--- a/docs/deck/StreamVault-BCH-Blaze-2026.pptx
+++ b/docs/deck/StreamVault-BCH-Blaze-2026.pptx
@@ -2,19 +2,19 @@
 <file path=ppt/presentation.xml><?xml version="1.0" encoding="utf-8"?>
 <p:presentation xmlns:p="http://schemas.openxmlformats.org/presentationml/2006/main">
   <p:sldMasterIdLst>
-    <p:sldMasterId xmlns:r="http://schemas.openxmlformats.org/officeDocument/2006/relationships" id="2147483648" r:id="R2db5bf9798004782"/>
+    <p:sldMasterId xmlns:r="http://schemas.openxmlformats.org/officeDocument/2006/relationships" id="2147483648" r:id="R78a565f1a4ff40da"/>
   </p:sldMasterIdLst>
   <p:notesMasterIdLst>
-    <p:notesMasterId xmlns:r="http://schemas.openxmlformats.org/officeDocument/2006/relationships" r:id="R8faed92699114dce"/>
+    <p:notesMasterId xmlns:r="http://schemas.openxmlformats.org/officeDocument/2006/relationships" r:id="Re90db1306db24594"/>
   </p:notesMasterIdLst>
   <p:sldIdLst>
-    <p:sldId xmlns:r="http://schemas.openxmlformats.org/officeDocument/2006/relationships" id="256" r:id="Rd7ca576529844da1"/>
-    <p:sldId xmlns:r="http://schemas.openxmlformats.org/officeDocument/2006/relationships" id="257" r:id="R68faaaf0b75f40c1"/>
-    <p:sldId xmlns:r="http://schemas.openxmlformats.org/officeDocument/2006/relationships" id="258" r:id="Raf6724a90d614b59"/>
-    <p:sldId xmlns:r="http://schemas.openxmlformats.org/officeDocument/2006/relationships" id="259" r:id="R923dee0259674c39"/>
-    <p:sldId xmlns:r="http://schemas.openxmlformats.org/officeDocument/2006/relationships" id="260" r:id="R7917ffe94a374d00"/>
-    <p:sldId xmlns:r="http://schemas.openxmlformats.org/officeDocument/2006/relationships" id="261" r:id="Reffdd5f489f94d3e"/>
-    <p:sldId xmlns:r="http://schemas.openxmlformats.org/officeDocument/2006/relationships" id="262" r:id="Ra47589bbf78e46d9"/>
+    <p:sldId xmlns:r="http://schemas.openxmlformats.org/officeDocument/2006/relationships" id="256" r:id="R78f564e1bde74c99"/>
+    <p:sldId xmlns:r="http://schemas.openxmlformats.org/officeDocument/2006/relationships" id="257" r:id="R14883d9f770e47ba"/>
+    <p:sldId xmlns:r="http://schemas.openxmlformats.org/officeDocument/2006/relationships" id="258" r:id="R2f8e7a5188b5496a"/>
+    <p:sldId xmlns:r="http://schemas.openxmlformats.org/officeDocument/2006/relationships" id="259" r:id="R512d17f61215472d"/>
+    <p:sldId xmlns:r="http://schemas.openxmlformats.org/officeDocument/2006/relationships" id="260" r:id="Rb3240e4271c24862"/>
+    <p:sldId xmlns:r="http://schemas.openxmlformats.org/officeDocument/2006/relationships" id="261" r:id="Rc61d8f8399b746ae"/>
+    <p:sldId xmlns:r="http://schemas.openxmlformats.org/officeDocument/2006/relationships" id="262" r:id="R24846a707e21402c"/>
   </p:sldIdLst>
   <p:sldSz cx="12192000" cy="6858000"/>
   <p:notesSz cx="6858000" cy="9144000"/>
@@ -887,7 +887,7 @@
           <p:cNvPr id="3" name="Title">
             <a:extLst xmlns:a="http://schemas.openxmlformats.org/drawingml/2006/main">
               <a:ext uri="{FF2B5EF4-FFF2-40B4-BE49-F238E27FC236}">
-                <a16:creationId xmlns:a16="http://schemas.microsoft.com/office/drawing/2014/main" id="{69393EFC-6E06-44CA-8C72-C9C046D12C01}"/>
+                <a16:creationId xmlns:a16="http://schemas.microsoft.com/office/drawing/2014/main" id="{C6530832-4712-47F1-AE9B-9C59052D2869}"/>
               </a:ext>
             </a:extLst>
           </p:cNvPr>
@@ -1044,7 +1044,7 @@
           <p:cNvPr id="2" name="Subtitle">
             <a:extLst xmlns:a="http://schemas.openxmlformats.org/drawingml/2006/main">
               <a:ext uri="{FF2B5EF4-FFF2-40B4-BE49-F238E27FC236}">
-                <a16:creationId xmlns:a16="http://schemas.microsoft.com/office/drawing/2014/main" id="{4A41C8C5-1808-4306-A79D-3212E84D6207}"/>
+                <a16:creationId xmlns:a16="http://schemas.microsoft.com/office/drawing/2014/main" id="{5C4B20D8-E894-4DF8-AA33-C22045D9DFE1}"/>
               </a:ext>
             </a:extLst>
           </p:cNvPr>
@@ -1218,7 +1218,7 @@
           <p:cNvPr id="2" name="Section title">
             <a:extLst xmlns:a="http://schemas.openxmlformats.org/drawingml/2006/main">
               <a:ext uri="{FF2B5EF4-FFF2-40B4-BE49-F238E27FC236}">
-                <a16:creationId xmlns:a16="http://schemas.microsoft.com/office/drawing/2014/main" id="{A8F814ED-C266-496B-8B85-0A2A423B621B}"/>
+                <a16:creationId xmlns:a16="http://schemas.microsoft.com/office/drawing/2014/main" id="{1319F0C3-B2D3-46D6-87DE-1F0968C24B78}"/>
               </a:ext>
             </a:extLst>
           </p:cNvPr>
@@ -1392,7 +1392,7 @@
           <p:cNvPr id="3" name="Title">
             <a:extLst xmlns:a="http://schemas.openxmlformats.org/drawingml/2006/main">
               <a:ext uri="{FF2B5EF4-FFF2-40B4-BE49-F238E27FC236}">
-                <a16:creationId xmlns:a16="http://schemas.microsoft.com/office/drawing/2014/main" id="{DA0CEC8F-BC3D-4FE7-B271-711D5CA6A45F}"/>
+                <a16:creationId xmlns:a16="http://schemas.microsoft.com/office/drawing/2014/main" id="{241E5175-C864-4C9C-99A3-09B4E287E7D2}"/>
               </a:ext>
             </a:extLst>
           </p:cNvPr>
@@ -1549,7 +1549,7 @@
           <p:cNvPr id="2" name="Body">
             <a:extLst xmlns:a="http://schemas.openxmlformats.org/drawingml/2006/main">
               <a:ext uri="{FF2B5EF4-FFF2-40B4-BE49-F238E27FC236}">
-                <a16:creationId xmlns:a16="http://schemas.microsoft.com/office/drawing/2014/main" id="{FD24280C-DC52-4B5D-A439-DEB96FB1A6BF}"/>
+                <a16:creationId xmlns:a16="http://schemas.microsoft.com/office/drawing/2014/main" id="{09626BCD-B798-4AFF-8169-A8EDD398B5E7}"/>
               </a:ext>
             </a:extLst>
           </p:cNvPr>
@@ -1723,7 +1723,7 @@
           <p:cNvPr id="4" name="Title">
             <a:extLst xmlns:a="http://schemas.openxmlformats.org/drawingml/2006/main">
               <a:ext uri="{FF2B5EF4-FFF2-40B4-BE49-F238E27FC236}">
-                <a16:creationId xmlns:a16="http://schemas.microsoft.com/office/drawing/2014/main" id="{55B6FDB4-F1A0-458E-8321-07510FABFC34}"/>
+                <a16:creationId xmlns:a16="http://schemas.microsoft.com/office/drawing/2014/main" id="{C073BB25-0653-4A1D-8FB1-CBC52C60B4BD}"/>
               </a:ext>
             </a:extLst>
           </p:cNvPr>
@@ -1880,7 +1880,7 @@
           <p:cNvPr id="2" name="Left column">
             <a:extLst xmlns:a="http://schemas.openxmlformats.org/drawingml/2006/main">
               <a:ext uri="{FF2B5EF4-FFF2-40B4-BE49-F238E27FC236}">
-                <a16:creationId xmlns:a16="http://schemas.microsoft.com/office/drawing/2014/main" id="{66EA58E2-D1DC-471A-8730-C3E3395DB005}"/>
+                <a16:creationId xmlns:a16="http://schemas.microsoft.com/office/drawing/2014/main" id="{431FDD08-16F7-4CD3-9E2B-F9D914979A65}"/>
               </a:ext>
             </a:extLst>
           </p:cNvPr>
@@ -2037,7 +2037,7 @@
           <p:cNvPr id="3" name="Right column">
             <a:extLst xmlns:a="http://schemas.openxmlformats.org/drawingml/2006/main">
               <a:ext uri="{FF2B5EF4-FFF2-40B4-BE49-F238E27FC236}">
-                <a16:creationId xmlns:a16="http://schemas.microsoft.com/office/drawing/2014/main" id="{3617AA9E-1D71-4A0E-BF72-63111A284F2E}"/>
+                <a16:creationId xmlns:a16="http://schemas.microsoft.com/office/drawing/2014/main" id="{707C37A6-B2CE-4F27-B51B-CC8C3C482EB9}"/>
               </a:ext>
             </a:extLst>
           </p:cNvPr>
@@ -2211,7 +2211,7 @@
           <p:cNvPr id="3" name="Title">
             <a:extLst xmlns:a="http://schemas.openxmlformats.org/drawingml/2006/main">
               <a:ext uri="{FF2B5EF4-FFF2-40B4-BE49-F238E27FC236}">
-                <a16:creationId xmlns:a16="http://schemas.microsoft.com/office/drawing/2014/main" id="{3AD2C2A4-0AC3-4263-821D-2F847A78EE43}"/>
+                <a16:creationId xmlns:a16="http://schemas.microsoft.com/office/drawing/2014/main" id="{E387B255-3B74-45F0-9A4A-79E07BE3EC9F}"/>
               </a:ext>
             </a:extLst>
           </p:cNvPr>
@@ -2368,7 +2368,7 @@
           <p:cNvPr id="2" name="Left column">
             <a:extLst xmlns:a="http://schemas.openxmlformats.org/drawingml/2006/main">
               <a:ext uri="{FF2B5EF4-FFF2-40B4-BE49-F238E27FC236}">
-                <a16:creationId xmlns:a16="http://schemas.microsoft.com/office/drawing/2014/main" id="{E3369494-BF78-4ADB-95BE-7204F2E8618B}"/>
+                <a16:creationId xmlns:a16="http://schemas.microsoft.com/office/drawing/2014/main" id="{C506ECFB-35AF-4A82-9D8C-C53FDBCB32A9}"/>
               </a:ext>
             </a:extLst>
           </p:cNvPr>
@@ -2563,12 +2563,12 @@
   </p:cSld>
   <p:clrMap bg1="lt1" tx1="dk1" bg2="lt2" tx2="dk2" accent1="accent1" accent2="accent2" accent3="accent3" accent4="accent4" accent5="accent5" accent6="accent6" hlink="hlink" folHlink="folHlink"/>
   <p:sldLayoutIdLst>
-    <p:sldLayoutId xmlns:r="http://schemas.openxmlformats.org/officeDocument/2006/relationships" id="2147483649" r:id="R4b141b26b2aa44d9"/>
-    <p:sldLayoutId xmlns:r="http://schemas.openxmlformats.org/officeDocument/2006/relationships" id="2147483650" r:id="R96122bd521b14dd3"/>
-    <p:sldLayoutId xmlns:r="http://schemas.openxmlformats.org/officeDocument/2006/relationships" id="2147483651" r:id="Rc212eb71af804c03"/>
-    <p:sldLayoutId xmlns:r="http://schemas.openxmlformats.org/officeDocument/2006/relationships" id="2147483652" r:id="R54bb3a7fd05e46ee"/>
-    <p:sldLayoutId xmlns:r="http://schemas.openxmlformats.org/officeDocument/2006/relationships" id="2147483653" r:id="R6043162ca53740d9"/>
-    <p:sldLayoutId xmlns:r="http://schemas.openxmlformats.org/officeDocument/2006/relationships" id="2147483654" r:id="R4c628ed6af2641b8"/>
+    <p:sldLayoutId xmlns:r="http://schemas.openxmlformats.org/officeDocument/2006/relationships" id="2147483649" r:id="R892d7bcf54004835"/>
+    <p:sldLayoutId xmlns:r="http://schemas.openxmlformats.org/officeDocument/2006/relationships" id="2147483650" r:id="Ra698d2c5f9aa4dd7"/>
+    <p:sldLayoutId xmlns:r="http://schemas.openxmlformats.org/officeDocument/2006/relationships" id="2147483651" r:id="Rc907ad9c648042da"/>
+    <p:sldLayoutId xmlns:r="http://schemas.openxmlformats.org/officeDocument/2006/relationships" id="2147483652" r:id="Raeb9d7c699924275"/>
+    <p:sldLayoutId xmlns:r="http://schemas.openxmlformats.org/officeDocument/2006/relationships" id="2147483653" r:id="Ra4896faca168459b"/>
+    <p:sldLayoutId xmlns:r="http://schemas.openxmlformats.org/officeDocument/2006/relationships" id="2147483654" r:id="Re8a80b20bddb44e7"/>
   </p:sldLayoutIdLst>
   <p:txStyles>
     <p:titleStyle>
@@ -3119,7 +3119,7 @@
           <p:cNvPr id="10" name="">
             <a:extLst xmlns:a="http://schemas.openxmlformats.org/drawingml/2006/main">
               <a:ext uri="{FF2B5EF4-FFF2-40B4-BE49-F238E27FC236}">
-                <a16:creationId xmlns:a16="http://schemas.microsoft.com/office/drawing/2014/main" id="{97BDEBD8-7C8A-49C0-8302-5686A8F0391C}"/>
+                <a16:creationId xmlns:a16="http://schemas.microsoft.com/office/drawing/2014/main" id="{6DC408E5-5EC7-4602-BCE0-548C5E0CF7A6}"/>
               </a:ext>
             </a:extLst>
           </p:cNvPr>
@@ -3177,7 +3177,7 @@
           <p:cNvPr id="2" name="">
             <a:extLst xmlns:a="http://schemas.openxmlformats.org/drawingml/2006/main">
               <a:ext uri="{FF2B5EF4-FFF2-40B4-BE49-F238E27FC236}">
-                <a16:creationId xmlns:a16="http://schemas.microsoft.com/office/drawing/2014/main" id="{347F4EF4-9325-4153-B716-F1D00A830024}"/>
+                <a16:creationId xmlns:a16="http://schemas.microsoft.com/office/drawing/2014/main" id="{955762BD-F871-4E01-8DE5-D020E280595B}"/>
               </a:ext>
             </a:extLst>
           </p:cNvPr>
@@ -3235,7 +3235,7 @@
           <p:cNvPr id="3" name="">
             <a:extLst xmlns:a="http://schemas.openxmlformats.org/drawingml/2006/main">
               <a:ext uri="{FF2B5EF4-FFF2-40B4-BE49-F238E27FC236}">
-                <a16:creationId xmlns:a16="http://schemas.microsoft.com/office/drawing/2014/main" id="{7A2445DD-FEE0-4BAF-B0C4-2ADF2977045F}"/>
+                <a16:creationId xmlns:a16="http://schemas.microsoft.com/office/drawing/2014/main" id="{23390D7E-296E-4226-9B01-D785F5186B0A}"/>
               </a:ext>
             </a:extLst>
           </p:cNvPr>
@@ -3293,7 +3293,7 @@
           <p:cNvPr id="4" name="">
             <a:extLst xmlns:a="http://schemas.openxmlformats.org/drawingml/2006/main">
               <a:ext uri="{FF2B5EF4-FFF2-40B4-BE49-F238E27FC236}">
-                <a16:creationId xmlns:a16="http://schemas.microsoft.com/office/drawing/2014/main" id="{2C7340FE-8AC5-4867-A245-B2618FAFAD68}"/>
+                <a16:creationId xmlns:a16="http://schemas.microsoft.com/office/drawing/2014/main" id="{CD4A4A9A-735D-405E-B81F-E033680ACB86}"/>
               </a:ext>
             </a:extLst>
           </p:cNvPr>
@@ -3351,7 +3351,7 @@
           <p:cNvPr id="5" name="">
             <a:extLst xmlns:a="http://schemas.openxmlformats.org/drawingml/2006/main">
               <a:ext uri="{FF2B5EF4-FFF2-40B4-BE49-F238E27FC236}">
-                <a16:creationId xmlns:a16="http://schemas.microsoft.com/office/drawing/2014/main" id="{98060BF7-828F-4B5E-804D-C7E49400156C}"/>
+                <a16:creationId xmlns:a16="http://schemas.microsoft.com/office/drawing/2014/main" id="{9D18F786-E4DC-4EE4-AB55-E47939E02001}"/>
               </a:ext>
             </a:extLst>
           </p:cNvPr>
@@ -3386,7 +3386,7 @@
           <p:cNvPr id="6" name="">
             <a:extLst xmlns:a="http://schemas.openxmlformats.org/drawingml/2006/main">
               <a:ext uri="{FF2B5EF4-FFF2-40B4-BE49-F238E27FC236}">
-                <a16:creationId xmlns:a16="http://schemas.microsoft.com/office/drawing/2014/main" id="{B131686E-B919-4FC2-AE14-E5E5EE71473F}"/>
+                <a16:creationId xmlns:a16="http://schemas.microsoft.com/office/drawing/2014/main" id="{7F64893D-7E3D-4393-B985-52DDFC370C38}"/>
               </a:ext>
             </a:extLst>
           </p:cNvPr>
@@ -3444,7 +3444,7 @@
           <p:cNvPr id="7" name="">
             <a:extLst xmlns:a="http://schemas.openxmlformats.org/drawingml/2006/main">
               <a:ext uri="{FF2B5EF4-FFF2-40B4-BE49-F238E27FC236}">
-                <a16:creationId xmlns:a16="http://schemas.microsoft.com/office/drawing/2014/main" id="{CE714665-0499-43FC-93F1-E0FDD895E918}"/>
+                <a16:creationId xmlns:a16="http://schemas.microsoft.com/office/drawing/2014/main" id="{40427998-FA4F-4BBF-9939-F3A779C56B1B}"/>
               </a:ext>
             </a:extLst>
           </p:cNvPr>
@@ -3502,7 +3502,7 @@
           <p:cNvPr id="8" name="">
             <a:extLst xmlns:a="http://schemas.openxmlformats.org/drawingml/2006/main">
               <a:ext uri="{FF2B5EF4-FFF2-40B4-BE49-F238E27FC236}">
-                <a16:creationId xmlns:a16="http://schemas.microsoft.com/office/drawing/2014/main" id="{9A4396BC-A570-40D7-A50C-2EF34FB17F50}"/>
+                <a16:creationId xmlns:a16="http://schemas.microsoft.com/office/drawing/2014/main" id="{4F432D94-7FBB-4B70-9669-2E04EA5BED0A}"/>
               </a:ext>
             </a:extLst>
           </p:cNvPr>
@@ -3560,7 +3560,7 @@
           <p:cNvPr id="9" name="">
             <a:extLst xmlns:a="http://schemas.openxmlformats.org/drawingml/2006/main">
               <a:ext uri="{FF2B5EF4-FFF2-40B4-BE49-F238E27FC236}">
-                <a16:creationId xmlns:a16="http://schemas.microsoft.com/office/drawing/2014/main" id="{E0CC2F34-66C0-427C-88AF-A10C49A81C22}"/>
+                <a16:creationId xmlns:a16="http://schemas.microsoft.com/office/drawing/2014/main" id="{84DCAF20-74A4-46A3-A9ED-3BFC19FBFFC4}"/>
               </a:ext>
             </a:extLst>
           </p:cNvPr>
@@ -3616,7 +3616,7 @@
     </p:spTree>
     <p:extLst>
       <p:ext uri="{BB962C8B-B14F-4D97-AF65-F5344CB8AC3E}">
-        <p14:creationId xmlns:p14="http://schemas.microsoft.com/office/powerpoint/2010/main" val="1303417725"/>
+        <p14:creationId xmlns:p14="http://schemas.microsoft.com/office/powerpoint/2010/main" val="1283098994"/>
       </p:ext>
     </p:extLst>
   </p:cSld>
@@ -3647,7 +3647,7 @@
           <p:cNvPr id="13" name="">
             <a:extLst xmlns:a="http://schemas.openxmlformats.org/drawingml/2006/main">
               <a:ext uri="{FF2B5EF4-FFF2-40B4-BE49-F238E27FC236}">
-                <a16:creationId xmlns:a16="http://schemas.microsoft.com/office/drawing/2014/main" id="{874D9E03-DBD7-4726-BE05-870F17CD4F9F}"/>
+                <a16:creationId xmlns:a16="http://schemas.microsoft.com/office/drawing/2014/main" id="{2505EA11-C3C2-4892-87B5-7D1FB73E2311}"/>
               </a:ext>
             </a:extLst>
           </p:cNvPr>
@@ -3705,7 +3705,7 @@
           <p:cNvPr id="2" name="">
             <a:extLst xmlns:a="http://schemas.openxmlformats.org/drawingml/2006/main">
               <a:ext uri="{FF2B5EF4-FFF2-40B4-BE49-F238E27FC236}">
-                <a16:creationId xmlns:a16="http://schemas.microsoft.com/office/drawing/2014/main" id="{DBF11312-A7BE-4C49-B6EA-CD5772DAA56E}"/>
+                <a16:creationId xmlns:a16="http://schemas.microsoft.com/office/drawing/2014/main" id="{1D971093-2BA7-4183-A9C8-B7B9562C8042}"/>
               </a:ext>
             </a:extLst>
           </p:cNvPr>
@@ -3763,7 +3763,7 @@
           <p:cNvPr id="3" name="">
             <a:extLst xmlns:a="http://schemas.openxmlformats.org/drawingml/2006/main">
               <a:ext uri="{FF2B5EF4-FFF2-40B4-BE49-F238E27FC236}">
-                <a16:creationId xmlns:a16="http://schemas.microsoft.com/office/drawing/2014/main" id="{3FBFEB38-8D53-41A0-B082-BA6A9F329290}"/>
+                <a16:creationId xmlns:a16="http://schemas.microsoft.com/office/drawing/2014/main" id="{B65AB2F7-32AE-44C7-83AC-1739F3CE0D5C}"/>
               </a:ext>
             </a:extLst>
           </p:cNvPr>
@@ -3798,7 +3798,7 @@
           <p:cNvPr id="4" name="">
             <a:extLst xmlns:a="http://schemas.openxmlformats.org/drawingml/2006/main">
               <a:ext uri="{FF2B5EF4-FFF2-40B4-BE49-F238E27FC236}">
-                <a16:creationId xmlns:a16="http://schemas.microsoft.com/office/drawing/2014/main" id="{B21E312B-647F-4A29-9A79-CD13931E47E3}"/>
+                <a16:creationId xmlns:a16="http://schemas.microsoft.com/office/drawing/2014/main" id="{F670D9DA-E33F-40E0-ABF6-2FC116175638}"/>
               </a:ext>
             </a:extLst>
           </p:cNvPr>
@@ -3856,7 +3856,7 @@
           <p:cNvPr id="5" name="">
             <a:extLst xmlns:a="http://schemas.openxmlformats.org/drawingml/2006/main">
               <a:ext uri="{FF2B5EF4-FFF2-40B4-BE49-F238E27FC236}">
-                <a16:creationId xmlns:a16="http://schemas.microsoft.com/office/drawing/2014/main" id="{CA053EFA-E6CE-42F5-ADE7-5B20EA496637}"/>
+                <a16:creationId xmlns:a16="http://schemas.microsoft.com/office/drawing/2014/main" id="{C130C72E-322E-488C-9582-8D54F8432CF4}"/>
               </a:ext>
             </a:extLst>
           </p:cNvPr>
@@ -3914,7 +3914,7 @@
           <p:cNvPr id="6" name="">
             <a:extLst xmlns:a="http://schemas.openxmlformats.org/drawingml/2006/main">
               <a:ext uri="{FF2B5EF4-FFF2-40B4-BE49-F238E27FC236}">
-                <a16:creationId xmlns:a16="http://schemas.microsoft.com/office/drawing/2014/main" id="{4324327C-6E45-4635-82D4-E93871A8CBDE}"/>
+                <a16:creationId xmlns:a16="http://schemas.microsoft.com/office/drawing/2014/main" id="{EA092D5C-DDBE-4CE2-BBAA-853AE73D1F6C}"/>
               </a:ext>
             </a:extLst>
           </p:cNvPr>
@@ -3949,7 +3949,7 @@
           <p:cNvPr id="7" name="">
             <a:extLst xmlns:a="http://schemas.openxmlformats.org/drawingml/2006/main">
               <a:ext uri="{FF2B5EF4-FFF2-40B4-BE49-F238E27FC236}">
-                <a16:creationId xmlns:a16="http://schemas.microsoft.com/office/drawing/2014/main" id="{13B58F94-E097-4BD6-913D-FE04F6A3F8FD}"/>
+                <a16:creationId xmlns:a16="http://schemas.microsoft.com/office/drawing/2014/main" id="{673B97BA-9261-4B2B-9621-798E262550AC}"/>
               </a:ext>
             </a:extLst>
           </p:cNvPr>
@@ -4007,7 +4007,7 @@
           <p:cNvPr id="8" name="">
             <a:extLst xmlns:a="http://schemas.openxmlformats.org/drawingml/2006/main">
               <a:ext uri="{FF2B5EF4-FFF2-40B4-BE49-F238E27FC236}">
-                <a16:creationId xmlns:a16="http://schemas.microsoft.com/office/drawing/2014/main" id="{79716BF5-2224-4C1C-83CE-72B4D4D8ED19}"/>
+                <a16:creationId xmlns:a16="http://schemas.microsoft.com/office/drawing/2014/main" id="{F950F84D-D282-4E61-B328-DF844812D31A}"/>
               </a:ext>
             </a:extLst>
           </p:cNvPr>
@@ -4065,7 +4065,7 @@
           <p:cNvPr id="9" name="">
             <a:extLst xmlns:a="http://schemas.openxmlformats.org/drawingml/2006/main">
               <a:ext uri="{FF2B5EF4-FFF2-40B4-BE49-F238E27FC236}">
-                <a16:creationId xmlns:a16="http://schemas.microsoft.com/office/drawing/2014/main" id="{FFA50143-E7BC-4186-B4C3-FD13D1FDA39D}"/>
+                <a16:creationId xmlns:a16="http://schemas.microsoft.com/office/drawing/2014/main" id="{44FDB0CB-AAFE-4698-BD42-71877677338E}"/>
               </a:ext>
             </a:extLst>
           </p:cNvPr>
@@ -4100,7 +4100,7 @@
           <p:cNvPr id="10" name="">
             <a:extLst xmlns:a="http://schemas.openxmlformats.org/drawingml/2006/main">
               <a:ext uri="{FF2B5EF4-FFF2-40B4-BE49-F238E27FC236}">
-                <a16:creationId xmlns:a16="http://schemas.microsoft.com/office/drawing/2014/main" id="{059EF8F5-1C8F-4885-A90C-A9ECA772BF53}"/>
+                <a16:creationId xmlns:a16="http://schemas.microsoft.com/office/drawing/2014/main" id="{6A87F1B3-18D2-4356-8410-A185E321E779}"/>
               </a:ext>
             </a:extLst>
           </p:cNvPr>
@@ -4158,7 +4158,7 @@
           <p:cNvPr id="11" name="">
             <a:extLst xmlns:a="http://schemas.openxmlformats.org/drawingml/2006/main">
               <a:ext uri="{FF2B5EF4-FFF2-40B4-BE49-F238E27FC236}">
-                <a16:creationId xmlns:a16="http://schemas.microsoft.com/office/drawing/2014/main" id="{FF291A43-8B92-448A-A6DA-DDD5D01BFD80}"/>
+                <a16:creationId xmlns:a16="http://schemas.microsoft.com/office/drawing/2014/main" id="{EDD34E56-0013-4DFA-AD07-C8EDAFB4A475}"/>
               </a:ext>
             </a:extLst>
           </p:cNvPr>
@@ -4216,7 +4216,7 @@
           <p:cNvPr id="12" name="">
             <a:extLst xmlns:a="http://schemas.openxmlformats.org/drawingml/2006/main">
               <a:ext uri="{FF2B5EF4-FFF2-40B4-BE49-F238E27FC236}">
-                <a16:creationId xmlns:a16="http://schemas.microsoft.com/office/drawing/2014/main" id="{FC530293-DD27-481C-B73E-2A78AE8743A5}"/>
+                <a16:creationId xmlns:a16="http://schemas.microsoft.com/office/drawing/2014/main" id="{5DE8B242-9BC3-44CD-B1C8-5B906C745174}"/>
               </a:ext>
             </a:extLst>
           </p:cNvPr>
@@ -4264,7 +4264,7 @@
                   <a:srgbClr val="94A3B8"/>
                 </a:solidFill>
               </a:rPr>
-              <a:t>github.com/streamvault/streamvault.cash</a:t>
+              <a:t>github.com/juangh123/streamvault.cash</a:t>
             </a:r>
           </a:p>
         </p:txBody>
@@ -4272,7 +4272,7 @@
     </p:spTree>
     <p:extLst>
       <p:ext uri="{BB962C8B-B14F-4D97-AF65-F5344CB8AC3E}">
-        <p14:creationId xmlns:p14="http://schemas.microsoft.com/office/powerpoint/2010/main" val="1422105800"/>
+        <p14:creationId xmlns:p14="http://schemas.microsoft.com/office/powerpoint/2010/main" val="1994569339"/>
       </p:ext>
     </p:extLst>
   </p:cSld>
@@ -4303,7 +4303,7 @@
           <p:cNvPr id="13" name="">
             <a:extLst xmlns:a="http://schemas.openxmlformats.org/drawingml/2006/main">
               <a:ext uri="{FF2B5EF4-FFF2-40B4-BE49-F238E27FC236}">
-                <a16:creationId xmlns:a16="http://schemas.microsoft.com/office/drawing/2014/main" id="{A72C5ABC-CA79-4335-AD7C-E92F9AB51CF7}"/>
+                <a16:creationId xmlns:a16="http://schemas.microsoft.com/office/drawing/2014/main" id="{95A2655D-7B76-46B5-820E-653A6112590E}"/>
               </a:ext>
             </a:extLst>
           </p:cNvPr>
@@ -4361,7 +4361,7 @@
           <p:cNvPr id="2" name="">
             <a:extLst xmlns:a="http://schemas.openxmlformats.org/drawingml/2006/main">
               <a:ext uri="{FF2B5EF4-FFF2-40B4-BE49-F238E27FC236}">
-                <a16:creationId xmlns:a16="http://schemas.microsoft.com/office/drawing/2014/main" id="{611E2E10-1AC0-471D-B6E1-051A26A778F7}"/>
+                <a16:creationId xmlns:a16="http://schemas.microsoft.com/office/drawing/2014/main" id="{05F6E342-6C7D-4221-B958-847B460BEF1C}"/>
               </a:ext>
             </a:extLst>
           </p:cNvPr>
@@ -4419,7 +4419,7 @@
           <p:cNvPr id="3" name="">
             <a:extLst xmlns:a="http://schemas.openxmlformats.org/drawingml/2006/main">
               <a:ext uri="{FF2B5EF4-FFF2-40B4-BE49-F238E27FC236}">
-                <a16:creationId xmlns:a16="http://schemas.microsoft.com/office/drawing/2014/main" id="{11F18901-BE44-4F1C-B9F2-E10F9C32E557}"/>
+                <a16:creationId xmlns:a16="http://schemas.microsoft.com/office/drawing/2014/main" id="{9823702A-7457-426B-A0CF-1BD76B23ABA8}"/>
               </a:ext>
             </a:extLst>
           </p:cNvPr>
@@ -4454,7 +4454,7 @@
           <p:cNvPr id="4" name="">
             <a:extLst xmlns:a="http://schemas.openxmlformats.org/drawingml/2006/main">
               <a:ext uri="{FF2B5EF4-FFF2-40B4-BE49-F238E27FC236}">
-                <a16:creationId xmlns:a16="http://schemas.microsoft.com/office/drawing/2014/main" id="{5328AD62-1ACA-4855-BBB9-2A060A1BE372}"/>
+                <a16:creationId xmlns:a16="http://schemas.microsoft.com/office/drawing/2014/main" id="{5CAF867B-1007-4DDE-9777-756B89E1AC4A}"/>
               </a:ext>
             </a:extLst>
           </p:cNvPr>
@@ -4512,7 +4512,7 @@
           <p:cNvPr id="5" name="">
             <a:extLst xmlns:a="http://schemas.openxmlformats.org/drawingml/2006/main">
               <a:ext uri="{FF2B5EF4-FFF2-40B4-BE49-F238E27FC236}">
-                <a16:creationId xmlns:a16="http://schemas.microsoft.com/office/drawing/2014/main" id="{B9421E58-403C-45DC-8989-8B4767BE660D}"/>
+                <a16:creationId xmlns:a16="http://schemas.microsoft.com/office/drawing/2014/main" id="{41ABDA7B-0538-4B20-B0F5-609781E08A9A}"/>
               </a:ext>
             </a:extLst>
           </p:cNvPr>
@@ -4570,7 +4570,7 @@
           <p:cNvPr id="6" name="">
             <a:extLst xmlns:a="http://schemas.openxmlformats.org/drawingml/2006/main">
               <a:ext uri="{FF2B5EF4-FFF2-40B4-BE49-F238E27FC236}">
-                <a16:creationId xmlns:a16="http://schemas.microsoft.com/office/drawing/2014/main" id="{E56D2653-6F70-4F87-A2F3-C43171829B19}"/>
+                <a16:creationId xmlns:a16="http://schemas.microsoft.com/office/drawing/2014/main" id="{FBA2F2A8-18EB-4B27-9563-19B85B801820}"/>
               </a:ext>
             </a:extLst>
           </p:cNvPr>
@@ -4605,7 +4605,7 @@
           <p:cNvPr id="7" name="">
             <a:extLst xmlns:a="http://schemas.openxmlformats.org/drawingml/2006/main">
               <a:ext uri="{FF2B5EF4-FFF2-40B4-BE49-F238E27FC236}">
-                <a16:creationId xmlns:a16="http://schemas.microsoft.com/office/drawing/2014/main" id="{DF8FDA1B-BD5E-4B06-A3F5-907E85A768AF}"/>
+                <a16:creationId xmlns:a16="http://schemas.microsoft.com/office/drawing/2014/main" id="{C5DE0680-C3CD-4D1B-A34C-73C259684DC2}"/>
               </a:ext>
             </a:extLst>
           </p:cNvPr>
@@ -4663,7 +4663,7 @@
           <p:cNvPr id="8" name="">
             <a:extLst xmlns:a="http://schemas.openxmlformats.org/drawingml/2006/main">
               <a:ext uri="{FF2B5EF4-FFF2-40B4-BE49-F238E27FC236}">
-                <a16:creationId xmlns:a16="http://schemas.microsoft.com/office/drawing/2014/main" id="{7769DBD0-E61B-4A2A-8AE8-B81C56DA976C}"/>
+                <a16:creationId xmlns:a16="http://schemas.microsoft.com/office/drawing/2014/main" id="{5EBC41F9-4536-4D29-B4C8-F6DF1CAC74F2}"/>
               </a:ext>
             </a:extLst>
           </p:cNvPr>
@@ -4721,7 +4721,7 @@
           <p:cNvPr id="9" name="">
             <a:extLst xmlns:a="http://schemas.openxmlformats.org/drawingml/2006/main">
               <a:ext uri="{FF2B5EF4-FFF2-40B4-BE49-F238E27FC236}">
-                <a16:creationId xmlns:a16="http://schemas.microsoft.com/office/drawing/2014/main" id="{47DDB6BE-2434-43EE-8307-AC26B75002A6}"/>
+                <a16:creationId xmlns:a16="http://schemas.microsoft.com/office/drawing/2014/main" id="{7BA19CB8-3D8A-4A73-8DCC-F20700F67E5A}"/>
               </a:ext>
             </a:extLst>
           </p:cNvPr>
@@ -4756,7 +4756,7 @@
           <p:cNvPr id="10" name="">
             <a:extLst xmlns:a="http://schemas.openxmlformats.org/drawingml/2006/main">
               <a:ext uri="{FF2B5EF4-FFF2-40B4-BE49-F238E27FC236}">
-                <a16:creationId xmlns:a16="http://schemas.microsoft.com/office/drawing/2014/main" id="{36E112DE-DE0A-4103-B14F-2C0F5EAE9761}"/>
+                <a16:creationId xmlns:a16="http://schemas.microsoft.com/office/drawing/2014/main" id="{01D7FECC-D1BB-4161-9E53-E3FC16ACFFDD}"/>
               </a:ext>
             </a:extLst>
           </p:cNvPr>
@@ -4814,7 +4814,7 @@
           <p:cNvPr id="11" name="">
             <a:extLst xmlns:a="http://schemas.openxmlformats.org/drawingml/2006/main">
               <a:ext uri="{FF2B5EF4-FFF2-40B4-BE49-F238E27FC236}">
-                <a16:creationId xmlns:a16="http://schemas.microsoft.com/office/drawing/2014/main" id="{D1D9C31A-4B98-4BF3-9167-A2204052BEC1}"/>
+                <a16:creationId xmlns:a16="http://schemas.microsoft.com/office/drawing/2014/main" id="{5F30A69D-960C-4827-BCBB-D73AD7C71A3A}"/>
               </a:ext>
             </a:extLst>
           </p:cNvPr>
@@ -4872,7 +4872,7 @@
           <p:cNvPr id="12" name="">
             <a:extLst xmlns:a="http://schemas.openxmlformats.org/drawingml/2006/main">
               <a:ext uri="{FF2B5EF4-FFF2-40B4-BE49-F238E27FC236}">
-                <a16:creationId xmlns:a16="http://schemas.microsoft.com/office/drawing/2014/main" id="{BDC80FB2-84CB-4991-9FF1-28E0238704F4}"/>
+                <a16:creationId xmlns:a16="http://schemas.microsoft.com/office/drawing/2014/main" id="{2C0C282E-D888-48D1-963C-96AAB35D26AB}"/>
               </a:ext>
             </a:extLst>
           </p:cNvPr>
@@ -4928,7 +4928,7 @@
     </p:spTree>
     <p:extLst>
       <p:ext uri="{BB962C8B-B14F-4D97-AF65-F5344CB8AC3E}">
-        <p14:creationId xmlns:p14="http://schemas.microsoft.com/office/powerpoint/2010/main" val="640899966"/>
+        <p14:creationId xmlns:p14="http://schemas.microsoft.com/office/powerpoint/2010/main" val="866723601"/>
       </p:ext>
     </p:extLst>
   </p:cSld>
@@ -4959,7 +4959,7 @@
           <p:cNvPr id="15" name="">
             <a:extLst xmlns:a="http://schemas.openxmlformats.org/drawingml/2006/main">
               <a:ext uri="{FF2B5EF4-FFF2-40B4-BE49-F238E27FC236}">
-                <a16:creationId xmlns:a16="http://schemas.microsoft.com/office/drawing/2014/main" id="{1C74F4E3-BD81-4D68-A953-5E3ED8DC3C9D}"/>
+                <a16:creationId xmlns:a16="http://schemas.microsoft.com/office/drawing/2014/main" id="{AC749316-A4D4-4FA1-9148-BAD8624302E7}"/>
               </a:ext>
             </a:extLst>
           </p:cNvPr>
@@ -5017,7 +5017,7 @@
           <p:cNvPr id="2" name="">
             <a:extLst xmlns:a="http://schemas.openxmlformats.org/drawingml/2006/main">
               <a:ext uri="{FF2B5EF4-FFF2-40B4-BE49-F238E27FC236}">
-                <a16:creationId xmlns:a16="http://schemas.microsoft.com/office/drawing/2014/main" id="{7C47B84C-5B53-4651-917E-C7B9828F35E9}"/>
+                <a16:creationId xmlns:a16="http://schemas.microsoft.com/office/drawing/2014/main" id="{BA6EA689-2161-440F-9A30-A2606EE37CBB}"/>
               </a:ext>
             </a:extLst>
           </p:cNvPr>
@@ -5075,7 +5075,7 @@
           <p:cNvPr id="3" name="">
             <a:extLst xmlns:a="http://schemas.openxmlformats.org/drawingml/2006/main">
               <a:ext uri="{FF2B5EF4-FFF2-40B4-BE49-F238E27FC236}">
-                <a16:creationId xmlns:a16="http://schemas.microsoft.com/office/drawing/2014/main" id="{D1A99AA2-0329-4A7F-A9BC-7B93CE8CF051}"/>
+                <a16:creationId xmlns:a16="http://schemas.microsoft.com/office/drawing/2014/main" id="{DB5E830D-9898-4BB7-A29D-F9D1A6EDE697}"/>
               </a:ext>
             </a:extLst>
           </p:cNvPr>
@@ -5110,7 +5110,7 @@
           <p:cNvPr id="4" name="">
             <a:extLst xmlns:a="http://schemas.openxmlformats.org/drawingml/2006/main">
               <a:ext uri="{FF2B5EF4-FFF2-40B4-BE49-F238E27FC236}">
-                <a16:creationId xmlns:a16="http://schemas.microsoft.com/office/drawing/2014/main" id="{CA4CDF45-B9B7-4E84-8521-A80346E12EC7}"/>
+                <a16:creationId xmlns:a16="http://schemas.microsoft.com/office/drawing/2014/main" id="{3BB5D4C2-A70A-4931-8F92-CC83FBCC8BAF}"/>
               </a:ext>
             </a:extLst>
           </p:cNvPr>
@@ -5168,7 +5168,7 @@
           <p:cNvPr id="5" name="">
             <a:extLst xmlns:a="http://schemas.openxmlformats.org/drawingml/2006/main">
               <a:ext uri="{FF2B5EF4-FFF2-40B4-BE49-F238E27FC236}">
-                <a16:creationId xmlns:a16="http://schemas.microsoft.com/office/drawing/2014/main" id="{4A68370B-CD89-4A12-8E60-552580FDE18A}"/>
+                <a16:creationId xmlns:a16="http://schemas.microsoft.com/office/drawing/2014/main" id="{7FF913F0-61B9-423F-9F48-5092A4039180}"/>
               </a:ext>
             </a:extLst>
           </p:cNvPr>
@@ -5226,7 +5226,7 @@
           <p:cNvPr id="6" name="">
             <a:extLst xmlns:a="http://schemas.openxmlformats.org/drawingml/2006/main">
               <a:ext uri="{FF2B5EF4-FFF2-40B4-BE49-F238E27FC236}">
-                <a16:creationId xmlns:a16="http://schemas.microsoft.com/office/drawing/2014/main" id="{AD1671B6-09A9-42D9-B93E-BDEB8B9EAD51}"/>
+                <a16:creationId xmlns:a16="http://schemas.microsoft.com/office/drawing/2014/main" id="{5745277E-DC09-4159-ABFE-9CDFD74F83C1}"/>
               </a:ext>
             </a:extLst>
           </p:cNvPr>
@@ -5261,7 +5261,7 @@
           <p:cNvPr id="7" name="">
             <a:extLst xmlns:a="http://schemas.openxmlformats.org/drawingml/2006/main">
               <a:ext uri="{FF2B5EF4-FFF2-40B4-BE49-F238E27FC236}">
-                <a16:creationId xmlns:a16="http://schemas.microsoft.com/office/drawing/2014/main" id="{9E0B1C6A-20DC-4389-B94C-E1CE4396B898}"/>
+                <a16:creationId xmlns:a16="http://schemas.microsoft.com/office/drawing/2014/main" id="{6981FDDC-92EF-4B6C-BFE1-005E67A8DAEF}"/>
               </a:ext>
             </a:extLst>
           </p:cNvPr>
@@ -5319,7 +5319,7 @@
           <p:cNvPr id="8" name="">
             <a:extLst xmlns:a="http://schemas.openxmlformats.org/drawingml/2006/main">
               <a:ext uri="{FF2B5EF4-FFF2-40B4-BE49-F238E27FC236}">
-                <a16:creationId xmlns:a16="http://schemas.microsoft.com/office/drawing/2014/main" id="{0BE62731-E418-4058-AEE1-1617C87A538B}"/>
+                <a16:creationId xmlns:a16="http://schemas.microsoft.com/office/drawing/2014/main" id="{66F94B7D-BF5B-4F16-99A1-9516ABBEF0BB}"/>
               </a:ext>
             </a:extLst>
           </p:cNvPr>
@@ -5377,7 +5377,7 @@
           <p:cNvPr id="9" name="">
             <a:extLst xmlns:a="http://schemas.openxmlformats.org/drawingml/2006/main">
               <a:ext uri="{FF2B5EF4-FFF2-40B4-BE49-F238E27FC236}">
-                <a16:creationId xmlns:a16="http://schemas.microsoft.com/office/drawing/2014/main" id="{93F6964B-02C4-4426-85C1-F0286E5D83BA}"/>
+                <a16:creationId xmlns:a16="http://schemas.microsoft.com/office/drawing/2014/main" id="{AE960B7F-A565-4A90-AADC-1AEAEF463C64}"/>
               </a:ext>
             </a:extLst>
           </p:cNvPr>
@@ -5412,7 +5412,7 @@
           <p:cNvPr id="10" name="">
             <a:extLst xmlns:a="http://schemas.openxmlformats.org/drawingml/2006/main">
               <a:ext uri="{FF2B5EF4-FFF2-40B4-BE49-F238E27FC236}">
-                <a16:creationId xmlns:a16="http://schemas.microsoft.com/office/drawing/2014/main" id="{FE3C38C5-24EB-4075-9A9C-4204052358E6}"/>
+                <a16:creationId xmlns:a16="http://schemas.microsoft.com/office/drawing/2014/main" id="{D879013A-A57B-4EB2-839B-758F383DCFE8}"/>
               </a:ext>
             </a:extLst>
           </p:cNvPr>
@@ -5470,7 +5470,7 @@
           <p:cNvPr id="11" name="">
             <a:extLst xmlns:a="http://schemas.openxmlformats.org/drawingml/2006/main">
               <a:ext uri="{FF2B5EF4-FFF2-40B4-BE49-F238E27FC236}">
-                <a16:creationId xmlns:a16="http://schemas.microsoft.com/office/drawing/2014/main" id="{7794A71F-DB5C-4D33-A75B-626FAEC13780}"/>
+                <a16:creationId xmlns:a16="http://schemas.microsoft.com/office/drawing/2014/main" id="{A27F628C-4D4E-40DC-83DA-10DE701D419E}"/>
               </a:ext>
             </a:extLst>
           </p:cNvPr>
@@ -5528,7 +5528,7 @@
           <p:cNvPr id="12" name="">
             <a:extLst xmlns:a="http://schemas.openxmlformats.org/drawingml/2006/main">
               <a:ext uri="{FF2B5EF4-FFF2-40B4-BE49-F238E27FC236}">
-                <a16:creationId xmlns:a16="http://schemas.microsoft.com/office/drawing/2014/main" id="{05F0733B-C0E9-4FDD-A959-6AC024760879}"/>
+                <a16:creationId xmlns:a16="http://schemas.microsoft.com/office/drawing/2014/main" id="{0A82F08D-7389-47B0-BE4F-D4D91593BF84}"/>
               </a:ext>
             </a:extLst>
           </p:cNvPr>
@@ -5563,7 +5563,7 @@
           <p:cNvPr id="13" name="">
             <a:extLst xmlns:a="http://schemas.openxmlformats.org/drawingml/2006/main">
               <a:ext uri="{FF2B5EF4-FFF2-40B4-BE49-F238E27FC236}">
-                <a16:creationId xmlns:a16="http://schemas.microsoft.com/office/drawing/2014/main" id="{61AA575F-05A1-40DA-A6B4-1ECC7155BE49}"/>
+                <a16:creationId xmlns:a16="http://schemas.microsoft.com/office/drawing/2014/main" id="{BA424D5D-9198-4AA5-88B5-FEC0EF9A4BD6}"/>
               </a:ext>
             </a:extLst>
           </p:cNvPr>
@@ -5621,7 +5621,7 @@
           <p:cNvPr id="14" name="">
             <a:extLst xmlns:a="http://schemas.openxmlformats.org/drawingml/2006/main">
               <a:ext uri="{FF2B5EF4-FFF2-40B4-BE49-F238E27FC236}">
-                <a16:creationId xmlns:a16="http://schemas.microsoft.com/office/drawing/2014/main" id="{F3A2337F-306E-409F-8764-6560B5CFAD9C}"/>
+                <a16:creationId xmlns:a16="http://schemas.microsoft.com/office/drawing/2014/main" id="{8C89DC13-11BA-4780-A0AD-CF8D138BAF17}"/>
               </a:ext>
             </a:extLst>
           </p:cNvPr>
@@ -5677,7 +5677,7 @@
     </p:spTree>
     <p:extLst>
       <p:ext uri="{BB962C8B-B14F-4D97-AF65-F5344CB8AC3E}">
-        <p14:creationId xmlns:p14="http://schemas.microsoft.com/office/powerpoint/2010/main" val="1794765103"/>
+        <p14:creationId xmlns:p14="http://schemas.microsoft.com/office/powerpoint/2010/main" val="827575271"/>
       </p:ext>
     </p:extLst>
   </p:cSld>
@@ -5708,7 +5708,7 @@
           <p:cNvPr id="23" name="">
             <a:extLst xmlns:a="http://schemas.openxmlformats.org/drawingml/2006/main">
               <a:ext uri="{FF2B5EF4-FFF2-40B4-BE49-F238E27FC236}">
-                <a16:creationId xmlns:a16="http://schemas.microsoft.com/office/drawing/2014/main" id="{23D52A9B-12F2-49A0-A85A-19683F801839}"/>
+                <a16:creationId xmlns:a16="http://schemas.microsoft.com/office/drawing/2014/main" id="{C2A1D414-622C-4816-BF82-9C98A13A1DC2}"/>
               </a:ext>
             </a:extLst>
           </p:cNvPr>
@@ -5766,7 +5766,7 @@
           <p:cNvPr id="2" name="">
             <a:extLst xmlns:a="http://schemas.openxmlformats.org/drawingml/2006/main">
               <a:ext uri="{FF2B5EF4-FFF2-40B4-BE49-F238E27FC236}">
-                <a16:creationId xmlns:a16="http://schemas.microsoft.com/office/drawing/2014/main" id="{CA86AC64-BF9D-4B4F-972F-AEEB9723011B}"/>
+                <a16:creationId xmlns:a16="http://schemas.microsoft.com/office/drawing/2014/main" id="{884D7EDE-A059-4E57-A8C3-2E50DD814E1B}"/>
               </a:ext>
             </a:extLst>
           </p:cNvPr>
@@ -5824,7 +5824,7 @@
           <p:cNvPr id="3" name="">
             <a:extLst xmlns:a="http://schemas.openxmlformats.org/drawingml/2006/main">
               <a:ext uri="{FF2B5EF4-FFF2-40B4-BE49-F238E27FC236}">
-                <a16:creationId xmlns:a16="http://schemas.microsoft.com/office/drawing/2014/main" id="{44BD5EC2-6F5A-4086-AB97-3A69C0EC7991}"/>
+                <a16:creationId xmlns:a16="http://schemas.microsoft.com/office/drawing/2014/main" id="{679F608D-E928-4815-87A7-6A728140D19B}"/>
               </a:ext>
             </a:extLst>
           </p:cNvPr>
@@ -5859,7 +5859,7 @@
           <p:cNvPr id="4" name="">
             <a:extLst xmlns:a="http://schemas.openxmlformats.org/drawingml/2006/main">
               <a:ext uri="{FF2B5EF4-FFF2-40B4-BE49-F238E27FC236}">
-                <a16:creationId xmlns:a16="http://schemas.microsoft.com/office/drawing/2014/main" id="{5BF074C4-79C9-4668-A8F2-9AE1F98CE53A}"/>
+                <a16:creationId xmlns:a16="http://schemas.microsoft.com/office/drawing/2014/main" id="{4281580D-6C53-4178-A52E-910F822A18E3}"/>
               </a:ext>
             </a:extLst>
           </p:cNvPr>
@@ -5917,7 +5917,7 @@
           <p:cNvPr id="5" name="">
             <a:extLst xmlns:a="http://schemas.openxmlformats.org/drawingml/2006/main">
               <a:ext uri="{FF2B5EF4-FFF2-40B4-BE49-F238E27FC236}">
-                <a16:creationId xmlns:a16="http://schemas.microsoft.com/office/drawing/2014/main" id="{1599AD44-6D6A-4EA7-95BA-F72386CAD92D}"/>
+                <a16:creationId xmlns:a16="http://schemas.microsoft.com/office/drawing/2014/main" id="{D6EBB25C-F4E7-4A49-A6FD-3A4397114DA5}"/>
               </a:ext>
             </a:extLst>
           </p:cNvPr>
@@ -5975,7 +5975,7 @@
           <p:cNvPr id="6" name="">
             <a:extLst xmlns:a="http://schemas.openxmlformats.org/drawingml/2006/main">
               <a:ext uri="{FF2B5EF4-FFF2-40B4-BE49-F238E27FC236}">
-                <a16:creationId xmlns:a16="http://schemas.microsoft.com/office/drawing/2014/main" id="{38E7EEBB-51CD-4848-B0F0-52E85AF0071F}"/>
+                <a16:creationId xmlns:a16="http://schemas.microsoft.com/office/drawing/2014/main" id="{A45A007F-E209-4354-AEFA-27D78C83224D}"/>
               </a:ext>
             </a:extLst>
           </p:cNvPr>
@@ -6033,7 +6033,7 @@
           <p:cNvPr id="7" name="">
             <a:extLst xmlns:a="http://schemas.openxmlformats.org/drawingml/2006/main">
               <a:ext uri="{FF2B5EF4-FFF2-40B4-BE49-F238E27FC236}">
-                <a16:creationId xmlns:a16="http://schemas.microsoft.com/office/drawing/2014/main" id="{EA4CDB47-9B48-4B8E-9EB9-4F1052EC4CB7}"/>
+                <a16:creationId xmlns:a16="http://schemas.microsoft.com/office/drawing/2014/main" id="{AEF5146F-1848-4CD7-84F7-2D979EDFEAFC}"/>
               </a:ext>
             </a:extLst>
           </p:cNvPr>
@@ -6068,7 +6068,7 @@
           <p:cNvPr id="8" name="">
             <a:extLst xmlns:a="http://schemas.openxmlformats.org/drawingml/2006/main">
               <a:ext uri="{FF2B5EF4-FFF2-40B4-BE49-F238E27FC236}">
-                <a16:creationId xmlns:a16="http://schemas.microsoft.com/office/drawing/2014/main" id="{9423D53A-2F86-4BF2-96EB-82EEFBF2B0C6}"/>
+                <a16:creationId xmlns:a16="http://schemas.microsoft.com/office/drawing/2014/main" id="{276DBA8F-EC34-48BF-AB6B-B457C64FF16C}"/>
               </a:ext>
             </a:extLst>
           </p:cNvPr>
@@ -6126,7 +6126,7 @@
           <p:cNvPr id="9" name="">
             <a:extLst xmlns:a="http://schemas.openxmlformats.org/drawingml/2006/main">
               <a:ext uri="{FF2B5EF4-FFF2-40B4-BE49-F238E27FC236}">
-                <a16:creationId xmlns:a16="http://schemas.microsoft.com/office/drawing/2014/main" id="{9CFBFCE1-822E-40C3-86B4-5ABFED4B0834}"/>
+                <a16:creationId xmlns:a16="http://schemas.microsoft.com/office/drawing/2014/main" id="{15759A13-BE0A-4AB5-826A-60E57B0FD75A}"/>
               </a:ext>
             </a:extLst>
           </p:cNvPr>
@@ -6184,7 +6184,7 @@
           <p:cNvPr id="10" name="">
             <a:extLst xmlns:a="http://schemas.openxmlformats.org/drawingml/2006/main">
               <a:ext uri="{FF2B5EF4-FFF2-40B4-BE49-F238E27FC236}">
-                <a16:creationId xmlns:a16="http://schemas.microsoft.com/office/drawing/2014/main" id="{E08C4AF2-5E6C-4353-BE81-C6CE45FF74AE}"/>
+                <a16:creationId xmlns:a16="http://schemas.microsoft.com/office/drawing/2014/main" id="{87B62400-E00D-489B-A834-31212B87F56A}"/>
               </a:ext>
             </a:extLst>
           </p:cNvPr>
@@ -6242,7 +6242,7 @@
           <p:cNvPr id="11" name="">
             <a:extLst xmlns:a="http://schemas.openxmlformats.org/drawingml/2006/main">
               <a:ext uri="{FF2B5EF4-FFF2-40B4-BE49-F238E27FC236}">
-                <a16:creationId xmlns:a16="http://schemas.microsoft.com/office/drawing/2014/main" id="{DEB6A15E-5581-4F6B-B93E-D899C726B787}"/>
+                <a16:creationId xmlns:a16="http://schemas.microsoft.com/office/drawing/2014/main" id="{8DB983DB-4AF9-48AC-B4E9-BF4C401A1184}"/>
               </a:ext>
             </a:extLst>
           </p:cNvPr>
@@ -6277,7 +6277,7 @@
           <p:cNvPr id="12" name="">
             <a:extLst xmlns:a="http://schemas.openxmlformats.org/drawingml/2006/main">
               <a:ext uri="{FF2B5EF4-FFF2-40B4-BE49-F238E27FC236}">
-                <a16:creationId xmlns:a16="http://schemas.microsoft.com/office/drawing/2014/main" id="{748880EE-60A7-45D3-88C6-64E47EEB483B}"/>
+                <a16:creationId xmlns:a16="http://schemas.microsoft.com/office/drawing/2014/main" id="{9BE4AC4A-52D7-4516-839D-4663D2477BF9}"/>
               </a:ext>
             </a:extLst>
           </p:cNvPr>
@@ -6335,7 +6335,7 @@
           <p:cNvPr id="13" name="">
             <a:extLst xmlns:a="http://schemas.openxmlformats.org/drawingml/2006/main">
               <a:ext uri="{FF2B5EF4-FFF2-40B4-BE49-F238E27FC236}">
-                <a16:creationId xmlns:a16="http://schemas.microsoft.com/office/drawing/2014/main" id="{7F06A914-71D7-4FF7-B006-0427EDE54054}"/>
+                <a16:creationId xmlns:a16="http://schemas.microsoft.com/office/drawing/2014/main" id="{8D5F964C-A5CE-4863-8F52-A2025CF911FA}"/>
               </a:ext>
             </a:extLst>
           </p:cNvPr>
@@ -6393,7 +6393,7 @@
           <p:cNvPr id="14" name="">
             <a:extLst xmlns:a="http://schemas.openxmlformats.org/drawingml/2006/main">
               <a:ext uri="{FF2B5EF4-FFF2-40B4-BE49-F238E27FC236}">
-                <a16:creationId xmlns:a16="http://schemas.microsoft.com/office/drawing/2014/main" id="{3CE41ED0-4320-4845-94CA-910630629E48}"/>
+                <a16:creationId xmlns:a16="http://schemas.microsoft.com/office/drawing/2014/main" id="{547FE8F1-D277-4B30-806C-7E06FDCE2240}"/>
               </a:ext>
             </a:extLst>
           </p:cNvPr>
@@ -6451,7 +6451,7 @@
           <p:cNvPr id="15" name="">
             <a:extLst xmlns:a="http://schemas.openxmlformats.org/drawingml/2006/main">
               <a:ext uri="{FF2B5EF4-FFF2-40B4-BE49-F238E27FC236}">
-                <a16:creationId xmlns:a16="http://schemas.microsoft.com/office/drawing/2014/main" id="{10B8915F-3462-4950-884E-2E12C6A3A6E4}"/>
+                <a16:creationId xmlns:a16="http://schemas.microsoft.com/office/drawing/2014/main" id="{628303FE-8046-4862-9B18-78E34784BBF8}"/>
               </a:ext>
             </a:extLst>
           </p:cNvPr>
@@ -6486,7 +6486,7 @@
           <p:cNvPr id="16" name="">
             <a:extLst xmlns:a="http://schemas.openxmlformats.org/drawingml/2006/main">
               <a:ext uri="{FF2B5EF4-FFF2-40B4-BE49-F238E27FC236}">
-                <a16:creationId xmlns:a16="http://schemas.microsoft.com/office/drawing/2014/main" id="{8497E934-A7DA-4423-A7B5-9B9F0FF9CF21}"/>
+                <a16:creationId xmlns:a16="http://schemas.microsoft.com/office/drawing/2014/main" id="{7E20A5B1-75ED-49AE-AE19-AC975162458E}"/>
               </a:ext>
             </a:extLst>
           </p:cNvPr>
@@ -6544,7 +6544,7 @@
           <p:cNvPr id="17" name="">
             <a:extLst xmlns:a="http://schemas.openxmlformats.org/drawingml/2006/main">
               <a:ext uri="{FF2B5EF4-FFF2-40B4-BE49-F238E27FC236}">
-                <a16:creationId xmlns:a16="http://schemas.microsoft.com/office/drawing/2014/main" id="{2CFA4A91-F9EE-4DBD-AAA3-658421AEF694}"/>
+                <a16:creationId xmlns:a16="http://schemas.microsoft.com/office/drawing/2014/main" id="{9515915B-6298-4978-97A6-2E82CE1A9EBA}"/>
               </a:ext>
             </a:extLst>
           </p:cNvPr>
@@ -6602,7 +6602,7 @@
           <p:cNvPr id="18" name="">
             <a:extLst xmlns:a="http://schemas.openxmlformats.org/drawingml/2006/main">
               <a:ext uri="{FF2B5EF4-FFF2-40B4-BE49-F238E27FC236}">
-                <a16:creationId xmlns:a16="http://schemas.microsoft.com/office/drawing/2014/main" id="{37FAAAB4-55FD-4D93-8313-76681D33F606}"/>
+                <a16:creationId xmlns:a16="http://schemas.microsoft.com/office/drawing/2014/main" id="{AF410D7D-A52C-4239-AD9D-4289963FF4F9}"/>
               </a:ext>
             </a:extLst>
           </p:cNvPr>
@@ -6660,7 +6660,7 @@
           <p:cNvPr id="19" name="">
             <a:extLst xmlns:a="http://schemas.openxmlformats.org/drawingml/2006/main">
               <a:ext uri="{FF2B5EF4-FFF2-40B4-BE49-F238E27FC236}">
-                <a16:creationId xmlns:a16="http://schemas.microsoft.com/office/drawing/2014/main" id="{83DED850-CE71-4DE7-9C3E-21EEE1E097F7}"/>
+                <a16:creationId xmlns:a16="http://schemas.microsoft.com/office/drawing/2014/main" id="{6F71561B-92B3-4F8E-A22D-D446D6948EE4}"/>
               </a:ext>
             </a:extLst>
           </p:cNvPr>
@@ -6695,7 +6695,7 @@
           <p:cNvPr id="20" name="">
             <a:extLst xmlns:a="http://schemas.openxmlformats.org/drawingml/2006/main">
               <a:ext uri="{FF2B5EF4-FFF2-40B4-BE49-F238E27FC236}">
-                <a16:creationId xmlns:a16="http://schemas.microsoft.com/office/drawing/2014/main" id="{51DE9929-5108-418E-AF99-6923076381FD}"/>
+                <a16:creationId xmlns:a16="http://schemas.microsoft.com/office/drawing/2014/main" id="{72537055-D742-4813-ADF4-F95ACB20A29C}"/>
               </a:ext>
             </a:extLst>
           </p:cNvPr>
@@ -6753,7 +6753,7 @@
           <p:cNvPr id="21" name="">
             <a:extLst xmlns:a="http://schemas.openxmlformats.org/drawingml/2006/main">
               <a:ext uri="{FF2B5EF4-FFF2-40B4-BE49-F238E27FC236}">
-                <a16:creationId xmlns:a16="http://schemas.microsoft.com/office/drawing/2014/main" id="{8A0C4120-F3D2-4E5B-8445-978139D87029}"/>
+                <a16:creationId xmlns:a16="http://schemas.microsoft.com/office/drawing/2014/main" id="{94C1813F-572D-4D17-8B0D-EC3ACE3ED716}"/>
               </a:ext>
             </a:extLst>
           </p:cNvPr>
@@ -6811,7 +6811,7 @@
           <p:cNvPr id="22" name="">
             <a:extLst xmlns:a="http://schemas.openxmlformats.org/drawingml/2006/main">
               <a:ext uri="{FF2B5EF4-FFF2-40B4-BE49-F238E27FC236}">
-                <a16:creationId xmlns:a16="http://schemas.microsoft.com/office/drawing/2014/main" id="{98FFB252-B7B5-440F-9284-9280EE07716E}"/>
+                <a16:creationId xmlns:a16="http://schemas.microsoft.com/office/drawing/2014/main" id="{B1372B6C-C502-4128-8E50-6B82939656F6}"/>
               </a:ext>
             </a:extLst>
           </p:cNvPr>
@@ -6867,7 +6867,7 @@
     </p:spTree>
     <p:extLst>
       <p:ext uri="{BB962C8B-B14F-4D97-AF65-F5344CB8AC3E}">
-        <p14:creationId xmlns:p14="http://schemas.microsoft.com/office/powerpoint/2010/main" val="597625310"/>
+        <p14:creationId xmlns:p14="http://schemas.microsoft.com/office/powerpoint/2010/main" val="639331145"/>
       </p:ext>
     </p:extLst>
   </p:cSld>
@@ -6898,7 +6898,7 @@
           <p:cNvPr id="12" name="">
             <a:extLst xmlns:a="http://schemas.openxmlformats.org/drawingml/2006/main">
               <a:ext uri="{FF2B5EF4-FFF2-40B4-BE49-F238E27FC236}">
-                <a16:creationId xmlns:a16="http://schemas.microsoft.com/office/drawing/2014/main" id="{A3E3F947-0AC6-4A99-AF48-05A355151781}"/>
+                <a16:creationId xmlns:a16="http://schemas.microsoft.com/office/drawing/2014/main" id="{9B20B05E-2E00-431C-8D04-7295ED6E223A}"/>
               </a:ext>
             </a:extLst>
           </p:cNvPr>
@@ -6956,7 +6956,7 @@
           <p:cNvPr id="2" name="">
             <a:extLst xmlns:a="http://schemas.openxmlformats.org/drawingml/2006/main">
               <a:ext uri="{FF2B5EF4-FFF2-40B4-BE49-F238E27FC236}">
-                <a16:creationId xmlns:a16="http://schemas.microsoft.com/office/drawing/2014/main" id="{E412F193-D1E8-4158-B402-58B646EA0975}"/>
+                <a16:creationId xmlns:a16="http://schemas.microsoft.com/office/drawing/2014/main" id="{F6CE9C81-25AC-4042-8B61-F73B82A2618F}"/>
               </a:ext>
             </a:extLst>
           </p:cNvPr>
@@ -7014,7 +7014,7 @@
           <p:cNvPr id="3" name="">
             <a:extLst xmlns:a="http://schemas.openxmlformats.org/drawingml/2006/main">
               <a:ext uri="{FF2B5EF4-FFF2-40B4-BE49-F238E27FC236}">
-                <a16:creationId xmlns:a16="http://schemas.microsoft.com/office/drawing/2014/main" id="{C15D4022-44A6-4801-A270-EBCC7A4E5AC8}"/>
+                <a16:creationId xmlns:a16="http://schemas.microsoft.com/office/drawing/2014/main" id="{1B518B40-B2DF-40B6-8B1F-48B5A8317E36}"/>
               </a:ext>
             </a:extLst>
           </p:cNvPr>
@@ -7049,7 +7049,7 @@
           <p:cNvPr id="4" name="">
             <a:extLst xmlns:a="http://schemas.openxmlformats.org/drawingml/2006/main">
               <a:ext uri="{FF2B5EF4-FFF2-40B4-BE49-F238E27FC236}">
-                <a16:creationId xmlns:a16="http://schemas.microsoft.com/office/drawing/2014/main" id="{2183815D-0D06-45BE-B1A3-09A31237AF5D}"/>
+                <a16:creationId xmlns:a16="http://schemas.microsoft.com/office/drawing/2014/main" id="{681D403D-9E4D-4CAA-94F3-DE96481D41A3}"/>
               </a:ext>
             </a:extLst>
           </p:cNvPr>
@@ -7107,7 +7107,7 @@
           <p:cNvPr id="5" name="">
             <a:extLst xmlns:a="http://schemas.openxmlformats.org/drawingml/2006/main">
               <a:ext uri="{FF2B5EF4-FFF2-40B4-BE49-F238E27FC236}">
-                <a16:creationId xmlns:a16="http://schemas.microsoft.com/office/drawing/2014/main" id="{F8D6C00C-80FD-4F95-9708-A89362D84B8A}"/>
+                <a16:creationId xmlns:a16="http://schemas.microsoft.com/office/drawing/2014/main" id="{A318B176-F486-4615-9594-60859F00843A}"/>
               </a:ext>
             </a:extLst>
           </p:cNvPr>
@@ -7165,7 +7165,7 @@
           <p:cNvPr id="6" name="">
             <a:extLst xmlns:a="http://schemas.openxmlformats.org/drawingml/2006/main">
               <a:ext uri="{FF2B5EF4-FFF2-40B4-BE49-F238E27FC236}">
-                <a16:creationId xmlns:a16="http://schemas.microsoft.com/office/drawing/2014/main" id="{D7CE0967-9FB5-4B74-8A4C-F8E9E9FD6B87}"/>
+                <a16:creationId xmlns:a16="http://schemas.microsoft.com/office/drawing/2014/main" id="{93F18D8E-3D89-456E-A8C1-D0F544ECFC6D}"/>
               </a:ext>
             </a:extLst>
           </p:cNvPr>
@@ -7200,7 +7200,7 @@
           <p:cNvPr id="7" name="">
             <a:extLst xmlns:a="http://schemas.openxmlformats.org/drawingml/2006/main">
               <a:ext uri="{FF2B5EF4-FFF2-40B4-BE49-F238E27FC236}">
-                <a16:creationId xmlns:a16="http://schemas.microsoft.com/office/drawing/2014/main" id="{784BFFAB-A9D9-4704-9E87-96FBD035600E}"/>
+                <a16:creationId xmlns:a16="http://schemas.microsoft.com/office/drawing/2014/main" id="{EB71CD7E-BFEF-463F-8DC9-DD09D25B0DFD}"/>
               </a:ext>
             </a:extLst>
           </p:cNvPr>
@@ -7258,7 +7258,7 @@
           <p:cNvPr id="8" name="">
             <a:extLst xmlns:a="http://schemas.openxmlformats.org/drawingml/2006/main">
               <a:ext uri="{FF2B5EF4-FFF2-40B4-BE49-F238E27FC236}">
-                <a16:creationId xmlns:a16="http://schemas.microsoft.com/office/drawing/2014/main" id="{3F84BE3C-B553-4C8D-BBE8-5F895EE3FEFD}"/>
+                <a16:creationId xmlns:a16="http://schemas.microsoft.com/office/drawing/2014/main" id="{ACFBDE91-CEFD-4CC9-BC80-C18B37CC9598}"/>
               </a:ext>
             </a:extLst>
           </p:cNvPr>
@@ -7316,7 +7316,7 @@
           <p:cNvPr id="9" name="">
             <a:extLst xmlns:a="http://schemas.openxmlformats.org/drawingml/2006/main">
               <a:ext uri="{FF2B5EF4-FFF2-40B4-BE49-F238E27FC236}">
-                <a16:creationId xmlns:a16="http://schemas.microsoft.com/office/drawing/2014/main" id="{9691F46B-F7BA-4ED0-A942-5F7B7B561CF0}"/>
+                <a16:creationId xmlns:a16="http://schemas.microsoft.com/office/drawing/2014/main" id="{8558ACAB-9C95-464C-B70A-2BC0EA5CCA89}"/>
               </a:ext>
             </a:extLst>
           </p:cNvPr>
@@ -7351,7 +7351,7 @@
           <p:cNvPr id="10" name="">
             <a:extLst xmlns:a="http://schemas.openxmlformats.org/drawingml/2006/main">
               <a:ext uri="{FF2B5EF4-FFF2-40B4-BE49-F238E27FC236}">
-                <a16:creationId xmlns:a16="http://schemas.microsoft.com/office/drawing/2014/main" id="{AE463F0D-6E55-4474-8474-542E447C9676}"/>
+                <a16:creationId xmlns:a16="http://schemas.microsoft.com/office/drawing/2014/main" id="{DDC7B76F-3DE0-4590-A3B4-57DBDCDF35F0}"/>
               </a:ext>
             </a:extLst>
           </p:cNvPr>
@@ -7409,7 +7409,7 @@
           <p:cNvPr id="11" name="">
             <a:extLst xmlns:a="http://schemas.openxmlformats.org/drawingml/2006/main">
               <a:ext uri="{FF2B5EF4-FFF2-40B4-BE49-F238E27FC236}">
-                <a16:creationId xmlns:a16="http://schemas.microsoft.com/office/drawing/2014/main" id="{1AC393C1-3C9F-4D71-AE24-256694200CB2}"/>
+                <a16:creationId xmlns:a16="http://schemas.microsoft.com/office/drawing/2014/main" id="{AC95BBDA-224F-4633-BE6B-9B55282D3170}"/>
               </a:ext>
             </a:extLst>
           </p:cNvPr>
@@ -7465,7 +7465,7 @@
     </p:spTree>
     <p:extLst>
       <p:ext uri="{BB962C8B-B14F-4D97-AF65-F5344CB8AC3E}">
-        <p14:creationId xmlns:p14="http://schemas.microsoft.com/office/powerpoint/2010/main" val="1412555322"/>
+        <p14:creationId xmlns:p14="http://schemas.microsoft.com/office/powerpoint/2010/main" val="1464482687"/>
       </p:ext>
     </p:extLst>
   </p:cSld>
@@ -7496,7 +7496,7 @@
           <p:cNvPr id="8" name="">
             <a:extLst xmlns:a="http://schemas.openxmlformats.org/drawingml/2006/main">
               <a:ext uri="{FF2B5EF4-FFF2-40B4-BE49-F238E27FC236}">
-                <a16:creationId xmlns:a16="http://schemas.microsoft.com/office/drawing/2014/main" id="{7CE7AF29-6D98-4274-B677-2A44CFE30929}"/>
+                <a16:creationId xmlns:a16="http://schemas.microsoft.com/office/drawing/2014/main" id="{67AF04DA-1910-4611-8883-DE469B189451}"/>
               </a:ext>
             </a:extLst>
           </p:cNvPr>
@@ -7554,7 +7554,7 @@
           <p:cNvPr id="2" name="">
             <a:extLst xmlns:a="http://schemas.openxmlformats.org/drawingml/2006/main">
               <a:ext uri="{FF2B5EF4-FFF2-40B4-BE49-F238E27FC236}">
-                <a16:creationId xmlns:a16="http://schemas.microsoft.com/office/drawing/2014/main" id="{41E6D872-2C60-4093-9349-BD0B26E76578}"/>
+                <a16:creationId xmlns:a16="http://schemas.microsoft.com/office/drawing/2014/main" id="{010CF6BD-8D74-49D5-B9C9-118CBC755980}"/>
               </a:ext>
             </a:extLst>
           </p:cNvPr>
@@ -7612,7 +7612,7 @@
           <p:cNvPr id="3" name="">
             <a:extLst xmlns:a="http://schemas.openxmlformats.org/drawingml/2006/main">
               <a:ext uri="{FF2B5EF4-FFF2-40B4-BE49-F238E27FC236}">
-                <a16:creationId xmlns:a16="http://schemas.microsoft.com/office/drawing/2014/main" id="{7BAFF7DB-54CA-4E24-B2BF-9F4759044B3B}"/>
+                <a16:creationId xmlns:a16="http://schemas.microsoft.com/office/drawing/2014/main" id="{24EA95FD-C51D-48AF-B42E-8FACF3253425}"/>
               </a:ext>
             </a:extLst>
           </p:cNvPr>
@@ -7670,7 +7670,7 @@
           <p:cNvPr id="4" name="">
             <a:extLst xmlns:a="http://schemas.openxmlformats.org/drawingml/2006/main">
               <a:ext uri="{FF2B5EF4-FFF2-40B4-BE49-F238E27FC236}">
-                <a16:creationId xmlns:a16="http://schemas.microsoft.com/office/drawing/2014/main" id="{32787D72-563C-487B-9E27-70D76C0512DF}"/>
+                <a16:creationId xmlns:a16="http://schemas.microsoft.com/office/drawing/2014/main" id="{3C0B4C8B-14DE-45E3-A9E9-7BDF691983AF}"/>
               </a:ext>
             </a:extLst>
           </p:cNvPr>
@@ -7705,7 +7705,7 @@
           <p:cNvPr id="5" name="">
             <a:extLst xmlns:a="http://schemas.openxmlformats.org/drawingml/2006/main">
               <a:ext uri="{FF2B5EF4-FFF2-40B4-BE49-F238E27FC236}">
-                <a16:creationId xmlns:a16="http://schemas.microsoft.com/office/drawing/2014/main" id="{1392828F-14E2-48D5-9B55-73B769F3B583}"/>
+                <a16:creationId xmlns:a16="http://schemas.microsoft.com/office/drawing/2014/main" id="{79F87129-484F-4817-B099-B0B702EF98B4}"/>
               </a:ext>
             </a:extLst>
           </p:cNvPr>
@@ -7763,7 +7763,7 @@
           <p:cNvPr id="6" name="">
             <a:extLst xmlns:a="http://schemas.openxmlformats.org/drawingml/2006/main">
               <a:ext uri="{FF2B5EF4-FFF2-40B4-BE49-F238E27FC236}">
-                <a16:creationId xmlns:a16="http://schemas.microsoft.com/office/drawing/2014/main" id="{DDB9BCAB-0168-4E88-914B-834A28C04AF2}"/>
+                <a16:creationId xmlns:a16="http://schemas.microsoft.com/office/drawing/2014/main" id="{6DD5C550-4A4A-4D19-B017-0229DA8B6FC2}"/>
               </a:ext>
             </a:extLst>
           </p:cNvPr>
@@ -7821,7 +7821,7 @@
           <p:cNvPr id="7" name="">
             <a:extLst xmlns:a="http://schemas.openxmlformats.org/drawingml/2006/main">
               <a:ext uri="{FF2B5EF4-FFF2-40B4-BE49-F238E27FC236}">
-                <a16:creationId xmlns:a16="http://schemas.microsoft.com/office/drawing/2014/main" id="{D38FDD52-A929-405E-B64D-90454AE9F17C}"/>
+                <a16:creationId xmlns:a16="http://schemas.microsoft.com/office/drawing/2014/main" id="{94381311-F4FC-44C1-8AA9-FD9C3BDA060C}"/>
               </a:ext>
             </a:extLst>
           </p:cNvPr>
@@ -7877,7 +7877,7 @@
     </p:spTree>
     <p:extLst>
       <p:ext uri="{BB962C8B-B14F-4D97-AF65-F5344CB8AC3E}">
-        <p14:creationId xmlns:p14="http://schemas.microsoft.com/office/powerpoint/2010/main" val="1262001784"/>
+        <p14:creationId xmlns:p14="http://schemas.microsoft.com/office/powerpoint/2010/main" val="1079592033"/>
       </p:ext>
     </p:extLst>
   </p:cSld>

--- a/docs/deck/StreamVault-BCH-Blaze-2026.pptx
+++ b/docs/deck/StreamVault-BCH-Blaze-2026.pptx
@@ -2,19 +2,19 @@
 <file path=ppt/presentation.xml><?xml version="1.0" encoding="utf-8"?>
 <p:presentation xmlns:p="http://schemas.openxmlformats.org/presentationml/2006/main">
   <p:sldMasterIdLst>
-    <p:sldMasterId xmlns:r="http://schemas.openxmlformats.org/officeDocument/2006/relationships" id="2147483648" r:id="R78a565f1a4ff40da"/>
+    <p:sldMasterId xmlns:r="http://schemas.openxmlformats.org/officeDocument/2006/relationships" id="2147483648" r:id="Rc029769c6c9a4666"/>
   </p:sldMasterIdLst>
   <p:notesMasterIdLst>
-    <p:notesMasterId xmlns:r="http://schemas.openxmlformats.org/officeDocument/2006/relationships" r:id="Re90db1306db24594"/>
+    <p:notesMasterId xmlns:r="http://schemas.openxmlformats.org/officeDocument/2006/relationships" r:id="Rfde6162cf3434d03"/>
   </p:notesMasterIdLst>
   <p:sldIdLst>
-    <p:sldId xmlns:r="http://schemas.openxmlformats.org/officeDocument/2006/relationships" id="256" r:id="R78f564e1bde74c99"/>
-    <p:sldId xmlns:r="http://schemas.openxmlformats.org/officeDocument/2006/relationships" id="257" r:id="R14883d9f770e47ba"/>
-    <p:sldId xmlns:r="http://schemas.openxmlformats.org/officeDocument/2006/relationships" id="258" r:id="R2f8e7a5188b5496a"/>
-    <p:sldId xmlns:r="http://schemas.openxmlformats.org/officeDocument/2006/relationships" id="259" r:id="R512d17f61215472d"/>
-    <p:sldId xmlns:r="http://schemas.openxmlformats.org/officeDocument/2006/relationships" id="260" r:id="Rb3240e4271c24862"/>
-    <p:sldId xmlns:r="http://schemas.openxmlformats.org/officeDocument/2006/relationships" id="261" r:id="Rc61d8f8399b746ae"/>
-    <p:sldId xmlns:r="http://schemas.openxmlformats.org/officeDocument/2006/relationships" id="262" r:id="R24846a707e21402c"/>
+    <p:sldId xmlns:r="http://schemas.openxmlformats.org/officeDocument/2006/relationships" id="256" r:id="R0679bd7ce14a4152"/>
+    <p:sldId xmlns:r="http://schemas.openxmlformats.org/officeDocument/2006/relationships" id="257" r:id="R434d508f73ab4e27"/>
+    <p:sldId xmlns:r="http://schemas.openxmlformats.org/officeDocument/2006/relationships" id="258" r:id="R2ee84897b1884e5b"/>
+    <p:sldId xmlns:r="http://schemas.openxmlformats.org/officeDocument/2006/relationships" id="259" r:id="R42696115b95c4b85"/>
+    <p:sldId xmlns:r="http://schemas.openxmlformats.org/officeDocument/2006/relationships" id="260" r:id="R47e176988b1d423a"/>
+    <p:sldId xmlns:r="http://schemas.openxmlformats.org/officeDocument/2006/relationships" id="261" r:id="Re77bfbee7c0b4262"/>
+    <p:sldId xmlns:r="http://schemas.openxmlformats.org/officeDocument/2006/relationships" id="262" r:id="Rdf063b01032141f7"/>
   </p:sldIdLst>
   <p:sldSz cx="12192000" cy="6858000"/>
   <p:notesSz cx="6858000" cy="9144000"/>
@@ -887,7 +887,7 @@
           <p:cNvPr id="3" name="Title">
             <a:extLst xmlns:a="http://schemas.openxmlformats.org/drawingml/2006/main">
               <a:ext uri="{FF2B5EF4-FFF2-40B4-BE49-F238E27FC236}">
-                <a16:creationId xmlns:a16="http://schemas.microsoft.com/office/drawing/2014/main" id="{C6530832-4712-47F1-AE9B-9C59052D2869}"/>
+                <a16:creationId xmlns:a16="http://schemas.microsoft.com/office/drawing/2014/main" id="{E565826C-75B3-471A-AC4D-B9F2670041FC}"/>
               </a:ext>
             </a:extLst>
           </p:cNvPr>
@@ -927,7 +927,7 @@
                 <a:cs typeface="+mj-lt"/>
               </a:defRPr>
             </a:defPPr>
-            <a:lvl1pPr marL="0" indent="0">
+            <a:lvl1pPr marL="0" indent="0" algn="ctr">
               <a:lnSpc>
                 <a:spcPct val="110000"/>
               </a:lnSpc>
@@ -938,8 +938,16 @@
                 <a:spcPts val="0"/>
               </a:spcAft>
               <a:buNone/>
+              <a:defRPr sz="4800" b="1">
+                <a:solidFill>
+                  <a:schemeClr val="tx1"/>
+                </a:solidFill>
+                <a:latin typeface="+mj-lt"/>
+                <a:ea typeface="+mj-lt"/>
+                <a:cs typeface="+mj-lt"/>
+              </a:defRPr>
             </a:lvl1pPr>
-            <a:lvl2pPr marL="0" indent="0">
+            <a:lvl2pPr marL="0" indent="0" algn="ctr">
               <a:lnSpc>
                 <a:spcPct val="110000"/>
               </a:lnSpc>
@@ -950,8 +958,16 @@
                 <a:spcPts val="0"/>
               </a:spcAft>
               <a:buNone/>
+              <a:defRPr sz="4800" b="1">
+                <a:solidFill>
+                  <a:schemeClr val="tx1"/>
+                </a:solidFill>
+                <a:latin typeface="+mj-lt"/>
+                <a:ea typeface="+mj-lt"/>
+                <a:cs typeface="+mj-lt"/>
+              </a:defRPr>
             </a:lvl2pPr>
-            <a:lvl3pPr marL="0" indent="0">
+            <a:lvl3pPr marL="0" indent="0" algn="ctr">
               <a:lnSpc>
                 <a:spcPct val="110000"/>
               </a:lnSpc>
@@ -962,8 +978,16 @@
                 <a:spcPts val="0"/>
               </a:spcAft>
               <a:buNone/>
+              <a:defRPr sz="4800" b="1">
+                <a:solidFill>
+                  <a:schemeClr val="tx1"/>
+                </a:solidFill>
+                <a:latin typeface="+mj-lt"/>
+                <a:ea typeface="+mj-lt"/>
+                <a:cs typeface="+mj-lt"/>
+              </a:defRPr>
             </a:lvl3pPr>
-            <a:lvl4pPr marL="0" indent="0">
+            <a:lvl4pPr marL="0" indent="0" algn="ctr">
               <a:lnSpc>
                 <a:spcPct val="110000"/>
               </a:lnSpc>
@@ -974,8 +998,16 @@
                 <a:spcPts val="0"/>
               </a:spcAft>
               <a:buNone/>
+              <a:defRPr sz="4800" b="1">
+                <a:solidFill>
+                  <a:schemeClr val="tx1"/>
+                </a:solidFill>
+                <a:latin typeface="+mj-lt"/>
+                <a:ea typeface="+mj-lt"/>
+                <a:cs typeface="+mj-lt"/>
+              </a:defRPr>
             </a:lvl4pPr>
-            <a:lvl5pPr marL="0" indent="0">
+            <a:lvl5pPr marL="0" indent="0" algn="ctr">
               <a:lnSpc>
                 <a:spcPct val="110000"/>
               </a:lnSpc>
@@ -986,8 +1018,16 @@
                 <a:spcPts val="0"/>
               </a:spcAft>
               <a:buNone/>
+              <a:defRPr sz="4800" b="1">
+                <a:solidFill>
+                  <a:schemeClr val="tx1"/>
+                </a:solidFill>
+                <a:latin typeface="+mj-lt"/>
+                <a:ea typeface="+mj-lt"/>
+                <a:cs typeface="+mj-lt"/>
+              </a:defRPr>
             </a:lvl5pPr>
-            <a:lvl6pPr marL="0" indent="0">
+            <a:lvl6pPr marL="0" indent="0" algn="ctr">
               <a:lnSpc>
                 <a:spcPct val="110000"/>
               </a:lnSpc>
@@ -998,8 +1038,16 @@
                 <a:spcPts val="0"/>
               </a:spcAft>
               <a:buNone/>
+              <a:defRPr sz="4800" b="1">
+                <a:solidFill>
+                  <a:schemeClr val="tx1"/>
+                </a:solidFill>
+                <a:latin typeface="+mj-lt"/>
+                <a:ea typeface="+mj-lt"/>
+                <a:cs typeface="+mj-lt"/>
+              </a:defRPr>
             </a:lvl6pPr>
-            <a:lvl7pPr marL="0" indent="0">
+            <a:lvl7pPr marL="0" indent="0" algn="ctr">
               <a:lnSpc>
                 <a:spcPct val="110000"/>
               </a:lnSpc>
@@ -1010,8 +1058,16 @@
                 <a:spcPts val="0"/>
               </a:spcAft>
               <a:buNone/>
+              <a:defRPr sz="4800" b="1">
+                <a:solidFill>
+                  <a:schemeClr val="tx1"/>
+                </a:solidFill>
+                <a:latin typeface="+mj-lt"/>
+                <a:ea typeface="+mj-lt"/>
+                <a:cs typeface="+mj-lt"/>
+              </a:defRPr>
             </a:lvl7pPr>
-            <a:lvl8pPr marL="0" indent="0">
+            <a:lvl8pPr marL="0" indent="0" algn="ctr">
               <a:lnSpc>
                 <a:spcPct val="110000"/>
               </a:lnSpc>
@@ -1022,8 +1078,16 @@
                 <a:spcPts val="0"/>
               </a:spcAft>
               <a:buNone/>
+              <a:defRPr sz="4800" b="1">
+                <a:solidFill>
+                  <a:schemeClr val="tx1"/>
+                </a:solidFill>
+                <a:latin typeface="+mj-lt"/>
+                <a:ea typeface="+mj-lt"/>
+                <a:cs typeface="+mj-lt"/>
+              </a:defRPr>
             </a:lvl8pPr>
-            <a:lvl9pPr marL="0" indent="0">
+            <a:lvl9pPr marL="0" indent="0" algn="ctr">
               <a:lnSpc>
                 <a:spcPct val="110000"/>
               </a:lnSpc>
@@ -1034,6 +1098,14 @@
                 <a:spcPts val="0"/>
               </a:spcAft>
               <a:buNone/>
+              <a:defRPr sz="4800" b="1">
+                <a:solidFill>
+                  <a:schemeClr val="tx1"/>
+                </a:solidFill>
+                <a:latin typeface="+mj-lt"/>
+                <a:ea typeface="+mj-lt"/>
+                <a:cs typeface="+mj-lt"/>
+              </a:defRPr>
             </a:lvl9pPr>
           </a:lstStyle>
           <a:p xmlns:a="http://schemas.openxmlformats.org/drawingml/2006/main"/>
@@ -1044,7 +1116,7 @@
           <p:cNvPr id="2" name="Subtitle">
             <a:extLst xmlns:a="http://schemas.openxmlformats.org/drawingml/2006/main">
               <a:ext uri="{FF2B5EF4-FFF2-40B4-BE49-F238E27FC236}">
-                <a16:creationId xmlns:a16="http://schemas.microsoft.com/office/drawing/2014/main" id="{5C4B20D8-E894-4DF8-AA33-C22045D9DFE1}"/>
+                <a16:creationId xmlns:a16="http://schemas.microsoft.com/office/drawing/2014/main" id="{92DE474B-8E32-4815-9134-223D416DD3E0}"/>
               </a:ext>
             </a:extLst>
           </p:cNvPr>
@@ -1084,7 +1156,7 @@
                 <a:cs typeface="+mn-lt"/>
               </a:defRPr>
             </a:defPPr>
-            <a:lvl1pPr marL="0" indent="0">
+            <a:lvl1pPr marL="0" indent="0" algn="ctr">
               <a:lnSpc>
                 <a:spcPct val="110000"/>
               </a:lnSpc>
@@ -1095,8 +1167,16 @@
                 <a:spcPts val="0"/>
               </a:spcAft>
               <a:buNone/>
+              <a:defRPr sz="2100" b="0">
+                <a:solidFill>
+                  <a:schemeClr val="tx1"/>
+                </a:solidFill>
+                <a:latin typeface="+mn-lt"/>
+                <a:ea typeface="+mn-lt"/>
+                <a:cs typeface="+mn-lt"/>
+              </a:defRPr>
             </a:lvl1pPr>
-            <a:lvl2pPr marL="0" indent="0">
+            <a:lvl2pPr marL="0" indent="0" algn="ctr">
               <a:lnSpc>
                 <a:spcPct val="110000"/>
               </a:lnSpc>
@@ -1107,8 +1187,16 @@
                 <a:spcPts val="0"/>
               </a:spcAft>
               <a:buNone/>
+              <a:defRPr sz="2100" b="0">
+                <a:solidFill>
+                  <a:schemeClr val="tx1"/>
+                </a:solidFill>
+                <a:latin typeface="+mn-lt"/>
+                <a:ea typeface="+mn-lt"/>
+                <a:cs typeface="+mn-lt"/>
+              </a:defRPr>
             </a:lvl2pPr>
-            <a:lvl3pPr marL="0" indent="0">
+            <a:lvl3pPr marL="0" indent="0" algn="ctr">
               <a:lnSpc>
                 <a:spcPct val="110000"/>
               </a:lnSpc>
@@ -1119,8 +1207,16 @@
                 <a:spcPts val="0"/>
               </a:spcAft>
               <a:buNone/>
+              <a:defRPr sz="2100" b="0">
+                <a:solidFill>
+                  <a:schemeClr val="tx1"/>
+                </a:solidFill>
+                <a:latin typeface="+mn-lt"/>
+                <a:ea typeface="+mn-lt"/>
+                <a:cs typeface="+mn-lt"/>
+              </a:defRPr>
             </a:lvl3pPr>
-            <a:lvl4pPr marL="0" indent="0">
+            <a:lvl4pPr marL="0" indent="0" algn="ctr">
               <a:lnSpc>
                 <a:spcPct val="110000"/>
               </a:lnSpc>
@@ -1131,8 +1227,16 @@
                 <a:spcPts val="0"/>
               </a:spcAft>
               <a:buNone/>
+              <a:defRPr sz="2100" b="0">
+                <a:solidFill>
+                  <a:schemeClr val="tx1"/>
+                </a:solidFill>
+                <a:latin typeface="+mn-lt"/>
+                <a:ea typeface="+mn-lt"/>
+                <a:cs typeface="+mn-lt"/>
+              </a:defRPr>
             </a:lvl4pPr>
-            <a:lvl5pPr marL="0" indent="0">
+            <a:lvl5pPr marL="0" indent="0" algn="ctr">
               <a:lnSpc>
                 <a:spcPct val="110000"/>
               </a:lnSpc>
@@ -1143,8 +1247,16 @@
                 <a:spcPts val="0"/>
               </a:spcAft>
               <a:buNone/>
+              <a:defRPr sz="2100" b="0">
+                <a:solidFill>
+                  <a:schemeClr val="tx1"/>
+                </a:solidFill>
+                <a:latin typeface="+mn-lt"/>
+                <a:ea typeface="+mn-lt"/>
+                <a:cs typeface="+mn-lt"/>
+              </a:defRPr>
             </a:lvl5pPr>
-            <a:lvl6pPr marL="0" indent="0">
+            <a:lvl6pPr marL="0" indent="0" algn="ctr">
               <a:lnSpc>
                 <a:spcPct val="110000"/>
               </a:lnSpc>
@@ -1155,8 +1267,16 @@
                 <a:spcPts val="0"/>
               </a:spcAft>
               <a:buNone/>
+              <a:defRPr sz="2100" b="0">
+                <a:solidFill>
+                  <a:schemeClr val="tx1"/>
+                </a:solidFill>
+                <a:latin typeface="+mn-lt"/>
+                <a:ea typeface="+mn-lt"/>
+                <a:cs typeface="+mn-lt"/>
+              </a:defRPr>
             </a:lvl6pPr>
-            <a:lvl7pPr marL="0" indent="0">
+            <a:lvl7pPr marL="0" indent="0" algn="ctr">
               <a:lnSpc>
                 <a:spcPct val="110000"/>
               </a:lnSpc>
@@ -1167,8 +1287,16 @@
                 <a:spcPts val="0"/>
               </a:spcAft>
               <a:buNone/>
+              <a:defRPr sz="2100" b="0">
+                <a:solidFill>
+                  <a:schemeClr val="tx1"/>
+                </a:solidFill>
+                <a:latin typeface="+mn-lt"/>
+                <a:ea typeface="+mn-lt"/>
+                <a:cs typeface="+mn-lt"/>
+              </a:defRPr>
             </a:lvl7pPr>
-            <a:lvl8pPr marL="0" indent="0">
+            <a:lvl8pPr marL="0" indent="0" algn="ctr">
               <a:lnSpc>
                 <a:spcPct val="110000"/>
               </a:lnSpc>
@@ -1179,8 +1307,16 @@
                 <a:spcPts val="0"/>
               </a:spcAft>
               <a:buNone/>
+              <a:defRPr sz="2100" b="0">
+                <a:solidFill>
+                  <a:schemeClr val="tx1"/>
+                </a:solidFill>
+                <a:latin typeface="+mn-lt"/>
+                <a:ea typeface="+mn-lt"/>
+                <a:cs typeface="+mn-lt"/>
+              </a:defRPr>
             </a:lvl8pPr>
-            <a:lvl9pPr marL="0" indent="0">
+            <a:lvl9pPr marL="0" indent="0" algn="ctr">
               <a:lnSpc>
                 <a:spcPct val="110000"/>
               </a:lnSpc>
@@ -1191,6 +1327,14 @@
                 <a:spcPts val="0"/>
               </a:spcAft>
               <a:buNone/>
+              <a:defRPr sz="2100" b="0">
+                <a:solidFill>
+                  <a:schemeClr val="tx1"/>
+                </a:solidFill>
+                <a:latin typeface="+mn-lt"/>
+                <a:ea typeface="+mn-lt"/>
+                <a:cs typeface="+mn-lt"/>
+              </a:defRPr>
             </a:lvl9pPr>
           </a:lstStyle>
           <a:p xmlns:a="http://schemas.openxmlformats.org/drawingml/2006/main"/>
@@ -1218,7 +1362,7 @@
           <p:cNvPr id="2" name="Section title">
             <a:extLst xmlns:a="http://schemas.openxmlformats.org/drawingml/2006/main">
               <a:ext uri="{FF2B5EF4-FFF2-40B4-BE49-F238E27FC236}">
-                <a16:creationId xmlns:a16="http://schemas.microsoft.com/office/drawing/2014/main" id="{1319F0C3-B2D3-46D6-87DE-1F0968C24B78}"/>
+                <a16:creationId xmlns:a16="http://schemas.microsoft.com/office/drawing/2014/main" id="{7DF89F76-C0D2-49A6-B426-6BA28D0B8E10}"/>
               </a:ext>
             </a:extLst>
           </p:cNvPr>
@@ -1258,7 +1402,7 @@
                 <a:cs typeface="+mj-lt"/>
               </a:defRPr>
             </a:defPPr>
-            <a:lvl1pPr marL="0" indent="0">
+            <a:lvl1pPr marL="0" indent="0" algn="ctr">
               <a:lnSpc>
                 <a:spcPct val="110000"/>
               </a:lnSpc>
@@ -1269,8 +1413,16 @@
                 <a:spcPts val="0"/>
               </a:spcAft>
               <a:buNone/>
+              <a:defRPr sz="4200" b="1">
+                <a:solidFill>
+                  <a:schemeClr val="tx1"/>
+                </a:solidFill>
+                <a:latin typeface="+mj-lt"/>
+                <a:ea typeface="+mj-lt"/>
+                <a:cs typeface="+mj-lt"/>
+              </a:defRPr>
             </a:lvl1pPr>
-            <a:lvl2pPr marL="0" indent="0">
+            <a:lvl2pPr marL="0" indent="0" algn="ctr">
               <a:lnSpc>
                 <a:spcPct val="110000"/>
               </a:lnSpc>
@@ -1281,8 +1433,16 @@
                 <a:spcPts val="0"/>
               </a:spcAft>
               <a:buNone/>
+              <a:defRPr sz="4200" b="1">
+                <a:solidFill>
+                  <a:schemeClr val="tx1"/>
+                </a:solidFill>
+                <a:latin typeface="+mj-lt"/>
+                <a:ea typeface="+mj-lt"/>
+                <a:cs typeface="+mj-lt"/>
+              </a:defRPr>
             </a:lvl2pPr>
-            <a:lvl3pPr marL="0" indent="0">
+            <a:lvl3pPr marL="0" indent="0" algn="ctr">
               <a:lnSpc>
                 <a:spcPct val="110000"/>
               </a:lnSpc>
@@ -1293,8 +1453,16 @@
                 <a:spcPts val="0"/>
               </a:spcAft>
               <a:buNone/>
+              <a:defRPr sz="4200" b="1">
+                <a:solidFill>
+                  <a:schemeClr val="tx1"/>
+                </a:solidFill>
+                <a:latin typeface="+mj-lt"/>
+                <a:ea typeface="+mj-lt"/>
+                <a:cs typeface="+mj-lt"/>
+              </a:defRPr>
             </a:lvl3pPr>
-            <a:lvl4pPr marL="0" indent="0">
+            <a:lvl4pPr marL="0" indent="0" algn="ctr">
               <a:lnSpc>
                 <a:spcPct val="110000"/>
               </a:lnSpc>
@@ -1305,8 +1473,16 @@
                 <a:spcPts val="0"/>
               </a:spcAft>
               <a:buNone/>
+              <a:defRPr sz="4200" b="1">
+                <a:solidFill>
+                  <a:schemeClr val="tx1"/>
+                </a:solidFill>
+                <a:latin typeface="+mj-lt"/>
+                <a:ea typeface="+mj-lt"/>
+                <a:cs typeface="+mj-lt"/>
+              </a:defRPr>
             </a:lvl4pPr>
-            <a:lvl5pPr marL="0" indent="0">
+            <a:lvl5pPr marL="0" indent="0" algn="ctr">
               <a:lnSpc>
                 <a:spcPct val="110000"/>
               </a:lnSpc>
@@ -1317,8 +1493,16 @@
                 <a:spcPts val="0"/>
               </a:spcAft>
               <a:buNone/>
+              <a:defRPr sz="4200" b="1">
+                <a:solidFill>
+                  <a:schemeClr val="tx1"/>
+                </a:solidFill>
+                <a:latin typeface="+mj-lt"/>
+                <a:ea typeface="+mj-lt"/>
+                <a:cs typeface="+mj-lt"/>
+              </a:defRPr>
             </a:lvl5pPr>
-            <a:lvl6pPr marL="0" indent="0">
+            <a:lvl6pPr marL="0" indent="0" algn="ctr">
               <a:lnSpc>
                 <a:spcPct val="110000"/>
               </a:lnSpc>
@@ -1329,8 +1513,16 @@
                 <a:spcPts val="0"/>
               </a:spcAft>
               <a:buNone/>
+              <a:defRPr sz="4200" b="1">
+                <a:solidFill>
+                  <a:schemeClr val="tx1"/>
+                </a:solidFill>
+                <a:latin typeface="+mj-lt"/>
+                <a:ea typeface="+mj-lt"/>
+                <a:cs typeface="+mj-lt"/>
+              </a:defRPr>
             </a:lvl6pPr>
-            <a:lvl7pPr marL="0" indent="0">
+            <a:lvl7pPr marL="0" indent="0" algn="ctr">
               <a:lnSpc>
                 <a:spcPct val="110000"/>
               </a:lnSpc>
@@ -1341,8 +1533,16 @@
                 <a:spcPts val="0"/>
               </a:spcAft>
               <a:buNone/>
+              <a:defRPr sz="4200" b="1">
+                <a:solidFill>
+                  <a:schemeClr val="tx1"/>
+                </a:solidFill>
+                <a:latin typeface="+mj-lt"/>
+                <a:ea typeface="+mj-lt"/>
+                <a:cs typeface="+mj-lt"/>
+              </a:defRPr>
             </a:lvl7pPr>
-            <a:lvl8pPr marL="0" indent="0">
+            <a:lvl8pPr marL="0" indent="0" algn="ctr">
               <a:lnSpc>
                 <a:spcPct val="110000"/>
               </a:lnSpc>
@@ -1353,8 +1553,16 @@
                 <a:spcPts val="0"/>
               </a:spcAft>
               <a:buNone/>
+              <a:defRPr sz="4200" b="1">
+                <a:solidFill>
+                  <a:schemeClr val="tx1"/>
+                </a:solidFill>
+                <a:latin typeface="+mj-lt"/>
+                <a:ea typeface="+mj-lt"/>
+                <a:cs typeface="+mj-lt"/>
+              </a:defRPr>
             </a:lvl8pPr>
-            <a:lvl9pPr marL="0" indent="0">
+            <a:lvl9pPr marL="0" indent="0" algn="ctr">
               <a:lnSpc>
                 <a:spcPct val="110000"/>
               </a:lnSpc>
@@ -1365,6 +1573,14 @@
                 <a:spcPts val="0"/>
               </a:spcAft>
               <a:buNone/>
+              <a:defRPr sz="4200" b="1">
+                <a:solidFill>
+                  <a:schemeClr val="tx1"/>
+                </a:solidFill>
+                <a:latin typeface="+mj-lt"/>
+                <a:ea typeface="+mj-lt"/>
+                <a:cs typeface="+mj-lt"/>
+              </a:defRPr>
             </a:lvl9pPr>
           </a:lstStyle>
           <a:p xmlns:a="http://schemas.openxmlformats.org/drawingml/2006/main"/>
@@ -1392,7 +1608,7 @@
           <p:cNvPr id="3" name="Title">
             <a:extLst xmlns:a="http://schemas.openxmlformats.org/drawingml/2006/main">
               <a:ext uri="{FF2B5EF4-FFF2-40B4-BE49-F238E27FC236}">
-                <a16:creationId xmlns:a16="http://schemas.microsoft.com/office/drawing/2014/main" id="{241E5175-C864-4C9C-99A3-09B4E287E7D2}"/>
+                <a16:creationId xmlns:a16="http://schemas.microsoft.com/office/drawing/2014/main" id="{A7A816BB-2D34-4419-87E0-6C0719C2C3DC}"/>
               </a:ext>
             </a:extLst>
           </p:cNvPr>
@@ -1432,7 +1648,7 @@
                 <a:cs typeface="+mj-lt"/>
               </a:defRPr>
             </a:defPPr>
-            <a:lvl1pPr marL="0" indent="0">
+            <a:lvl1pPr marL="0" indent="0" algn="l">
               <a:lnSpc>
                 <a:spcPct val="110000"/>
               </a:lnSpc>
@@ -1443,8 +1659,16 @@
                 <a:spcPts val="0"/>
               </a:spcAft>
               <a:buNone/>
+              <a:defRPr sz="3300" b="1">
+                <a:solidFill>
+                  <a:schemeClr val="tx1"/>
+                </a:solidFill>
+                <a:latin typeface="+mj-lt"/>
+                <a:ea typeface="+mj-lt"/>
+                <a:cs typeface="+mj-lt"/>
+              </a:defRPr>
             </a:lvl1pPr>
-            <a:lvl2pPr marL="0" indent="0">
+            <a:lvl2pPr marL="0" indent="0" algn="l">
               <a:lnSpc>
                 <a:spcPct val="110000"/>
               </a:lnSpc>
@@ -1455,8 +1679,16 @@
                 <a:spcPts val="0"/>
               </a:spcAft>
               <a:buNone/>
+              <a:defRPr sz="3300" b="1">
+                <a:solidFill>
+                  <a:schemeClr val="tx1"/>
+                </a:solidFill>
+                <a:latin typeface="+mj-lt"/>
+                <a:ea typeface="+mj-lt"/>
+                <a:cs typeface="+mj-lt"/>
+              </a:defRPr>
             </a:lvl2pPr>
-            <a:lvl3pPr marL="0" indent="0">
+            <a:lvl3pPr marL="0" indent="0" algn="l">
               <a:lnSpc>
                 <a:spcPct val="110000"/>
               </a:lnSpc>
@@ -1467,8 +1699,16 @@
                 <a:spcPts val="0"/>
               </a:spcAft>
               <a:buNone/>
+              <a:defRPr sz="3300" b="1">
+                <a:solidFill>
+                  <a:schemeClr val="tx1"/>
+                </a:solidFill>
+                <a:latin typeface="+mj-lt"/>
+                <a:ea typeface="+mj-lt"/>
+                <a:cs typeface="+mj-lt"/>
+              </a:defRPr>
             </a:lvl3pPr>
-            <a:lvl4pPr marL="0" indent="0">
+            <a:lvl4pPr marL="0" indent="0" algn="l">
               <a:lnSpc>
                 <a:spcPct val="110000"/>
               </a:lnSpc>
@@ -1479,8 +1719,16 @@
                 <a:spcPts val="0"/>
               </a:spcAft>
               <a:buNone/>
+              <a:defRPr sz="3300" b="1">
+                <a:solidFill>
+                  <a:schemeClr val="tx1"/>
+                </a:solidFill>
+                <a:latin typeface="+mj-lt"/>
+                <a:ea typeface="+mj-lt"/>
+                <a:cs typeface="+mj-lt"/>
+              </a:defRPr>
             </a:lvl4pPr>
-            <a:lvl5pPr marL="0" indent="0">
+            <a:lvl5pPr marL="0" indent="0" algn="l">
               <a:lnSpc>
                 <a:spcPct val="110000"/>
               </a:lnSpc>
@@ -1491,8 +1739,16 @@
                 <a:spcPts val="0"/>
               </a:spcAft>
               <a:buNone/>
+              <a:defRPr sz="3300" b="1">
+                <a:solidFill>
+                  <a:schemeClr val="tx1"/>
+                </a:solidFill>
+                <a:latin typeface="+mj-lt"/>
+                <a:ea typeface="+mj-lt"/>
+                <a:cs typeface="+mj-lt"/>
+              </a:defRPr>
             </a:lvl5pPr>
-            <a:lvl6pPr marL="0" indent="0">
+            <a:lvl6pPr marL="0" indent="0" algn="l">
               <a:lnSpc>
                 <a:spcPct val="110000"/>
               </a:lnSpc>
@@ -1503,8 +1759,16 @@
                 <a:spcPts val="0"/>
               </a:spcAft>
               <a:buNone/>
+              <a:defRPr sz="3300" b="1">
+                <a:solidFill>
+                  <a:schemeClr val="tx1"/>
+                </a:solidFill>
+                <a:latin typeface="+mj-lt"/>
+                <a:ea typeface="+mj-lt"/>
+                <a:cs typeface="+mj-lt"/>
+              </a:defRPr>
             </a:lvl6pPr>
-            <a:lvl7pPr marL="0" indent="0">
+            <a:lvl7pPr marL="0" indent="0" algn="l">
               <a:lnSpc>
                 <a:spcPct val="110000"/>
               </a:lnSpc>
@@ -1515,8 +1779,16 @@
                 <a:spcPts val="0"/>
               </a:spcAft>
               <a:buNone/>
+              <a:defRPr sz="3300" b="1">
+                <a:solidFill>
+                  <a:schemeClr val="tx1"/>
+                </a:solidFill>
+                <a:latin typeface="+mj-lt"/>
+                <a:ea typeface="+mj-lt"/>
+                <a:cs typeface="+mj-lt"/>
+              </a:defRPr>
             </a:lvl7pPr>
-            <a:lvl8pPr marL="0" indent="0">
+            <a:lvl8pPr marL="0" indent="0" algn="l">
               <a:lnSpc>
                 <a:spcPct val="110000"/>
               </a:lnSpc>
@@ -1527,8 +1799,16 @@
                 <a:spcPts val="0"/>
               </a:spcAft>
               <a:buNone/>
+              <a:defRPr sz="3300" b="1">
+                <a:solidFill>
+                  <a:schemeClr val="tx1"/>
+                </a:solidFill>
+                <a:latin typeface="+mj-lt"/>
+                <a:ea typeface="+mj-lt"/>
+                <a:cs typeface="+mj-lt"/>
+              </a:defRPr>
             </a:lvl8pPr>
-            <a:lvl9pPr marL="0" indent="0">
+            <a:lvl9pPr marL="0" indent="0" algn="l">
               <a:lnSpc>
                 <a:spcPct val="110000"/>
               </a:lnSpc>
@@ -1539,6 +1819,14 @@
                 <a:spcPts val="0"/>
               </a:spcAft>
               <a:buNone/>
+              <a:defRPr sz="3300" b="1">
+                <a:solidFill>
+                  <a:schemeClr val="tx1"/>
+                </a:solidFill>
+                <a:latin typeface="+mj-lt"/>
+                <a:ea typeface="+mj-lt"/>
+                <a:cs typeface="+mj-lt"/>
+              </a:defRPr>
             </a:lvl9pPr>
           </a:lstStyle>
           <a:p xmlns:a="http://schemas.openxmlformats.org/drawingml/2006/main"/>
@@ -1549,7 +1837,7 @@
           <p:cNvPr id="2" name="Body">
             <a:extLst xmlns:a="http://schemas.openxmlformats.org/drawingml/2006/main">
               <a:ext uri="{FF2B5EF4-FFF2-40B4-BE49-F238E27FC236}">
-                <a16:creationId xmlns:a16="http://schemas.microsoft.com/office/drawing/2014/main" id="{09626BCD-B798-4AFF-8169-A8EDD398B5E7}"/>
+                <a16:creationId xmlns:a16="http://schemas.microsoft.com/office/drawing/2014/main" id="{1965AB19-8293-451A-ADD1-38E73261E46B}"/>
               </a:ext>
             </a:extLst>
           </p:cNvPr>
@@ -1589,7 +1877,7 @@
                 <a:cs typeface="+mn-lt"/>
               </a:defRPr>
             </a:defPPr>
-            <a:lvl1pPr marL="228600" indent="-228600">
+            <a:lvl1pPr marL="228600" indent="-228600" algn="l">
               <a:lnSpc>
                 <a:spcPct val="110000"/>
               </a:lnSpc>
@@ -1600,8 +1888,16 @@
                 <a:spcPts val="1200"/>
               </a:spcAft>
               <a:buChar char="•"/>
+              <a:defRPr sz="2250" b="0">
+                <a:solidFill>
+                  <a:schemeClr val="tx1"/>
+                </a:solidFill>
+                <a:latin typeface="+mn-lt"/>
+                <a:ea typeface="+mn-lt"/>
+                <a:cs typeface="+mn-lt"/>
+              </a:defRPr>
             </a:lvl1pPr>
-            <a:lvl2pPr marL="533400" indent="-228600">
+            <a:lvl2pPr marL="533400" indent="-228600" algn="l">
               <a:lnSpc>
                 <a:spcPct val="110000"/>
               </a:lnSpc>
@@ -1612,8 +1908,16 @@
                 <a:spcPts val="1200"/>
               </a:spcAft>
               <a:buChar char="•"/>
+              <a:defRPr sz="2250" b="0">
+                <a:solidFill>
+                  <a:schemeClr val="tx1"/>
+                </a:solidFill>
+                <a:latin typeface="+mn-lt"/>
+                <a:ea typeface="+mn-lt"/>
+                <a:cs typeface="+mn-lt"/>
+              </a:defRPr>
             </a:lvl2pPr>
-            <a:lvl3pPr marL="838200" indent="-228600">
+            <a:lvl3pPr marL="838200" indent="-228600" algn="l">
               <a:lnSpc>
                 <a:spcPct val="110000"/>
               </a:lnSpc>
@@ -1624,8 +1928,16 @@
                 <a:spcPts val="1200"/>
               </a:spcAft>
               <a:buChar char="•"/>
+              <a:defRPr sz="2250" b="0">
+                <a:solidFill>
+                  <a:schemeClr val="tx1"/>
+                </a:solidFill>
+                <a:latin typeface="+mn-lt"/>
+                <a:ea typeface="+mn-lt"/>
+                <a:cs typeface="+mn-lt"/>
+              </a:defRPr>
             </a:lvl3pPr>
-            <a:lvl4pPr marL="1143000" indent="-228600">
+            <a:lvl4pPr marL="1143000" indent="-228600" algn="l">
               <a:lnSpc>
                 <a:spcPct val="110000"/>
               </a:lnSpc>
@@ -1636,8 +1948,16 @@
                 <a:spcPts val="1200"/>
               </a:spcAft>
               <a:buChar char="•"/>
+              <a:defRPr sz="2250" b="0">
+                <a:solidFill>
+                  <a:schemeClr val="tx1"/>
+                </a:solidFill>
+                <a:latin typeface="+mn-lt"/>
+                <a:ea typeface="+mn-lt"/>
+                <a:cs typeface="+mn-lt"/>
+              </a:defRPr>
             </a:lvl4pPr>
-            <a:lvl5pPr marL="1447800" indent="-228600">
+            <a:lvl5pPr marL="1447800" indent="-228600" algn="l">
               <a:lnSpc>
                 <a:spcPct val="110000"/>
               </a:lnSpc>
@@ -1648,8 +1968,16 @@
                 <a:spcPts val="1200"/>
               </a:spcAft>
               <a:buChar char="•"/>
+              <a:defRPr sz="2250" b="0">
+                <a:solidFill>
+                  <a:schemeClr val="tx1"/>
+                </a:solidFill>
+                <a:latin typeface="+mn-lt"/>
+                <a:ea typeface="+mn-lt"/>
+                <a:cs typeface="+mn-lt"/>
+              </a:defRPr>
             </a:lvl5pPr>
-            <a:lvl6pPr marL="1752600" indent="-228600">
+            <a:lvl6pPr marL="1752600" indent="-228600" algn="l">
               <a:lnSpc>
                 <a:spcPct val="110000"/>
               </a:lnSpc>
@@ -1660,8 +1988,16 @@
                 <a:spcPts val="1200"/>
               </a:spcAft>
               <a:buChar char="•"/>
+              <a:defRPr sz="2250" b="0">
+                <a:solidFill>
+                  <a:schemeClr val="tx1"/>
+                </a:solidFill>
+                <a:latin typeface="+mn-lt"/>
+                <a:ea typeface="+mn-lt"/>
+                <a:cs typeface="+mn-lt"/>
+              </a:defRPr>
             </a:lvl6pPr>
-            <a:lvl7pPr marL="2057400" indent="-228600">
+            <a:lvl7pPr marL="2057400" indent="-228600" algn="l">
               <a:lnSpc>
                 <a:spcPct val="110000"/>
               </a:lnSpc>
@@ -1672,8 +2008,16 @@
                 <a:spcPts val="1200"/>
               </a:spcAft>
               <a:buChar char="•"/>
+              <a:defRPr sz="2250" b="0">
+                <a:solidFill>
+                  <a:schemeClr val="tx1"/>
+                </a:solidFill>
+                <a:latin typeface="+mn-lt"/>
+                <a:ea typeface="+mn-lt"/>
+                <a:cs typeface="+mn-lt"/>
+              </a:defRPr>
             </a:lvl7pPr>
-            <a:lvl8pPr marL="2362200" indent="-228600">
+            <a:lvl8pPr marL="2362200" indent="-228600" algn="l">
               <a:lnSpc>
                 <a:spcPct val="110000"/>
               </a:lnSpc>
@@ -1684,8 +2028,16 @@
                 <a:spcPts val="1200"/>
               </a:spcAft>
               <a:buChar char="•"/>
+              <a:defRPr sz="2250" b="0">
+                <a:solidFill>
+                  <a:schemeClr val="tx1"/>
+                </a:solidFill>
+                <a:latin typeface="+mn-lt"/>
+                <a:ea typeface="+mn-lt"/>
+                <a:cs typeface="+mn-lt"/>
+              </a:defRPr>
             </a:lvl8pPr>
-            <a:lvl9pPr marL="2667000" indent="-228600">
+            <a:lvl9pPr marL="2667000" indent="-228600" algn="l">
               <a:lnSpc>
                 <a:spcPct val="110000"/>
               </a:lnSpc>
@@ -1696,6 +2048,14 @@
                 <a:spcPts val="1200"/>
               </a:spcAft>
               <a:buChar char="•"/>
+              <a:defRPr sz="2250" b="0">
+                <a:solidFill>
+                  <a:schemeClr val="tx1"/>
+                </a:solidFill>
+                <a:latin typeface="+mn-lt"/>
+                <a:ea typeface="+mn-lt"/>
+                <a:cs typeface="+mn-lt"/>
+              </a:defRPr>
             </a:lvl9pPr>
           </a:lstStyle>
           <a:p xmlns:a="http://schemas.openxmlformats.org/drawingml/2006/main"/>
@@ -1723,7 +2083,7 @@
           <p:cNvPr id="4" name="Title">
             <a:extLst xmlns:a="http://schemas.openxmlformats.org/drawingml/2006/main">
               <a:ext uri="{FF2B5EF4-FFF2-40B4-BE49-F238E27FC236}">
-                <a16:creationId xmlns:a16="http://schemas.microsoft.com/office/drawing/2014/main" id="{C073BB25-0653-4A1D-8FB1-CBC52C60B4BD}"/>
+                <a16:creationId xmlns:a16="http://schemas.microsoft.com/office/drawing/2014/main" id="{518B77AA-8594-4943-AAD1-4D82E2D981F5}"/>
               </a:ext>
             </a:extLst>
           </p:cNvPr>
@@ -1763,7 +2123,7 @@
                 <a:cs typeface="+mj-lt"/>
               </a:defRPr>
             </a:defPPr>
-            <a:lvl1pPr marL="0" indent="0">
+            <a:lvl1pPr marL="0" indent="0" algn="l">
               <a:lnSpc>
                 <a:spcPct val="110000"/>
               </a:lnSpc>
@@ -1774,8 +2134,16 @@
                 <a:spcPts val="0"/>
               </a:spcAft>
               <a:buNone/>
+              <a:defRPr sz="3300" b="1">
+                <a:solidFill>
+                  <a:schemeClr val="tx1"/>
+                </a:solidFill>
+                <a:latin typeface="+mj-lt"/>
+                <a:ea typeface="+mj-lt"/>
+                <a:cs typeface="+mj-lt"/>
+              </a:defRPr>
             </a:lvl1pPr>
-            <a:lvl2pPr marL="0" indent="0">
+            <a:lvl2pPr marL="0" indent="0" algn="l">
               <a:lnSpc>
                 <a:spcPct val="110000"/>
               </a:lnSpc>
@@ -1786,8 +2154,16 @@
                 <a:spcPts val="0"/>
               </a:spcAft>
               <a:buNone/>
+              <a:defRPr sz="3300" b="1">
+                <a:solidFill>
+                  <a:schemeClr val="tx1"/>
+                </a:solidFill>
+                <a:latin typeface="+mj-lt"/>
+                <a:ea typeface="+mj-lt"/>
+                <a:cs typeface="+mj-lt"/>
+              </a:defRPr>
             </a:lvl2pPr>
-            <a:lvl3pPr marL="0" indent="0">
+            <a:lvl3pPr marL="0" indent="0" algn="l">
               <a:lnSpc>
                 <a:spcPct val="110000"/>
               </a:lnSpc>
@@ -1798,8 +2174,16 @@
                 <a:spcPts val="0"/>
               </a:spcAft>
               <a:buNone/>
+              <a:defRPr sz="3300" b="1">
+                <a:solidFill>
+                  <a:schemeClr val="tx1"/>
+                </a:solidFill>
+                <a:latin typeface="+mj-lt"/>
+                <a:ea typeface="+mj-lt"/>
+                <a:cs typeface="+mj-lt"/>
+              </a:defRPr>
             </a:lvl3pPr>
-            <a:lvl4pPr marL="0" indent="0">
+            <a:lvl4pPr marL="0" indent="0" algn="l">
               <a:lnSpc>
                 <a:spcPct val="110000"/>
               </a:lnSpc>
@@ -1810,8 +2194,16 @@
                 <a:spcPts val="0"/>
               </a:spcAft>
               <a:buNone/>
+              <a:defRPr sz="3300" b="1">
+                <a:solidFill>
+                  <a:schemeClr val="tx1"/>
+                </a:solidFill>
+                <a:latin typeface="+mj-lt"/>
+                <a:ea typeface="+mj-lt"/>
+                <a:cs typeface="+mj-lt"/>
+              </a:defRPr>
             </a:lvl4pPr>
-            <a:lvl5pPr marL="0" indent="0">
+            <a:lvl5pPr marL="0" indent="0" algn="l">
               <a:lnSpc>
                 <a:spcPct val="110000"/>
               </a:lnSpc>
@@ -1822,8 +2214,16 @@
                 <a:spcPts val="0"/>
               </a:spcAft>
               <a:buNone/>
+              <a:defRPr sz="3300" b="1">
+                <a:solidFill>
+                  <a:schemeClr val="tx1"/>
+                </a:solidFill>
+                <a:latin typeface="+mj-lt"/>
+                <a:ea typeface="+mj-lt"/>
+                <a:cs typeface="+mj-lt"/>
+              </a:defRPr>
             </a:lvl5pPr>
-            <a:lvl6pPr marL="0" indent="0">
+            <a:lvl6pPr marL="0" indent="0" algn="l">
               <a:lnSpc>
                 <a:spcPct val="110000"/>
               </a:lnSpc>
@@ -1834,8 +2234,16 @@
                 <a:spcPts val="0"/>
               </a:spcAft>
               <a:buNone/>
+              <a:defRPr sz="3300" b="1">
+                <a:solidFill>
+                  <a:schemeClr val="tx1"/>
+                </a:solidFill>
+                <a:latin typeface="+mj-lt"/>
+                <a:ea typeface="+mj-lt"/>
+                <a:cs typeface="+mj-lt"/>
+              </a:defRPr>
             </a:lvl6pPr>
-            <a:lvl7pPr marL="0" indent="0">
+            <a:lvl7pPr marL="0" indent="0" algn="l">
               <a:lnSpc>
                 <a:spcPct val="110000"/>
               </a:lnSpc>
@@ -1846,8 +2254,16 @@
                 <a:spcPts val="0"/>
               </a:spcAft>
               <a:buNone/>
+              <a:defRPr sz="3300" b="1">
+                <a:solidFill>
+                  <a:schemeClr val="tx1"/>
+                </a:solidFill>
+                <a:latin typeface="+mj-lt"/>
+                <a:ea typeface="+mj-lt"/>
+                <a:cs typeface="+mj-lt"/>
+              </a:defRPr>
             </a:lvl7pPr>
-            <a:lvl8pPr marL="0" indent="0">
+            <a:lvl8pPr marL="0" indent="0" algn="l">
               <a:lnSpc>
                 <a:spcPct val="110000"/>
               </a:lnSpc>
@@ -1858,8 +2274,16 @@
                 <a:spcPts val="0"/>
               </a:spcAft>
               <a:buNone/>
+              <a:defRPr sz="3300" b="1">
+                <a:solidFill>
+                  <a:schemeClr val="tx1"/>
+                </a:solidFill>
+                <a:latin typeface="+mj-lt"/>
+                <a:ea typeface="+mj-lt"/>
+                <a:cs typeface="+mj-lt"/>
+              </a:defRPr>
             </a:lvl8pPr>
-            <a:lvl9pPr marL="0" indent="0">
+            <a:lvl9pPr marL="0" indent="0" algn="l">
               <a:lnSpc>
                 <a:spcPct val="110000"/>
               </a:lnSpc>
@@ -1870,6 +2294,14 @@
                 <a:spcPts val="0"/>
               </a:spcAft>
               <a:buNone/>
+              <a:defRPr sz="3300" b="1">
+                <a:solidFill>
+                  <a:schemeClr val="tx1"/>
+                </a:solidFill>
+                <a:latin typeface="+mj-lt"/>
+                <a:ea typeface="+mj-lt"/>
+                <a:cs typeface="+mj-lt"/>
+              </a:defRPr>
             </a:lvl9pPr>
           </a:lstStyle>
           <a:p xmlns:a="http://schemas.openxmlformats.org/drawingml/2006/main"/>
@@ -1880,7 +2312,7 @@
           <p:cNvPr id="2" name="Left column">
             <a:extLst xmlns:a="http://schemas.openxmlformats.org/drawingml/2006/main">
               <a:ext uri="{FF2B5EF4-FFF2-40B4-BE49-F238E27FC236}">
-                <a16:creationId xmlns:a16="http://schemas.microsoft.com/office/drawing/2014/main" id="{431FDD08-16F7-4CD3-9E2B-F9D914979A65}"/>
+                <a16:creationId xmlns:a16="http://schemas.microsoft.com/office/drawing/2014/main" id="{02F9F40B-A29A-485F-A4E6-19F9A2AE4C86}"/>
               </a:ext>
             </a:extLst>
           </p:cNvPr>
@@ -1920,7 +2352,7 @@
                 <a:cs typeface="+mn-lt"/>
               </a:defRPr>
             </a:defPPr>
-            <a:lvl1pPr marL="228600" indent="-228600">
+            <a:lvl1pPr marL="228600" indent="-228600" algn="l">
               <a:lnSpc>
                 <a:spcPct val="110000"/>
               </a:lnSpc>
@@ -1931,8 +2363,16 @@
                 <a:spcPts val="1200"/>
               </a:spcAft>
               <a:buChar char="•"/>
+              <a:defRPr sz="2100" b="0">
+                <a:solidFill>
+                  <a:schemeClr val="tx1"/>
+                </a:solidFill>
+                <a:latin typeface="+mn-lt"/>
+                <a:ea typeface="+mn-lt"/>
+                <a:cs typeface="+mn-lt"/>
+              </a:defRPr>
             </a:lvl1pPr>
-            <a:lvl2pPr marL="533400" indent="-228600">
+            <a:lvl2pPr marL="533400" indent="-228600" algn="l">
               <a:lnSpc>
                 <a:spcPct val="110000"/>
               </a:lnSpc>
@@ -1943,8 +2383,16 @@
                 <a:spcPts val="1200"/>
               </a:spcAft>
               <a:buChar char="•"/>
+              <a:defRPr sz="2100" b="0">
+                <a:solidFill>
+                  <a:schemeClr val="tx1"/>
+                </a:solidFill>
+                <a:latin typeface="+mn-lt"/>
+                <a:ea typeface="+mn-lt"/>
+                <a:cs typeface="+mn-lt"/>
+              </a:defRPr>
             </a:lvl2pPr>
-            <a:lvl3pPr marL="838200" indent="-228600">
+            <a:lvl3pPr marL="838200" indent="-228600" algn="l">
               <a:lnSpc>
                 <a:spcPct val="110000"/>
               </a:lnSpc>
@@ -1955,8 +2403,16 @@
                 <a:spcPts val="1200"/>
               </a:spcAft>
               <a:buChar char="•"/>
+              <a:defRPr sz="2100" b="0">
+                <a:solidFill>
+                  <a:schemeClr val="tx1"/>
+                </a:solidFill>
+                <a:latin typeface="+mn-lt"/>
+                <a:ea typeface="+mn-lt"/>
+                <a:cs typeface="+mn-lt"/>
+              </a:defRPr>
             </a:lvl3pPr>
-            <a:lvl4pPr marL="1143000" indent="-228600">
+            <a:lvl4pPr marL="1143000" indent="-228600" algn="l">
               <a:lnSpc>
                 <a:spcPct val="110000"/>
               </a:lnSpc>
@@ -1967,8 +2423,16 @@
                 <a:spcPts val="1200"/>
               </a:spcAft>
               <a:buChar char="•"/>
+              <a:defRPr sz="2100" b="0">
+                <a:solidFill>
+                  <a:schemeClr val="tx1"/>
+                </a:solidFill>
+                <a:latin typeface="+mn-lt"/>
+                <a:ea typeface="+mn-lt"/>
+                <a:cs typeface="+mn-lt"/>
+              </a:defRPr>
             </a:lvl4pPr>
-            <a:lvl5pPr marL="1447800" indent="-228600">
+            <a:lvl5pPr marL="1447800" indent="-228600" algn="l">
               <a:lnSpc>
                 <a:spcPct val="110000"/>
               </a:lnSpc>
@@ -1979,8 +2443,16 @@
                 <a:spcPts val="1200"/>
               </a:spcAft>
               <a:buChar char="•"/>
+              <a:defRPr sz="2100" b="0">
+                <a:solidFill>
+                  <a:schemeClr val="tx1"/>
+                </a:solidFill>
+                <a:latin typeface="+mn-lt"/>
+                <a:ea typeface="+mn-lt"/>
+                <a:cs typeface="+mn-lt"/>
+              </a:defRPr>
             </a:lvl5pPr>
-            <a:lvl6pPr marL="1752600" indent="-228600">
+            <a:lvl6pPr marL="1752600" indent="-228600" algn="l">
               <a:lnSpc>
                 <a:spcPct val="110000"/>
               </a:lnSpc>
@@ -1991,8 +2463,16 @@
                 <a:spcPts val="1200"/>
               </a:spcAft>
               <a:buChar char="•"/>
+              <a:defRPr sz="2100" b="0">
+                <a:solidFill>
+                  <a:schemeClr val="tx1"/>
+                </a:solidFill>
+                <a:latin typeface="+mn-lt"/>
+                <a:ea typeface="+mn-lt"/>
+                <a:cs typeface="+mn-lt"/>
+              </a:defRPr>
             </a:lvl6pPr>
-            <a:lvl7pPr marL="2057400" indent="-228600">
+            <a:lvl7pPr marL="2057400" indent="-228600" algn="l">
               <a:lnSpc>
                 <a:spcPct val="110000"/>
               </a:lnSpc>
@@ -2003,8 +2483,16 @@
                 <a:spcPts val="1200"/>
               </a:spcAft>
               <a:buChar char="•"/>
+              <a:defRPr sz="2100" b="0">
+                <a:solidFill>
+                  <a:schemeClr val="tx1"/>
+                </a:solidFill>
+                <a:latin typeface="+mn-lt"/>
+                <a:ea typeface="+mn-lt"/>
+                <a:cs typeface="+mn-lt"/>
+              </a:defRPr>
             </a:lvl7pPr>
-            <a:lvl8pPr marL="2362200" indent="-228600">
+            <a:lvl8pPr marL="2362200" indent="-228600" algn="l">
               <a:lnSpc>
                 <a:spcPct val="110000"/>
               </a:lnSpc>
@@ -2015,8 +2503,16 @@
                 <a:spcPts val="1200"/>
               </a:spcAft>
               <a:buChar char="•"/>
+              <a:defRPr sz="2100" b="0">
+                <a:solidFill>
+                  <a:schemeClr val="tx1"/>
+                </a:solidFill>
+                <a:latin typeface="+mn-lt"/>
+                <a:ea typeface="+mn-lt"/>
+                <a:cs typeface="+mn-lt"/>
+              </a:defRPr>
             </a:lvl8pPr>
-            <a:lvl9pPr marL="2667000" indent="-228600">
+            <a:lvl9pPr marL="2667000" indent="-228600" algn="l">
               <a:lnSpc>
                 <a:spcPct val="110000"/>
               </a:lnSpc>
@@ -2027,6 +2523,14 @@
                 <a:spcPts val="1200"/>
               </a:spcAft>
               <a:buChar char="•"/>
+              <a:defRPr sz="2100" b="0">
+                <a:solidFill>
+                  <a:schemeClr val="tx1"/>
+                </a:solidFill>
+                <a:latin typeface="+mn-lt"/>
+                <a:ea typeface="+mn-lt"/>
+                <a:cs typeface="+mn-lt"/>
+              </a:defRPr>
             </a:lvl9pPr>
           </a:lstStyle>
           <a:p xmlns:a="http://schemas.openxmlformats.org/drawingml/2006/main"/>
@@ -2037,7 +2541,7 @@
           <p:cNvPr id="3" name="Right column">
             <a:extLst xmlns:a="http://schemas.openxmlformats.org/drawingml/2006/main">
               <a:ext uri="{FF2B5EF4-FFF2-40B4-BE49-F238E27FC236}">
-                <a16:creationId xmlns:a16="http://schemas.microsoft.com/office/drawing/2014/main" id="{707C37A6-B2CE-4F27-B51B-CC8C3C482EB9}"/>
+                <a16:creationId xmlns:a16="http://schemas.microsoft.com/office/drawing/2014/main" id="{7D958BA7-715B-4E82-8866-458F52A4A888}"/>
               </a:ext>
             </a:extLst>
           </p:cNvPr>
@@ -2077,7 +2581,7 @@
                 <a:cs typeface="+mn-lt"/>
               </a:defRPr>
             </a:defPPr>
-            <a:lvl1pPr marL="228600" indent="-228600">
+            <a:lvl1pPr marL="228600" indent="-228600" algn="l">
               <a:lnSpc>
                 <a:spcPct val="110000"/>
               </a:lnSpc>
@@ -2088,8 +2592,16 @@
                 <a:spcPts val="1200"/>
               </a:spcAft>
               <a:buChar char="•"/>
+              <a:defRPr sz="2100" b="0">
+                <a:solidFill>
+                  <a:schemeClr val="tx1"/>
+                </a:solidFill>
+                <a:latin typeface="+mn-lt"/>
+                <a:ea typeface="+mn-lt"/>
+                <a:cs typeface="+mn-lt"/>
+              </a:defRPr>
             </a:lvl1pPr>
-            <a:lvl2pPr marL="533400" indent="-228600">
+            <a:lvl2pPr marL="533400" indent="-228600" algn="l">
               <a:lnSpc>
                 <a:spcPct val="110000"/>
               </a:lnSpc>
@@ -2100,8 +2612,16 @@
                 <a:spcPts val="1200"/>
               </a:spcAft>
               <a:buChar char="•"/>
+              <a:defRPr sz="2100" b="0">
+                <a:solidFill>
+                  <a:schemeClr val="tx1"/>
+                </a:solidFill>
+                <a:latin typeface="+mn-lt"/>
+                <a:ea typeface="+mn-lt"/>
+                <a:cs typeface="+mn-lt"/>
+              </a:defRPr>
             </a:lvl2pPr>
-            <a:lvl3pPr marL="838200" indent="-228600">
+            <a:lvl3pPr marL="838200" indent="-228600" algn="l">
               <a:lnSpc>
                 <a:spcPct val="110000"/>
               </a:lnSpc>
@@ -2112,8 +2632,16 @@
                 <a:spcPts val="1200"/>
               </a:spcAft>
               <a:buChar char="•"/>
+              <a:defRPr sz="2100" b="0">
+                <a:solidFill>
+                  <a:schemeClr val="tx1"/>
+                </a:solidFill>
+                <a:latin typeface="+mn-lt"/>
+                <a:ea typeface="+mn-lt"/>
+                <a:cs typeface="+mn-lt"/>
+              </a:defRPr>
             </a:lvl3pPr>
-            <a:lvl4pPr marL="1143000" indent="-228600">
+            <a:lvl4pPr marL="1143000" indent="-228600" algn="l">
               <a:lnSpc>
                 <a:spcPct val="110000"/>
               </a:lnSpc>
@@ -2124,8 +2652,16 @@
                 <a:spcPts val="1200"/>
               </a:spcAft>
               <a:buChar char="•"/>
+              <a:defRPr sz="2100" b="0">
+                <a:solidFill>
+                  <a:schemeClr val="tx1"/>
+                </a:solidFill>
+                <a:latin typeface="+mn-lt"/>
+                <a:ea typeface="+mn-lt"/>
+                <a:cs typeface="+mn-lt"/>
+              </a:defRPr>
             </a:lvl4pPr>
-            <a:lvl5pPr marL="1447800" indent="-228600">
+            <a:lvl5pPr marL="1447800" indent="-228600" algn="l">
               <a:lnSpc>
                 <a:spcPct val="110000"/>
               </a:lnSpc>
@@ -2136,8 +2672,16 @@
                 <a:spcPts val="1200"/>
               </a:spcAft>
               <a:buChar char="•"/>
+              <a:defRPr sz="2100" b="0">
+                <a:solidFill>
+                  <a:schemeClr val="tx1"/>
+                </a:solidFill>
+                <a:latin typeface="+mn-lt"/>
+                <a:ea typeface="+mn-lt"/>
+                <a:cs typeface="+mn-lt"/>
+              </a:defRPr>
             </a:lvl5pPr>
-            <a:lvl6pPr marL="1752600" indent="-228600">
+            <a:lvl6pPr marL="1752600" indent="-228600" algn="l">
               <a:lnSpc>
                 <a:spcPct val="110000"/>
               </a:lnSpc>
@@ -2148,8 +2692,16 @@
                 <a:spcPts val="1200"/>
               </a:spcAft>
               <a:buChar char="•"/>
+              <a:defRPr sz="2100" b="0">
+                <a:solidFill>
+                  <a:schemeClr val="tx1"/>
+                </a:solidFill>
+                <a:latin typeface="+mn-lt"/>
+                <a:ea typeface="+mn-lt"/>
+                <a:cs typeface="+mn-lt"/>
+              </a:defRPr>
             </a:lvl6pPr>
-            <a:lvl7pPr marL="2057400" indent="-228600">
+            <a:lvl7pPr marL="2057400" indent="-228600" algn="l">
               <a:lnSpc>
                 <a:spcPct val="110000"/>
               </a:lnSpc>
@@ -2160,8 +2712,16 @@
                 <a:spcPts val="1200"/>
               </a:spcAft>
               <a:buChar char="•"/>
+              <a:defRPr sz="2100" b="0">
+                <a:solidFill>
+                  <a:schemeClr val="tx1"/>
+                </a:solidFill>
+                <a:latin typeface="+mn-lt"/>
+                <a:ea typeface="+mn-lt"/>
+                <a:cs typeface="+mn-lt"/>
+              </a:defRPr>
             </a:lvl7pPr>
-            <a:lvl8pPr marL="2362200" indent="-228600">
+            <a:lvl8pPr marL="2362200" indent="-228600" algn="l">
               <a:lnSpc>
                 <a:spcPct val="110000"/>
               </a:lnSpc>
@@ -2172,8 +2732,16 @@
                 <a:spcPts val="1200"/>
               </a:spcAft>
               <a:buChar char="•"/>
+              <a:defRPr sz="2100" b="0">
+                <a:solidFill>
+                  <a:schemeClr val="tx1"/>
+                </a:solidFill>
+                <a:latin typeface="+mn-lt"/>
+                <a:ea typeface="+mn-lt"/>
+                <a:cs typeface="+mn-lt"/>
+              </a:defRPr>
             </a:lvl8pPr>
-            <a:lvl9pPr marL="2667000" indent="-228600">
+            <a:lvl9pPr marL="2667000" indent="-228600" algn="l">
               <a:lnSpc>
                 <a:spcPct val="110000"/>
               </a:lnSpc>
@@ -2184,6 +2752,14 @@
                 <a:spcPts val="1200"/>
               </a:spcAft>
               <a:buChar char="•"/>
+              <a:defRPr sz="2100" b="0">
+                <a:solidFill>
+                  <a:schemeClr val="tx1"/>
+                </a:solidFill>
+                <a:latin typeface="+mn-lt"/>
+                <a:ea typeface="+mn-lt"/>
+                <a:cs typeface="+mn-lt"/>
+              </a:defRPr>
             </a:lvl9pPr>
           </a:lstStyle>
           <a:p xmlns:a="http://schemas.openxmlformats.org/drawingml/2006/main"/>
@@ -2211,7 +2787,7 @@
           <p:cNvPr id="3" name="Title">
             <a:extLst xmlns:a="http://schemas.openxmlformats.org/drawingml/2006/main">
               <a:ext uri="{FF2B5EF4-FFF2-40B4-BE49-F238E27FC236}">
-                <a16:creationId xmlns:a16="http://schemas.microsoft.com/office/drawing/2014/main" id="{E387B255-3B74-45F0-9A4A-79E07BE3EC9F}"/>
+                <a16:creationId xmlns:a16="http://schemas.microsoft.com/office/drawing/2014/main" id="{AD888E89-F76A-4590-BC63-687DDB19A006}"/>
               </a:ext>
             </a:extLst>
           </p:cNvPr>
@@ -2251,7 +2827,7 @@
                 <a:cs typeface="+mj-lt"/>
               </a:defRPr>
             </a:defPPr>
-            <a:lvl1pPr marL="0" indent="0">
+            <a:lvl1pPr marL="0" indent="0" algn="l">
               <a:lnSpc>
                 <a:spcPct val="110000"/>
               </a:lnSpc>
@@ -2262,8 +2838,16 @@
                 <a:spcPts val="0"/>
               </a:spcAft>
               <a:buNone/>
+              <a:defRPr sz="3300" b="1">
+                <a:solidFill>
+                  <a:schemeClr val="tx1"/>
+                </a:solidFill>
+                <a:latin typeface="+mj-lt"/>
+                <a:ea typeface="+mj-lt"/>
+                <a:cs typeface="+mj-lt"/>
+              </a:defRPr>
             </a:lvl1pPr>
-            <a:lvl2pPr marL="0" indent="0">
+            <a:lvl2pPr marL="0" indent="0" algn="l">
               <a:lnSpc>
                 <a:spcPct val="110000"/>
               </a:lnSpc>
@@ -2274,8 +2858,16 @@
                 <a:spcPts val="0"/>
               </a:spcAft>
               <a:buNone/>
+              <a:defRPr sz="3300" b="1">
+                <a:solidFill>
+                  <a:schemeClr val="tx1"/>
+                </a:solidFill>
+                <a:latin typeface="+mj-lt"/>
+                <a:ea typeface="+mj-lt"/>
+                <a:cs typeface="+mj-lt"/>
+              </a:defRPr>
             </a:lvl2pPr>
-            <a:lvl3pPr marL="0" indent="0">
+            <a:lvl3pPr marL="0" indent="0" algn="l">
               <a:lnSpc>
                 <a:spcPct val="110000"/>
               </a:lnSpc>
@@ -2286,8 +2878,16 @@
                 <a:spcPts val="0"/>
               </a:spcAft>
               <a:buNone/>
+              <a:defRPr sz="3300" b="1">
+                <a:solidFill>
+                  <a:schemeClr val="tx1"/>
+                </a:solidFill>
+                <a:latin typeface="+mj-lt"/>
+                <a:ea typeface="+mj-lt"/>
+                <a:cs typeface="+mj-lt"/>
+              </a:defRPr>
             </a:lvl3pPr>
-            <a:lvl4pPr marL="0" indent="0">
+            <a:lvl4pPr marL="0" indent="0" algn="l">
               <a:lnSpc>
                 <a:spcPct val="110000"/>
               </a:lnSpc>
@@ -2298,8 +2898,16 @@
                 <a:spcPts val="0"/>
               </a:spcAft>
               <a:buNone/>
+              <a:defRPr sz="3300" b="1">
+                <a:solidFill>
+                  <a:schemeClr val="tx1"/>
+                </a:solidFill>
+                <a:latin typeface="+mj-lt"/>
+                <a:ea typeface="+mj-lt"/>
+                <a:cs typeface="+mj-lt"/>
+              </a:defRPr>
             </a:lvl4pPr>
-            <a:lvl5pPr marL="0" indent="0">
+            <a:lvl5pPr marL="0" indent="0" algn="l">
               <a:lnSpc>
                 <a:spcPct val="110000"/>
               </a:lnSpc>
@@ -2310,8 +2918,16 @@
                 <a:spcPts val="0"/>
               </a:spcAft>
               <a:buNone/>
+              <a:defRPr sz="3300" b="1">
+                <a:solidFill>
+                  <a:schemeClr val="tx1"/>
+                </a:solidFill>
+                <a:latin typeface="+mj-lt"/>
+                <a:ea typeface="+mj-lt"/>
+                <a:cs typeface="+mj-lt"/>
+              </a:defRPr>
             </a:lvl5pPr>
-            <a:lvl6pPr marL="0" indent="0">
+            <a:lvl6pPr marL="0" indent="0" algn="l">
               <a:lnSpc>
                 <a:spcPct val="110000"/>
               </a:lnSpc>
@@ -2322,8 +2938,16 @@
                 <a:spcPts val="0"/>
               </a:spcAft>
               <a:buNone/>
+              <a:defRPr sz="3300" b="1">
+                <a:solidFill>
+                  <a:schemeClr val="tx1"/>
+                </a:solidFill>
+                <a:latin typeface="+mj-lt"/>
+                <a:ea typeface="+mj-lt"/>
+                <a:cs typeface="+mj-lt"/>
+              </a:defRPr>
             </a:lvl6pPr>
-            <a:lvl7pPr marL="0" indent="0">
+            <a:lvl7pPr marL="0" indent="0" algn="l">
               <a:lnSpc>
                 <a:spcPct val="110000"/>
               </a:lnSpc>
@@ -2334,8 +2958,16 @@
                 <a:spcPts val="0"/>
               </a:spcAft>
               <a:buNone/>
+              <a:defRPr sz="3300" b="1">
+                <a:solidFill>
+                  <a:schemeClr val="tx1"/>
+                </a:solidFill>
+                <a:latin typeface="+mj-lt"/>
+                <a:ea typeface="+mj-lt"/>
+                <a:cs typeface="+mj-lt"/>
+              </a:defRPr>
             </a:lvl7pPr>
-            <a:lvl8pPr marL="0" indent="0">
+            <a:lvl8pPr marL="0" indent="0" algn="l">
               <a:lnSpc>
                 <a:spcPct val="110000"/>
               </a:lnSpc>
@@ -2346,8 +2978,16 @@
                 <a:spcPts val="0"/>
               </a:spcAft>
               <a:buNone/>
+              <a:defRPr sz="3300" b="1">
+                <a:solidFill>
+                  <a:schemeClr val="tx1"/>
+                </a:solidFill>
+                <a:latin typeface="+mj-lt"/>
+                <a:ea typeface="+mj-lt"/>
+                <a:cs typeface="+mj-lt"/>
+              </a:defRPr>
             </a:lvl8pPr>
-            <a:lvl9pPr marL="0" indent="0">
+            <a:lvl9pPr marL="0" indent="0" algn="l">
               <a:lnSpc>
                 <a:spcPct val="110000"/>
               </a:lnSpc>
@@ -2358,6 +2998,14 @@
                 <a:spcPts val="0"/>
               </a:spcAft>
               <a:buNone/>
+              <a:defRPr sz="3300" b="1">
+                <a:solidFill>
+                  <a:schemeClr val="tx1"/>
+                </a:solidFill>
+                <a:latin typeface="+mj-lt"/>
+                <a:ea typeface="+mj-lt"/>
+                <a:cs typeface="+mj-lt"/>
+              </a:defRPr>
             </a:lvl9pPr>
           </a:lstStyle>
           <a:p xmlns:a="http://schemas.openxmlformats.org/drawingml/2006/main"/>
@@ -2368,7 +3016,7 @@
           <p:cNvPr id="2" name="Left column">
             <a:extLst xmlns:a="http://schemas.openxmlformats.org/drawingml/2006/main">
               <a:ext uri="{FF2B5EF4-FFF2-40B4-BE49-F238E27FC236}">
-                <a16:creationId xmlns:a16="http://schemas.microsoft.com/office/drawing/2014/main" id="{C506ECFB-35AF-4A82-9D8C-C53FDBCB32A9}"/>
+                <a16:creationId xmlns:a16="http://schemas.microsoft.com/office/drawing/2014/main" id="{17CD31A7-6BC9-461E-8CD1-4B375989DCA8}"/>
               </a:ext>
             </a:extLst>
           </p:cNvPr>
@@ -2408,7 +3056,7 @@
                 <a:cs typeface="+mn-lt"/>
               </a:defRPr>
             </a:defPPr>
-            <a:lvl1pPr marL="228600" indent="-228600">
+            <a:lvl1pPr marL="228600" indent="-228600" algn="l">
               <a:lnSpc>
                 <a:spcPct val="110000"/>
               </a:lnSpc>
@@ -2419,8 +3067,16 @@
                 <a:spcPts val="1200"/>
               </a:spcAft>
               <a:buChar char="•"/>
+              <a:defRPr sz="2250" b="0">
+                <a:solidFill>
+                  <a:schemeClr val="tx1"/>
+                </a:solidFill>
+                <a:latin typeface="+mn-lt"/>
+                <a:ea typeface="+mn-lt"/>
+                <a:cs typeface="+mn-lt"/>
+              </a:defRPr>
             </a:lvl1pPr>
-            <a:lvl2pPr marL="533400" indent="-228600">
+            <a:lvl2pPr marL="533400" indent="-228600" algn="l">
               <a:lnSpc>
                 <a:spcPct val="110000"/>
               </a:lnSpc>
@@ -2431,8 +3087,16 @@
                 <a:spcPts val="1200"/>
               </a:spcAft>
               <a:buChar char="•"/>
+              <a:defRPr sz="2250" b="0">
+                <a:solidFill>
+                  <a:schemeClr val="tx1"/>
+                </a:solidFill>
+                <a:latin typeface="+mn-lt"/>
+                <a:ea typeface="+mn-lt"/>
+                <a:cs typeface="+mn-lt"/>
+              </a:defRPr>
             </a:lvl2pPr>
-            <a:lvl3pPr marL="838200" indent="-228600">
+            <a:lvl3pPr marL="838200" indent="-228600" algn="l">
               <a:lnSpc>
                 <a:spcPct val="110000"/>
               </a:lnSpc>
@@ -2443,8 +3107,16 @@
                 <a:spcPts val="1200"/>
               </a:spcAft>
               <a:buChar char="•"/>
+              <a:defRPr sz="2250" b="0">
+                <a:solidFill>
+                  <a:schemeClr val="tx1"/>
+                </a:solidFill>
+                <a:latin typeface="+mn-lt"/>
+                <a:ea typeface="+mn-lt"/>
+                <a:cs typeface="+mn-lt"/>
+              </a:defRPr>
             </a:lvl3pPr>
-            <a:lvl4pPr marL="1143000" indent="-228600">
+            <a:lvl4pPr marL="1143000" indent="-228600" algn="l">
               <a:lnSpc>
                 <a:spcPct val="110000"/>
               </a:lnSpc>
@@ -2455,8 +3127,16 @@
                 <a:spcPts val="1200"/>
               </a:spcAft>
               <a:buChar char="•"/>
+              <a:defRPr sz="2250" b="0">
+                <a:solidFill>
+                  <a:schemeClr val="tx1"/>
+                </a:solidFill>
+                <a:latin typeface="+mn-lt"/>
+                <a:ea typeface="+mn-lt"/>
+                <a:cs typeface="+mn-lt"/>
+              </a:defRPr>
             </a:lvl4pPr>
-            <a:lvl5pPr marL="1447800" indent="-228600">
+            <a:lvl5pPr marL="1447800" indent="-228600" algn="l">
               <a:lnSpc>
                 <a:spcPct val="110000"/>
               </a:lnSpc>
@@ -2467,8 +3147,16 @@
                 <a:spcPts val="1200"/>
               </a:spcAft>
               <a:buChar char="•"/>
+              <a:defRPr sz="2250" b="0">
+                <a:solidFill>
+                  <a:schemeClr val="tx1"/>
+                </a:solidFill>
+                <a:latin typeface="+mn-lt"/>
+                <a:ea typeface="+mn-lt"/>
+                <a:cs typeface="+mn-lt"/>
+              </a:defRPr>
             </a:lvl5pPr>
-            <a:lvl6pPr marL="1752600" indent="-228600">
+            <a:lvl6pPr marL="1752600" indent="-228600" algn="l">
               <a:lnSpc>
                 <a:spcPct val="110000"/>
               </a:lnSpc>
@@ -2479,8 +3167,16 @@
                 <a:spcPts val="1200"/>
               </a:spcAft>
               <a:buChar char="•"/>
+              <a:defRPr sz="2250" b="0">
+                <a:solidFill>
+                  <a:schemeClr val="tx1"/>
+                </a:solidFill>
+                <a:latin typeface="+mn-lt"/>
+                <a:ea typeface="+mn-lt"/>
+                <a:cs typeface="+mn-lt"/>
+              </a:defRPr>
             </a:lvl6pPr>
-            <a:lvl7pPr marL="2057400" indent="-228600">
+            <a:lvl7pPr marL="2057400" indent="-228600" algn="l">
               <a:lnSpc>
                 <a:spcPct val="110000"/>
               </a:lnSpc>
@@ -2491,8 +3187,16 @@
                 <a:spcPts val="1200"/>
               </a:spcAft>
               <a:buChar char="•"/>
+              <a:defRPr sz="2250" b="0">
+                <a:solidFill>
+                  <a:schemeClr val="tx1"/>
+                </a:solidFill>
+                <a:latin typeface="+mn-lt"/>
+                <a:ea typeface="+mn-lt"/>
+                <a:cs typeface="+mn-lt"/>
+              </a:defRPr>
             </a:lvl7pPr>
-            <a:lvl8pPr marL="2362200" indent="-228600">
+            <a:lvl8pPr marL="2362200" indent="-228600" algn="l">
               <a:lnSpc>
                 <a:spcPct val="110000"/>
               </a:lnSpc>
@@ -2503,8 +3207,16 @@
                 <a:spcPts val="1200"/>
               </a:spcAft>
               <a:buChar char="•"/>
+              <a:defRPr sz="2250" b="0">
+                <a:solidFill>
+                  <a:schemeClr val="tx1"/>
+                </a:solidFill>
+                <a:latin typeface="+mn-lt"/>
+                <a:ea typeface="+mn-lt"/>
+                <a:cs typeface="+mn-lt"/>
+              </a:defRPr>
             </a:lvl8pPr>
-            <a:lvl9pPr marL="2667000" indent="-228600">
+            <a:lvl9pPr marL="2667000" indent="-228600" algn="l">
               <a:lnSpc>
                 <a:spcPct val="110000"/>
               </a:lnSpc>
@@ -2515,6 +3227,14 @@
                 <a:spcPts val="1200"/>
               </a:spcAft>
               <a:buChar char="•"/>
+              <a:defRPr sz="2250" b="0">
+                <a:solidFill>
+                  <a:schemeClr val="tx1"/>
+                </a:solidFill>
+                <a:latin typeface="+mn-lt"/>
+                <a:ea typeface="+mn-lt"/>
+                <a:cs typeface="+mn-lt"/>
+              </a:defRPr>
             </a:lvl9pPr>
           </a:lstStyle>
           <a:p xmlns:a="http://schemas.openxmlformats.org/drawingml/2006/main"/>
@@ -2563,12 +3283,12 @@
   </p:cSld>
   <p:clrMap bg1="lt1" tx1="dk1" bg2="lt2" tx2="dk2" accent1="accent1" accent2="accent2" accent3="accent3" accent4="accent4" accent5="accent5" accent6="accent6" hlink="hlink" folHlink="folHlink"/>
   <p:sldLayoutIdLst>
-    <p:sldLayoutId xmlns:r="http://schemas.openxmlformats.org/officeDocument/2006/relationships" id="2147483649" r:id="R892d7bcf54004835"/>
-    <p:sldLayoutId xmlns:r="http://schemas.openxmlformats.org/officeDocument/2006/relationships" id="2147483650" r:id="Ra698d2c5f9aa4dd7"/>
-    <p:sldLayoutId xmlns:r="http://schemas.openxmlformats.org/officeDocument/2006/relationships" id="2147483651" r:id="Rc907ad9c648042da"/>
-    <p:sldLayoutId xmlns:r="http://schemas.openxmlformats.org/officeDocument/2006/relationships" id="2147483652" r:id="Raeb9d7c699924275"/>
-    <p:sldLayoutId xmlns:r="http://schemas.openxmlformats.org/officeDocument/2006/relationships" id="2147483653" r:id="Ra4896faca168459b"/>
-    <p:sldLayoutId xmlns:r="http://schemas.openxmlformats.org/officeDocument/2006/relationships" id="2147483654" r:id="Re8a80b20bddb44e7"/>
+    <p:sldLayoutId xmlns:r="http://schemas.openxmlformats.org/officeDocument/2006/relationships" id="2147483649" r:id="R60e710860db84b85"/>
+    <p:sldLayoutId xmlns:r="http://schemas.openxmlformats.org/officeDocument/2006/relationships" id="2147483650" r:id="R6df738fcb9a446b2"/>
+    <p:sldLayoutId xmlns:r="http://schemas.openxmlformats.org/officeDocument/2006/relationships" id="2147483651" r:id="R6d2b629167d34d6b"/>
+    <p:sldLayoutId xmlns:r="http://schemas.openxmlformats.org/officeDocument/2006/relationships" id="2147483652" r:id="R7e178f99c2914f87"/>
+    <p:sldLayoutId xmlns:r="http://schemas.openxmlformats.org/officeDocument/2006/relationships" id="2147483653" r:id="Ra9fe62dc04a14bf2"/>
+    <p:sldLayoutId xmlns:r="http://schemas.openxmlformats.org/officeDocument/2006/relationships" id="2147483654" r:id="R52546e72ccd94aa9"/>
   </p:sldLayoutIdLst>
   <p:txStyles>
     <p:titleStyle>
@@ -3119,7 +3839,7 @@
           <p:cNvPr id="10" name="">
             <a:extLst xmlns:a="http://schemas.openxmlformats.org/drawingml/2006/main">
               <a:ext uri="{FF2B5EF4-FFF2-40B4-BE49-F238E27FC236}">
-                <a16:creationId xmlns:a16="http://schemas.microsoft.com/office/drawing/2014/main" id="{6DC408E5-5EC7-4602-BCE0-548C5E0CF7A6}"/>
+                <a16:creationId xmlns:a16="http://schemas.microsoft.com/office/drawing/2014/main" id="{A89F1222-832D-4EAA-B939-E87EFD45C467}"/>
               </a:ext>
             </a:extLst>
           </p:cNvPr>
@@ -3152,6 +3872,69 @@
                 </a:solidFill>
               </a:defRPr>
             </a:defPPr>
+            <a:lvl1pPr>
+              <a:defRPr sz="1050" b="1">
+                <a:solidFill>
+                  <a:srgbClr val="0AC18E"/>
+                </a:solidFill>
+              </a:defRPr>
+            </a:lvl1pPr>
+            <a:lvl2pPr>
+              <a:defRPr sz="1050" b="1">
+                <a:solidFill>
+                  <a:srgbClr val="0AC18E"/>
+                </a:solidFill>
+              </a:defRPr>
+            </a:lvl2pPr>
+            <a:lvl3pPr>
+              <a:defRPr sz="1050" b="1">
+                <a:solidFill>
+                  <a:srgbClr val="0AC18E"/>
+                </a:solidFill>
+              </a:defRPr>
+            </a:lvl3pPr>
+            <a:lvl4pPr>
+              <a:defRPr sz="1050" b="1">
+                <a:solidFill>
+                  <a:srgbClr val="0AC18E"/>
+                </a:solidFill>
+              </a:defRPr>
+            </a:lvl4pPr>
+            <a:lvl5pPr>
+              <a:defRPr sz="1050" b="1">
+                <a:solidFill>
+                  <a:srgbClr val="0AC18E"/>
+                </a:solidFill>
+              </a:defRPr>
+            </a:lvl5pPr>
+            <a:lvl6pPr>
+              <a:defRPr sz="1050" b="1">
+                <a:solidFill>
+                  <a:srgbClr val="0AC18E"/>
+                </a:solidFill>
+              </a:defRPr>
+            </a:lvl6pPr>
+            <a:lvl7pPr>
+              <a:defRPr sz="1050" b="1">
+                <a:solidFill>
+                  <a:srgbClr val="0AC18E"/>
+                </a:solidFill>
+              </a:defRPr>
+            </a:lvl7pPr>
+            <a:lvl8pPr>
+              <a:defRPr sz="1050" b="1">
+                <a:solidFill>
+                  <a:srgbClr val="0AC18E"/>
+                </a:solidFill>
+              </a:defRPr>
+            </a:lvl8pPr>
+            <a:lvl9pPr>
+              <a:defRPr sz="1050" b="1">
+                <a:solidFill>
+                  <a:srgbClr val="0AC18E"/>
+                </a:solidFill>
+              </a:defRPr>
+            </a:lvl9pPr>
           </a:lstStyle>
           <a:p xmlns:a="http://schemas.openxmlformats.org/drawingml/2006/main">
             <a:pPr>
@@ -3177,7 +3960,7 @@
           <p:cNvPr id="2" name="">
             <a:extLst xmlns:a="http://schemas.openxmlformats.org/drawingml/2006/main">
               <a:ext uri="{FF2B5EF4-FFF2-40B4-BE49-F238E27FC236}">
-                <a16:creationId xmlns:a16="http://schemas.microsoft.com/office/drawing/2014/main" id="{955762BD-F871-4E01-8DE5-D020E280595B}"/>
+                <a16:creationId xmlns:a16="http://schemas.microsoft.com/office/drawing/2014/main" id="{85DB8C30-1B7A-4B80-A1E7-94B6B454BD8B}"/>
               </a:ext>
             </a:extLst>
           </p:cNvPr>
@@ -3210,6 +3993,69 @@
                 </a:solidFill>
               </a:defRPr>
             </a:defPPr>
+            <a:lvl1pPr>
+              <a:defRPr sz="5400" b="1">
+                <a:solidFill>
+                  <a:srgbClr val="F1F5F9"/>
+                </a:solidFill>
+              </a:defRPr>
+            </a:lvl1pPr>
+            <a:lvl2pPr>
+              <a:defRPr sz="5400" b="1">
+                <a:solidFill>
+                  <a:srgbClr val="F1F5F9"/>
+                </a:solidFill>
+              </a:defRPr>
+            </a:lvl2pPr>
+            <a:lvl3pPr>
+              <a:defRPr sz="5400" b="1">
+                <a:solidFill>
+                  <a:srgbClr val="F1F5F9"/>
+                </a:solidFill>
+              </a:defRPr>
+            </a:lvl3pPr>
+            <a:lvl4pPr>
+              <a:defRPr sz="5400" b="1">
+                <a:solidFill>
+                  <a:srgbClr val="F1F5F9"/>
+                </a:solidFill>
+              </a:defRPr>
+            </a:lvl4pPr>
+            <a:lvl5pPr>
+              <a:defRPr sz="5400" b="1">
+                <a:solidFill>
+                  <a:srgbClr val="F1F5F9"/>
+                </a:solidFill>
+              </a:defRPr>
+            </a:lvl5pPr>
+            <a:lvl6pPr>
+              <a:defRPr sz="5400" b="1">
+                <a:solidFill>
+                  <a:srgbClr val="F1F5F9"/>
+                </a:solidFill>
+              </a:defRPr>
+            </a:lvl6pPr>
+            <a:lvl7pPr>
+              <a:defRPr sz="5400" b="1">
+                <a:solidFill>
+                  <a:srgbClr val="F1F5F9"/>
+                </a:solidFill>
+              </a:defRPr>
+            </a:lvl7pPr>
+            <a:lvl8pPr>
+              <a:defRPr sz="5400" b="1">
+                <a:solidFill>
+                  <a:srgbClr val="F1F5F9"/>
+                </a:solidFill>
+              </a:defRPr>
+            </a:lvl8pPr>
+            <a:lvl9pPr>
+              <a:defRPr sz="5400" b="1">
+                <a:solidFill>
+                  <a:srgbClr val="F1F5F9"/>
+                </a:solidFill>
+              </a:defRPr>
+            </a:lvl9pPr>
           </a:lstStyle>
           <a:p xmlns:a="http://schemas.openxmlformats.org/drawingml/2006/main">
             <a:pPr>
@@ -3235,7 +4081,7 @@
           <p:cNvPr id="3" name="">
             <a:extLst xmlns:a="http://schemas.openxmlformats.org/drawingml/2006/main">
               <a:ext uri="{FF2B5EF4-FFF2-40B4-BE49-F238E27FC236}">
-                <a16:creationId xmlns:a16="http://schemas.microsoft.com/office/drawing/2014/main" id="{23390D7E-296E-4226-9B01-D785F5186B0A}"/>
+                <a16:creationId xmlns:a16="http://schemas.microsoft.com/office/drawing/2014/main" id="{DE850030-FD4A-4B11-BD0D-CFE7FE5CF3F0}"/>
               </a:ext>
             </a:extLst>
           </p:cNvPr>
@@ -3268,6 +4114,69 @@
                 </a:solidFill>
               </a:defRPr>
             </a:defPPr>
+            <a:lvl1pPr>
+              <a:defRPr sz="1800" b="0">
+                <a:solidFill>
+                  <a:srgbClr val="94A3B8"/>
+                </a:solidFill>
+              </a:defRPr>
+            </a:lvl1pPr>
+            <a:lvl2pPr>
+              <a:defRPr sz="1800" b="0">
+                <a:solidFill>
+                  <a:srgbClr val="94A3B8"/>
+                </a:solidFill>
+              </a:defRPr>
+            </a:lvl2pPr>
+            <a:lvl3pPr>
+              <a:defRPr sz="1800" b="0">
+                <a:solidFill>
+                  <a:srgbClr val="94A3B8"/>
+                </a:solidFill>
+              </a:defRPr>
+            </a:lvl3pPr>
+            <a:lvl4pPr>
+              <a:defRPr sz="1800" b="0">
+                <a:solidFill>
+                  <a:srgbClr val="94A3B8"/>
+                </a:solidFill>
+              </a:defRPr>
+            </a:lvl4pPr>
+            <a:lvl5pPr>
+              <a:defRPr sz="1800" b="0">
+                <a:solidFill>
+                  <a:srgbClr val="94A3B8"/>
+                </a:solidFill>
+              </a:defRPr>
+            </a:lvl5pPr>
+            <a:lvl6pPr>
+              <a:defRPr sz="1800" b="0">
+                <a:solidFill>
+                  <a:srgbClr val="94A3B8"/>
+                </a:solidFill>
+              </a:defRPr>
+            </a:lvl6pPr>
+            <a:lvl7pPr>
+              <a:defRPr sz="1800" b="0">
+                <a:solidFill>
+                  <a:srgbClr val="94A3B8"/>
+                </a:solidFill>
+              </a:defRPr>
+            </a:lvl7pPr>
+            <a:lvl8pPr>
+              <a:defRPr sz="1800" b="0">
+                <a:solidFill>
+                  <a:srgbClr val="94A3B8"/>
+                </a:solidFill>
+              </a:defRPr>
+            </a:lvl8pPr>
+            <a:lvl9pPr>
+              <a:defRPr sz="1800" b="0">
+                <a:solidFill>
+                  <a:srgbClr val="94A3B8"/>
+                </a:solidFill>
+              </a:defRPr>
+            </a:lvl9pPr>
           </a:lstStyle>
           <a:p xmlns:a="http://schemas.openxmlformats.org/drawingml/2006/main">
             <a:pPr>
@@ -3283,7 +4192,7 @@
                   <a:srgbClr val="94A3B8"/>
                 </a:solidFill>
               </a:rPr>
-              <a:t>Non-custodial PUSD streaming payroll &amp; subscription vault on Bitcoin Cash</a:t>
+              <a:t>Give an AI an allowance, not your bank account. PUSD budgets on Bitcoin Cash.</a:t>
             </a:r>
           </a:p>
         </p:txBody>
@@ -3293,7 +4202,7 @@
           <p:cNvPr id="4" name="">
             <a:extLst xmlns:a="http://schemas.openxmlformats.org/drawingml/2006/main">
               <a:ext uri="{FF2B5EF4-FFF2-40B4-BE49-F238E27FC236}">
-                <a16:creationId xmlns:a16="http://schemas.microsoft.com/office/drawing/2014/main" id="{CD4A4A9A-735D-405E-B81F-E033680ACB86}"/>
+                <a16:creationId xmlns:a16="http://schemas.microsoft.com/office/drawing/2014/main" id="{8B4C9D6F-1AFA-4F22-8CAC-CC17653492AB}"/>
               </a:ext>
             </a:extLst>
           </p:cNvPr>
@@ -3326,6 +4235,69 @@
                 </a:solidFill>
               </a:defRPr>
             </a:defPPr>
+            <a:lvl1pPr>
+              <a:defRPr sz="1200" b="0">
+                <a:solidFill>
+                  <a:srgbClr val="94A3B8"/>
+                </a:solidFill>
+              </a:defRPr>
+            </a:lvl1pPr>
+            <a:lvl2pPr>
+              <a:defRPr sz="1200" b="0">
+                <a:solidFill>
+                  <a:srgbClr val="94A3B8"/>
+                </a:solidFill>
+              </a:defRPr>
+            </a:lvl2pPr>
+            <a:lvl3pPr>
+              <a:defRPr sz="1200" b="0">
+                <a:solidFill>
+                  <a:srgbClr val="94A3B8"/>
+                </a:solidFill>
+              </a:defRPr>
+            </a:lvl3pPr>
+            <a:lvl4pPr>
+              <a:defRPr sz="1200" b="0">
+                <a:solidFill>
+                  <a:srgbClr val="94A3B8"/>
+                </a:solidFill>
+              </a:defRPr>
+            </a:lvl4pPr>
+            <a:lvl5pPr>
+              <a:defRPr sz="1200" b="0">
+                <a:solidFill>
+                  <a:srgbClr val="94A3B8"/>
+                </a:solidFill>
+              </a:defRPr>
+            </a:lvl5pPr>
+            <a:lvl6pPr>
+              <a:defRPr sz="1200" b="0">
+                <a:solidFill>
+                  <a:srgbClr val="94A3B8"/>
+                </a:solidFill>
+              </a:defRPr>
+            </a:lvl6pPr>
+            <a:lvl7pPr>
+              <a:defRPr sz="1200" b="0">
+                <a:solidFill>
+                  <a:srgbClr val="94A3B8"/>
+                </a:solidFill>
+              </a:defRPr>
+            </a:lvl7pPr>
+            <a:lvl8pPr>
+              <a:defRPr sz="1200" b="0">
+                <a:solidFill>
+                  <a:srgbClr val="94A3B8"/>
+                </a:solidFill>
+              </a:defRPr>
+            </a:lvl8pPr>
+            <a:lvl9pPr>
+              <a:defRPr sz="1200" b="0">
+                <a:solidFill>
+                  <a:srgbClr val="94A3B8"/>
+                </a:solidFill>
+              </a:defRPr>
+            </a:lvl9pPr>
           </a:lstStyle>
           <a:p xmlns:a="http://schemas.openxmlformats.org/drawingml/2006/main">
             <a:pPr>
@@ -3341,7 +4313,7 @@
                   <a:srgbClr val="94A3B8"/>
                 </a:solidFill>
               </a:rPr>
-              <a:t>Team Autonomous Cash  ·  streamvault.cash  ·  @StreamVaultCash</a:t>
+              <a:t>Team Autonomous Cash  ·  streamvault-cash.vercel.app  ·  @StreamVaultCash</a:t>
             </a:r>
           </a:p>
         </p:txBody>
@@ -3351,7 +4323,7 @@
           <p:cNvPr id="5" name="">
             <a:extLst xmlns:a="http://schemas.openxmlformats.org/drawingml/2006/main">
               <a:ext uri="{FF2B5EF4-FFF2-40B4-BE49-F238E27FC236}">
-                <a16:creationId xmlns:a16="http://schemas.microsoft.com/office/drawing/2014/main" id="{9D18F786-E4DC-4EE4-AB55-E47939E02001}"/>
+                <a16:creationId xmlns:a16="http://schemas.microsoft.com/office/drawing/2014/main" id="{0B15C30F-F0F4-4C91-B83A-9F66DA3E568A}"/>
               </a:ext>
             </a:extLst>
           </p:cNvPr>
@@ -3386,7 +4358,7 @@
           <p:cNvPr id="6" name="">
             <a:extLst xmlns:a="http://schemas.openxmlformats.org/drawingml/2006/main">
               <a:ext uri="{FF2B5EF4-FFF2-40B4-BE49-F238E27FC236}">
-                <a16:creationId xmlns:a16="http://schemas.microsoft.com/office/drawing/2014/main" id="{7F64893D-7E3D-4393-B985-52DDFC370C38}"/>
+                <a16:creationId xmlns:a16="http://schemas.microsoft.com/office/drawing/2014/main" id="{0D74E9AB-7EF2-4B01-BB2C-B53EF429CFAD}"/>
               </a:ext>
             </a:extLst>
           </p:cNvPr>
@@ -3419,6 +4391,69 @@
                 </a:solidFill>
               </a:defRPr>
             </a:defPPr>
+            <a:lvl1pPr>
+              <a:defRPr sz="975" b="1">
+                <a:solidFill>
+                  <a:srgbClr val="0AC18E"/>
+                </a:solidFill>
+              </a:defRPr>
+            </a:lvl1pPr>
+            <a:lvl2pPr>
+              <a:defRPr sz="975" b="1">
+                <a:solidFill>
+                  <a:srgbClr val="0AC18E"/>
+                </a:solidFill>
+              </a:defRPr>
+            </a:lvl2pPr>
+            <a:lvl3pPr>
+              <a:defRPr sz="975" b="1">
+                <a:solidFill>
+                  <a:srgbClr val="0AC18E"/>
+                </a:solidFill>
+              </a:defRPr>
+            </a:lvl3pPr>
+            <a:lvl4pPr>
+              <a:defRPr sz="975" b="1">
+                <a:solidFill>
+                  <a:srgbClr val="0AC18E"/>
+                </a:solidFill>
+              </a:defRPr>
+            </a:lvl4pPr>
+            <a:lvl5pPr>
+              <a:defRPr sz="975" b="1">
+                <a:solidFill>
+                  <a:srgbClr val="0AC18E"/>
+                </a:solidFill>
+              </a:defRPr>
+            </a:lvl5pPr>
+            <a:lvl6pPr>
+              <a:defRPr sz="975" b="1">
+                <a:solidFill>
+                  <a:srgbClr val="0AC18E"/>
+                </a:solidFill>
+              </a:defRPr>
+            </a:lvl6pPr>
+            <a:lvl7pPr>
+              <a:defRPr sz="975" b="1">
+                <a:solidFill>
+                  <a:srgbClr val="0AC18E"/>
+                </a:solidFill>
+              </a:defRPr>
+            </a:lvl7pPr>
+            <a:lvl8pPr>
+              <a:defRPr sz="975" b="1">
+                <a:solidFill>
+                  <a:srgbClr val="0AC18E"/>
+                </a:solidFill>
+              </a:defRPr>
+            </a:lvl8pPr>
+            <a:lvl9pPr>
+              <a:defRPr sz="975" b="1">
+                <a:solidFill>
+                  <a:srgbClr val="0AC18E"/>
+                </a:solidFill>
+              </a:defRPr>
+            </a:lvl9pPr>
           </a:lstStyle>
           <a:p xmlns:a="http://schemas.openxmlformats.org/drawingml/2006/main">
             <a:pPr>
@@ -3444,7 +4479,7 @@
           <p:cNvPr id="7" name="">
             <a:extLst xmlns:a="http://schemas.openxmlformats.org/drawingml/2006/main">
               <a:ext uri="{FF2B5EF4-FFF2-40B4-BE49-F238E27FC236}">
-                <a16:creationId xmlns:a16="http://schemas.microsoft.com/office/drawing/2014/main" id="{40427998-FA4F-4BBF-9939-F3A779C56B1B}"/>
+                <a16:creationId xmlns:a16="http://schemas.microsoft.com/office/drawing/2014/main" id="{83A9F118-7D0D-4144-BAF5-4E3AF54EB6F9}"/>
               </a:ext>
             </a:extLst>
           </p:cNvPr>
@@ -3477,6 +4512,69 @@
                 </a:solidFill>
               </a:defRPr>
             </a:defPPr>
+            <a:lvl1pPr>
+              <a:defRPr sz="2550" b="1">
+                <a:solidFill>
+                  <a:srgbClr val="F1F5F9"/>
+                </a:solidFill>
+              </a:defRPr>
+            </a:lvl1pPr>
+            <a:lvl2pPr>
+              <a:defRPr sz="2550" b="1">
+                <a:solidFill>
+                  <a:srgbClr val="F1F5F9"/>
+                </a:solidFill>
+              </a:defRPr>
+            </a:lvl2pPr>
+            <a:lvl3pPr>
+              <a:defRPr sz="2550" b="1">
+                <a:solidFill>
+                  <a:srgbClr val="F1F5F9"/>
+                </a:solidFill>
+              </a:defRPr>
+            </a:lvl3pPr>
+            <a:lvl4pPr>
+              <a:defRPr sz="2550" b="1">
+                <a:solidFill>
+                  <a:srgbClr val="F1F5F9"/>
+                </a:solidFill>
+              </a:defRPr>
+            </a:lvl4pPr>
+            <a:lvl5pPr>
+              <a:defRPr sz="2550" b="1">
+                <a:solidFill>
+                  <a:srgbClr val="F1F5F9"/>
+                </a:solidFill>
+              </a:defRPr>
+            </a:lvl5pPr>
+            <a:lvl6pPr>
+              <a:defRPr sz="2550" b="1">
+                <a:solidFill>
+                  <a:srgbClr val="F1F5F9"/>
+                </a:solidFill>
+              </a:defRPr>
+            </a:lvl6pPr>
+            <a:lvl7pPr>
+              <a:defRPr sz="2550" b="1">
+                <a:solidFill>
+                  <a:srgbClr val="F1F5F9"/>
+                </a:solidFill>
+              </a:defRPr>
+            </a:lvl7pPr>
+            <a:lvl8pPr>
+              <a:defRPr sz="2550" b="1">
+                <a:solidFill>
+                  <a:srgbClr val="F1F5F9"/>
+                </a:solidFill>
+              </a:defRPr>
+            </a:lvl8pPr>
+            <a:lvl9pPr>
+              <a:defRPr sz="2550" b="1">
+                <a:solidFill>
+                  <a:srgbClr val="F1F5F9"/>
+                </a:solidFill>
+              </a:defRPr>
+            </a:lvl9pPr>
           </a:lstStyle>
           <a:p xmlns:a="http://schemas.openxmlformats.org/drawingml/2006/main">
             <a:pPr>
@@ -3492,7 +4590,7 @@
                   <a:srgbClr val="F1F5F9"/>
                 </a:solidFill>
               </a:rPr>
-              <a:t>$1,000.00</a:t>
+              <a:t>2.00 PUSD</a:t>
             </a:r>
           </a:p>
         </p:txBody>
@@ -3502,7 +4600,7 @@
           <p:cNvPr id="8" name="">
             <a:extLst xmlns:a="http://schemas.openxmlformats.org/drawingml/2006/main">
               <a:ext uri="{FF2B5EF4-FFF2-40B4-BE49-F238E27FC236}">
-                <a16:creationId xmlns:a16="http://schemas.microsoft.com/office/drawing/2014/main" id="{4F432D94-7FBB-4B70-9669-2E04EA5BED0A}"/>
+                <a16:creationId xmlns:a16="http://schemas.microsoft.com/office/drawing/2014/main" id="{2FC8C1A6-6738-4DCB-8CFB-05ED7D6EE5F6}"/>
               </a:ext>
             </a:extLst>
           </p:cNvPr>
@@ -3535,6 +4633,69 @@
                 </a:solidFill>
               </a:defRPr>
             </a:defPPr>
+            <a:lvl1pPr>
+              <a:defRPr sz="975" b="0">
+                <a:solidFill>
+                  <a:srgbClr val="94A3B8"/>
+                </a:solidFill>
+              </a:defRPr>
+            </a:lvl1pPr>
+            <a:lvl2pPr>
+              <a:defRPr sz="975" b="0">
+                <a:solidFill>
+                  <a:srgbClr val="94A3B8"/>
+                </a:solidFill>
+              </a:defRPr>
+            </a:lvl2pPr>
+            <a:lvl3pPr>
+              <a:defRPr sz="975" b="0">
+                <a:solidFill>
+                  <a:srgbClr val="94A3B8"/>
+                </a:solidFill>
+              </a:defRPr>
+            </a:lvl3pPr>
+            <a:lvl4pPr>
+              <a:defRPr sz="975" b="0">
+                <a:solidFill>
+                  <a:srgbClr val="94A3B8"/>
+                </a:solidFill>
+              </a:defRPr>
+            </a:lvl4pPr>
+            <a:lvl5pPr>
+              <a:defRPr sz="975" b="0">
+                <a:solidFill>
+                  <a:srgbClr val="94A3B8"/>
+                </a:solidFill>
+              </a:defRPr>
+            </a:lvl5pPr>
+            <a:lvl6pPr>
+              <a:defRPr sz="975" b="0">
+                <a:solidFill>
+                  <a:srgbClr val="94A3B8"/>
+                </a:solidFill>
+              </a:defRPr>
+            </a:lvl6pPr>
+            <a:lvl7pPr>
+              <a:defRPr sz="975" b="0">
+                <a:solidFill>
+                  <a:srgbClr val="94A3B8"/>
+                </a:solidFill>
+              </a:defRPr>
+            </a:lvl7pPr>
+            <a:lvl8pPr>
+              <a:defRPr sz="975" b="0">
+                <a:solidFill>
+                  <a:srgbClr val="94A3B8"/>
+                </a:solidFill>
+              </a:defRPr>
+            </a:lvl8pPr>
+            <a:lvl9pPr>
+              <a:defRPr sz="975" b="0">
+                <a:solidFill>
+                  <a:srgbClr val="94A3B8"/>
+                </a:solidFill>
+              </a:defRPr>
+            </a:lvl9pPr>
           </a:lstStyle>
           <a:p xmlns:a="http://schemas.openxmlformats.org/drawingml/2006/main">
             <a:pPr>
@@ -3560,7 +4721,7 @@
           <p:cNvPr id="9" name="">
             <a:extLst xmlns:a="http://schemas.openxmlformats.org/drawingml/2006/main">
               <a:ext uri="{FF2B5EF4-FFF2-40B4-BE49-F238E27FC236}">
-                <a16:creationId xmlns:a16="http://schemas.microsoft.com/office/drawing/2014/main" id="{84DCAF20-74A4-46A3-A9ED-3BFC19FBFFC4}"/>
+                <a16:creationId xmlns:a16="http://schemas.microsoft.com/office/drawing/2014/main" id="{5EB61BB0-DA9F-4142-B0DA-ACD2E59AA1ED}"/>
               </a:ext>
             </a:extLst>
           </p:cNvPr>
@@ -3593,6 +4754,69 @@
                 </a:solidFill>
               </a:defRPr>
             </a:defPPr>
+            <a:lvl1pPr>
+              <a:defRPr sz="975" b="0">
+                <a:solidFill>
+                  <a:srgbClr val="818CF8"/>
+                </a:solidFill>
+              </a:defRPr>
+            </a:lvl1pPr>
+            <a:lvl2pPr>
+              <a:defRPr sz="975" b="0">
+                <a:solidFill>
+                  <a:srgbClr val="818CF8"/>
+                </a:solidFill>
+              </a:defRPr>
+            </a:lvl2pPr>
+            <a:lvl3pPr>
+              <a:defRPr sz="975" b="0">
+                <a:solidFill>
+                  <a:srgbClr val="818CF8"/>
+                </a:solidFill>
+              </a:defRPr>
+            </a:lvl3pPr>
+            <a:lvl4pPr>
+              <a:defRPr sz="975" b="0">
+                <a:solidFill>
+                  <a:srgbClr val="818CF8"/>
+                </a:solidFill>
+              </a:defRPr>
+            </a:lvl4pPr>
+            <a:lvl5pPr>
+              <a:defRPr sz="975" b="0">
+                <a:solidFill>
+                  <a:srgbClr val="818CF8"/>
+                </a:solidFill>
+              </a:defRPr>
+            </a:lvl5pPr>
+            <a:lvl6pPr>
+              <a:defRPr sz="975" b="0">
+                <a:solidFill>
+                  <a:srgbClr val="818CF8"/>
+                </a:solidFill>
+              </a:defRPr>
+            </a:lvl6pPr>
+            <a:lvl7pPr>
+              <a:defRPr sz="975" b="0">
+                <a:solidFill>
+                  <a:srgbClr val="818CF8"/>
+                </a:solidFill>
+              </a:defRPr>
+            </a:lvl7pPr>
+            <a:lvl8pPr>
+              <a:defRPr sz="975" b="0">
+                <a:solidFill>
+                  <a:srgbClr val="818CF8"/>
+                </a:solidFill>
+              </a:defRPr>
+            </a:lvl8pPr>
+            <a:lvl9pPr>
+              <a:defRPr sz="975" b="0">
+                <a:solidFill>
+                  <a:srgbClr val="818CF8"/>
+                </a:solidFill>
+              </a:defRPr>
+            </a:lvl9pPr>
           </a:lstStyle>
           <a:p xmlns:a="http://schemas.openxmlformats.org/drawingml/2006/main">
             <a:pPr>
@@ -3608,7 +4832,7 @@
                   <a:srgbClr val="818CF8"/>
                 </a:solidFill>
               </a:rPr>
-              <a:t>$25.00 / period  ·  cancellable</a:t>
+              <a:t>0.10 PUSD / period  ·  cancellable</a:t>
             </a:r>
           </a:p>
         </p:txBody>
@@ -3616,7 +4840,7 @@
     </p:spTree>
     <p:extLst>
       <p:ext uri="{BB962C8B-B14F-4D97-AF65-F5344CB8AC3E}">
-        <p14:creationId xmlns:p14="http://schemas.microsoft.com/office/powerpoint/2010/main" val="1283098994"/>
+        <p14:creationId xmlns:p14="http://schemas.microsoft.com/office/powerpoint/2010/main" val="1031020461"/>
       </p:ext>
     </p:extLst>
   </p:cSld>
@@ -3647,7 +4871,7 @@
           <p:cNvPr id="13" name="">
             <a:extLst xmlns:a="http://schemas.openxmlformats.org/drawingml/2006/main">
               <a:ext uri="{FF2B5EF4-FFF2-40B4-BE49-F238E27FC236}">
-                <a16:creationId xmlns:a16="http://schemas.microsoft.com/office/drawing/2014/main" id="{2505EA11-C3C2-4892-87B5-7D1FB73E2311}"/>
+                <a16:creationId xmlns:a16="http://schemas.microsoft.com/office/drawing/2014/main" id="{E47F6CB6-1112-4151-9C46-4E26402F209F}"/>
               </a:ext>
             </a:extLst>
           </p:cNvPr>
@@ -3680,6 +4904,69 @@
                 </a:solidFill>
               </a:defRPr>
             </a:defPPr>
+            <a:lvl1pPr>
+              <a:defRPr sz="975" b="1">
+                <a:solidFill>
+                  <a:srgbClr val="0AC18E"/>
+                </a:solidFill>
+              </a:defRPr>
+            </a:lvl1pPr>
+            <a:lvl2pPr>
+              <a:defRPr sz="975" b="1">
+                <a:solidFill>
+                  <a:srgbClr val="0AC18E"/>
+                </a:solidFill>
+              </a:defRPr>
+            </a:lvl2pPr>
+            <a:lvl3pPr>
+              <a:defRPr sz="975" b="1">
+                <a:solidFill>
+                  <a:srgbClr val="0AC18E"/>
+                </a:solidFill>
+              </a:defRPr>
+            </a:lvl3pPr>
+            <a:lvl4pPr>
+              <a:defRPr sz="975" b="1">
+                <a:solidFill>
+                  <a:srgbClr val="0AC18E"/>
+                </a:solidFill>
+              </a:defRPr>
+            </a:lvl4pPr>
+            <a:lvl5pPr>
+              <a:defRPr sz="975" b="1">
+                <a:solidFill>
+                  <a:srgbClr val="0AC18E"/>
+                </a:solidFill>
+              </a:defRPr>
+            </a:lvl5pPr>
+            <a:lvl6pPr>
+              <a:defRPr sz="975" b="1">
+                <a:solidFill>
+                  <a:srgbClr val="0AC18E"/>
+                </a:solidFill>
+              </a:defRPr>
+            </a:lvl6pPr>
+            <a:lvl7pPr>
+              <a:defRPr sz="975" b="1">
+                <a:solidFill>
+                  <a:srgbClr val="0AC18E"/>
+                </a:solidFill>
+              </a:defRPr>
+            </a:lvl7pPr>
+            <a:lvl8pPr>
+              <a:defRPr sz="975" b="1">
+                <a:solidFill>
+                  <a:srgbClr val="0AC18E"/>
+                </a:solidFill>
+              </a:defRPr>
+            </a:lvl8pPr>
+            <a:lvl9pPr>
+              <a:defRPr sz="975" b="1">
+                <a:solidFill>
+                  <a:srgbClr val="0AC18E"/>
+                </a:solidFill>
+              </a:defRPr>
+            </a:lvl9pPr>
           </a:lstStyle>
           <a:p xmlns:a="http://schemas.openxmlformats.org/drawingml/2006/main">
             <a:pPr>
@@ -3705,7 +4992,7 @@
           <p:cNvPr id="2" name="">
             <a:extLst xmlns:a="http://schemas.openxmlformats.org/drawingml/2006/main">
               <a:ext uri="{FF2B5EF4-FFF2-40B4-BE49-F238E27FC236}">
-                <a16:creationId xmlns:a16="http://schemas.microsoft.com/office/drawing/2014/main" id="{1D971093-2BA7-4183-A9C8-B7B9562C8042}"/>
+                <a16:creationId xmlns:a16="http://schemas.microsoft.com/office/drawing/2014/main" id="{4BEAF557-58AB-437C-8FAB-06FDA1FFCB77}"/>
               </a:ext>
             </a:extLst>
           </p:cNvPr>
@@ -3738,6 +5025,69 @@
                 </a:solidFill>
               </a:defRPr>
             </a:defPPr>
+            <a:lvl1pPr>
+              <a:defRPr sz="2250" b="1">
+                <a:solidFill>
+                  <a:srgbClr val="F1F5F9"/>
+                </a:solidFill>
+              </a:defRPr>
+            </a:lvl1pPr>
+            <a:lvl2pPr>
+              <a:defRPr sz="2250" b="1">
+                <a:solidFill>
+                  <a:srgbClr val="F1F5F9"/>
+                </a:solidFill>
+              </a:defRPr>
+            </a:lvl2pPr>
+            <a:lvl3pPr>
+              <a:defRPr sz="2250" b="1">
+                <a:solidFill>
+                  <a:srgbClr val="F1F5F9"/>
+                </a:solidFill>
+              </a:defRPr>
+            </a:lvl3pPr>
+            <a:lvl4pPr>
+              <a:defRPr sz="2250" b="1">
+                <a:solidFill>
+                  <a:srgbClr val="F1F5F9"/>
+                </a:solidFill>
+              </a:defRPr>
+            </a:lvl4pPr>
+            <a:lvl5pPr>
+              <a:defRPr sz="2250" b="1">
+                <a:solidFill>
+                  <a:srgbClr val="F1F5F9"/>
+                </a:solidFill>
+              </a:defRPr>
+            </a:lvl5pPr>
+            <a:lvl6pPr>
+              <a:defRPr sz="2250" b="1">
+                <a:solidFill>
+                  <a:srgbClr val="F1F5F9"/>
+                </a:solidFill>
+              </a:defRPr>
+            </a:lvl6pPr>
+            <a:lvl7pPr>
+              <a:defRPr sz="2250" b="1">
+                <a:solidFill>
+                  <a:srgbClr val="F1F5F9"/>
+                </a:solidFill>
+              </a:defRPr>
+            </a:lvl7pPr>
+            <a:lvl8pPr>
+              <a:defRPr sz="2250" b="1">
+                <a:solidFill>
+                  <a:srgbClr val="F1F5F9"/>
+                </a:solidFill>
+              </a:defRPr>
+            </a:lvl8pPr>
+            <a:lvl9pPr>
+              <a:defRPr sz="2250" b="1">
+                <a:solidFill>
+                  <a:srgbClr val="F1F5F9"/>
+                </a:solidFill>
+              </a:defRPr>
+            </a:lvl9pPr>
           </a:lstStyle>
           <a:p xmlns:a="http://schemas.openxmlformats.org/drawingml/2006/main">
             <a:pPr>
@@ -3753,7 +5103,7 @@
                   <a:srgbClr val="F1F5F9"/>
                 </a:solidFill>
               </a:rPr>
-              <a:t>Programmable BCH money streams that pay themselves - capped on-chain, cancellable by the payer, settled in a stablecoin.</a:t>
+              <a:t>Give autonomous software a PUSD budget it cannot exceed per period - and give people the same streaming primitive.</a:t>
             </a:r>
           </a:p>
         </p:txBody>
@@ -3763,7 +5113,7 @@
           <p:cNvPr id="3" name="">
             <a:extLst xmlns:a="http://schemas.openxmlformats.org/drawingml/2006/main">
               <a:ext uri="{FF2B5EF4-FFF2-40B4-BE49-F238E27FC236}">
-                <a16:creationId xmlns:a16="http://schemas.microsoft.com/office/drawing/2014/main" id="{B65AB2F7-32AE-44C7-83AC-1739F3CE0D5C}"/>
+                <a16:creationId xmlns:a16="http://schemas.microsoft.com/office/drawing/2014/main" id="{0BBD738E-2791-4206-9B0B-D2FA71141E3F}"/>
               </a:ext>
             </a:extLst>
           </p:cNvPr>
@@ -3798,7 +5148,7 @@
           <p:cNvPr id="4" name="">
             <a:extLst xmlns:a="http://schemas.openxmlformats.org/drawingml/2006/main">
               <a:ext uri="{FF2B5EF4-FFF2-40B4-BE49-F238E27FC236}">
-                <a16:creationId xmlns:a16="http://schemas.microsoft.com/office/drawing/2014/main" id="{F670D9DA-E33F-40E0-ABF6-2FC116175638}"/>
+                <a16:creationId xmlns:a16="http://schemas.microsoft.com/office/drawing/2014/main" id="{F61D117D-CD83-4DED-BA89-15C016C27B3D}"/>
               </a:ext>
             </a:extLst>
           </p:cNvPr>
@@ -3831,6 +5181,69 @@
                 </a:solidFill>
               </a:defRPr>
             </a:defPPr>
+            <a:lvl1pPr>
+              <a:defRPr sz="1500" b="1">
+                <a:solidFill>
+                  <a:srgbClr val="0AC18E"/>
+                </a:solidFill>
+              </a:defRPr>
+            </a:lvl1pPr>
+            <a:lvl2pPr>
+              <a:defRPr sz="1500" b="1">
+                <a:solidFill>
+                  <a:srgbClr val="0AC18E"/>
+                </a:solidFill>
+              </a:defRPr>
+            </a:lvl2pPr>
+            <a:lvl3pPr>
+              <a:defRPr sz="1500" b="1">
+                <a:solidFill>
+                  <a:srgbClr val="0AC18E"/>
+                </a:solidFill>
+              </a:defRPr>
+            </a:lvl3pPr>
+            <a:lvl4pPr>
+              <a:defRPr sz="1500" b="1">
+                <a:solidFill>
+                  <a:srgbClr val="0AC18E"/>
+                </a:solidFill>
+              </a:defRPr>
+            </a:lvl4pPr>
+            <a:lvl5pPr>
+              <a:defRPr sz="1500" b="1">
+                <a:solidFill>
+                  <a:srgbClr val="0AC18E"/>
+                </a:solidFill>
+              </a:defRPr>
+            </a:lvl5pPr>
+            <a:lvl6pPr>
+              <a:defRPr sz="1500" b="1">
+                <a:solidFill>
+                  <a:srgbClr val="0AC18E"/>
+                </a:solidFill>
+              </a:defRPr>
+            </a:lvl6pPr>
+            <a:lvl7pPr>
+              <a:defRPr sz="1500" b="1">
+                <a:solidFill>
+                  <a:srgbClr val="0AC18E"/>
+                </a:solidFill>
+              </a:defRPr>
+            </a:lvl7pPr>
+            <a:lvl8pPr>
+              <a:defRPr sz="1500" b="1">
+                <a:solidFill>
+                  <a:srgbClr val="0AC18E"/>
+                </a:solidFill>
+              </a:defRPr>
+            </a:lvl8pPr>
+            <a:lvl9pPr>
+              <a:defRPr sz="1500" b="1">
+                <a:solidFill>
+                  <a:srgbClr val="0AC18E"/>
+                </a:solidFill>
+              </a:defRPr>
+            </a:lvl9pPr>
           </a:lstStyle>
           <a:p xmlns:a="http://schemas.openxmlformats.org/drawingml/2006/main">
             <a:pPr>
@@ -3846,7 +5259,7 @@
                   <a:srgbClr val="0AC18E"/>
                 </a:solidFill>
               </a:rPr>
-              <a:t>Non-custodial</a:t>
+              <a:t>Runaway agents</a:t>
             </a:r>
           </a:p>
         </p:txBody>
@@ -3856,7 +5269,7 @@
           <p:cNvPr id="5" name="">
             <a:extLst xmlns:a="http://schemas.openxmlformats.org/drawingml/2006/main">
               <a:ext uri="{FF2B5EF4-FFF2-40B4-BE49-F238E27FC236}">
-                <a16:creationId xmlns:a16="http://schemas.microsoft.com/office/drawing/2014/main" id="{C130C72E-322E-488C-9582-8D54F8432CF4}"/>
+                <a16:creationId xmlns:a16="http://schemas.microsoft.com/office/drawing/2014/main" id="{6FEEEAD3-9C2E-4EE1-98CB-CF783CA11462}"/>
               </a:ext>
             </a:extLst>
           </p:cNvPr>
@@ -3889,6 +5302,69 @@
                 </a:solidFill>
               </a:defRPr>
             </a:defPPr>
+            <a:lvl1pPr>
+              <a:defRPr sz="1125" b="0">
+                <a:solidFill>
+                  <a:srgbClr val="94A3B8"/>
+                </a:solidFill>
+              </a:defRPr>
+            </a:lvl1pPr>
+            <a:lvl2pPr>
+              <a:defRPr sz="1125" b="0">
+                <a:solidFill>
+                  <a:srgbClr val="94A3B8"/>
+                </a:solidFill>
+              </a:defRPr>
+            </a:lvl2pPr>
+            <a:lvl3pPr>
+              <a:defRPr sz="1125" b="0">
+                <a:solidFill>
+                  <a:srgbClr val="94A3B8"/>
+                </a:solidFill>
+              </a:defRPr>
+            </a:lvl3pPr>
+            <a:lvl4pPr>
+              <a:defRPr sz="1125" b="0">
+                <a:solidFill>
+                  <a:srgbClr val="94A3B8"/>
+                </a:solidFill>
+              </a:defRPr>
+            </a:lvl4pPr>
+            <a:lvl5pPr>
+              <a:defRPr sz="1125" b="0">
+                <a:solidFill>
+                  <a:srgbClr val="94A3B8"/>
+                </a:solidFill>
+              </a:defRPr>
+            </a:lvl5pPr>
+            <a:lvl6pPr>
+              <a:defRPr sz="1125" b="0">
+                <a:solidFill>
+                  <a:srgbClr val="94A3B8"/>
+                </a:solidFill>
+              </a:defRPr>
+            </a:lvl6pPr>
+            <a:lvl7pPr>
+              <a:defRPr sz="1125" b="0">
+                <a:solidFill>
+                  <a:srgbClr val="94A3B8"/>
+                </a:solidFill>
+              </a:defRPr>
+            </a:lvl7pPr>
+            <a:lvl8pPr>
+              <a:defRPr sz="1125" b="0">
+                <a:solidFill>
+                  <a:srgbClr val="94A3B8"/>
+                </a:solidFill>
+              </a:defRPr>
+            </a:lvl8pPr>
+            <a:lvl9pPr>
+              <a:defRPr sz="1125" b="0">
+                <a:solidFill>
+                  <a:srgbClr val="94A3B8"/>
+                </a:solidFill>
+              </a:defRPr>
+            </a:lvl9pPr>
           </a:lstStyle>
           <a:p xmlns:a="http://schemas.openxmlformats.org/drawingml/2006/main">
             <a:pPr>
@@ -3904,7 +5380,7 @@
                   <a:srgbClr val="94A3B8"/>
                 </a:solidFill>
               </a:rPr>
-              <a:t>Payer keeps the claw-back</a:t>
+              <a:t>A prompt is not a financial control</a:t>
             </a:r>
           </a:p>
         </p:txBody>
@@ -3914,7 +5390,7 @@
           <p:cNvPr id="6" name="">
             <a:extLst xmlns:a="http://schemas.openxmlformats.org/drawingml/2006/main">
               <a:ext uri="{FF2B5EF4-FFF2-40B4-BE49-F238E27FC236}">
-                <a16:creationId xmlns:a16="http://schemas.microsoft.com/office/drawing/2014/main" id="{EA092D5C-DDBE-4CE2-BBAA-853AE73D1F6C}"/>
+                <a16:creationId xmlns:a16="http://schemas.microsoft.com/office/drawing/2014/main" id="{9A1526A2-EF76-47C3-B4F3-B57C582EF2E0}"/>
               </a:ext>
             </a:extLst>
           </p:cNvPr>
@@ -3949,7 +5425,7 @@
           <p:cNvPr id="7" name="">
             <a:extLst xmlns:a="http://schemas.openxmlformats.org/drawingml/2006/main">
               <a:ext uri="{FF2B5EF4-FFF2-40B4-BE49-F238E27FC236}">
-                <a16:creationId xmlns:a16="http://schemas.microsoft.com/office/drawing/2014/main" id="{673B97BA-9261-4B2B-9621-798E262550AC}"/>
+                <a16:creationId xmlns:a16="http://schemas.microsoft.com/office/drawing/2014/main" id="{273408C5-D193-443C-9A42-7EA8658D0A4F}"/>
               </a:ext>
             </a:extLst>
           </p:cNvPr>
@@ -3982,6 +5458,69 @@
                 </a:solidFill>
               </a:defRPr>
             </a:defPPr>
+            <a:lvl1pPr>
+              <a:defRPr sz="1500" b="1">
+                <a:solidFill>
+                  <a:srgbClr val="818CF8"/>
+                </a:solidFill>
+              </a:defRPr>
+            </a:lvl1pPr>
+            <a:lvl2pPr>
+              <a:defRPr sz="1500" b="1">
+                <a:solidFill>
+                  <a:srgbClr val="818CF8"/>
+                </a:solidFill>
+              </a:defRPr>
+            </a:lvl2pPr>
+            <a:lvl3pPr>
+              <a:defRPr sz="1500" b="1">
+                <a:solidFill>
+                  <a:srgbClr val="818CF8"/>
+                </a:solidFill>
+              </a:defRPr>
+            </a:lvl3pPr>
+            <a:lvl4pPr>
+              <a:defRPr sz="1500" b="1">
+                <a:solidFill>
+                  <a:srgbClr val="818CF8"/>
+                </a:solidFill>
+              </a:defRPr>
+            </a:lvl4pPr>
+            <a:lvl5pPr>
+              <a:defRPr sz="1500" b="1">
+                <a:solidFill>
+                  <a:srgbClr val="818CF8"/>
+                </a:solidFill>
+              </a:defRPr>
+            </a:lvl5pPr>
+            <a:lvl6pPr>
+              <a:defRPr sz="1500" b="1">
+                <a:solidFill>
+                  <a:srgbClr val="818CF8"/>
+                </a:solidFill>
+              </a:defRPr>
+            </a:lvl6pPr>
+            <a:lvl7pPr>
+              <a:defRPr sz="1500" b="1">
+                <a:solidFill>
+                  <a:srgbClr val="818CF8"/>
+                </a:solidFill>
+              </a:defRPr>
+            </a:lvl7pPr>
+            <a:lvl8pPr>
+              <a:defRPr sz="1500" b="1">
+                <a:solidFill>
+                  <a:srgbClr val="818CF8"/>
+                </a:solidFill>
+              </a:defRPr>
+            </a:lvl8pPr>
+            <a:lvl9pPr>
+              <a:defRPr sz="1500" b="1">
+                <a:solidFill>
+                  <a:srgbClr val="818CF8"/>
+                </a:solidFill>
+              </a:defRPr>
+            </a:lvl9pPr>
           </a:lstStyle>
           <a:p xmlns:a="http://schemas.openxmlformats.org/drawingml/2006/main">
             <a:pPr>
@@ -3997,7 +5536,7 @@
                   <a:srgbClr val="818CF8"/>
                 </a:solidFill>
               </a:rPr>
-              <a:t>PUSD settlement</a:t>
+              <a:t>PUSD budget</a:t>
             </a:r>
           </a:p>
         </p:txBody>
@@ -4007,7 +5546,7 @@
           <p:cNvPr id="8" name="">
             <a:extLst xmlns:a="http://schemas.openxmlformats.org/drawingml/2006/main">
               <a:ext uri="{FF2B5EF4-FFF2-40B4-BE49-F238E27FC236}">
-                <a16:creationId xmlns:a16="http://schemas.microsoft.com/office/drawing/2014/main" id="{F950F84D-D282-4E61-B328-DF844812D31A}"/>
+                <a16:creationId xmlns:a16="http://schemas.microsoft.com/office/drawing/2014/main" id="{580C7DB0-0385-4EA5-897C-57444C39791D}"/>
               </a:ext>
             </a:extLst>
           </p:cNvPr>
@@ -4040,6 +5579,69 @@
                 </a:solidFill>
               </a:defRPr>
             </a:defPPr>
+            <a:lvl1pPr>
+              <a:defRPr sz="1125" b="0">
+                <a:solidFill>
+                  <a:srgbClr val="94A3B8"/>
+                </a:solidFill>
+              </a:defRPr>
+            </a:lvl1pPr>
+            <a:lvl2pPr>
+              <a:defRPr sz="1125" b="0">
+                <a:solidFill>
+                  <a:srgbClr val="94A3B8"/>
+                </a:solidFill>
+              </a:defRPr>
+            </a:lvl2pPr>
+            <a:lvl3pPr>
+              <a:defRPr sz="1125" b="0">
+                <a:solidFill>
+                  <a:srgbClr val="94A3B8"/>
+                </a:solidFill>
+              </a:defRPr>
+            </a:lvl3pPr>
+            <a:lvl4pPr>
+              <a:defRPr sz="1125" b="0">
+                <a:solidFill>
+                  <a:srgbClr val="94A3B8"/>
+                </a:solidFill>
+              </a:defRPr>
+            </a:lvl4pPr>
+            <a:lvl5pPr>
+              <a:defRPr sz="1125" b="0">
+                <a:solidFill>
+                  <a:srgbClr val="94A3B8"/>
+                </a:solidFill>
+              </a:defRPr>
+            </a:lvl5pPr>
+            <a:lvl6pPr>
+              <a:defRPr sz="1125" b="0">
+                <a:solidFill>
+                  <a:srgbClr val="94A3B8"/>
+                </a:solidFill>
+              </a:defRPr>
+            </a:lvl6pPr>
+            <a:lvl7pPr>
+              <a:defRPr sz="1125" b="0">
+                <a:solidFill>
+                  <a:srgbClr val="94A3B8"/>
+                </a:solidFill>
+              </a:defRPr>
+            </a:lvl7pPr>
+            <a:lvl8pPr>
+              <a:defRPr sz="1125" b="0">
+                <a:solidFill>
+                  <a:srgbClr val="94A3B8"/>
+                </a:solidFill>
+              </a:defRPr>
+            </a:lvl8pPr>
+            <a:lvl9pPr>
+              <a:defRPr sz="1125" b="0">
+                <a:solidFill>
+                  <a:srgbClr val="94A3B8"/>
+                </a:solidFill>
+              </a:defRPr>
+            </a:lvl9pPr>
           </a:lstStyle>
           <a:p xmlns:a="http://schemas.openxmlformats.org/drawingml/2006/main">
             <a:pPr>
@@ -4065,7 +5667,7 @@
           <p:cNvPr id="9" name="">
             <a:extLst xmlns:a="http://schemas.openxmlformats.org/drawingml/2006/main">
               <a:ext uri="{FF2B5EF4-FFF2-40B4-BE49-F238E27FC236}">
-                <a16:creationId xmlns:a16="http://schemas.microsoft.com/office/drawing/2014/main" id="{44FDB0CB-AAFE-4698-BD42-71877677338E}"/>
+                <a16:creationId xmlns:a16="http://schemas.microsoft.com/office/drawing/2014/main" id="{B641F20A-668E-4AB7-882D-EB146AC84176}"/>
               </a:ext>
             </a:extLst>
           </p:cNvPr>
@@ -4100,7 +5702,7 @@
           <p:cNvPr id="10" name="">
             <a:extLst xmlns:a="http://schemas.openxmlformats.org/drawingml/2006/main">
               <a:ext uri="{FF2B5EF4-FFF2-40B4-BE49-F238E27FC236}">
-                <a16:creationId xmlns:a16="http://schemas.microsoft.com/office/drawing/2014/main" id="{6A87F1B3-18D2-4356-8410-A185E321E779}"/>
+                <a16:creationId xmlns:a16="http://schemas.microsoft.com/office/drawing/2014/main" id="{EA5A80B8-4210-4F01-94D0-658A17050D3A}"/>
               </a:ext>
             </a:extLst>
           </p:cNvPr>
@@ -4133,6 +5735,69 @@
                 </a:solidFill>
               </a:defRPr>
             </a:defPPr>
+            <a:lvl1pPr>
+              <a:defRPr sz="1500" b="1">
+                <a:solidFill>
+                  <a:srgbClr val="FBBF24"/>
+                </a:solidFill>
+              </a:defRPr>
+            </a:lvl1pPr>
+            <a:lvl2pPr>
+              <a:defRPr sz="1500" b="1">
+                <a:solidFill>
+                  <a:srgbClr val="FBBF24"/>
+                </a:solidFill>
+              </a:defRPr>
+            </a:lvl2pPr>
+            <a:lvl3pPr>
+              <a:defRPr sz="1500" b="1">
+                <a:solidFill>
+                  <a:srgbClr val="FBBF24"/>
+                </a:solidFill>
+              </a:defRPr>
+            </a:lvl3pPr>
+            <a:lvl4pPr>
+              <a:defRPr sz="1500" b="1">
+                <a:solidFill>
+                  <a:srgbClr val="FBBF24"/>
+                </a:solidFill>
+              </a:defRPr>
+            </a:lvl4pPr>
+            <a:lvl5pPr>
+              <a:defRPr sz="1500" b="1">
+                <a:solidFill>
+                  <a:srgbClr val="FBBF24"/>
+                </a:solidFill>
+              </a:defRPr>
+            </a:lvl5pPr>
+            <a:lvl6pPr>
+              <a:defRPr sz="1500" b="1">
+                <a:solidFill>
+                  <a:srgbClr val="FBBF24"/>
+                </a:solidFill>
+              </a:defRPr>
+            </a:lvl6pPr>
+            <a:lvl7pPr>
+              <a:defRPr sz="1500" b="1">
+                <a:solidFill>
+                  <a:srgbClr val="FBBF24"/>
+                </a:solidFill>
+              </a:defRPr>
+            </a:lvl7pPr>
+            <a:lvl8pPr>
+              <a:defRPr sz="1500" b="1">
+                <a:solidFill>
+                  <a:srgbClr val="FBBF24"/>
+                </a:solidFill>
+              </a:defRPr>
+            </a:lvl8pPr>
+            <a:lvl9pPr>
+              <a:defRPr sz="1500" b="1">
+                <a:solidFill>
+                  <a:srgbClr val="FBBF24"/>
+                </a:solidFill>
+              </a:defRPr>
+            </a:lvl9pPr>
           </a:lstStyle>
           <a:p xmlns:a="http://schemas.openxmlformats.org/drawingml/2006/main">
             <a:pPr>
@@ -4158,7 +5823,7 @@
           <p:cNvPr id="11" name="">
             <a:extLst xmlns:a="http://schemas.openxmlformats.org/drawingml/2006/main">
               <a:ext uri="{FF2B5EF4-FFF2-40B4-BE49-F238E27FC236}">
-                <a16:creationId xmlns:a16="http://schemas.microsoft.com/office/drawing/2014/main" id="{EDD34E56-0013-4DFA-AD07-C8EDAFB4A475}"/>
+                <a16:creationId xmlns:a16="http://schemas.microsoft.com/office/drawing/2014/main" id="{F207D55B-678D-4E20-B5FD-ECFAE138CB93}"/>
               </a:ext>
             </a:extLst>
           </p:cNvPr>
@@ -4191,6 +5856,69 @@
                 </a:solidFill>
               </a:defRPr>
             </a:defPPr>
+            <a:lvl1pPr>
+              <a:defRPr sz="1125" b="0">
+                <a:solidFill>
+                  <a:srgbClr val="94A3B8"/>
+                </a:solidFill>
+              </a:defRPr>
+            </a:lvl1pPr>
+            <a:lvl2pPr>
+              <a:defRPr sz="1125" b="0">
+                <a:solidFill>
+                  <a:srgbClr val="94A3B8"/>
+                </a:solidFill>
+              </a:defRPr>
+            </a:lvl2pPr>
+            <a:lvl3pPr>
+              <a:defRPr sz="1125" b="0">
+                <a:solidFill>
+                  <a:srgbClr val="94A3B8"/>
+                </a:solidFill>
+              </a:defRPr>
+            </a:lvl3pPr>
+            <a:lvl4pPr>
+              <a:defRPr sz="1125" b="0">
+                <a:solidFill>
+                  <a:srgbClr val="94A3B8"/>
+                </a:solidFill>
+              </a:defRPr>
+            </a:lvl4pPr>
+            <a:lvl5pPr>
+              <a:defRPr sz="1125" b="0">
+                <a:solidFill>
+                  <a:srgbClr val="94A3B8"/>
+                </a:solidFill>
+              </a:defRPr>
+            </a:lvl5pPr>
+            <a:lvl6pPr>
+              <a:defRPr sz="1125" b="0">
+                <a:solidFill>
+                  <a:srgbClr val="94A3B8"/>
+                </a:solidFill>
+              </a:defRPr>
+            </a:lvl6pPr>
+            <a:lvl7pPr>
+              <a:defRPr sz="1125" b="0">
+                <a:solidFill>
+                  <a:srgbClr val="94A3B8"/>
+                </a:solidFill>
+              </a:defRPr>
+            </a:lvl7pPr>
+            <a:lvl8pPr>
+              <a:defRPr sz="1125" b="0">
+                <a:solidFill>
+                  <a:srgbClr val="94A3B8"/>
+                </a:solidFill>
+              </a:defRPr>
+            </a:lvl8pPr>
+            <a:lvl9pPr>
+              <a:defRPr sz="1125" b="0">
+                <a:solidFill>
+                  <a:srgbClr val="94A3B8"/>
+                </a:solidFill>
+              </a:defRPr>
+            </a:lvl9pPr>
           </a:lstStyle>
           <a:p xmlns:a="http://schemas.openxmlformats.org/drawingml/2006/main">
             <a:pPr>
@@ -4216,7 +5944,7 @@
           <p:cNvPr id="12" name="">
             <a:extLst xmlns:a="http://schemas.openxmlformats.org/drawingml/2006/main">
               <a:ext uri="{FF2B5EF4-FFF2-40B4-BE49-F238E27FC236}">
-                <a16:creationId xmlns:a16="http://schemas.microsoft.com/office/drawing/2014/main" id="{5DE8B242-9BC3-44CD-B1C8-5B906C745174}"/>
+                <a16:creationId xmlns:a16="http://schemas.microsoft.com/office/drawing/2014/main" id="{2EE2DB79-27B2-43EC-B3CF-910CADE6FA5B}"/>
               </a:ext>
             </a:extLst>
           </p:cNvPr>
@@ -4249,6 +5977,69 @@
                 </a:solidFill>
               </a:defRPr>
             </a:defPPr>
+            <a:lvl1pPr>
+              <a:defRPr sz="1125" b="0">
+                <a:solidFill>
+                  <a:srgbClr val="94A3B8"/>
+                </a:solidFill>
+              </a:defRPr>
+            </a:lvl1pPr>
+            <a:lvl2pPr>
+              <a:defRPr sz="1125" b="0">
+                <a:solidFill>
+                  <a:srgbClr val="94A3B8"/>
+                </a:solidFill>
+              </a:defRPr>
+            </a:lvl2pPr>
+            <a:lvl3pPr>
+              <a:defRPr sz="1125" b="0">
+                <a:solidFill>
+                  <a:srgbClr val="94A3B8"/>
+                </a:solidFill>
+              </a:defRPr>
+            </a:lvl3pPr>
+            <a:lvl4pPr>
+              <a:defRPr sz="1125" b="0">
+                <a:solidFill>
+                  <a:srgbClr val="94A3B8"/>
+                </a:solidFill>
+              </a:defRPr>
+            </a:lvl4pPr>
+            <a:lvl5pPr>
+              <a:defRPr sz="1125" b="0">
+                <a:solidFill>
+                  <a:srgbClr val="94A3B8"/>
+                </a:solidFill>
+              </a:defRPr>
+            </a:lvl5pPr>
+            <a:lvl6pPr>
+              <a:defRPr sz="1125" b="0">
+                <a:solidFill>
+                  <a:srgbClr val="94A3B8"/>
+                </a:solidFill>
+              </a:defRPr>
+            </a:lvl6pPr>
+            <a:lvl7pPr>
+              <a:defRPr sz="1125" b="0">
+                <a:solidFill>
+                  <a:srgbClr val="94A3B8"/>
+                </a:solidFill>
+              </a:defRPr>
+            </a:lvl7pPr>
+            <a:lvl8pPr>
+              <a:defRPr sz="1125" b="0">
+                <a:solidFill>
+                  <a:srgbClr val="94A3B8"/>
+                </a:solidFill>
+              </a:defRPr>
+            </a:lvl8pPr>
+            <a:lvl9pPr>
+              <a:defRPr sz="1125" b="0">
+                <a:solidFill>
+                  <a:srgbClr val="94A3B8"/>
+                </a:solidFill>
+              </a:defRPr>
+            </a:lvl9pPr>
           </a:lstStyle>
           <a:p xmlns:a="http://schemas.openxmlformats.org/drawingml/2006/main">
             <a:pPr>
@@ -4272,7 +6063,7 @@
     </p:spTree>
     <p:extLst>
       <p:ext uri="{BB962C8B-B14F-4D97-AF65-F5344CB8AC3E}">
-        <p14:creationId xmlns:p14="http://schemas.microsoft.com/office/powerpoint/2010/main" val="1994569339"/>
+        <p14:creationId xmlns:p14="http://schemas.microsoft.com/office/powerpoint/2010/main" val="136851150"/>
       </p:ext>
     </p:extLst>
   </p:cSld>
@@ -4303,7 +6094,7 @@
           <p:cNvPr id="13" name="">
             <a:extLst xmlns:a="http://schemas.openxmlformats.org/drawingml/2006/main">
               <a:ext uri="{FF2B5EF4-FFF2-40B4-BE49-F238E27FC236}">
-                <a16:creationId xmlns:a16="http://schemas.microsoft.com/office/drawing/2014/main" id="{95A2655D-7B76-46B5-820E-653A6112590E}"/>
+                <a16:creationId xmlns:a16="http://schemas.microsoft.com/office/drawing/2014/main" id="{576ECB20-71C4-4EE9-9619-29474CF9D80B}"/>
               </a:ext>
             </a:extLst>
           </p:cNvPr>
@@ -4336,6 +6127,69 @@
                 </a:solidFill>
               </a:defRPr>
             </a:defPPr>
+            <a:lvl1pPr>
+              <a:defRPr sz="975" b="1">
+                <a:solidFill>
+                  <a:srgbClr val="0AC18E"/>
+                </a:solidFill>
+              </a:defRPr>
+            </a:lvl1pPr>
+            <a:lvl2pPr>
+              <a:defRPr sz="975" b="1">
+                <a:solidFill>
+                  <a:srgbClr val="0AC18E"/>
+                </a:solidFill>
+              </a:defRPr>
+            </a:lvl2pPr>
+            <a:lvl3pPr>
+              <a:defRPr sz="975" b="1">
+                <a:solidFill>
+                  <a:srgbClr val="0AC18E"/>
+                </a:solidFill>
+              </a:defRPr>
+            </a:lvl3pPr>
+            <a:lvl4pPr>
+              <a:defRPr sz="975" b="1">
+                <a:solidFill>
+                  <a:srgbClr val="0AC18E"/>
+                </a:solidFill>
+              </a:defRPr>
+            </a:lvl4pPr>
+            <a:lvl5pPr>
+              <a:defRPr sz="975" b="1">
+                <a:solidFill>
+                  <a:srgbClr val="0AC18E"/>
+                </a:solidFill>
+              </a:defRPr>
+            </a:lvl5pPr>
+            <a:lvl6pPr>
+              <a:defRPr sz="975" b="1">
+                <a:solidFill>
+                  <a:srgbClr val="0AC18E"/>
+                </a:solidFill>
+              </a:defRPr>
+            </a:lvl6pPr>
+            <a:lvl7pPr>
+              <a:defRPr sz="975" b="1">
+                <a:solidFill>
+                  <a:srgbClr val="0AC18E"/>
+                </a:solidFill>
+              </a:defRPr>
+            </a:lvl7pPr>
+            <a:lvl8pPr>
+              <a:defRPr sz="975" b="1">
+                <a:solidFill>
+                  <a:srgbClr val="0AC18E"/>
+                </a:solidFill>
+              </a:defRPr>
+            </a:lvl8pPr>
+            <a:lvl9pPr>
+              <a:defRPr sz="975" b="1">
+                <a:solidFill>
+                  <a:srgbClr val="0AC18E"/>
+                </a:solidFill>
+              </a:defRPr>
+            </a:lvl9pPr>
           </a:lstStyle>
           <a:p xmlns:a="http://schemas.openxmlformats.org/drawingml/2006/main">
             <a:pPr>
@@ -4361,7 +6215,7 @@
           <p:cNvPr id="2" name="">
             <a:extLst xmlns:a="http://schemas.openxmlformats.org/drawingml/2006/main">
               <a:ext uri="{FF2B5EF4-FFF2-40B4-BE49-F238E27FC236}">
-                <a16:creationId xmlns:a16="http://schemas.microsoft.com/office/drawing/2014/main" id="{05F6E342-6C7D-4221-B958-847B460BEF1C}"/>
+                <a16:creationId xmlns:a16="http://schemas.microsoft.com/office/drawing/2014/main" id="{C5E8297B-6CF1-4392-A890-3E94DC5D7E81}"/>
               </a:ext>
             </a:extLst>
           </p:cNvPr>
@@ -4394,6 +6248,69 @@
                 </a:solidFill>
               </a:defRPr>
             </a:defPPr>
+            <a:lvl1pPr>
+              <a:defRPr sz="2100" b="1">
+                <a:solidFill>
+                  <a:srgbClr val="F1F5F9"/>
+                </a:solidFill>
+              </a:defRPr>
+            </a:lvl1pPr>
+            <a:lvl2pPr>
+              <a:defRPr sz="2100" b="1">
+                <a:solidFill>
+                  <a:srgbClr val="F1F5F9"/>
+                </a:solidFill>
+              </a:defRPr>
+            </a:lvl2pPr>
+            <a:lvl3pPr>
+              <a:defRPr sz="2100" b="1">
+                <a:solidFill>
+                  <a:srgbClr val="F1F5F9"/>
+                </a:solidFill>
+              </a:defRPr>
+            </a:lvl3pPr>
+            <a:lvl4pPr>
+              <a:defRPr sz="2100" b="1">
+                <a:solidFill>
+                  <a:srgbClr val="F1F5F9"/>
+                </a:solidFill>
+              </a:defRPr>
+            </a:lvl4pPr>
+            <a:lvl5pPr>
+              <a:defRPr sz="2100" b="1">
+                <a:solidFill>
+                  <a:srgbClr val="F1F5F9"/>
+                </a:solidFill>
+              </a:defRPr>
+            </a:lvl5pPr>
+            <a:lvl6pPr>
+              <a:defRPr sz="2100" b="1">
+                <a:solidFill>
+                  <a:srgbClr val="F1F5F9"/>
+                </a:solidFill>
+              </a:defRPr>
+            </a:lvl6pPr>
+            <a:lvl7pPr>
+              <a:defRPr sz="2100" b="1">
+                <a:solidFill>
+                  <a:srgbClr val="F1F5F9"/>
+                </a:solidFill>
+              </a:defRPr>
+            </a:lvl7pPr>
+            <a:lvl8pPr>
+              <a:defRPr sz="2100" b="1">
+                <a:solidFill>
+                  <a:srgbClr val="F1F5F9"/>
+                </a:solidFill>
+              </a:defRPr>
+            </a:lvl8pPr>
+            <a:lvl9pPr>
+              <a:defRPr sz="2100" b="1">
+                <a:solidFill>
+                  <a:srgbClr val="F1F5F9"/>
+                </a:solidFill>
+              </a:defRPr>
+            </a:lvl9pPr>
           </a:lstStyle>
           <a:p xmlns:a="http://schemas.openxmlformats.org/drawingml/2006/main">
             <a:pPr>
@@ -4409,7 +6326,7 @@
                   <a:srgbClr val="F1F5F9"/>
                 </a:solidFill>
               </a:rPr>
-              <a:t>Contractors, creators and vendors are paid in lumps - late, custodial, or both.</a:t>
+              <a:t>AI agents and payroll share the same trust gap: a wallet can spend everything it can reach.</a:t>
             </a:r>
           </a:p>
         </p:txBody>
@@ -4419,7 +6336,7 @@
           <p:cNvPr id="3" name="">
             <a:extLst xmlns:a="http://schemas.openxmlformats.org/drawingml/2006/main">
               <a:ext uri="{FF2B5EF4-FFF2-40B4-BE49-F238E27FC236}">
-                <a16:creationId xmlns:a16="http://schemas.microsoft.com/office/drawing/2014/main" id="{9823702A-7457-426B-A0CF-1BD76B23ABA8}"/>
+                <a16:creationId xmlns:a16="http://schemas.microsoft.com/office/drawing/2014/main" id="{CC7FF40D-C9E5-46A9-90F8-D310C78723E7}"/>
               </a:ext>
             </a:extLst>
           </p:cNvPr>
@@ -4454,7 +6371,7 @@
           <p:cNvPr id="4" name="">
             <a:extLst xmlns:a="http://schemas.openxmlformats.org/drawingml/2006/main">
               <a:ext uri="{FF2B5EF4-FFF2-40B4-BE49-F238E27FC236}">
-                <a16:creationId xmlns:a16="http://schemas.microsoft.com/office/drawing/2014/main" id="{5CAF867B-1007-4DDE-9777-756B89E1AC4A}"/>
+                <a16:creationId xmlns:a16="http://schemas.microsoft.com/office/drawing/2014/main" id="{427E999E-1547-443D-A976-6DB027F09067}"/>
               </a:ext>
             </a:extLst>
           </p:cNvPr>
@@ -4487,6 +6404,69 @@
                 </a:solidFill>
               </a:defRPr>
             </a:defPPr>
+            <a:lvl1pPr>
+              <a:defRPr sz="1500" b="1">
+                <a:solidFill>
+                  <a:srgbClr val="FB7185"/>
+                </a:solidFill>
+              </a:defRPr>
+            </a:lvl1pPr>
+            <a:lvl2pPr>
+              <a:defRPr sz="1500" b="1">
+                <a:solidFill>
+                  <a:srgbClr val="FB7185"/>
+                </a:solidFill>
+              </a:defRPr>
+            </a:lvl2pPr>
+            <a:lvl3pPr>
+              <a:defRPr sz="1500" b="1">
+                <a:solidFill>
+                  <a:srgbClr val="FB7185"/>
+                </a:solidFill>
+              </a:defRPr>
+            </a:lvl3pPr>
+            <a:lvl4pPr>
+              <a:defRPr sz="1500" b="1">
+                <a:solidFill>
+                  <a:srgbClr val="FB7185"/>
+                </a:solidFill>
+              </a:defRPr>
+            </a:lvl4pPr>
+            <a:lvl5pPr>
+              <a:defRPr sz="1500" b="1">
+                <a:solidFill>
+                  <a:srgbClr val="FB7185"/>
+                </a:solidFill>
+              </a:defRPr>
+            </a:lvl5pPr>
+            <a:lvl6pPr>
+              <a:defRPr sz="1500" b="1">
+                <a:solidFill>
+                  <a:srgbClr val="FB7185"/>
+                </a:solidFill>
+              </a:defRPr>
+            </a:lvl6pPr>
+            <a:lvl7pPr>
+              <a:defRPr sz="1500" b="1">
+                <a:solidFill>
+                  <a:srgbClr val="FB7185"/>
+                </a:solidFill>
+              </a:defRPr>
+            </a:lvl7pPr>
+            <a:lvl8pPr>
+              <a:defRPr sz="1500" b="1">
+                <a:solidFill>
+                  <a:srgbClr val="FB7185"/>
+                </a:solidFill>
+              </a:defRPr>
+            </a:lvl8pPr>
+            <a:lvl9pPr>
+              <a:defRPr sz="1500" b="1">
+                <a:solidFill>
+                  <a:srgbClr val="FB7185"/>
+                </a:solidFill>
+              </a:defRPr>
+            </a:lvl9pPr>
           </a:lstStyle>
           <a:p xmlns:a="http://schemas.openxmlformats.org/drawingml/2006/main">
             <a:pPr>
@@ -4502,7 +6482,7 @@
                   <a:srgbClr val="FB7185"/>
                 </a:solidFill>
               </a:rPr>
-              <a:t>Cards &amp; mandates</a:t>
+              <a:t>Runaway agents</a:t>
             </a:r>
           </a:p>
         </p:txBody>
@@ -4512,7 +6492,7 @@
           <p:cNvPr id="5" name="">
             <a:extLst xmlns:a="http://schemas.openxmlformats.org/drawingml/2006/main">
               <a:ext uri="{FF2B5EF4-FFF2-40B4-BE49-F238E27FC236}">
-                <a16:creationId xmlns:a16="http://schemas.microsoft.com/office/drawing/2014/main" id="{41ABDA7B-0538-4B20-B0F5-609781E08A9A}"/>
+                <a16:creationId xmlns:a16="http://schemas.microsoft.com/office/drawing/2014/main" id="{89F65132-ABEA-4298-816B-F857A6A4002C}"/>
               </a:ext>
             </a:extLst>
           </p:cNvPr>
@@ -4545,6 +6525,69 @@
                 </a:solidFill>
               </a:defRPr>
             </a:defPPr>
+            <a:lvl1pPr>
+              <a:defRPr sz="1200" b="0">
+                <a:solidFill>
+                  <a:srgbClr val="94A3B8"/>
+                </a:solidFill>
+              </a:defRPr>
+            </a:lvl1pPr>
+            <a:lvl2pPr>
+              <a:defRPr sz="1200" b="0">
+                <a:solidFill>
+                  <a:srgbClr val="94A3B8"/>
+                </a:solidFill>
+              </a:defRPr>
+            </a:lvl2pPr>
+            <a:lvl3pPr>
+              <a:defRPr sz="1200" b="0">
+                <a:solidFill>
+                  <a:srgbClr val="94A3B8"/>
+                </a:solidFill>
+              </a:defRPr>
+            </a:lvl3pPr>
+            <a:lvl4pPr>
+              <a:defRPr sz="1200" b="0">
+                <a:solidFill>
+                  <a:srgbClr val="94A3B8"/>
+                </a:solidFill>
+              </a:defRPr>
+            </a:lvl4pPr>
+            <a:lvl5pPr>
+              <a:defRPr sz="1200" b="0">
+                <a:solidFill>
+                  <a:srgbClr val="94A3B8"/>
+                </a:solidFill>
+              </a:defRPr>
+            </a:lvl5pPr>
+            <a:lvl6pPr>
+              <a:defRPr sz="1200" b="0">
+                <a:solidFill>
+                  <a:srgbClr val="94A3B8"/>
+                </a:solidFill>
+              </a:defRPr>
+            </a:lvl6pPr>
+            <a:lvl7pPr>
+              <a:defRPr sz="1200" b="0">
+                <a:solidFill>
+                  <a:srgbClr val="94A3B8"/>
+                </a:solidFill>
+              </a:defRPr>
+            </a:lvl7pPr>
+            <a:lvl8pPr>
+              <a:defRPr sz="1200" b="0">
+                <a:solidFill>
+                  <a:srgbClr val="94A3B8"/>
+                </a:solidFill>
+              </a:defRPr>
+            </a:lvl8pPr>
+            <a:lvl9pPr>
+              <a:defRPr sz="1200" b="0">
+                <a:solidFill>
+                  <a:srgbClr val="94A3B8"/>
+                </a:solidFill>
+              </a:defRPr>
+            </a:lvl9pPr>
           </a:lstStyle>
           <a:p xmlns:a="http://schemas.openxmlformats.org/drawingml/2006/main">
             <a:pPr>
@@ -4560,7 +6603,7 @@
                   <a:srgbClr val="94A3B8"/>
                 </a:solidFill>
               </a:rPr>
-              <a:t>Custodial, reversible, geo-fenced.</a:t>
+              <a:t>A loop or prompt injection can drain an API key or wallet.</a:t>
             </a:r>
           </a:p>
         </p:txBody>
@@ -4570,7 +6613,7 @@
           <p:cNvPr id="6" name="">
             <a:extLst xmlns:a="http://schemas.openxmlformats.org/drawingml/2006/main">
               <a:ext uri="{FF2B5EF4-FFF2-40B4-BE49-F238E27FC236}">
-                <a16:creationId xmlns:a16="http://schemas.microsoft.com/office/drawing/2014/main" id="{FBA2F2A8-18EB-4B27-9563-19B85B801820}"/>
+                <a16:creationId xmlns:a16="http://schemas.microsoft.com/office/drawing/2014/main" id="{61F13A24-B845-4FDC-B980-46800FB34954}"/>
               </a:ext>
             </a:extLst>
           </p:cNvPr>
@@ -4605,7 +6648,7 @@
           <p:cNvPr id="7" name="">
             <a:extLst xmlns:a="http://schemas.openxmlformats.org/drawingml/2006/main">
               <a:ext uri="{FF2B5EF4-FFF2-40B4-BE49-F238E27FC236}">
-                <a16:creationId xmlns:a16="http://schemas.microsoft.com/office/drawing/2014/main" id="{C5DE0680-C3CD-4D1B-A34C-73C259684DC2}"/>
+                <a16:creationId xmlns:a16="http://schemas.microsoft.com/office/drawing/2014/main" id="{B4496532-C93F-4F30-9C98-EA8EC6938D74}"/>
               </a:ext>
             </a:extLst>
           </p:cNvPr>
@@ -4638,6 +6681,69 @@
                 </a:solidFill>
               </a:defRPr>
             </a:defPPr>
+            <a:lvl1pPr>
+              <a:defRPr sz="1500" b="1">
+                <a:solidFill>
+                  <a:srgbClr val="FB7185"/>
+                </a:solidFill>
+              </a:defRPr>
+            </a:lvl1pPr>
+            <a:lvl2pPr>
+              <a:defRPr sz="1500" b="1">
+                <a:solidFill>
+                  <a:srgbClr val="FB7185"/>
+                </a:solidFill>
+              </a:defRPr>
+            </a:lvl2pPr>
+            <a:lvl3pPr>
+              <a:defRPr sz="1500" b="1">
+                <a:solidFill>
+                  <a:srgbClr val="FB7185"/>
+                </a:solidFill>
+              </a:defRPr>
+            </a:lvl3pPr>
+            <a:lvl4pPr>
+              <a:defRPr sz="1500" b="1">
+                <a:solidFill>
+                  <a:srgbClr val="FB7185"/>
+                </a:solidFill>
+              </a:defRPr>
+            </a:lvl4pPr>
+            <a:lvl5pPr>
+              <a:defRPr sz="1500" b="1">
+                <a:solidFill>
+                  <a:srgbClr val="FB7185"/>
+                </a:solidFill>
+              </a:defRPr>
+            </a:lvl5pPr>
+            <a:lvl6pPr>
+              <a:defRPr sz="1500" b="1">
+                <a:solidFill>
+                  <a:srgbClr val="FB7185"/>
+                </a:solidFill>
+              </a:defRPr>
+            </a:lvl6pPr>
+            <a:lvl7pPr>
+              <a:defRPr sz="1500" b="1">
+                <a:solidFill>
+                  <a:srgbClr val="FB7185"/>
+                </a:solidFill>
+              </a:defRPr>
+            </a:lvl7pPr>
+            <a:lvl8pPr>
+              <a:defRPr sz="1500" b="1">
+                <a:solidFill>
+                  <a:srgbClr val="FB7185"/>
+                </a:solidFill>
+              </a:defRPr>
+            </a:lvl8pPr>
+            <a:lvl9pPr>
+              <a:defRPr sz="1500" b="1">
+                <a:solidFill>
+                  <a:srgbClr val="FB7185"/>
+                </a:solidFill>
+              </a:defRPr>
+            </a:lvl9pPr>
           </a:lstStyle>
           <a:p xmlns:a="http://schemas.openxmlformats.org/drawingml/2006/main">
             <a:pPr>
@@ -4653,7 +6759,7 @@
                   <a:srgbClr val="FB7185"/>
                 </a:solidFill>
               </a:rPr>
-              <a:t>Lump-sum crypto</a:t>
+              <a:t>Lump-sum payroll</a:t>
             </a:r>
           </a:p>
         </p:txBody>
@@ -4663,7 +6769,7 @@
           <p:cNvPr id="8" name="">
             <a:extLst xmlns:a="http://schemas.openxmlformats.org/drawingml/2006/main">
               <a:ext uri="{FF2B5EF4-FFF2-40B4-BE49-F238E27FC236}">
-                <a16:creationId xmlns:a16="http://schemas.microsoft.com/office/drawing/2014/main" id="{5EBC41F9-4536-4D29-B4C8-F6DF1CAC74F2}"/>
+                <a16:creationId xmlns:a16="http://schemas.microsoft.com/office/drawing/2014/main" id="{C6755382-900B-4B90-9F1D-EF143DFFA30E}"/>
               </a:ext>
             </a:extLst>
           </p:cNvPr>
@@ -4696,6 +6802,69 @@
                 </a:solidFill>
               </a:defRPr>
             </a:defPPr>
+            <a:lvl1pPr>
+              <a:defRPr sz="1200" b="0">
+                <a:solidFill>
+                  <a:srgbClr val="94A3B8"/>
+                </a:solidFill>
+              </a:defRPr>
+            </a:lvl1pPr>
+            <a:lvl2pPr>
+              <a:defRPr sz="1200" b="0">
+                <a:solidFill>
+                  <a:srgbClr val="94A3B8"/>
+                </a:solidFill>
+              </a:defRPr>
+            </a:lvl2pPr>
+            <a:lvl3pPr>
+              <a:defRPr sz="1200" b="0">
+                <a:solidFill>
+                  <a:srgbClr val="94A3B8"/>
+                </a:solidFill>
+              </a:defRPr>
+            </a:lvl3pPr>
+            <a:lvl4pPr>
+              <a:defRPr sz="1200" b="0">
+                <a:solidFill>
+                  <a:srgbClr val="94A3B8"/>
+                </a:solidFill>
+              </a:defRPr>
+            </a:lvl4pPr>
+            <a:lvl5pPr>
+              <a:defRPr sz="1200" b="0">
+                <a:solidFill>
+                  <a:srgbClr val="94A3B8"/>
+                </a:solidFill>
+              </a:defRPr>
+            </a:lvl5pPr>
+            <a:lvl6pPr>
+              <a:defRPr sz="1200" b="0">
+                <a:solidFill>
+                  <a:srgbClr val="94A3B8"/>
+                </a:solidFill>
+              </a:defRPr>
+            </a:lvl6pPr>
+            <a:lvl7pPr>
+              <a:defRPr sz="1200" b="0">
+                <a:solidFill>
+                  <a:srgbClr val="94A3B8"/>
+                </a:solidFill>
+              </a:defRPr>
+            </a:lvl7pPr>
+            <a:lvl8pPr>
+              <a:defRPr sz="1200" b="0">
+                <a:solidFill>
+                  <a:srgbClr val="94A3B8"/>
+                </a:solidFill>
+              </a:defRPr>
+            </a:lvl8pPr>
+            <a:lvl9pPr>
+              <a:defRPr sz="1200" b="0">
+                <a:solidFill>
+                  <a:srgbClr val="94A3B8"/>
+                </a:solidFill>
+              </a:defRPr>
+            </a:lvl9pPr>
           </a:lstStyle>
           <a:p xmlns:a="http://schemas.openxmlformats.org/drawingml/2006/main">
             <a:pPr>
@@ -4711,7 +6880,7 @@
                   <a:srgbClr val="94A3B8"/>
                 </a:solidFill>
               </a:rPr>
-              <a:t>No schedule; all-or-nothing.</a:t>
+              <a:t>Payees wait; payers over-commit; custodians sit in the middle.</a:t>
             </a:r>
           </a:p>
         </p:txBody>
@@ -4721,7 +6890,7 @@
           <p:cNvPr id="9" name="">
             <a:extLst xmlns:a="http://schemas.openxmlformats.org/drawingml/2006/main">
               <a:ext uri="{FF2B5EF4-FFF2-40B4-BE49-F238E27FC236}">
-                <a16:creationId xmlns:a16="http://schemas.microsoft.com/office/drawing/2014/main" id="{7BA19CB8-3D8A-4A73-8DCC-F20700F67E5A}"/>
+                <a16:creationId xmlns:a16="http://schemas.microsoft.com/office/drawing/2014/main" id="{B4F7C96F-99EC-402E-AED1-650C0F3560E3}"/>
               </a:ext>
             </a:extLst>
           </p:cNvPr>
@@ -4756,7 +6925,7 @@
           <p:cNvPr id="10" name="">
             <a:extLst xmlns:a="http://schemas.openxmlformats.org/drawingml/2006/main">
               <a:ext uri="{FF2B5EF4-FFF2-40B4-BE49-F238E27FC236}">
-                <a16:creationId xmlns:a16="http://schemas.microsoft.com/office/drawing/2014/main" id="{01D7FECC-D1BB-4161-9E53-E3FC16ACFFDD}"/>
+                <a16:creationId xmlns:a16="http://schemas.microsoft.com/office/drawing/2014/main" id="{BE7042EC-387B-4DE1-A8DB-662C76D103EE}"/>
               </a:ext>
             </a:extLst>
           </p:cNvPr>
@@ -4789,6 +6958,69 @@
                 </a:solidFill>
               </a:defRPr>
             </a:defPPr>
+            <a:lvl1pPr>
+              <a:defRPr sz="1500" b="1">
+                <a:solidFill>
+                  <a:srgbClr val="FB7185"/>
+                </a:solidFill>
+              </a:defRPr>
+            </a:lvl1pPr>
+            <a:lvl2pPr>
+              <a:defRPr sz="1500" b="1">
+                <a:solidFill>
+                  <a:srgbClr val="FB7185"/>
+                </a:solidFill>
+              </a:defRPr>
+            </a:lvl2pPr>
+            <a:lvl3pPr>
+              <a:defRPr sz="1500" b="1">
+                <a:solidFill>
+                  <a:srgbClr val="FB7185"/>
+                </a:solidFill>
+              </a:defRPr>
+            </a:lvl3pPr>
+            <a:lvl4pPr>
+              <a:defRPr sz="1500" b="1">
+                <a:solidFill>
+                  <a:srgbClr val="FB7185"/>
+                </a:solidFill>
+              </a:defRPr>
+            </a:lvl4pPr>
+            <a:lvl5pPr>
+              <a:defRPr sz="1500" b="1">
+                <a:solidFill>
+                  <a:srgbClr val="FB7185"/>
+                </a:solidFill>
+              </a:defRPr>
+            </a:lvl5pPr>
+            <a:lvl6pPr>
+              <a:defRPr sz="1500" b="1">
+                <a:solidFill>
+                  <a:srgbClr val="FB7185"/>
+                </a:solidFill>
+              </a:defRPr>
+            </a:lvl6pPr>
+            <a:lvl7pPr>
+              <a:defRPr sz="1500" b="1">
+                <a:solidFill>
+                  <a:srgbClr val="FB7185"/>
+                </a:solidFill>
+              </a:defRPr>
+            </a:lvl7pPr>
+            <a:lvl8pPr>
+              <a:defRPr sz="1500" b="1">
+                <a:solidFill>
+                  <a:srgbClr val="FB7185"/>
+                </a:solidFill>
+              </a:defRPr>
+            </a:lvl8pPr>
+            <a:lvl9pPr>
+              <a:defRPr sz="1500" b="1">
+                <a:solidFill>
+                  <a:srgbClr val="FB7185"/>
+                </a:solidFill>
+              </a:defRPr>
+            </a:lvl9pPr>
           </a:lstStyle>
           <a:p xmlns:a="http://schemas.openxmlformats.org/drawingml/2006/main">
             <a:pPr>
@@ -4804,7 +7036,7 @@
                   <a:srgbClr val="FB7185"/>
                 </a:solidFill>
               </a:rPr>
-              <a:t>Streaming on EVM</a:t>
+              <a:t>EVM service calls</a:t>
             </a:r>
           </a:p>
         </p:txBody>
@@ -4814,7 +7046,7 @@
           <p:cNvPr id="11" name="">
             <a:extLst xmlns:a="http://schemas.openxmlformats.org/drawingml/2006/main">
               <a:ext uri="{FF2B5EF4-FFF2-40B4-BE49-F238E27FC236}">
-                <a16:creationId xmlns:a16="http://schemas.microsoft.com/office/drawing/2014/main" id="{5F30A69D-960C-4827-BCBB-D73AD7C71A3A}"/>
+                <a16:creationId xmlns:a16="http://schemas.microsoft.com/office/drawing/2014/main" id="{5341D762-5259-4416-BF43-E441B4A28693}"/>
               </a:ext>
             </a:extLst>
           </p:cNvPr>
@@ -4847,6 +7079,69 @@
                 </a:solidFill>
               </a:defRPr>
             </a:defPPr>
+            <a:lvl1pPr>
+              <a:defRPr sz="1200" b="0">
+                <a:solidFill>
+                  <a:srgbClr val="94A3B8"/>
+                </a:solidFill>
+              </a:defRPr>
+            </a:lvl1pPr>
+            <a:lvl2pPr>
+              <a:defRPr sz="1200" b="0">
+                <a:solidFill>
+                  <a:srgbClr val="94A3B8"/>
+                </a:solidFill>
+              </a:defRPr>
+            </a:lvl2pPr>
+            <a:lvl3pPr>
+              <a:defRPr sz="1200" b="0">
+                <a:solidFill>
+                  <a:srgbClr val="94A3B8"/>
+                </a:solidFill>
+              </a:defRPr>
+            </a:lvl3pPr>
+            <a:lvl4pPr>
+              <a:defRPr sz="1200" b="0">
+                <a:solidFill>
+                  <a:srgbClr val="94A3B8"/>
+                </a:solidFill>
+              </a:defRPr>
+            </a:lvl4pPr>
+            <a:lvl5pPr>
+              <a:defRPr sz="1200" b="0">
+                <a:solidFill>
+                  <a:srgbClr val="94A3B8"/>
+                </a:solidFill>
+              </a:defRPr>
+            </a:lvl5pPr>
+            <a:lvl6pPr>
+              <a:defRPr sz="1200" b="0">
+                <a:solidFill>
+                  <a:srgbClr val="94A3B8"/>
+                </a:solidFill>
+              </a:defRPr>
+            </a:lvl6pPr>
+            <a:lvl7pPr>
+              <a:defRPr sz="1200" b="0">
+                <a:solidFill>
+                  <a:srgbClr val="94A3B8"/>
+                </a:solidFill>
+              </a:defRPr>
+            </a:lvl7pPr>
+            <a:lvl8pPr>
+              <a:defRPr sz="1200" b="0">
+                <a:solidFill>
+                  <a:srgbClr val="94A3B8"/>
+                </a:solidFill>
+              </a:defRPr>
+            </a:lvl8pPr>
+            <a:lvl9pPr>
+              <a:defRPr sz="1200" b="0">
+                <a:solidFill>
+                  <a:srgbClr val="94A3B8"/>
+                </a:solidFill>
+              </a:defRPr>
+            </a:lvl9pPr>
           </a:lstStyle>
           <a:p xmlns:a="http://schemas.openxmlformats.org/drawingml/2006/main">
             <a:pPr>
@@ -4862,7 +7157,7 @@
                   <a:srgbClr val="94A3B8"/>
                 </a:solidFill>
               </a:rPr>
-              <a:t>Gas exceeds the tranche.</a:t>
+              <a:t>Gas exceeds a 0.01 USD payment.</a:t>
             </a:r>
           </a:p>
         </p:txBody>
@@ -4872,7 +7167,7 @@
           <p:cNvPr id="12" name="">
             <a:extLst xmlns:a="http://schemas.openxmlformats.org/drawingml/2006/main">
               <a:ext uri="{FF2B5EF4-FFF2-40B4-BE49-F238E27FC236}">
-                <a16:creationId xmlns:a16="http://schemas.microsoft.com/office/drawing/2014/main" id="{2C0C282E-D888-48D1-963C-96AAB35D26AB}"/>
+                <a16:creationId xmlns:a16="http://schemas.microsoft.com/office/drawing/2014/main" id="{C99B69AD-333A-4414-AC18-79BF5505A1B5}"/>
               </a:ext>
             </a:extLst>
           </p:cNvPr>
@@ -4905,6 +7200,69 @@
                 </a:solidFill>
               </a:defRPr>
             </a:defPPr>
+            <a:lvl1pPr>
+              <a:defRPr sz="1500" b="1">
+                <a:solidFill>
+                  <a:srgbClr val="0AC18E"/>
+                </a:solidFill>
+              </a:defRPr>
+            </a:lvl1pPr>
+            <a:lvl2pPr>
+              <a:defRPr sz="1500" b="1">
+                <a:solidFill>
+                  <a:srgbClr val="0AC18E"/>
+                </a:solidFill>
+              </a:defRPr>
+            </a:lvl2pPr>
+            <a:lvl3pPr>
+              <a:defRPr sz="1500" b="1">
+                <a:solidFill>
+                  <a:srgbClr val="0AC18E"/>
+                </a:solidFill>
+              </a:defRPr>
+            </a:lvl3pPr>
+            <a:lvl4pPr>
+              <a:defRPr sz="1500" b="1">
+                <a:solidFill>
+                  <a:srgbClr val="0AC18E"/>
+                </a:solidFill>
+              </a:defRPr>
+            </a:lvl4pPr>
+            <a:lvl5pPr>
+              <a:defRPr sz="1500" b="1">
+                <a:solidFill>
+                  <a:srgbClr val="0AC18E"/>
+                </a:solidFill>
+              </a:defRPr>
+            </a:lvl5pPr>
+            <a:lvl6pPr>
+              <a:defRPr sz="1500" b="1">
+                <a:solidFill>
+                  <a:srgbClr val="0AC18E"/>
+                </a:solidFill>
+              </a:defRPr>
+            </a:lvl6pPr>
+            <a:lvl7pPr>
+              <a:defRPr sz="1500" b="1">
+                <a:solidFill>
+                  <a:srgbClr val="0AC18E"/>
+                </a:solidFill>
+              </a:defRPr>
+            </a:lvl7pPr>
+            <a:lvl8pPr>
+              <a:defRPr sz="1500" b="1">
+                <a:solidFill>
+                  <a:srgbClr val="0AC18E"/>
+                </a:solidFill>
+              </a:defRPr>
+            </a:lvl8pPr>
+            <a:lvl9pPr>
+              <a:defRPr sz="1500" b="1">
+                <a:solidFill>
+                  <a:srgbClr val="0AC18E"/>
+                </a:solidFill>
+              </a:defRPr>
+            </a:lvl9pPr>
           </a:lstStyle>
           <a:p xmlns:a="http://schemas.openxmlformats.org/drawingml/2006/main">
             <a:pPr>
@@ -4928,7 +7286,7 @@
     </p:spTree>
     <p:extLst>
       <p:ext uri="{BB962C8B-B14F-4D97-AF65-F5344CB8AC3E}">
-        <p14:creationId xmlns:p14="http://schemas.microsoft.com/office/powerpoint/2010/main" val="866723601"/>
+        <p14:creationId xmlns:p14="http://schemas.microsoft.com/office/powerpoint/2010/main" val="188871036"/>
       </p:ext>
     </p:extLst>
   </p:cSld>
@@ -4959,7 +7317,7 @@
           <p:cNvPr id="15" name="">
             <a:extLst xmlns:a="http://schemas.openxmlformats.org/drawingml/2006/main">
               <a:ext uri="{FF2B5EF4-FFF2-40B4-BE49-F238E27FC236}">
-                <a16:creationId xmlns:a16="http://schemas.microsoft.com/office/drawing/2014/main" id="{AC749316-A4D4-4FA1-9148-BAD8624302E7}"/>
+                <a16:creationId xmlns:a16="http://schemas.microsoft.com/office/drawing/2014/main" id="{D9BDE69E-9A2B-48DD-97FB-B867E2666EB1}"/>
               </a:ext>
             </a:extLst>
           </p:cNvPr>
@@ -4992,6 +7350,69 @@
                 </a:solidFill>
               </a:defRPr>
             </a:defPPr>
+            <a:lvl1pPr>
+              <a:defRPr sz="975" b="1">
+                <a:solidFill>
+                  <a:srgbClr val="0AC18E"/>
+                </a:solidFill>
+              </a:defRPr>
+            </a:lvl1pPr>
+            <a:lvl2pPr>
+              <a:defRPr sz="975" b="1">
+                <a:solidFill>
+                  <a:srgbClr val="0AC18E"/>
+                </a:solidFill>
+              </a:defRPr>
+            </a:lvl2pPr>
+            <a:lvl3pPr>
+              <a:defRPr sz="975" b="1">
+                <a:solidFill>
+                  <a:srgbClr val="0AC18E"/>
+                </a:solidFill>
+              </a:defRPr>
+            </a:lvl3pPr>
+            <a:lvl4pPr>
+              <a:defRPr sz="975" b="1">
+                <a:solidFill>
+                  <a:srgbClr val="0AC18E"/>
+                </a:solidFill>
+              </a:defRPr>
+            </a:lvl4pPr>
+            <a:lvl5pPr>
+              <a:defRPr sz="975" b="1">
+                <a:solidFill>
+                  <a:srgbClr val="0AC18E"/>
+                </a:solidFill>
+              </a:defRPr>
+            </a:lvl5pPr>
+            <a:lvl6pPr>
+              <a:defRPr sz="975" b="1">
+                <a:solidFill>
+                  <a:srgbClr val="0AC18E"/>
+                </a:solidFill>
+              </a:defRPr>
+            </a:lvl6pPr>
+            <a:lvl7pPr>
+              <a:defRPr sz="975" b="1">
+                <a:solidFill>
+                  <a:srgbClr val="0AC18E"/>
+                </a:solidFill>
+              </a:defRPr>
+            </a:lvl7pPr>
+            <a:lvl8pPr>
+              <a:defRPr sz="975" b="1">
+                <a:solidFill>
+                  <a:srgbClr val="0AC18E"/>
+                </a:solidFill>
+              </a:defRPr>
+            </a:lvl8pPr>
+            <a:lvl9pPr>
+              <a:defRPr sz="975" b="1">
+                <a:solidFill>
+                  <a:srgbClr val="0AC18E"/>
+                </a:solidFill>
+              </a:defRPr>
+            </a:lvl9pPr>
           </a:lstStyle>
           <a:p xmlns:a="http://schemas.openxmlformats.org/drawingml/2006/main">
             <a:pPr>
@@ -5017,7 +7438,7 @@
           <p:cNvPr id="2" name="">
             <a:extLst xmlns:a="http://schemas.openxmlformats.org/drawingml/2006/main">
               <a:ext uri="{FF2B5EF4-FFF2-40B4-BE49-F238E27FC236}">
-                <a16:creationId xmlns:a16="http://schemas.microsoft.com/office/drawing/2014/main" id="{BA6EA689-2161-440F-9A30-A2606EE37CBB}"/>
+                <a16:creationId xmlns:a16="http://schemas.microsoft.com/office/drawing/2014/main" id="{22C91821-7CDD-4BDF-ACE1-506E59F12201}"/>
               </a:ext>
             </a:extLst>
           </p:cNvPr>
@@ -5050,6 +7471,69 @@
                 </a:solidFill>
               </a:defRPr>
             </a:defPPr>
+            <a:lvl1pPr>
+              <a:defRPr sz="2250" b="1">
+                <a:solidFill>
+                  <a:srgbClr val="F1F5F9"/>
+                </a:solidFill>
+              </a:defRPr>
+            </a:lvl1pPr>
+            <a:lvl2pPr>
+              <a:defRPr sz="2250" b="1">
+                <a:solidFill>
+                  <a:srgbClr val="F1F5F9"/>
+                </a:solidFill>
+              </a:defRPr>
+            </a:lvl2pPr>
+            <a:lvl3pPr>
+              <a:defRPr sz="2250" b="1">
+                <a:solidFill>
+                  <a:srgbClr val="F1F5F9"/>
+                </a:solidFill>
+              </a:defRPr>
+            </a:lvl3pPr>
+            <a:lvl4pPr>
+              <a:defRPr sz="2250" b="1">
+                <a:solidFill>
+                  <a:srgbClr val="F1F5F9"/>
+                </a:solidFill>
+              </a:defRPr>
+            </a:lvl4pPr>
+            <a:lvl5pPr>
+              <a:defRPr sz="2250" b="1">
+                <a:solidFill>
+                  <a:srgbClr val="F1F5F9"/>
+                </a:solidFill>
+              </a:defRPr>
+            </a:lvl5pPr>
+            <a:lvl6pPr>
+              <a:defRPr sz="2250" b="1">
+                <a:solidFill>
+                  <a:srgbClr val="F1F5F9"/>
+                </a:solidFill>
+              </a:defRPr>
+            </a:lvl6pPr>
+            <a:lvl7pPr>
+              <a:defRPr sz="2250" b="1">
+                <a:solidFill>
+                  <a:srgbClr val="F1F5F9"/>
+                </a:solidFill>
+              </a:defRPr>
+            </a:lvl7pPr>
+            <a:lvl8pPr>
+              <a:defRPr sz="2250" b="1">
+                <a:solidFill>
+                  <a:srgbClr val="F1F5F9"/>
+                </a:solidFill>
+              </a:defRPr>
+            </a:lvl8pPr>
+            <a:lvl9pPr>
+              <a:defRPr sz="2250" b="1">
+                <a:solidFill>
+                  <a:srgbClr val="F1F5F9"/>
+                </a:solidFill>
+              </a:defRPr>
+            </a:lvl9pPr>
           </a:lstStyle>
           <a:p xmlns:a="http://schemas.openxmlformats.org/drawingml/2006/main">
             <a:pPr>
@@ -5065,7 +7549,7 @@
                   <a:srgbClr val="F1F5F9"/>
                 </a:solidFill>
               </a:rPr>
-              <a:t>One covenant, four wins.</a:t>
+              <a:t>One covenant, three users.</a:t>
             </a:r>
           </a:p>
         </p:txBody>
@@ -5075,7 +7559,7 @@
           <p:cNvPr id="3" name="">
             <a:extLst xmlns:a="http://schemas.openxmlformats.org/drawingml/2006/main">
               <a:ext uri="{FF2B5EF4-FFF2-40B4-BE49-F238E27FC236}">
-                <a16:creationId xmlns:a16="http://schemas.microsoft.com/office/drawing/2014/main" id="{DB5E830D-9898-4BB7-A29D-F9D1A6EDE697}"/>
+                <a16:creationId xmlns:a16="http://schemas.microsoft.com/office/drawing/2014/main" id="{B39CE288-A592-4B77-902B-A33882515B2B}"/>
               </a:ext>
             </a:extLst>
           </p:cNvPr>
@@ -5110,7 +7594,7 @@
           <p:cNvPr id="4" name="">
             <a:extLst xmlns:a="http://schemas.openxmlformats.org/drawingml/2006/main">
               <a:ext uri="{FF2B5EF4-FFF2-40B4-BE49-F238E27FC236}">
-                <a16:creationId xmlns:a16="http://schemas.microsoft.com/office/drawing/2014/main" id="{3BB5D4C2-A70A-4931-8F92-CC83FBCC8BAF}"/>
+                <a16:creationId xmlns:a16="http://schemas.microsoft.com/office/drawing/2014/main" id="{0E443373-EC42-48B4-923E-4EBDB2E71E69}"/>
               </a:ext>
             </a:extLst>
           </p:cNvPr>
@@ -5143,6 +7627,69 @@
                 </a:solidFill>
               </a:defRPr>
             </a:defPPr>
+            <a:lvl1pPr>
+              <a:defRPr sz="1800" b="1">
+                <a:solidFill>
+                  <a:srgbClr val="0AC18E"/>
+                </a:solidFill>
+              </a:defRPr>
+            </a:lvl1pPr>
+            <a:lvl2pPr>
+              <a:defRPr sz="1800" b="1">
+                <a:solidFill>
+                  <a:srgbClr val="0AC18E"/>
+                </a:solidFill>
+              </a:defRPr>
+            </a:lvl2pPr>
+            <a:lvl3pPr>
+              <a:defRPr sz="1800" b="1">
+                <a:solidFill>
+                  <a:srgbClr val="0AC18E"/>
+                </a:solidFill>
+              </a:defRPr>
+            </a:lvl3pPr>
+            <a:lvl4pPr>
+              <a:defRPr sz="1800" b="1">
+                <a:solidFill>
+                  <a:srgbClr val="0AC18E"/>
+                </a:solidFill>
+              </a:defRPr>
+            </a:lvl4pPr>
+            <a:lvl5pPr>
+              <a:defRPr sz="1800" b="1">
+                <a:solidFill>
+                  <a:srgbClr val="0AC18E"/>
+                </a:solidFill>
+              </a:defRPr>
+            </a:lvl5pPr>
+            <a:lvl6pPr>
+              <a:defRPr sz="1800" b="1">
+                <a:solidFill>
+                  <a:srgbClr val="0AC18E"/>
+                </a:solidFill>
+              </a:defRPr>
+            </a:lvl6pPr>
+            <a:lvl7pPr>
+              <a:defRPr sz="1800" b="1">
+                <a:solidFill>
+                  <a:srgbClr val="0AC18E"/>
+                </a:solidFill>
+              </a:defRPr>
+            </a:lvl7pPr>
+            <a:lvl8pPr>
+              <a:defRPr sz="1800" b="1">
+                <a:solidFill>
+                  <a:srgbClr val="0AC18E"/>
+                </a:solidFill>
+              </a:defRPr>
+            </a:lvl8pPr>
+            <a:lvl9pPr>
+              <a:defRPr sz="1800" b="1">
+                <a:solidFill>
+                  <a:srgbClr val="0AC18E"/>
+                </a:solidFill>
+              </a:defRPr>
+            </a:lvl9pPr>
           </a:lstStyle>
           <a:p xmlns:a="http://schemas.openxmlformats.org/drawingml/2006/main">
             <a:pPr>
@@ -5158,7 +7705,7 @@
                   <a:srgbClr val="0AC18E"/>
                 </a:solidFill>
               </a:rPr>
-              <a:t>Payees</a:t>
+              <a:t>Payer</a:t>
             </a:r>
           </a:p>
         </p:txBody>
@@ -5168,7 +7715,7 @@
           <p:cNvPr id="5" name="">
             <a:extLst xmlns:a="http://schemas.openxmlformats.org/drawingml/2006/main">
               <a:ext uri="{FF2B5EF4-FFF2-40B4-BE49-F238E27FC236}">
-                <a16:creationId xmlns:a16="http://schemas.microsoft.com/office/drawing/2014/main" id="{7FF913F0-61B9-423F-9F48-5092A4039180}"/>
+                <a16:creationId xmlns:a16="http://schemas.microsoft.com/office/drawing/2014/main" id="{43A1F7C8-E087-4C79-9371-C123DEDEC232}"/>
               </a:ext>
             </a:extLst>
           </p:cNvPr>
@@ -5201,6 +7748,69 @@
                 </a:solidFill>
               </a:defRPr>
             </a:defPPr>
+            <a:lvl1pPr>
+              <a:defRPr sz="1275" b="0">
+                <a:solidFill>
+                  <a:srgbClr val="94A3B8"/>
+                </a:solidFill>
+              </a:defRPr>
+            </a:lvl1pPr>
+            <a:lvl2pPr>
+              <a:defRPr sz="1275" b="0">
+                <a:solidFill>
+                  <a:srgbClr val="94A3B8"/>
+                </a:solidFill>
+              </a:defRPr>
+            </a:lvl2pPr>
+            <a:lvl3pPr>
+              <a:defRPr sz="1275" b="0">
+                <a:solidFill>
+                  <a:srgbClr val="94A3B8"/>
+                </a:solidFill>
+              </a:defRPr>
+            </a:lvl3pPr>
+            <a:lvl4pPr>
+              <a:defRPr sz="1275" b="0">
+                <a:solidFill>
+                  <a:srgbClr val="94A3B8"/>
+                </a:solidFill>
+              </a:defRPr>
+            </a:lvl4pPr>
+            <a:lvl5pPr>
+              <a:defRPr sz="1275" b="0">
+                <a:solidFill>
+                  <a:srgbClr val="94A3B8"/>
+                </a:solidFill>
+              </a:defRPr>
+            </a:lvl5pPr>
+            <a:lvl6pPr>
+              <a:defRPr sz="1275" b="0">
+                <a:solidFill>
+                  <a:srgbClr val="94A3B8"/>
+                </a:solidFill>
+              </a:defRPr>
+            </a:lvl6pPr>
+            <a:lvl7pPr>
+              <a:defRPr sz="1275" b="0">
+                <a:solidFill>
+                  <a:srgbClr val="94A3B8"/>
+                </a:solidFill>
+              </a:defRPr>
+            </a:lvl7pPr>
+            <a:lvl8pPr>
+              <a:defRPr sz="1275" b="0">
+                <a:solidFill>
+                  <a:srgbClr val="94A3B8"/>
+                </a:solidFill>
+              </a:defRPr>
+            </a:lvl8pPr>
+            <a:lvl9pPr>
+              <a:defRPr sz="1275" b="0">
+                <a:solidFill>
+                  <a:srgbClr val="94A3B8"/>
+                </a:solidFill>
+              </a:defRPr>
+            </a:lvl9pPr>
           </a:lstStyle>
           <a:p xmlns:a="http://schemas.openxmlformats.org/drawingml/2006/main">
             <a:pPr>
@@ -5216,7 +7826,7 @@
                   <a:srgbClr val="94A3B8"/>
                 </a:solidFill>
               </a:rPr>
-              <a:t>Withdraw on schedule - no invoice, no custodian.</a:t>
+              <a:t>Locks a budget; keeps a cancel key and reclaims the rest.</a:t>
             </a:r>
           </a:p>
         </p:txBody>
@@ -5226,7 +7836,7 @@
           <p:cNvPr id="6" name="">
             <a:extLst xmlns:a="http://schemas.openxmlformats.org/drawingml/2006/main">
               <a:ext uri="{FF2B5EF4-FFF2-40B4-BE49-F238E27FC236}">
-                <a16:creationId xmlns:a16="http://schemas.microsoft.com/office/drawing/2014/main" id="{5745277E-DC09-4159-ABFE-9CDFD74F83C1}"/>
+                <a16:creationId xmlns:a16="http://schemas.microsoft.com/office/drawing/2014/main" id="{C96F7F66-9F7B-4687-9EA6-5259E9916EFC}"/>
               </a:ext>
             </a:extLst>
           </p:cNvPr>
@@ -5261,7 +7871,7 @@
           <p:cNvPr id="7" name="">
             <a:extLst xmlns:a="http://schemas.openxmlformats.org/drawingml/2006/main">
               <a:ext uri="{FF2B5EF4-FFF2-40B4-BE49-F238E27FC236}">
-                <a16:creationId xmlns:a16="http://schemas.microsoft.com/office/drawing/2014/main" id="{6981FDDC-92EF-4B6C-BFE1-005E67A8DAEF}"/>
+                <a16:creationId xmlns:a16="http://schemas.microsoft.com/office/drawing/2014/main" id="{F8C239FA-590C-4198-A23C-9AFDAB58D2B6}"/>
               </a:ext>
             </a:extLst>
           </p:cNvPr>
@@ -5294,6 +7904,69 @@
                 </a:solidFill>
               </a:defRPr>
             </a:defPPr>
+            <a:lvl1pPr>
+              <a:defRPr sz="1800" b="1">
+                <a:solidFill>
+                  <a:srgbClr val="818CF8"/>
+                </a:solidFill>
+              </a:defRPr>
+            </a:lvl1pPr>
+            <a:lvl2pPr>
+              <a:defRPr sz="1800" b="1">
+                <a:solidFill>
+                  <a:srgbClr val="818CF8"/>
+                </a:solidFill>
+              </a:defRPr>
+            </a:lvl2pPr>
+            <a:lvl3pPr>
+              <a:defRPr sz="1800" b="1">
+                <a:solidFill>
+                  <a:srgbClr val="818CF8"/>
+                </a:solidFill>
+              </a:defRPr>
+            </a:lvl3pPr>
+            <a:lvl4pPr>
+              <a:defRPr sz="1800" b="1">
+                <a:solidFill>
+                  <a:srgbClr val="818CF8"/>
+                </a:solidFill>
+              </a:defRPr>
+            </a:lvl4pPr>
+            <a:lvl5pPr>
+              <a:defRPr sz="1800" b="1">
+                <a:solidFill>
+                  <a:srgbClr val="818CF8"/>
+                </a:solidFill>
+              </a:defRPr>
+            </a:lvl5pPr>
+            <a:lvl6pPr>
+              <a:defRPr sz="1800" b="1">
+                <a:solidFill>
+                  <a:srgbClr val="818CF8"/>
+                </a:solidFill>
+              </a:defRPr>
+            </a:lvl6pPr>
+            <a:lvl7pPr>
+              <a:defRPr sz="1800" b="1">
+                <a:solidFill>
+                  <a:srgbClr val="818CF8"/>
+                </a:solidFill>
+              </a:defRPr>
+            </a:lvl7pPr>
+            <a:lvl8pPr>
+              <a:defRPr sz="1800" b="1">
+                <a:solidFill>
+                  <a:srgbClr val="818CF8"/>
+                </a:solidFill>
+              </a:defRPr>
+            </a:lvl8pPr>
+            <a:lvl9pPr>
+              <a:defRPr sz="1800" b="1">
+                <a:solidFill>
+                  <a:srgbClr val="818CF8"/>
+                </a:solidFill>
+              </a:defRPr>
+            </a:lvl9pPr>
           </a:lstStyle>
           <a:p xmlns:a="http://schemas.openxmlformats.org/drawingml/2006/main">
             <a:pPr>
@@ -5309,7 +7982,7 @@
                   <a:srgbClr val="818CF8"/>
                 </a:solidFill>
               </a:rPr>
-              <a:t>Payers</a:t>
+              <a:t>Worker</a:t>
             </a:r>
           </a:p>
         </p:txBody>
@@ -5319,7 +7992,7 @@
           <p:cNvPr id="8" name="">
             <a:extLst xmlns:a="http://schemas.openxmlformats.org/drawingml/2006/main">
               <a:ext uri="{FF2B5EF4-FFF2-40B4-BE49-F238E27FC236}">
-                <a16:creationId xmlns:a16="http://schemas.microsoft.com/office/drawing/2014/main" id="{66F94B7D-BF5B-4F16-99A1-9516ABBEF0BB}"/>
+                <a16:creationId xmlns:a16="http://schemas.microsoft.com/office/drawing/2014/main" id="{173F5832-7496-43F3-B083-28300E9E913C}"/>
               </a:ext>
             </a:extLst>
           </p:cNvPr>
@@ -5352,6 +8025,69 @@
                 </a:solidFill>
               </a:defRPr>
             </a:defPPr>
+            <a:lvl1pPr>
+              <a:defRPr sz="1275" b="0">
+                <a:solidFill>
+                  <a:srgbClr val="94A3B8"/>
+                </a:solidFill>
+              </a:defRPr>
+            </a:lvl1pPr>
+            <a:lvl2pPr>
+              <a:defRPr sz="1275" b="0">
+                <a:solidFill>
+                  <a:srgbClr val="94A3B8"/>
+                </a:solidFill>
+              </a:defRPr>
+            </a:lvl2pPr>
+            <a:lvl3pPr>
+              <a:defRPr sz="1275" b="0">
+                <a:solidFill>
+                  <a:srgbClr val="94A3B8"/>
+                </a:solidFill>
+              </a:defRPr>
+            </a:lvl3pPr>
+            <a:lvl4pPr>
+              <a:defRPr sz="1275" b="0">
+                <a:solidFill>
+                  <a:srgbClr val="94A3B8"/>
+                </a:solidFill>
+              </a:defRPr>
+            </a:lvl4pPr>
+            <a:lvl5pPr>
+              <a:defRPr sz="1275" b="0">
+                <a:solidFill>
+                  <a:srgbClr val="94A3B8"/>
+                </a:solidFill>
+              </a:defRPr>
+            </a:lvl5pPr>
+            <a:lvl6pPr>
+              <a:defRPr sz="1275" b="0">
+                <a:solidFill>
+                  <a:srgbClr val="94A3B8"/>
+                </a:solidFill>
+              </a:defRPr>
+            </a:lvl6pPr>
+            <a:lvl7pPr>
+              <a:defRPr sz="1275" b="0">
+                <a:solidFill>
+                  <a:srgbClr val="94A3B8"/>
+                </a:solidFill>
+              </a:defRPr>
+            </a:lvl7pPr>
+            <a:lvl8pPr>
+              <a:defRPr sz="1275" b="0">
+                <a:solidFill>
+                  <a:srgbClr val="94A3B8"/>
+                </a:solidFill>
+              </a:defRPr>
+            </a:lvl8pPr>
+            <a:lvl9pPr>
+              <a:defRPr sz="1275" b="0">
+                <a:solidFill>
+                  <a:srgbClr val="94A3B8"/>
+                </a:solidFill>
+              </a:defRPr>
+            </a:lvl9pPr>
           </a:lstStyle>
           <a:p xmlns:a="http://schemas.openxmlformats.org/drawingml/2006/main">
             <a:pPr>
@@ -5367,7 +8103,7 @@
                   <a:srgbClr val="94A3B8"/>
                 </a:solidFill>
               </a:rPr>
-              <a:t>Per-period ceiling; cancel and reclaim anytime.</a:t>
+              <a:t>Withdraws one tranche per period without a custodian.</a:t>
             </a:r>
           </a:p>
         </p:txBody>
@@ -5377,7 +8113,7 @@
           <p:cNvPr id="9" name="">
             <a:extLst xmlns:a="http://schemas.openxmlformats.org/drawingml/2006/main">
               <a:ext uri="{FF2B5EF4-FFF2-40B4-BE49-F238E27FC236}">
-                <a16:creationId xmlns:a16="http://schemas.microsoft.com/office/drawing/2014/main" id="{AE960B7F-A565-4A90-AADC-1AEAEF463C64}"/>
+                <a16:creationId xmlns:a16="http://schemas.microsoft.com/office/drawing/2014/main" id="{CD55F8C6-A9B9-41A0-AF59-F1D1C06E5AEE}"/>
               </a:ext>
             </a:extLst>
           </p:cNvPr>
@@ -5412,7 +8148,7 @@
           <p:cNvPr id="10" name="">
             <a:extLst xmlns:a="http://schemas.openxmlformats.org/drawingml/2006/main">
               <a:ext uri="{FF2B5EF4-FFF2-40B4-BE49-F238E27FC236}">
-                <a16:creationId xmlns:a16="http://schemas.microsoft.com/office/drawing/2014/main" id="{D879013A-A57B-4EB2-839B-758F383DCFE8}"/>
+                <a16:creationId xmlns:a16="http://schemas.microsoft.com/office/drawing/2014/main" id="{67EAE868-28B0-4173-BC34-BBDD0E152919}"/>
               </a:ext>
             </a:extLst>
           </p:cNvPr>
@@ -5445,6 +8181,69 @@
                 </a:solidFill>
               </a:defRPr>
             </a:defPPr>
+            <a:lvl1pPr>
+              <a:defRPr sz="1800" b="1">
+                <a:solidFill>
+                  <a:srgbClr val="FBBF24"/>
+                </a:solidFill>
+              </a:defRPr>
+            </a:lvl1pPr>
+            <a:lvl2pPr>
+              <a:defRPr sz="1800" b="1">
+                <a:solidFill>
+                  <a:srgbClr val="FBBF24"/>
+                </a:solidFill>
+              </a:defRPr>
+            </a:lvl2pPr>
+            <a:lvl3pPr>
+              <a:defRPr sz="1800" b="1">
+                <a:solidFill>
+                  <a:srgbClr val="FBBF24"/>
+                </a:solidFill>
+              </a:defRPr>
+            </a:lvl3pPr>
+            <a:lvl4pPr>
+              <a:defRPr sz="1800" b="1">
+                <a:solidFill>
+                  <a:srgbClr val="FBBF24"/>
+                </a:solidFill>
+              </a:defRPr>
+            </a:lvl4pPr>
+            <a:lvl5pPr>
+              <a:defRPr sz="1800" b="1">
+                <a:solidFill>
+                  <a:srgbClr val="FBBF24"/>
+                </a:solidFill>
+              </a:defRPr>
+            </a:lvl5pPr>
+            <a:lvl6pPr>
+              <a:defRPr sz="1800" b="1">
+                <a:solidFill>
+                  <a:srgbClr val="FBBF24"/>
+                </a:solidFill>
+              </a:defRPr>
+            </a:lvl6pPr>
+            <a:lvl7pPr>
+              <a:defRPr sz="1800" b="1">
+                <a:solidFill>
+                  <a:srgbClr val="FBBF24"/>
+                </a:solidFill>
+              </a:defRPr>
+            </a:lvl7pPr>
+            <a:lvl8pPr>
+              <a:defRPr sz="1800" b="1">
+                <a:solidFill>
+                  <a:srgbClr val="FBBF24"/>
+                </a:solidFill>
+              </a:defRPr>
+            </a:lvl8pPr>
+            <a:lvl9pPr>
+              <a:defRPr sz="1800" b="1">
+                <a:solidFill>
+                  <a:srgbClr val="FBBF24"/>
+                </a:solidFill>
+              </a:defRPr>
+            </a:lvl9pPr>
           </a:lstStyle>
           <a:p xmlns:a="http://schemas.openxmlformats.org/drawingml/2006/main">
             <a:pPr>
@@ -5460,7 +8259,7 @@
                   <a:srgbClr val="FBBF24"/>
                 </a:solidFill>
               </a:rPr>
-              <a:t>Stable value</a:t>
+              <a:t>AI Agent</a:t>
             </a:r>
           </a:p>
         </p:txBody>
@@ -5470,7 +8269,7 @@
           <p:cNvPr id="11" name="">
             <a:extLst xmlns:a="http://schemas.openxmlformats.org/drawingml/2006/main">
               <a:ext uri="{FF2B5EF4-FFF2-40B4-BE49-F238E27FC236}">
-                <a16:creationId xmlns:a16="http://schemas.microsoft.com/office/drawing/2014/main" id="{A27F628C-4D4E-40DC-83DA-10DE701D419E}"/>
+                <a16:creationId xmlns:a16="http://schemas.microsoft.com/office/drawing/2014/main" id="{4C935E7C-8F0B-4A51-911F-DD60D885839D}"/>
               </a:ext>
             </a:extLst>
           </p:cNvPr>
@@ -5503,6 +8302,69 @@
                 </a:solidFill>
               </a:defRPr>
             </a:defPPr>
+            <a:lvl1pPr>
+              <a:defRPr sz="1275" b="0">
+                <a:solidFill>
+                  <a:srgbClr val="94A3B8"/>
+                </a:solidFill>
+              </a:defRPr>
+            </a:lvl1pPr>
+            <a:lvl2pPr>
+              <a:defRPr sz="1275" b="0">
+                <a:solidFill>
+                  <a:srgbClr val="94A3B8"/>
+                </a:solidFill>
+              </a:defRPr>
+            </a:lvl2pPr>
+            <a:lvl3pPr>
+              <a:defRPr sz="1275" b="0">
+                <a:solidFill>
+                  <a:srgbClr val="94A3B8"/>
+                </a:solidFill>
+              </a:defRPr>
+            </a:lvl3pPr>
+            <a:lvl4pPr>
+              <a:defRPr sz="1275" b="0">
+                <a:solidFill>
+                  <a:srgbClr val="94A3B8"/>
+                </a:solidFill>
+              </a:defRPr>
+            </a:lvl4pPr>
+            <a:lvl5pPr>
+              <a:defRPr sz="1275" b="0">
+                <a:solidFill>
+                  <a:srgbClr val="94A3B8"/>
+                </a:solidFill>
+              </a:defRPr>
+            </a:lvl5pPr>
+            <a:lvl6pPr>
+              <a:defRPr sz="1275" b="0">
+                <a:solidFill>
+                  <a:srgbClr val="94A3B8"/>
+                </a:solidFill>
+              </a:defRPr>
+            </a:lvl6pPr>
+            <a:lvl7pPr>
+              <a:defRPr sz="1275" b="0">
+                <a:solidFill>
+                  <a:srgbClr val="94A3B8"/>
+                </a:solidFill>
+              </a:defRPr>
+            </a:lvl7pPr>
+            <a:lvl8pPr>
+              <a:defRPr sz="1275" b="0">
+                <a:solidFill>
+                  <a:srgbClr val="94A3B8"/>
+                </a:solidFill>
+              </a:defRPr>
+            </a:lvl8pPr>
+            <a:lvl9pPr>
+              <a:defRPr sz="1275" b="0">
+                <a:solidFill>
+                  <a:srgbClr val="94A3B8"/>
+                </a:solidFill>
+              </a:defRPr>
+            </a:lvl9pPr>
           </a:lstStyle>
           <a:p xmlns:a="http://schemas.openxmlformats.org/drawingml/2006/main">
             <a:pPr>
@@ -5518,7 +8380,7 @@
                   <a:srgbClr val="94A3B8"/>
                 </a:solidFill>
               </a:rPr>
-              <a:t>Denominated in PUSD, not a volatile token.</a:t>
+              <a:t>Claims a small budget and pays a service per request.</a:t>
             </a:r>
           </a:p>
         </p:txBody>
@@ -5528,7 +8390,7 @@
           <p:cNvPr id="12" name="">
             <a:extLst xmlns:a="http://schemas.openxmlformats.org/drawingml/2006/main">
               <a:ext uri="{FF2B5EF4-FFF2-40B4-BE49-F238E27FC236}">
-                <a16:creationId xmlns:a16="http://schemas.microsoft.com/office/drawing/2014/main" id="{0A82F08D-7389-47B0-BE4F-D4D91593BF84}"/>
+                <a16:creationId xmlns:a16="http://schemas.microsoft.com/office/drawing/2014/main" id="{B6F982CB-E493-49DD-A9E5-8A7C9103361A}"/>
               </a:ext>
             </a:extLst>
           </p:cNvPr>
@@ -5563,7 +8425,7 @@
           <p:cNvPr id="13" name="">
             <a:extLst xmlns:a="http://schemas.openxmlformats.org/drawingml/2006/main">
               <a:ext uri="{FF2B5EF4-FFF2-40B4-BE49-F238E27FC236}">
-                <a16:creationId xmlns:a16="http://schemas.microsoft.com/office/drawing/2014/main" id="{BA424D5D-9198-4AA5-88B5-FEC0EF9A4BD6}"/>
+                <a16:creationId xmlns:a16="http://schemas.microsoft.com/office/drawing/2014/main" id="{AFE160BD-BC9C-4D53-A55E-A88818D78E0B}"/>
               </a:ext>
             </a:extLst>
           </p:cNvPr>
@@ -5596,6 +8458,69 @@
                 </a:solidFill>
               </a:defRPr>
             </a:defPPr>
+            <a:lvl1pPr>
+              <a:defRPr sz="1800" b="1">
+                <a:solidFill>
+                  <a:srgbClr val="FB7185"/>
+                </a:solidFill>
+              </a:defRPr>
+            </a:lvl1pPr>
+            <a:lvl2pPr>
+              <a:defRPr sz="1800" b="1">
+                <a:solidFill>
+                  <a:srgbClr val="FB7185"/>
+                </a:solidFill>
+              </a:defRPr>
+            </a:lvl2pPr>
+            <a:lvl3pPr>
+              <a:defRPr sz="1800" b="1">
+                <a:solidFill>
+                  <a:srgbClr val="FB7185"/>
+                </a:solidFill>
+              </a:defRPr>
+            </a:lvl3pPr>
+            <a:lvl4pPr>
+              <a:defRPr sz="1800" b="1">
+                <a:solidFill>
+                  <a:srgbClr val="FB7185"/>
+                </a:solidFill>
+              </a:defRPr>
+            </a:lvl4pPr>
+            <a:lvl5pPr>
+              <a:defRPr sz="1800" b="1">
+                <a:solidFill>
+                  <a:srgbClr val="FB7185"/>
+                </a:solidFill>
+              </a:defRPr>
+            </a:lvl5pPr>
+            <a:lvl6pPr>
+              <a:defRPr sz="1800" b="1">
+                <a:solidFill>
+                  <a:srgbClr val="FB7185"/>
+                </a:solidFill>
+              </a:defRPr>
+            </a:lvl6pPr>
+            <a:lvl7pPr>
+              <a:defRPr sz="1800" b="1">
+                <a:solidFill>
+                  <a:srgbClr val="FB7185"/>
+                </a:solidFill>
+              </a:defRPr>
+            </a:lvl7pPr>
+            <a:lvl8pPr>
+              <a:defRPr sz="1800" b="1">
+                <a:solidFill>
+                  <a:srgbClr val="FB7185"/>
+                </a:solidFill>
+              </a:defRPr>
+            </a:lvl8pPr>
+            <a:lvl9pPr>
+              <a:defRPr sz="1800" b="1">
+                <a:solidFill>
+                  <a:srgbClr val="FB7185"/>
+                </a:solidFill>
+              </a:defRPr>
+            </a:lvl9pPr>
           </a:lstStyle>
           <a:p xmlns:a="http://schemas.openxmlformats.org/drawingml/2006/main">
             <a:pPr>
@@ -5621,7 +8546,7 @@
           <p:cNvPr id="14" name="">
             <a:extLst xmlns:a="http://schemas.openxmlformats.org/drawingml/2006/main">
               <a:ext uri="{FF2B5EF4-FFF2-40B4-BE49-F238E27FC236}">
-                <a16:creationId xmlns:a16="http://schemas.microsoft.com/office/drawing/2014/main" id="{8C89DC13-11BA-4780-A0AD-CF8D138BAF17}"/>
+                <a16:creationId xmlns:a16="http://schemas.microsoft.com/office/drawing/2014/main" id="{E3B12DEE-2505-4136-AEB6-44549DC35B87}"/>
               </a:ext>
             </a:extLst>
           </p:cNvPr>
@@ -5654,6 +8579,69 @@
                 </a:solidFill>
               </a:defRPr>
             </a:defPPr>
+            <a:lvl1pPr>
+              <a:defRPr sz="1275" b="0">
+                <a:solidFill>
+                  <a:srgbClr val="94A3B8"/>
+                </a:solidFill>
+              </a:defRPr>
+            </a:lvl1pPr>
+            <a:lvl2pPr>
+              <a:defRPr sz="1275" b="0">
+                <a:solidFill>
+                  <a:srgbClr val="94A3B8"/>
+                </a:solidFill>
+              </a:defRPr>
+            </a:lvl2pPr>
+            <a:lvl3pPr>
+              <a:defRPr sz="1275" b="0">
+                <a:solidFill>
+                  <a:srgbClr val="94A3B8"/>
+                </a:solidFill>
+              </a:defRPr>
+            </a:lvl3pPr>
+            <a:lvl4pPr>
+              <a:defRPr sz="1275" b="0">
+                <a:solidFill>
+                  <a:srgbClr val="94A3B8"/>
+                </a:solidFill>
+              </a:defRPr>
+            </a:lvl4pPr>
+            <a:lvl5pPr>
+              <a:defRPr sz="1275" b="0">
+                <a:solidFill>
+                  <a:srgbClr val="94A3B8"/>
+                </a:solidFill>
+              </a:defRPr>
+            </a:lvl5pPr>
+            <a:lvl6pPr>
+              <a:defRPr sz="1275" b="0">
+                <a:solidFill>
+                  <a:srgbClr val="94A3B8"/>
+                </a:solidFill>
+              </a:defRPr>
+            </a:lvl6pPr>
+            <a:lvl7pPr>
+              <a:defRPr sz="1275" b="0">
+                <a:solidFill>
+                  <a:srgbClr val="94A3B8"/>
+                </a:solidFill>
+              </a:defRPr>
+            </a:lvl7pPr>
+            <a:lvl8pPr>
+              <a:defRPr sz="1275" b="0">
+                <a:solidFill>
+                  <a:srgbClr val="94A3B8"/>
+                </a:solidFill>
+              </a:defRPr>
+            </a:lvl8pPr>
+            <a:lvl9pPr>
+              <a:defRPr sz="1275" b="0">
+                <a:solidFill>
+                  <a:srgbClr val="94A3B8"/>
+                </a:solidFill>
+              </a:defRPr>
+            </a:lvl9pPr>
           </a:lstStyle>
           <a:p xmlns:a="http://schemas.openxmlformats.org/drawingml/2006/main">
             <a:pPr>
@@ -5677,7 +8665,7 @@
     </p:spTree>
     <p:extLst>
       <p:ext uri="{BB962C8B-B14F-4D97-AF65-F5344CB8AC3E}">
-        <p14:creationId xmlns:p14="http://schemas.microsoft.com/office/powerpoint/2010/main" val="827575271"/>
+        <p14:creationId xmlns:p14="http://schemas.microsoft.com/office/powerpoint/2010/main" val="2079324912"/>
       </p:ext>
     </p:extLst>
   </p:cSld>
@@ -5708,7 +8696,7 @@
           <p:cNvPr id="23" name="">
             <a:extLst xmlns:a="http://schemas.openxmlformats.org/drawingml/2006/main">
               <a:ext uri="{FF2B5EF4-FFF2-40B4-BE49-F238E27FC236}">
-                <a16:creationId xmlns:a16="http://schemas.microsoft.com/office/drawing/2014/main" id="{C2A1D414-622C-4816-BF82-9C98A13A1DC2}"/>
+                <a16:creationId xmlns:a16="http://schemas.microsoft.com/office/drawing/2014/main" id="{646102E7-D15E-4AA2-BC4A-E0D0F5628420}"/>
               </a:ext>
             </a:extLst>
           </p:cNvPr>
@@ -5741,6 +8729,69 @@
                 </a:solidFill>
               </a:defRPr>
             </a:defPPr>
+            <a:lvl1pPr>
+              <a:defRPr sz="975" b="1">
+                <a:solidFill>
+                  <a:srgbClr val="0AC18E"/>
+                </a:solidFill>
+              </a:defRPr>
+            </a:lvl1pPr>
+            <a:lvl2pPr>
+              <a:defRPr sz="975" b="1">
+                <a:solidFill>
+                  <a:srgbClr val="0AC18E"/>
+                </a:solidFill>
+              </a:defRPr>
+            </a:lvl2pPr>
+            <a:lvl3pPr>
+              <a:defRPr sz="975" b="1">
+                <a:solidFill>
+                  <a:srgbClr val="0AC18E"/>
+                </a:solidFill>
+              </a:defRPr>
+            </a:lvl3pPr>
+            <a:lvl4pPr>
+              <a:defRPr sz="975" b="1">
+                <a:solidFill>
+                  <a:srgbClr val="0AC18E"/>
+                </a:solidFill>
+              </a:defRPr>
+            </a:lvl4pPr>
+            <a:lvl5pPr>
+              <a:defRPr sz="975" b="1">
+                <a:solidFill>
+                  <a:srgbClr val="0AC18E"/>
+                </a:solidFill>
+              </a:defRPr>
+            </a:lvl5pPr>
+            <a:lvl6pPr>
+              <a:defRPr sz="975" b="1">
+                <a:solidFill>
+                  <a:srgbClr val="0AC18E"/>
+                </a:solidFill>
+              </a:defRPr>
+            </a:lvl6pPr>
+            <a:lvl7pPr>
+              <a:defRPr sz="975" b="1">
+                <a:solidFill>
+                  <a:srgbClr val="0AC18E"/>
+                </a:solidFill>
+              </a:defRPr>
+            </a:lvl7pPr>
+            <a:lvl8pPr>
+              <a:defRPr sz="975" b="1">
+                <a:solidFill>
+                  <a:srgbClr val="0AC18E"/>
+                </a:solidFill>
+              </a:defRPr>
+            </a:lvl8pPr>
+            <a:lvl9pPr>
+              <a:defRPr sz="975" b="1">
+                <a:solidFill>
+                  <a:srgbClr val="0AC18E"/>
+                </a:solidFill>
+              </a:defRPr>
+            </a:lvl9pPr>
           </a:lstStyle>
           <a:p xmlns:a="http://schemas.openxmlformats.org/drawingml/2006/main">
             <a:pPr>
@@ -5766,7 +8817,7 @@
           <p:cNvPr id="2" name="">
             <a:extLst xmlns:a="http://schemas.openxmlformats.org/drawingml/2006/main">
               <a:ext uri="{FF2B5EF4-FFF2-40B4-BE49-F238E27FC236}">
-                <a16:creationId xmlns:a16="http://schemas.microsoft.com/office/drawing/2014/main" id="{884D7EDE-A059-4E57-A8C3-2E50DD814E1B}"/>
+                <a16:creationId xmlns:a16="http://schemas.microsoft.com/office/drawing/2014/main" id="{91DE2163-432D-4B97-B656-B48D64D03127}"/>
               </a:ext>
             </a:extLst>
           </p:cNvPr>
@@ -5799,6 +8850,69 @@
                 </a:solidFill>
               </a:defRPr>
             </a:defPPr>
+            <a:lvl1pPr>
+              <a:defRPr sz="1950" b="1">
+                <a:solidFill>
+                  <a:srgbClr val="F1F5F9"/>
+                </a:solidFill>
+              </a:defRPr>
+            </a:lvl1pPr>
+            <a:lvl2pPr>
+              <a:defRPr sz="1950" b="1">
+                <a:solidFill>
+                  <a:srgbClr val="F1F5F9"/>
+                </a:solidFill>
+              </a:defRPr>
+            </a:lvl2pPr>
+            <a:lvl3pPr>
+              <a:defRPr sz="1950" b="1">
+                <a:solidFill>
+                  <a:srgbClr val="F1F5F9"/>
+                </a:solidFill>
+              </a:defRPr>
+            </a:lvl3pPr>
+            <a:lvl4pPr>
+              <a:defRPr sz="1950" b="1">
+                <a:solidFill>
+                  <a:srgbClr val="F1F5F9"/>
+                </a:solidFill>
+              </a:defRPr>
+            </a:lvl4pPr>
+            <a:lvl5pPr>
+              <a:defRPr sz="1950" b="1">
+                <a:solidFill>
+                  <a:srgbClr val="F1F5F9"/>
+                </a:solidFill>
+              </a:defRPr>
+            </a:lvl5pPr>
+            <a:lvl6pPr>
+              <a:defRPr sz="1950" b="1">
+                <a:solidFill>
+                  <a:srgbClr val="F1F5F9"/>
+                </a:solidFill>
+              </a:defRPr>
+            </a:lvl6pPr>
+            <a:lvl7pPr>
+              <a:defRPr sz="1950" b="1">
+                <a:solidFill>
+                  <a:srgbClr val="F1F5F9"/>
+                </a:solidFill>
+              </a:defRPr>
+            </a:lvl7pPr>
+            <a:lvl8pPr>
+              <a:defRPr sz="1950" b="1">
+                <a:solidFill>
+                  <a:srgbClr val="F1F5F9"/>
+                </a:solidFill>
+              </a:defRPr>
+            </a:lvl8pPr>
+            <a:lvl9pPr>
+              <a:defRPr sz="1950" b="1">
+                <a:solidFill>
+                  <a:srgbClr val="F1F5F9"/>
+                </a:solidFill>
+              </a:defRPr>
+            </a:lvl9pPr>
           </a:lstStyle>
           <a:p xmlns:a="http://schemas.openxmlformats.org/drawingml/2006/main">
             <a:pPr>
@@ -5814,7 +8928,7 @@
                   <a:srgbClr val="F1F5F9"/>
                 </a:solidFill>
               </a:rPr>
-              <a:t>Every rule is enforced by consensus, not by a server.</a:t>
+              <a:t>Every limit is enforced by consensus, not by a prompt.</a:t>
             </a:r>
           </a:p>
         </p:txBody>
@@ -5824,7 +8938,7 @@
           <p:cNvPr id="3" name="">
             <a:extLst xmlns:a="http://schemas.openxmlformats.org/drawingml/2006/main">
               <a:ext uri="{FF2B5EF4-FFF2-40B4-BE49-F238E27FC236}">
-                <a16:creationId xmlns:a16="http://schemas.microsoft.com/office/drawing/2014/main" id="{679F608D-E928-4815-87A7-6A728140D19B}"/>
+                <a16:creationId xmlns:a16="http://schemas.microsoft.com/office/drawing/2014/main" id="{F5596D3D-F411-477D-A1DE-F9C1F19BFB81}"/>
               </a:ext>
             </a:extLst>
           </p:cNvPr>
@@ -5859,7 +8973,7 @@
           <p:cNvPr id="4" name="">
             <a:extLst xmlns:a="http://schemas.openxmlformats.org/drawingml/2006/main">
               <a:ext uri="{FF2B5EF4-FFF2-40B4-BE49-F238E27FC236}">
-                <a16:creationId xmlns:a16="http://schemas.microsoft.com/office/drawing/2014/main" id="{4281580D-6C53-4178-A52E-910F822A18E3}"/>
+                <a16:creationId xmlns:a16="http://schemas.microsoft.com/office/drawing/2014/main" id="{9D7CF5AD-267A-41BD-B868-037323828E0E}"/>
               </a:ext>
             </a:extLst>
           </p:cNvPr>
@@ -5892,6 +9006,69 @@
                 </a:solidFill>
               </a:defRPr>
             </a:defPPr>
+            <a:lvl1pPr>
+              <a:defRPr sz="1350" b="1">
+                <a:solidFill>
+                  <a:srgbClr val="0AC18E"/>
+                </a:solidFill>
+              </a:defRPr>
+            </a:lvl1pPr>
+            <a:lvl2pPr>
+              <a:defRPr sz="1350" b="1">
+                <a:solidFill>
+                  <a:srgbClr val="0AC18E"/>
+                </a:solidFill>
+              </a:defRPr>
+            </a:lvl2pPr>
+            <a:lvl3pPr>
+              <a:defRPr sz="1350" b="1">
+                <a:solidFill>
+                  <a:srgbClr val="0AC18E"/>
+                </a:solidFill>
+              </a:defRPr>
+            </a:lvl3pPr>
+            <a:lvl4pPr>
+              <a:defRPr sz="1350" b="1">
+                <a:solidFill>
+                  <a:srgbClr val="0AC18E"/>
+                </a:solidFill>
+              </a:defRPr>
+            </a:lvl4pPr>
+            <a:lvl5pPr>
+              <a:defRPr sz="1350" b="1">
+                <a:solidFill>
+                  <a:srgbClr val="0AC18E"/>
+                </a:solidFill>
+              </a:defRPr>
+            </a:lvl5pPr>
+            <a:lvl6pPr>
+              <a:defRPr sz="1350" b="1">
+                <a:solidFill>
+                  <a:srgbClr val="0AC18E"/>
+                </a:solidFill>
+              </a:defRPr>
+            </a:lvl6pPr>
+            <a:lvl7pPr>
+              <a:defRPr sz="1350" b="1">
+                <a:solidFill>
+                  <a:srgbClr val="0AC18E"/>
+                </a:solidFill>
+              </a:defRPr>
+            </a:lvl7pPr>
+            <a:lvl8pPr>
+              <a:defRPr sz="1350" b="1">
+                <a:solidFill>
+                  <a:srgbClr val="0AC18E"/>
+                </a:solidFill>
+              </a:defRPr>
+            </a:lvl8pPr>
+            <a:lvl9pPr>
+              <a:defRPr sz="1350" b="1">
+                <a:solidFill>
+                  <a:srgbClr val="0AC18E"/>
+                </a:solidFill>
+              </a:defRPr>
+            </a:lvl9pPr>
           </a:lstStyle>
           <a:p xmlns:a="http://schemas.openxmlformats.org/drawingml/2006/main">
             <a:pPr>
@@ -5917,7 +9094,7 @@
           <p:cNvPr id="5" name="">
             <a:extLst xmlns:a="http://schemas.openxmlformats.org/drawingml/2006/main">
               <a:ext uri="{FF2B5EF4-FFF2-40B4-BE49-F238E27FC236}">
-                <a16:creationId xmlns:a16="http://schemas.microsoft.com/office/drawing/2014/main" id="{D6EBB25C-F4E7-4A49-A6FD-3A4397114DA5}"/>
+                <a16:creationId xmlns:a16="http://schemas.microsoft.com/office/drawing/2014/main" id="{A1479AFF-ED9B-4DB3-B3F6-04018F5E6485}"/>
               </a:ext>
             </a:extLst>
           </p:cNvPr>
@@ -5950,6 +9127,69 @@
                 </a:solidFill>
               </a:defRPr>
             </a:defPPr>
+            <a:lvl1pPr>
+              <a:defRPr sz="1050" b="0">
+                <a:solidFill>
+                  <a:srgbClr val="94A3B8"/>
+                </a:solidFill>
+              </a:defRPr>
+            </a:lvl1pPr>
+            <a:lvl2pPr>
+              <a:defRPr sz="1050" b="0">
+                <a:solidFill>
+                  <a:srgbClr val="94A3B8"/>
+                </a:solidFill>
+              </a:defRPr>
+            </a:lvl2pPr>
+            <a:lvl3pPr>
+              <a:defRPr sz="1050" b="0">
+                <a:solidFill>
+                  <a:srgbClr val="94A3B8"/>
+                </a:solidFill>
+              </a:defRPr>
+            </a:lvl3pPr>
+            <a:lvl4pPr>
+              <a:defRPr sz="1050" b="0">
+                <a:solidFill>
+                  <a:srgbClr val="94A3B8"/>
+                </a:solidFill>
+              </a:defRPr>
+            </a:lvl4pPr>
+            <a:lvl5pPr>
+              <a:defRPr sz="1050" b="0">
+                <a:solidFill>
+                  <a:srgbClr val="94A3B8"/>
+                </a:solidFill>
+              </a:defRPr>
+            </a:lvl5pPr>
+            <a:lvl6pPr>
+              <a:defRPr sz="1050" b="0">
+                <a:solidFill>
+                  <a:srgbClr val="94A3B8"/>
+                </a:solidFill>
+              </a:defRPr>
+            </a:lvl6pPr>
+            <a:lvl7pPr>
+              <a:defRPr sz="1050" b="0">
+                <a:solidFill>
+                  <a:srgbClr val="94A3B8"/>
+                </a:solidFill>
+              </a:defRPr>
+            </a:lvl7pPr>
+            <a:lvl8pPr>
+              <a:defRPr sz="1050" b="0">
+                <a:solidFill>
+                  <a:srgbClr val="94A3B8"/>
+                </a:solidFill>
+              </a:defRPr>
+            </a:lvl8pPr>
+            <a:lvl9pPr>
+              <a:defRPr sz="1050" b="0">
+                <a:solidFill>
+                  <a:srgbClr val="94A3B8"/>
+                </a:solidFill>
+              </a:defRPr>
+            </a:lvl9pPr>
           </a:lstStyle>
           <a:p xmlns:a="http://schemas.openxmlformats.org/drawingml/2006/main">
             <a:pPr>
@@ -5975,7 +9215,7 @@
           <p:cNvPr id="6" name="">
             <a:extLst xmlns:a="http://schemas.openxmlformats.org/drawingml/2006/main">
               <a:ext uri="{FF2B5EF4-FFF2-40B4-BE49-F238E27FC236}">
-                <a16:creationId xmlns:a16="http://schemas.microsoft.com/office/drawing/2014/main" id="{A45A007F-E209-4354-AEFA-27D78C83224D}"/>
+                <a16:creationId xmlns:a16="http://schemas.microsoft.com/office/drawing/2014/main" id="{8F02E514-FE85-43B2-A15D-BE8F4A3AFE8B}"/>
               </a:ext>
             </a:extLst>
           </p:cNvPr>
@@ -6008,6 +9248,69 @@
                 </a:solidFill>
               </a:defRPr>
             </a:defPPr>
+            <a:lvl1pPr>
+              <a:defRPr sz="1650" b="1">
+                <a:solidFill>
+                  <a:srgbClr val="94A3B8"/>
+                </a:solidFill>
+              </a:defRPr>
+            </a:lvl1pPr>
+            <a:lvl2pPr>
+              <a:defRPr sz="1650" b="1">
+                <a:solidFill>
+                  <a:srgbClr val="94A3B8"/>
+                </a:solidFill>
+              </a:defRPr>
+            </a:lvl2pPr>
+            <a:lvl3pPr>
+              <a:defRPr sz="1650" b="1">
+                <a:solidFill>
+                  <a:srgbClr val="94A3B8"/>
+                </a:solidFill>
+              </a:defRPr>
+            </a:lvl3pPr>
+            <a:lvl4pPr>
+              <a:defRPr sz="1650" b="1">
+                <a:solidFill>
+                  <a:srgbClr val="94A3B8"/>
+                </a:solidFill>
+              </a:defRPr>
+            </a:lvl4pPr>
+            <a:lvl5pPr>
+              <a:defRPr sz="1650" b="1">
+                <a:solidFill>
+                  <a:srgbClr val="94A3B8"/>
+                </a:solidFill>
+              </a:defRPr>
+            </a:lvl5pPr>
+            <a:lvl6pPr>
+              <a:defRPr sz="1650" b="1">
+                <a:solidFill>
+                  <a:srgbClr val="94A3B8"/>
+                </a:solidFill>
+              </a:defRPr>
+            </a:lvl6pPr>
+            <a:lvl7pPr>
+              <a:defRPr sz="1650" b="1">
+                <a:solidFill>
+                  <a:srgbClr val="94A3B8"/>
+                </a:solidFill>
+              </a:defRPr>
+            </a:lvl7pPr>
+            <a:lvl8pPr>
+              <a:defRPr sz="1650" b="1">
+                <a:solidFill>
+                  <a:srgbClr val="94A3B8"/>
+                </a:solidFill>
+              </a:defRPr>
+            </a:lvl8pPr>
+            <a:lvl9pPr>
+              <a:defRPr sz="1650" b="1">
+                <a:solidFill>
+                  <a:srgbClr val="94A3B8"/>
+                </a:solidFill>
+              </a:defRPr>
+            </a:lvl9pPr>
           </a:lstStyle>
           <a:p xmlns:a="http://schemas.openxmlformats.org/drawingml/2006/main">
             <a:pPr>
@@ -6033,7 +9336,7 @@
           <p:cNvPr id="7" name="">
             <a:extLst xmlns:a="http://schemas.openxmlformats.org/drawingml/2006/main">
               <a:ext uri="{FF2B5EF4-FFF2-40B4-BE49-F238E27FC236}">
-                <a16:creationId xmlns:a16="http://schemas.microsoft.com/office/drawing/2014/main" id="{AEF5146F-1848-4CD7-84F7-2D979EDFEAFC}"/>
+                <a16:creationId xmlns:a16="http://schemas.microsoft.com/office/drawing/2014/main" id="{4F0CEB0A-B524-4214-8C09-D84900238035}"/>
               </a:ext>
             </a:extLst>
           </p:cNvPr>
@@ -6068,7 +9371,7 @@
           <p:cNvPr id="8" name="">
             <a:extLst xmlns:a="http://schemas.openxmlformats.org/drawingml/2006/main">
               <a:ext uri="{FF2B5EF4-FFF2-40B4-BE49-F238E27FC236}">
-                <a16:creationId xmlns:a16="http://schemas.microsoft.com/office/drawing/2014/main" id="{276DBA8F-EC34-48BF-AB6B-B457C64FF16C}"/>
+                <a16:creationId xmlns:a16="http://schemas.microsoft.com/office/drawing/2014/main" id="{10F0461F-A58E-41E1-991C-4260F02AF692}"/>
               </a:ext>
             </a:extLst>
           </p:cNvPr>
@@ -6101,6 +9404,69 @@
                 </a:solidFill>
               </a:defRPr>
             </a:defPPr>
+            <a:lvl1pPr>
+              <a:defRPr sz="1350" b="1">
+                <a:solidFill>
+                  <a:srgbClr val="818CF8"/>
+                </a:solidFill>
+              </a:defRPr>
+            </a:lvl1pPr>
+            <a:lvl2pPr>
+              <a:defRPr sz="1350" b="1">
+                <a:solidFill>
+                  <a:srgbClr val="818CF8"/>
+                </a:solidFill>
+              </a:defRPr>
+            </a:lvl2pPr>
+            <a:lvl3pPr>
+              <a:defRPr sz="1350" b="1">
+                <a:solidFill>
+                  <a:srgbClr val="818CF8"/>
+                </a:solidFill>
+              </a:defRPr>
+            </a:lvl3pPr>
+            <a:lvl4pPr>
+              <a:defRPr sz="1350" b="1">
+                <a:solidFill>
+                  <a:srgbClr val="818CF8"/>
+                </a:solidFill>
+              </a:defRPr>
+            </a:lvl4pPr>
+            <a:lvl5pPr>
+              <a:defRPr sz="1350" b="1">
+                <a:solidFill>
+                  <a:srgbClr val="818CF8"/>
+                </a:solidFill>
+              </a:defRPr>
+            </a:lvl5pPr>
+            <a:lvl6pPr>
+              <a:defRPr sz="1350" b="1">
+                <a:solidFill>
+                  <a:srgbClr val="818CF8"/>
+                </a:solidFill>
+              </a:defRPr>
+            </a:lvl6pPr>
+            <a:lvl7pPr>
+              <a:defRPr sz="1350" b="1">
+                <a:solidFill>
+                  <a:srgbClr val="818CF8"/>
+                </a:solidFill>
+              </a:defRPr>
+            </a:lvl7pPr>
+            <a:lvl8pPr>
+              <a:defRPr sz="1350" b="1">
+                <a:solidFill>
+                  <a:srgbClr val="818CF8"/>
+                </a:solidFill>
+              </a:defRPr>
+            </a:lvl8pPr>
+            <a:lvl9pPr>
+              <a:defRPr sz="1350" b="1">
+                <a:solidFill>
+                  <a:srgbClr val="818CF8"/>
+                </a:solidFill>
+              </a:defRPr>
+            </a:lvl9pPr>
           </a:lstStyle>
           <a:p xmlns:a="http://schemas.openxmlformats.org/drawingml/2006/main">
             <a:pPr>
@@ -6126,7 +9492,7 @@
           <p:cNvPr id="9" name="">
             <a:extLst xmlns:a="http://schemas.openxmlformats.org/drawingml/2006/main">
               <a:ext uri="{FF2B5EF4-FFF2-40B4-BE49-F238E27FC236}">
-                <a16:creationId xmlns:a16="http://schemas.microsoft.com/office/drawing/2014/main" id="{15759A13-BE0A-4AB5-826A-60E57B0FD75A}"/>
+                <a16:creationId xmlns:a16="http://schemas.microsoft.com/office/drawing/2014/main" id="{FD51A96A-1E96-4618-8329-E3A8C0134514}"/>
               </a:ext>
             </a:extLst>
           </p:cNvPr>
@@ -6159,6 +9525,69 @@
                 </a:solidFill>
               </a:defRPr>
             </a:defPPr>
+            <a:lvl1pPr>
+              <a:defRPr sz="1050" b="0">
+                <a:solidFill>
+                  <a:srgbClr val="94A3B8"/>
+                </a:solidFill>
+              </a:defRPr>
+            </a:lvl1pPr>
+            <a:lvl2pPr>
+              <a:defRPr sz="1050" b="0">
+                <a:solidFill>
+                  <a:srgbClr val="94A3B8"/>
+                </a:solidFill>
+              </a:defRPr>
+            </a:lvl2pPr>
+            <a:lvl3pPr>
+              <a:defRPr sz="1050" b="0">
+                <a:solidFill>
+                  <a:srgbClr val="94A3B8"/>
+                </a:solidFill>
+              </a:defRPr>
+            </a:lvl3pPr>
+            <a:lvl4pPr>
+              <a:defRPr sz="1050" b="0">
+                <a:solidFill>
+                  <a:srgbClr val="94A3B8"/>
+                </a:solidFill>
+              </a:defRPr>
+            </a:lvl4pPr>
+            <a:lvl5pPr>
+              <a:defRPr sz="1050" b="0">
+                <a:solidFill>
+                  <a:srgbClr val="94A3B8"/>
+                </a:solidFill>
+              </a:defRPr>
+            </a:lvl5pPr>
+            <a:lvl6pPr>
+              <a:defRPr sz="1050" b="0">
+                <a:solidFill>
+                  <a:srgbClr val="94A3B8"/>
+                </a:solidFill>
+              </a:defRPr>
+            </a:lvl6pPr>
+            <a:lvl7pPr>
+              <a:defRPr sz="1050" b="0">
+                <a:solidFill>
+                  <a:srgbClr val="94A3B8"/>
+                </a:solidFill>
+              </a:defRPr>
+            </a:lvl7pPr>
+            <a:lvl8pPr>
+              <a:defRPr sz="1050" b="0">
+                <a:solidFill>
+                  <a:srgbClr val="94A3B8"/>
+                </a:solidFill>
+              </a:defRPr>
+            </a:lvl8pPr>
+            <a:lvl9pPr>
+              <a:defRPr sz="1050" b="0">
+                <a:solidFill>
+                  <a:srgbClr val="94A3B8"/>
+                </a:solidFill>
+              </a:defRPr>
+            </a:lvl9pPr>
           </a:lstStyle>
           <a:p xmlns:a="http://schemas.openxmlformats.org/drawingml/2006/main">
             <a:pPr>
@@ -6184,7 +9613,7 @@
           <p:cNvPr id="10" name="">
             <a:extLst xmlns:a="http://schemas.openxmlformats.org/drawingml/2006/main">
               <a:ext uri="{FF2B5EF4-FFF2-40B4-BE49-F238E27FC236}">
-                <a16:creationId xmlns:a16="http://schemas.microsoft.com/office/drawing/2014/main" id="{87B62400-E00D-489B-A834-31212B87F56A}"/>
+                <a16:creationId xmlns:a16="http://schemas.microsoft.com/office/drawing/2014/main" id="{5E542E07-B32B-428F-ABED-9684C986C6BA}"/>
               </a:ext>
             </a:extLst>
           </p:cNvPr>
@@ -6217,6 +9646,69 @@
                 </a:solidFill>
               </a:defRPr>
             </a:defPPr>
+            <a:lvl1pPr>
+              <a:defRPr sz="1650" b="1">
+                <a:solidFill>
+                  <a:srgbClr val="94A3B8"/>
+                </a:solidFill>
+              </a:defRPr>
+            </a:lvl1pPr>
+            <a:lvl2pPr>
+              <a:defRPr sz="1650" b="1">
+                <a:solidFill>
+                  <a:srgbClr val="94A3B8"/>
+                </a:solidFill>
+              </a:defRPr>
+            </a:lvl2pPr>
+            <a:lvl3pPr>
+              <a:defRPr sz="1650" b="1">
+                <a:solidFill>
+                  <a:srgbClr val="94A3B8"/>
+                </a:solidFill>
+              </a:defRPr>
+            </a:lvl3pPr>
+            <a:lvl4pPr>
+              <a:defRPr sz="1650" b="1">
+                <a:solidFill>
+                  <a:srgbClr val="94A3B8"/>
+                </a:solidFill>
+              </a:defRPr>
+            </a:lvl4pPr>
+            <a:lvl5pPr>
+              <a:defRPr sz="1650" b="1">
+                <a:solidFill>
+                  <a:srgbClr val="94A3B8"/>
+                </a:solidFill>
+              </a:defRPr>
+            </a:lvl5pPr>
+            <a:lvl6pPr>
+              <a:defRPr sz="1650" b="1">
+                <a:solidFill>
+                  <a:srgbClr val="94A3B8"/>
+                </a:solidFill>
+              </a:defRPr>
+            </a:lvl6pPr>
+            <a:lvl7pPr>
+              <a:defRPr sz="1650" b="1">
+                <a:solidFill>
+                  <a:srgbClr val="94A3B8"/>
+                </a:solidFill>
+              </a:defRPr>
+            </a:lvl7pPr>
+            <a:lvl8pPr>
+              <a:defRPr sz="1650" b="1">
+                <a:solidFill>
+                  <a:srgbClr val="94A3B8"/>
+                </a:solidFill>
+              </a:defRPr>
+            </a:lvl8pPr>
+            <a:lvl9pPr>
+              <a:defRPr sz="1650" b="1">
+                <a:solidFill>
+                  <a:srgbClr val="94A3B8"/>
+                </a:solidFill>
+              </a:defRPr>
+            </a:lvl9pPr>
           </a:lstStyle>
           <a:p xmlns:a="http://schemas.openxmlformats.org/drawingml/2006/main">
             <a:pPr>
@@ -6242,7 +9734,7 @@
           <p:cNvPr id="11" name="">
             <a:extLst xmlns:a="http://schemas.openxmlformats.org/drawingml/2006/main">
               <a:ext uri="{FF2B5EF4-FFF2-40B4-BE49-F238E27FC236}">
-                <a16:creationId xmlns:a16="http://schemas.microsoft.com/office/drawing/2014/main" id="{8DB983DB-4AF9-48AC-B4E9-BF4C401A1184}"/>
+                <a16:creationId xmlns:a16="http://schemas.microsoft.com/office/drawing/2014/main" id="{D21685E2-1558-4D4D-8FDD-9A4810A8A3A4}"/>
               </a:ext>
             </a:extLst>
           </p:cNvPr>
@@ -6277,7 +9769,7 @@
           <p:cNvPr id="12" name="">
             <a:extLst xmlns:a="http://schemas.openxmlformats.org/drawingml/2006/main">
               <a:ext uri="{FF2B5EF4-FFF2-40B4-BE49-F238E27FC236}">
-                <a16:creationId xmlns:a16="http://schemas.microsoft.com/office/drawing/2014/main" id="{9BE4AC4A-52D7-4516-839D-4663D2477BF9}"/>
+                <a16:creationId xmlns:a16="http://schemas.microsoft.com/office/drawing/2014/main" id="{35E999F2-F05F-4854-8096-B39C1E61A3C8}"/>
               </a:ext>
             </a:extLst>
           </p:cNvPr>
@@ -6310,6 +9802,69 @@
                 </a:solidFill>
               </a:defRPr>
             </a:defPPr>
+            <a:lvl1pPr>
+              <a:defRPr sz="1350" b="1">
+                <a:solidFill>
+                  <a:srgbClr val="FBBF24"/>
+                </a:solidFill>
+              </a:defRPr>
+            </a:lvl1pPr>
+            <a:lvl2pPr>
+              <a:defRPr sz="1350" b="1">
+                <a:solidFill>
+                  <a:srgbClr val="FBBF24"/>
+                </a:solidFill>
+              </a:defRPr>
+            </a:lvl2pPr>
+            <a:lvl3pPr>
+              <a:defRPr sz="1350" b="1">
+                <a:solidFill>
+                  <a:srgbClr val="FBBF24"/>
+                </a:solidFill>
+              </a:defRPr>
+            </a:lvl3pPr>
+            <a:lvl4pPr>
+              <a:defRPr sz="1350" b="1">
+                <a:solidFill>
+                  <a:srgbClr val="FBBF24"/>
+                </a:solidFill>
+              </a:defRPr>
+            </a:lvl4pPr>
+            <a:lvl5pPr>
+              <a:defRPr sz="1350" b="1">
+                <a:solidFill>
+                  <a:srgbClr val="FBBF24"/>
+                </a:solidFill>
+              </a:defRPr>
+            </a:lvl5pPr>
+            <a:lvl6pPr>
+              <a:defRPr sz="1350" b="1">
+                <a:solidFill>
+                  <a:srgbClr val="FBBF24"/>
+                </a:solidFill>
+              </a:defRPr>
+            </a:lvl6pPr>
+            <a:lvl7pPr>
+              <a:defRPr sz="1350" b="1">
+                <a:solidFill>
+                  <a:srgbClr val="FBBF24"/>
+                </a:solidFill>
+              </a:defRPr>
+            </a:lvl7pPr>
+            <a:lvl8pPr>
+              <a:defRPr sz="1350" b="1">
+                <a:solidFill>
+                  <a:srgbClr val="FBBF24"/>
+                </a:solidFill>
+              </a:defRPr>
+            </a:lvl8pPr>
+            <a:lvl9pPr>
+              <a:defRPr sz="1350" b="1">
+                <a:solidFill>
+                  <a:srgbClr val="FBBF24"/>
+                </a:solidFill>
+              </a:defRPr>
+            </a:lvl9pPr>
           </a:lstStyle>
           <a:p xmlns:a="http://schemas.openxmlformats.org/drawingml/2006/main">
             <a:pPr>
@@ -6335,7 +9890,7 @@
           <p:cNvPr id="13" name="">
             <a:extLst xmlns:a="http://schemas.openxmlformats.org/drawingml/2006/main">
               <a:ext uri="{FF2B5EF4-FFF2-40B4-BE49-F238E27FC236}">
-                <a16:creationId xmlns:a16="http://schemas.microsoft.com/office/drawing/2014/main" id="{8D5F964C-A5CE-4863-8F52-A2025CF911FA}"/>
+                <a16:creationId xmlns:a16="http://schemas.microsoft.com/office/drawing/2014/main" id="{884AAA8B-D571-4C6D-92DA-63221CB11FDD}"/>
               </a:ext>
             </a:extLst>
           </p:cNvPr>
@@ -6368,6 +9923,69 @@
                 </a:solidFill>
               </a:defRPr>
             </a:defPPr>
+            <a:lvl1pPr>
+              <a:defRPr sz="1050" b="0">
+                <a:solidFill>
+                  <a:srgbClr val="94A3B8"/>
+                </a:solidFill>
+              </a:defRPr>
+            </a:lvl1pPr>
+            <a:lvl2pPr>
+              <a:defRPr sz="1050" b="0">
+                <a:solidFill>
+                  <a:srgbClr val="94A3B8"/>
+                </a:solidFill>
+              </a:defRPr>
+            </a:lvl2pPr>
+            <a:lvl3pPr>
+              <a:defRPr sz="1050" b="0">
+                <a:solidFill>
+                  <a:srgbClr val="94A3B8"/>
+                </a:solidFill>
+              </a:defRPr>
+            </a:lvl3pPr>
+            <a:lvl4pPr>
+              <a:defRPr sz="1050" b="0">
+                <a:solidFill>
+                  <a:srgbClr val="94A3B8"/>
+                </a:solidFill>
+              </a:defRPr>
+            </a:lvl4pPr>
+            <a:lvl5pPr>
+              <a:defRPr sz="1050" b="0">
+                <a:solidFill>
+                  <a:srgbClr val="94A3B8"/>
+                </a:solidFill>
+              </a:defRPr>
+            </a:lvl5pPr>
+            <a:lvl6pPr>
+              <a:defRPr sz="1050" b="0">
+                <a:solidFill>
+                  <a:srgbClr val="94A3B8"/>
+                </a:solidFill>
+              </a:defRPr>
+            </a:lvl6pPr>
+            <a:lvl7pPr>
+              <a:defRPr sz="1050" b="0">
+                <a:solidFill>
+                  <a:srgbClr val="94A3B8"/>
+                </a:solidFill>
+              </a:defRPr>
+            </a:lvl7pPr>
+            <a:lvl8pPr>
+              <a:defRPr sz="1050" b="0">
+                <a:solidFill>
+                  <a:srgbClr val="94A3B8"/>
+                </a:solidFill>
+              </a:defRPr>
+            </a:lvl8pPr>
+            <a:lvl9pPr>
+              <a:defRPr sz="1050" b="0">
+                <a:solidFill>
+                  <a:srgbClr val="94A3B8"/>
+                </a:solidFill>
+              </a:defRPr>
+            </a:lvl9pPr>
           </a:lstStyle>
           <a:p xmlns:a="http://schemas.openxmlformats.org/drawingml/2006/main">
             <a:pPr>
@@ -6393,7 +10011,7 @@
           <p:cNvPr id="14" name="">
             <a:extLst xmlns:a="http://schemas.openxmlformats.org/drawingml/2006/main">
               <a:ext uri="{FF2B5EF4-FFF2-40B4-BE49-F238E27FC236}">
-                <a16:creationId xmlns:a16="http://schemas.microsoft.com/office/drawing/2014/main" id="{547FE8F1-D277-4B30-806C-7E06FDCE2240}"/>
+                <a16:creationId xmlns:a16="http://schemas.microsoft.com/office/drawing/2014/main" id="{6E751D0D-8770-4D62-B839-5B8CB19C29A7}"/>
               </a:ext>
             </a:extLst>
           </p:cNvPr>
@@ -6426,6 +10044,69 @@
                 </a:solidFill>
               </a:defRPr>
             </a:defPPr>
+            <a:lvl1pPr>
+              <a:defRPr sz="1650" b="1">
+                <a:solidFill>
+                  <a:srgbClr val="94A3B8"/>
+                </a:solidFill>
+              </a:defRPr>
+            </a:lvl1pPr>
+            <a:lvl2pPr>
+              <a:defRPr sz="1650" b="1">
+                <a:solidFill>
+                  <a:srgbClr val="94A3B8"/>
+                </a:solidFill>
+              </a:defRPr>
+            </a:lvl2pPr>
+            <a:lvl3pPr>
+              <a:defRPr sz="1650" b="1">
+                <a:solidFill>
+                  <a:srgbClr val="94A3B8"/>
+                </a:solidFill>
+              </a:defRPr>
+            </a:lvl3pPr>
+            <a:lvl4pPr>
+              <a:defRPr sz="1650" b="1">
+                <a:solidFill>
+                  <a:srgbClr val="94A3B8"/>
+                </a:solidFill>
+              </a:defRPr>
+            </a:lvl4pPr>
+            <a:lvl5pPr>
+              <a:defRPr sz="1650" b="1">
+                <a:solidFill>
+                  <a:srgbClr val="94A3B8"/>
+                </a:solidFill>
+              </a:defRPr>
+            </a:lvl5pPr>
+            <a:lvl6pPr>
+              <a:defRPr sz="1650" b="1">
+                <a:solidFill>
+                  <a:srgbClr val="94A3B8"/>
+                </a:solidFill>
+              </a:defRPr>
+            </a:lvl6pPr>
+            <a:lvl7pPr>
+              <a:defRPr sz="1650" b="1">
+                <a:solidFill>
+                  <a:srgbClr val="94A3B8"/>
+                </a:solidFill>
+              </a:defRPr>
+            </a:lvl7pPr>
+            <a:lvl8pPr>
+              <a:defRPr sz="1650" b="1">
+                <a:solidFill>
+                  <a:srgbClr val="94A3B8"/>
+                </a:solidFill>
+              </a:defRPr>
+            </a:lvl8pPr>
+            <a:lvl9pPr>
+              <a:defRPr sz="1650" b="1">
+                <a:solidFill>
+                  <a:srgbClr val="94A3B8"/>
+                </a:solidFill>
+              </a:defRPr>
+            </a:lvl9pPr>
           </a:lstStyle>
           <a:p xmlns:a="http://schemas.openxmlformats.org/drawingml/2006/main">
             <a:pPr>
@@ -6451,7 +10132,7 @@
           <p:cNvPr id="15" name="">
             <a:extLst xmlns:a="http://schemas.openxmlformats.org/drawingml/2006/main">
               <a:ext uri="{FF2B5EF4-FFF2-40B4-BE49-F238E27FC236}">
-                <a16:creationId xmlns:a16="http://schemas.microsoft.com/office/drawing/2014/main" id="{628303FE-8046-4862-9B18-78E34784BBF8}"/>
+                <a16:creationId xmlns:a16="http://schemas.microsoft.com/office/drawing/2014/main" id="{5C86338D-BEB0-4B0C-A488-54FC8F8EDAB4}"/>
               </a:ext>
             </a:extLst>
           </p:cNvPr>
@@ -6486,7 +10167,7 @@
           <p:cNvPr id="16" name="">
             <a:extLst xmlns:a="http://schemas.openxmlformats.org/drawingml/2006/main">
               <a:ext uri="{FF2B5EF4-FFF2-40B4-BE49-F238E27FC236}">
-                <a16:creationId xmlns:a16="http://schemas.microsoft.com/office/drawing/2014/main" id="{7E20A5B1-75ED-49AE-AE19-AC975162458E}"/>
+                <a16:creationId xmlns:a16="http://schemas.microsoft.com/office/drawing/2014/main" id="{CF835560-144A-480C-B3AB-E420F4570805}"/>
               </a:ext>
             </a:extLst>
           </p:cNvPr>
@@ -6519,6 +10200,69 @@
                 </a:solidFill>
               </a:defRPr>
             </a:defPPr>
+            <a:lvl1pPr>
+              <a:defRPr sz="1350" b="1">
+                <a:solidFill>
+                  <a:srgbClr val="C084FC"/>
+                </a:solidFill>
+              </a:defRPr>
+            </a:lvl1pPr>
+            <a:lvl2pPr>
+              <a:defRPr sz="1350" b="1">
+                <a:solidFill>
+                  <a:srgbClr val="C084FC"/>
+                </a:solidFill>
+              </a:defRPr>
+            </a:lvl2pPr>
+            <a:lvl3pPr>
+              <a:defRPr sz="1350" b="1">
+                <a:solidFill>
+                  <a:srgbClr val="C084FC"/>
+                </a:solidFill>
+              </a:defRPr>
+            </a:lvl3pPr>
+            <a:lvl4pPr>
+              <a:defRPr sz="1350" b="1">
+                <a:solidFill>
+                  <a:srgbClr val="C084FC"/>
+                </a:solidFill>
+              </a:defRPr>
+            </a:lvl4pPr>
+            <a:lvl5pPr>
+              <a:defRPr sz="1350" b="1">
+                <a:solidFill>
+                  <a:srgbClr val="C084FC"/>
+                </a:solidFill>
+              </a:defRPr>
+            </a:lvl5pPr>
+            <a:lvl6pPr>
+              <a:defRPr sz="1350" b="1">
+                <a:solidFill>
+                  <a:srgbClr val="C084FC"/>
+                </a:solidFill>
+              </a:defRPr>
+            </a:lvl6pPr>
+            <a:lvl7pPr>
+              <a:defRPr sz="1350" b="1">
+                <a:solidFill>
+                  <a:srgbClr val="C084FC"/>
+                </a:solidFill>
+              </a:defRPr>
+            </a:lvl7pPr>
+            <a:lvl8pPr>
+              <a:defRPr sz="1350" b="1">
+                <a:solidFill>
+                  <a:srgbClr val="C084FC"/>
+                </a:solidFill>
+              </a:defRPr>
+            </a:lvl8pPr>
+            <a:lvl9pPr>
+              <a:defRPr sz="1350" b="1">
+                <a:solidFill>
+                  <a:srgbClr val="C084FC"/>
+                </a:solidFill>
+              </a:defRPr>
+            </a:lvl9pPr>
           </a:lstStyle>
           <a:p xmlns:a="http://schemas.openxmlformats.org/drawingml/2006/main">
             <a:pPr>
@@ -6534,7 +10278,7 @@
                   <a:srgbClr val="C084FC"/>
                 </a:solidFill>
               </a:rPr>
-              <a:t>Recursive change</a:t>
+              <a:t>BCH buffer</a:t>
             </a:r>
           </a:p>
         </p:txBody>
@@ -6544,7 +10288,7 @@
           <p:cNvPr id="17" name="">
             <a:extLst xmlns:a="http://schemas.openxmlformats.org/drawingml/2006/main">
               <a:ext uri="{FF2B5EF4-FFF2-40B4-BE49-F238E27FC236}">
-                <a16:creationId xmlns:a16="http://schemas.microsoft.com/office/drawing/2014/main" id="{9515915B-6298-4978-97A6-2E82CE1A9EBA}"/>
+                <a16:creationId xmlns:a16="http://schemas.microsoft.com/office/drawing/2014/main" id="{4448CFD1-0ADA-4B8E-9100-8F87C2489254}"/>
               </a:ext>
             </a:extLst>
           </p:cNvPr>
@@ -6577,6 +10321,69 @@
                 </a:solidFill>
               </a:defRPr>
             </a:defPPr>
+            <a:lvl1pPr>
+              <a:defRPr sz="1050" b="0">
+                <a:solidFill>
+                  <a:srgbClr val="94A3B8"/>
+                </a:solidFill>
+              </a:defRPr>
+            </a:lvl1pPr>
+            <a:lvl2pPr>
+              <a:defRPr sz="1050" b="0">
+                <a:solidFill>
+                  <a:srgbClr val="94A3B8"/>
+                </a:solidFill>
+              </a:defRPr>
+            </a:lvl2pPr>
+            <a:lvl3pPr>
+              <a:defRPr sz="1050" b="0">
+                <a:solidFill>
+                  <a:srgbClr val="94A3B8"/>
+                </a:solidFill>
+              </a:defRPr>
+            </a:lvl3pPr>
+            <a:lvl4pPr>
+              <a:defRPr sz="1050" b="0">
+                <a:solidFill>
+                  <a:srgbClr val="94A3B8"/>
+                </a:solidFill>
+              </a:defRPr>
+            </a:lvl4pPr>
+            <a:lvl5pPr>
+              <a:defRPr sz="1050" b="0">
+                <a:solidFill>
+                  <a:srgbClr val="94A3B8"/>
+                </a:solidFill>
+              </a:defRPr>
+            </a:lvl5pPr>
+            <a:lvl6pPr>
+              <a:defRPr sz="1050" b="0">
+                <a:solidFill>
+                  <a:srgbClr val="94A3B8"/>
+                </a:solidFill>
+              </a:defRPr>
+            </a:lvl6pPr>
+            <a:lvl7pPr>
+              <a:defRPr sz="1050" b="0">
+                <a:solidFill>
+                  <a:srgbClr val="94A3B8"/>
+                </a:solidFill>
+              </a:defRPr>
+            </a:lvl7pPr>
+            <a:lvl8pPr>
+              <a:defRPr sz="1050" b="0">
+                <a:solidFill>
+                  <a:srgbClr val="94A3B8"/>
+                </a:solidFill>
+              </a:defRPr>
+            </a:lvl8pPr>
+            <a:lvl9pPr>
+              <a:defRPr sz="1050" b="0">
+                <a:solidFill>
+                  <a:srgbClr val="94A3B8"/>
+                </a:solidFill>
+              </a:defRPr>
+            </a:lvl9pPr>
           </a:lstStyle>
           <a:p xmlns:a="http://schemas.openxmlformats.org/drawingml/2006/main">
             <a:pPr>
@@ -6592,7 +10399,7 @@
                   <a:srgbClr val="94A3B8"/>
                 </a:solidFill>
               </a:rPr>
-              <a:t>output[1] == input[0] bytecode</a:t>
+              <a:t>change &gt;= input - 2000 sats</a:t>
             </a:r>
           </a:p>
         </p:txBody>
@@ -6602,7 +10409,7 @@
           <p:cNvPr id="18" name="">
             <a:extLst xmlns:a="http://schemas.openxmlformats.org/drawingml/2006/main">
               <a:ext uri="{FF2B5EF4-FFF2-40B4-BE49-F238E27FC236}">
-                <a16:creationId xmlns:a16="http://schemas.microsoft.com/office/drawing/2014/main" id="{AF410D7D-A52C-4239-AD9D-4289963FF4F9}"/>
+                <a16:creationId xmlns:a16="http://schemas.microsoft.com/office/drawing/2014/main" id="{544718D4-8575-48E9-889F-763FAF1AF93A}"/>
               </a:ext>
             </a:extLst>
           </p:cNvPr>
@@ -6635,6 +10442,69 @@
                 </a:solidFill>
               </a:defRPr>
             </a:defPPr>
+            <a:lvl1pPr>
+              <a:defRPr sz="1650" b="1">
+                <a:solidFill>
+                  <a:srgbClr val="94A3B8"/>
+                </a:solidFill>
+              </a:defRPr>
+            </a:lvl1pPr>
+            <a:lvl2pPr>
+              <a:defRPr sz="1650" b="1">
+                <a:solidFill>
+                  <a:srgbClr val="94A3B8"/>
+                </a:solidFill>
+              </a:defRPr>
+            </a:lvl2pPr>
+            <a:lvl3pPr>
+              <a:defRPr sz="1650" b="1">
+                <a:solidFill>
+                  <a:srgbClr val="94A3B8"/>
+                </a:solidFill>
+              </a:defRPr>
+            </a:lvl3pPr>
+            <a:lvl4pPr>
+              <a:defRPr sz="1650" b="1">
+                <a:solidFill>
+                  <a:srgbClr val="94A3B8"/>
+                </a:solidFill>
+              </a:defRPr>
+            </a:lvl4pPr>
+            <a:lvl5pPr>
+              <a:defRPr sz="1650" b="1">
+                <a:solidFill>
+                  <a:srgbClr val="94A3B8"/>
+                </a:solidFill>
+              </a:defRPr>
+            </a:lvl5pPr>
+            <a:lvl6pPr>
+              <a:defRPr sz="1650" b="1">
+                <a:solidFill>
+                  <a:srgbClr val="94A3B8"/>
+                </a:solidFill>
+              </a:defRPr>
+            </a:lvl6pPr>
+            <a:lvl7pPr>
+              <a:defRPr sz="1650" b="1">
+                <a:solidFill>
+                  <a:srgbClr val="94A3B8"/>
+                </a:solidFill>
+              </a:defRPr>
+            </a:lvl7pPr>
+            <a:lvl8pPr>
+              <a:defRPr sz="1650" b="1">
+                <a:solidFill>
+                  <a:srgbClr val="94A3B8"/>
+                </a:solidFill>
+              </a:defRPr>
+            </a:lvl8pPr>
+            <a:lvl9pPr>
+              <a:defRPr sz="1650" b="1">
+                <a:solidFill>
+                  <a:srgbClr val="94A3B8"/>
+                </a:solidFill>
+              </a:defRPr>
+            </a:lvl9pPr>
           </a:lstStyle>
           <a:p xmlns:a="http://schemas.openxmlformats.org/drawingml/2006/main">
             <a:pPr>
@@ -6660,7 +10530,7 @@
           <p:cNvPr id="19" name="">
             <a:extLst xmlns:a="http://schemas.openxmlformats.org/drawingml/2006/main">
               <a:ext uri="{FF2B5EF4-FFF2-40B4-BE49-F238E27FC236}">
-                <a16:creationId xmlns:a16="http://schemas.microsoft.com/office/drawing/2014/main" id="{6F71561B-92B3-4F8E-A22D-D446D6948EE4}"/>
+                <a16:creationId xmlns:a16="http://schemas.microsoft.com/office/drawing/2014/main" id="{6924CB02-3E28-4D82-BD12-FFB91877726F}"/>
               </a:ext>
             </a:extLst>
           </p:cNvPr>
@@ -6695,7 +10565,7 @@
           <p:cNvPr id="20" name="">
             <a:extLst xmlns:a="http://schemas.openxmlformats.org/drawingml/2006/main">
               <a:ext uri="{FF2B5EF4-FFF2-40B4-BE49-F238E27FC236}">
-                <a16:creationId xmlns:a16="http://schemas.microsoft.com/office/drawing/2014/main" id="{72537055-D742-4813-ADF4-F95ACB20A29C}"/>
+                <a16:creationId xmlns:a16="http://schemas.microsoft.com/office/drawing/2014/main" id="{AEF85091-41D8-40B2-8491-16A969CB74A9}"/>
               </a:ext>
             </a:extLst>
           </p:cNvPr>
@@ -6728,6 +10598,69 @@
                 </a:solidFill>
               </a:defRPr>
             </a:defPPr>
+            <a:lvl1pPr>
+              <a:defRPr sz="1350" b="1">
+                <a:solidFill>
+                  <a:srgbClr val="94A3B8"/>
+                </a:solidFill>
+              </a:defRPr>
+            </a:lvl1pPr>
+            <a:lvl2pPr>
+              <a:defRPr sz="1350" b="1">
+                <a:solidFill>
+                  <a:srgbClr val="94A3B8"/>
+                </a:solidFill>
+              </a:defRPr>
+            </a:lvl2pPr>
+            <a:lvl3pPr>
+              <a:defRPr sz="1350" b="1">
+                <a:solidFill>
+                  <a:srgbClr val="94A3B8"/>
+                </a:solidFill>
+              </a:defRPr>
+            </a:lvl3pPr>
+            <a:lvl4pPr>
+              <a:defRPr sz="1350" b="1">
+                <a:solidFill>
+                  <a:srgbClr val="94A3B8"/>
+                </a:solidFill>
+              </a:defRPr>
+            </a:lvl4pPr>
+            <a:lvl5pPr>
+              <a:defRPr sz="1350" b="1">
+                <a:solidFill>
+                  <a:srgbClr val="94A3B8"/>
+                </a:solidFill>
+              </a:defRPr>
+            </a:lvl5pPr>
+            <a:lvl6pPr>
+              <a:defRPr sz="1350" b="1">
+                <a:solidFill>
+                  <a:srgbClr val="94A3B8"/>
+                </a:solidFill>
+              </a:defRPr>
+            </a:lvl6pPr>
+            <a:lvl7pPr>
+              <a:defRPr sz="1350" b="1">
+                <a:solidFill>
+                  <a:srgbClr val="94A3B8"/>
+                </a:solidFill>
+              </a:defRPr>
+            </a:lvl7pPr>
+            <a:lvl8pPr>
+              <a:defRPr sz="1350" b="1">
+                <a:solidFill>
+                  <a:srgbClr val="94A3B8"/>
+                </a:solidFill>
+              </a:defRPr>
+            </a:lvl8pPr>
+            <a:lvl9pPr>
+              <a:defRPr sz="1350" b="1">
+                <a:solidFill>
+                  <a:srgbClr val="94A3B8"/>
+                </a:solidFill>
+              </a:defRPr>
+            </a:lvl9pPr>
           </a:lstStyle>
           <a:p xmlns:a="http://schemas.openxmlformats.org/drawingml/2006/main">
             <a:pPr>
@@ -6753,7 +10686,7 @@
           <p:cNvPr id="21" name="">
             <a:extLst xmlns:a="http://schemas.openxmlformats.org/drawingml/2006/main">
               <a:ext uri="{FF2B5EF4-FFF2-40B4-BE49-F238E27FC236}">
-                <a16:creationId xmlns:a16="http://schemas.microsoft.com/office/drawing/2014/main" id="{94C1813F-572D-4D17-8B0D-EC3ACE3ED716}"/>
+                <a16:creationId xmlns:a16="http://schemas.microsoft.com/office/drawing/2014/main" id="{C5C24236-70C3-41F5-88AF-86C320113036}"/>
               </a:ext>
             </a:extLst>
           </p:cNvPr>
@@ -6786,6 +10719,69 @@
                 </a:solidFill>
               </a:defRPr>
             </a:defPPr>
+            <a:lvl1pPr>
+              <a:defRPr sz="1050" b="0">
+                <a:solidFill>
+                  <a:srgbClr val="94A3B8"/>
+                </a:solidFill>
+              </a:defRPr>
+            </a:lvl1pPr>
+            <a:lvl2pPr>
+              <a:defRPr sz="1050" b="0">
+                <a:solidFill>
+                  <a:srgbClr val="94A3B8"/>
+                </a:solidFill>
+              </a:defRPr>
+            </a:lvl2pPr>
+            <a:lvl3pPr>
+              <a:defRPr sz="1050" b="0">
+                <a:solidFill>
+                  <a:srgbClr val="94A3B8"/>
+                </a:solidFill>
+              </a:defRPr>
+            </a:lvl3pPr>
+            <a:lvl4pPr>
+              <a:defRPr sz="1050" b="0">
+                <a:solidFill>
+                  <a:srgbClr val="94A3B8"/>
+                </a:solidFill>
+              </a:defRPr>
+            </a:lvl4pPr>
+            <a:lvl5pPr>
+              <a:defRPr sz="1050" b="0">
+                <a:solidFill>
+                  <a:srgbClr val="94A3B8"/>
+                </a:solidFill>
+              </a:defRPr>
+            </a:lvl5pPr>
+            <a:lvl6pPr>
+              <a:defRPr sz="1050" b="0">
+                <a:solidFill>
+                  <a:srgbClr val="94A3B8"/>
+                </a:solidFill>
+              </a:defRPr>
+            </a:lvl6pPr>
+            <a:lvl7pPr>
+              <a:defRPr sz="1050" b="0">
+                <a:solidFill>
+                  <a:srgbClr val="94A3B8"/>
+                </a:solidFill>
+              </a:defRPr>
+            </a:lvl7pPr>
+            <a:lvl8pPr>
+              <a:defRPr sz="1050" b="0">
+                <a:solidFill>
+                  <a:srgbClr val="94A3B8"/>
+                </a:solidFill>
+              </a:defRPr>
+            </a:lvl8pPr>
+            <a:lvl9pPr>
+              <a:defRPr sz="1050" b="0">
+                <a:solidFill>
+                  <a:srgbClr val="94A3B8"/>
+                </a:solidFill>
+              </a:defRPr>
+            </a:lvl9pPr>
           </a:lstStyle>
           <a:p xmlns:a="http://schemas.openxmlformats.org/drawingml/2006/main">
             <a:pPr>
@@ -6811,7 +10807,7 @@
           <p:cNvPr id="22" name="">
             <a:extLst xmlns:a="http://schemas.openxmlformats.org/drawingml/2006/main">
               <a:ext uri="{FF2B5EF4-FFF2-40B4-BE49-F238E27FC236}">
-                <a16:creationId xmlns:a16="http://schemas.microsoft.com/office/drawing/2014/main" id="{B1372B6C-C502-4128-8E50-6B82939656F6}"/>
+                <a16:creationId xmlns:a16="http://schemas.microsoft.com/office/drawing/2014/main" id="{F668E0BB-884C-48E6-8590-1E1C22C45F0C}"/>
               </a:ext>
             </a:extLst>
           </p:cNvPr>
@@ -6844,6 +10840,69 @@
                 </a:solidFill>
               </a:defRPr>
             </a:defPPr>
+            <a:lvl1pPr>
+              <a:defRPr sz="1200" b="0">
+                <a:solidFill>
+                  <a:srgbClr val="94A3B8"/>
+                </a:solidFill>
+              </a:defRPr>
+            </a:lvl1pPr>
+            <a:lvl2pPr>
+              <a:defRPr sz="1200" b="0">
+                <a:solidFill>
+                  <a:srgbClr val="94A3B8"/>
+                </a:solidFill>
+              </a:defRPr>
+            </a:lvl2pPr>
+            <a:lvl3pPr>
+              <a:defRPr sz="1200" b="0">
+                <a:solidFill>
+                  <a:srgbClr val="94A3B8"/>
+                </a:solidFill>
+              </a:defRPr>
+            </a:lvl3pPr>
+            <a:lvl4pPr>
+              <a:defRPr sz="1200" b="0">
+                <a:solidFill>
+                  <a:srgbClr val="94A3B8"/>
+                </a:solidFill>
+              </a:defRPr>
+            </a:lvl4pPr>
+            <a:lvl5pPr>
+              <a:defRPr sz="1200" b="0">
+                <a:solidFill>
+                  <a:srgbClr val="94A3B8"/>
+                </a:solidFill>
+              </a:defRPr>
+            </a:lvl5pPr>
+            <a:lvl6pPr>
+              <a:defRPr sz="1200" b="0">
+                <a:solidFill>
+                  <a:srgbClr val="94A3B8"/>
+                </a:solidFill>
+              </a:defRPr>
+            </a:lvl6pPr>
+            <a:lvl7pPr>
+              <a:defRPr sz="1200" b="0">
+                <a:solidFill>
+                  <a:srgbClr val="94A3B8"/>
+                </a:solidFill>
+              </a:defRPr>
+            </a:lvl7pPr>
+            <a:lvl8pPr>
+              <a:defRPr sz="1200" b="0">
+                <a:solidFill>
+                  <a:srgbClr val="94A3B8"/>
+                </a:solidFill>
+              </a:defRPr>
+            </a:lvl8pPr>
+            <a:lvl9pPr>
+              <a:defRPr sz="1200" b="0">
+                <a:solidFill>
+                  <a:srgbClr val="94A3B8"/>
+                </a:solidFill>
+              </a:defRPr>
+            </a:lvl9pPr>
           </a:lstStyle>
           <a:p xmlns:a="http://schemas.openxmlformats.org/drawingml/2006/main">
             <a:pPr>
@@ -6859,7 +10918,7 @@
                   <a:srgbClr val="94A3B8"/>
                 </a:solidFill>
               </a:rPr>
-              <a:t>PUSD is a CashToken, so the VM proves token conservation. Change is forced back into the identical covenant bytecode. A claim can never drain the vault - only the payer can cancel.</a:t>
+              <a:t>PUSD is a CashToken, so the VM proves token conservation. One vault input and two outputs keep the accounting tight. Change returns to the identical covenant, and the BCH buffer is bounded. Only the payer can cancel.</a:t>
             </a:r>
           </a:p>
         </p:txBody>
@@ -6867,7 +10926,7 @@
     </p:spTree>
     <p:extLst>
       <p:ext uri="{BB962C8B-B14F-4D97-AF65-F5344CB8AC3E}">
-        <p14:creationId xmlns:p14="http://schemas.microsoft.com/office/powerpoint/2010/main" val="639331145"/>
+        <p14:creationId xmlns:p14="http://schemas.microsoft.com/office/powerpoint/2010/main" val="67462121"/>
       </p:ext>
     </p:extLst>
   </p:cSld>
@@ -6895,10 +10954,10 @@
       </p:grpSpPr>
       <p:sp>
         <p:nvSpPr>
-          <p:cNvPr id="12" name="">
+          <p:cNvPr id="21" name="">
             <a:extLst xmlns:a="http://schemas.openxmlformats.org/drawingml/2006/main">
               <a:ext uri="{FF2B5EF4-FFF2-40B4-BE49-F238E27FC236}">
-                <a16:creationId xmlns:a16="http://schemas.microsoft.com/office/drawing/2014/main" id="{9B20B05E-2E00-431C-8D04-7295ED6E223A}"/>
+                <a16:creationId xmlns:a16="http://schemas.microsoft.com/office/drawing/2014/main" id="{7D218C64-BFC7-4C4A-ACF0-D34DB8FF6C63}"/>
               </a:ext>
             </a:extLst>
           </p:cNvPr>
@@ -6931,6 +10990,69 @@
                 </a:solidFill>
               </a:defRPr>
             </a:defPPr>
+            <a:lvl1pPr>
+              <a:defRPr sz="975" b="1">
+                <a:solidFill>
+                  <a:srgbClr val="0AC18E"/>
+                </a:solidFill>
+              </a:defRPr>
+            </a:lvl1pPr>
+            <a:lvl2pPr>
+              <a:defRPr sz="975" b="1">
+                <a:solidFill>
+                  <a:srgbClr val="0AC18E"/>
+                </a:solidFill>
+              </a:defRPr>
+            </a:lvl2pPr>
+            <a:lvl3pPr>
+              <a:defRPr sz="975" b="1">
+                <a:solidFill>
+                  <a:srgbClr val="0AC18E"/>
+                </a:solidFill>
+              </a:defRPr>
+            </a:lvl3pPr>
+            <a:lvl4pPr>
+              <a:defRPr sz="975" b="1">
+                <a:solidFill>
+                  <a:srgbClr val="0AC18E"/>
+                </a:solidFill>
+              </a:defRPr>
+            </a:lvl4pPr>
+            <a:lvl5pPr>
+              <a:defRPr sz="975" b="1">
+                <a:solidFill>
+                  <a:srgbClr val="0AC18E"/>
+                </a:solidFill>
+              </a:defRPr>
+            </a:lvl5pPr>
+            <a:lvl6pPr>
+              <a:defRPr sz="975" b="1">
+                <a:solidFill>
+                  <a:srgbClr val="0AC18E"/>
+                </a:solidFill>
+              </a:defRPr>
+            </a:lvl6pPr>
+            <a:lvl7pPr>
+              <a:defRPr sz="975" b="1">
+                <a:solidFill>
+                  <a:srgbClr val="0AC18E"/>
+                </a:solidFill>
+              </a:defRPr>
+            </a:lvl7pPr>
+            <a:lvl8pPr>
+              <a:defRPr sz="975" b="1">
+                <a:solidFill>
+                  <a:srgbClr val="0AC18E"/>
+                </a:solidFill>
+              </a:defRPr>
+            </a:lvl8pPr>
+            <a:lvl9pPr>
+              <a:defRPr sz="975" b="1">
+                <a:solidFill>
+                  <a:srgbClr val="0AC18E"/>
+                </a:solidFill>
+              </a:defRPr>
+            </a:lvl9pPr>
           </a:lstStyle>
           <a:p xmlns:a="http://schemas.openxmlformats.org/drawingml/2006/main">
             <a:pPr>
@@ -6946,7 +11068,7 @@
                   <a:srgbClr val="0AC18E"/>
                 </a:solidFill>
               </a:rPr>
-              <a:t>VISION &amp; ROADMAP</a:t>
+              <a:t>AGENT BUDGET DEMO</a:t>
             </a:r>
           </a:p>
         </p:txBody>
@@ -6956,7 +11078,7 @@
           <p:cNvPr id="2" name="">
             <a:extLst xmlns:a="http://schemas.openxmlformats.org/drawingml/2006/main">
               <a:ext uri="{FF2B5EF4-FFF2-40B4-BE49-F238E27FC236}">
-                <a16:creationId xmlns:a16="http://schemas.microsoft.com/office/drawing/2014/main" id="{F6CE9C81-25AC-4042-8B61-F73B82A2618F}"/>
+                <a16:creationId xmlns:a16="http://schemas.microsoft.com/office/drawing/2014/main" id="{910C320B-8C6C-40D3-9BC6-F97875B0152F}"/>
               </a:ext>
             </a:extLst>
           </p:cNvPr>
@@ -6967,7 +11089,7 @@
         </p:nvSpPr>
         <p:spPr>
           <a:xfrm xmlns:a="http://schemas.openxmlformats.org/drawingml/2006/main">
-            <a:off x="685800" y="914400"/>
+            <a:off x="685800" y="876300"/>
             <a:ext cx="10477500" cy="476250"/>
           </a:xfrm>
           <a:prstGeom xmlns:a="http://schemas.openxmlformats.org/drawingml/2006/main" prst="rect">
@@ -6989,6 +11111,69 @@
                 </a:solidFill>
               </a:defRPr>
             </a:defPPr>
+            <a:lvl1pPr>
+              <a:defRPr sz="2100" b="1">
+                <a:solidFill>
+                  <a:srgbClr val="F1F5F9"/>
+                </a:solidFill>
+              </a:defRPr>
+            </a:lvl1pPr>
+            <a:lvl2pPr>
+              <a:defRPr sz="2100" b="1">
+                <a:solidFill>
+                  <a:srgbClr val="F1F5F9"/>
+                </a:solidFill>
+              </a:defRPr>
+            </a:lvl2pPr>
+            <a:lvl3pPr>
+              <a:defRPr sz="2100" b="1">
+                <a:solidFill>
+                  <a:srgbClr val="F1F5F9"/>
+                </a:solidFill>
+              </a:defRPr>
+            </a:lvl3pPr>
+            <a:lvl4pPr>
+              <a:defRPr sz="2100" b="1">
+                <a:solidFill>
+                  <a:srgbClr val="F1F5F9"/>
+                </a:solidFill>
+              </a:defRPr>
+            </a:lvl4pPr>
+            <a:lvl5pPr>
+              <a:defRPr sz="2100" b="1">
+                <a:solidFill>
+                  <a:srgbClr val="F1F5F9"/>
+                </a:solidFill>
+              </a:defRPr>
+            </a:lvl5pPr>
+            <a:lvl6pPr>
+              <a:defRPr sz="2100" b="1">
+                <a:solidFill>
+                  <a:srgbClr val="F1F5F9"/>
+                </a:solidFill>
+              </a:defRPr>
+            </a:lvl6pPr>
+            <a:lvl7pPr>
+              <a:defRPr sz="2100" b="1">
+                <a:solidFill>
+                  <a:srgbClr val="F1F5F9"/>
+                </a:solidFill>
+              </a:defRPr>
+            </a:lvl7pPr>
+            <a:lvl8pPr>
+              <a:defRPr sz="2100" b="1">
+                <a:solidFill>
+                  <a:srgbClr val="F1F5F9"/>
+                </a:solidFill>
+              </a:defRPr>
+            </a:lvl8pPr>
+            <a:lvl9pPr>
+              <a:defRPr sz="2100" b="1">
+                <a:solidFill>
+                  <a:srgbClr val="F1F5F9"/>
+                </a:solidFill>
+              </a:defRPr>
+            </a:lvl9pPr>
           </a:lstStyle>
           <a:p xmlns:a="http://schemas.openxmlformats.org/drawingml/2006/main">
             <a:pPr>
@@ -7004,7 +11189,7 @@
                   <a:srgbClr val="F1F5F9"/>
                 </a:solidFill>
               </a:rPr>
-              <a:t>From hackathon MVP to an agent money-stream protocol.</a:t>
+              <a:t>0.01 PUSD per call. A hard budget behind it.</a:t>
             </a:r>
           </a:p>
         </p:txBody>
@@ -7014,7 +11199,7 @@
           <p:cNvPr id="3" name="">
             <a:extLst xmlns:a="http://schemas.openxmlformats.org/drawingml/2006/main">
               <a:ext uri="{FF2B5EF4-FFF2-40B4-BE49-F238E27FC236}">
-                <a16:creationId xmlns:a16="http://schemas.microsoft.com/office/drawing/2014/main" id="{1B518B40-B2DF-40B6-8B1F-48B5A8317E36}"/>
+                <a16:creationId xmlns:a16="http://schemas.microsoft.com/office/drawing/2014/main" id="{A7862250-311B-4A80-B63F-2589B845DB9F}"/>
               </a:ext>
             </a:extLst>
           </p:cNvPr>
@@ -7025,12 +11210,12 @@
         </p:nvSpPr>
         <p:spPr>
           <a:xfrm xmlns:a="http://schemas.openxmlformats.org/drawingml/2006/main">
-            <a:off x="685800" y="1905000"/>
-            <a:ext cx="10477500" cy="952500"/>
+            <a:off x="685800" y="1714500"/>
+            <a:ext cx="2381250" cy="1143000"/>
           </a:xfrm>
           <a:prstGeom xmlns:a="http://schemas.openxmlformats.org/drawingml/2006/main" prst="roundRect">
             <a:avLst>
-              <a:gd name="adj" fmla="val 12000"/>
+              <a:gd name="adj" fmla="val 10000"/>
             </a:avLst>
           </a:prstGeom>
           <a:solidFill xmlns:a="http://schemas.openxmlformats.org/drawingml/2006/main">
@@ -7049,7 +11234,7 @@
           <p:cNvPr id="4" name="">
             <a:extLst xmlns:a="http://schemas.openxmlformats.org/drawingml/2006/main">
               <a:ext uri="{FF2B5EF4-FFF2-40B4-BE49-F238E27FC236}">
-                <a16:creationId xmlns:a16="http://schemas.microsoft.com/office/drawing/2014/main" id="{681D403D-9E4D-4CAA-94F3-DE96481D41A3}"/>
+                <a16:creationId xmlns:a16="http://schemas.microsoft.com/office/drawing/2014/main" id="{864F26B0-591F-405E-98DD-761DD33630E3}"/>
               </a:ext>
             </a:extLst>
           </p:cNvPr>
@@ -7060,8 +11245,8 @@
         </p:nvSpPr>
         <p:spPr>
           <a:xfrm xmlns:a="http://schemas.openxmlformats.org/drawingml/2006/main">
-            <a:off x="952500" y="2095500"/>
-            <a:ext cx="3619500" cy="285750"/>
+            <a:off x="876300" y="1943100"/>
+            <a:ext cx="2000250" cy="323850"/>
           </a:xfrm>
           <a:prstGeom xmlns:a="http://schemas.openxmlformats.org/drawingml/2006/main" prst="rect">
             <a:avLst/>
@@ -7082,6 +11267,69 @@
                 </a:solidFill>
               </a:defRPr>
             </a:defPPr>
+            <a:lvl1pPr>
+              <a:defRPr sz="1650" b="1">
+                <a:solidFill>
+                  <a:srgbClr val="0AC18E"/>
+                </a:solidFill>
+              </a:defRPr>
+            </a:lvl1pPr>
+            <a:lvl2pPr>
+              <a:defRPr sz="1650" b="1">
+                <a:solidFill>
+                  <a:srgbClr val="0AC18E"/>
+                </a:solidFill>
+              </a:defRPr>
+            </a:lvl2pPr>
+            <a:lvl3pPr>
+              <a:defRPr sz="1650" b="1">
+                <a:solidFill>
+                  <a:srgbClr val="0AC18E"/>
+                </a:solidFill>
+              </a:defRPr>
+            </a:lvl3pPr>
+            <a:lvl4pPr>
+              <a:defRPr sz="1650" b="1">
+                <a:solidFill>
+                  <a:srgbClr val="0AC18E"/>
+                </a:solidFill>
+              </a:defRPr>
+            </a:lvl4pPr>
+            <a:lvl5pPr>
+              <a:defRPr sz="1650" b="1">
+                <a:solidFill>
+                  <a:srgbClr val="0AC18E"/>
+                </a:solidFill>
+              </a:defRPr>
+            </a:lvl5pPr>
+            <a:lvl6pPr>
+              <a:defRPr sz="1650" b="1">
+                <a:solidFill>
+                  <a:srgbClr val="0AC18E"/>
+                </a:solidFill>
+              </a:defRPr>
+            </a:lvl6pPr>
+            <a:lvl7pPr>
+              <a:defRPr sz="1650" b="1">
+                <a:solidFill>
+                  <a:srgbClr val="0AC18E"/>
+                </a:solidFill>
+              </a:defRPr>
+            </a:lvl7pPr>
+            <a:lvl8pPr>
+              <a:defRPr sz="1650" b="1">
+                <a:solidFill>
+                  <a:srgbClr val="0AC18E"/>
+                </a:solidFill>
+              </a:defRPr>
+            </a:lvl8pPr>
+            <a:lvl9pPr>
+              <a:defRPr sz="1650" b="1">
+                <a:solidFill>
+                  <a:srgbClr val="0AC18E"/>
+                </a:solidFill>
+              </a:defRPr>
+            </a:lvl9pPr>
           </a:lstStyle>
           <a:p xmlns:a="http://schemas.openxmlformats.org/drawingml/2006/main">
             <a:pPr>
@@ -7097,7 +11345,7 @@
                   <a:srgbClr val="0AC18E"/>
                 </a:solidFill>
               </a:rPr>
-              <a:t>Phase 1 - Hackathon</a:t>
+              <a:t>2.00 PUSD</a:t>
             </a:r>
           </a:p>
         </p:txBody>
@@ -7107,7 +11355,7 @@
           <p:cNvPr id="5" name="">
             <a:extLst xmlns:a="http://schemas.openxmlformats.org/drawingml/2006/main">
               <a:ext uri="{FF2B5EF4-FFF2-40B4-BE49-F238E27FC236}">
-                <a16:creationId xmlns:a16="http://schemas.microsoft.com/office/drawing/2014/main" id="{A318B176-F486-4615-9594-60859F00843A}"/>
+                <a16:creationId xmlns:a16="http://schemas.microsoft.com/office/drawing/2014/main" id="{B498DA29-2A0C-4F41-A34D-429453277A1E}"/>
               </a:ext>
             </a:extLst>
           </p:cNvPr>
@@ -7118,8 +11366,8 @@
         </p:nvSpPr>
         <p:spPr>
           <a:xfrm xmlns:a="http://schemas.openxmlformats.org/drawingml/2006/main">
-            <a:off x="4781550" y="2190750"/>
-            <a:ext cx="6096000" cy="476250"/>
+            <a:off x="876300" y="2381250"/>
+            <a:ext cx="2000250" cy="228600"/>
           </a:xfrm>
           <a:prstGeom xmlns:a="http://schemas.openxmlformats.org/drawingml/2006/main" prst="rect">
             <a:avLst/>
@@ -7134,28 +11382,91 @@
           <a:bodyPr xmlns:a="http://schemas.openxmlformats.org/drawingml/2006/main"/>
           <a:lstStyle xmlns:a="http://schemas.openxmlformats.org/drawingml/2006/main">
             <a:defPPr>
-              <a:defRPr sz="1275" b="0">
+              <a:defRPr sz="975" b="0">
                 <a:solidFill>
                   <a:srgbClr val="94A3B8"/>
                 </a:solidFill>
               </a:defRPr>
             </a:defPPr>
+            <a:lvl1pPr>
+              <a:defRPr sz="975" b="0">
+                <a:solidFill>
+                  <a:srgbClr val="94A3B8"/>
+                </a:solidFill>
+              </a:defRPr>
+            </a:lvl1pPr>
+            <a:lvl2pPr>
+              <a:defRPr sz="975" b="0">
+                <a:solidFill>
+                  <a:srgbClr val="94A3B8"/>
+                </a:solidFill>
+              </a:defRPr>
+            </a:lvl2pPr>
+            <a:lvl3pPr>
+              <a:defRPr sz="975" b="0">
+                <a:solidFill>
+                  <a:srgbClr val="94A3B8"/>
+                </a:solidFill>
+              </a:defRPr>
+            </a:lvl3pPr>
+            <a:lvl4pPr>
+              <a:defRPr sz="975" b="0">
+                <a:solidFill>
+                  <a:srgbClr val="94A3B8"/>
+                </a:solidFill>
+              </a:defRPr>
+            </a:lvl4pPr>
+            <a:lvl5pPr>
+              <a:defRPr sz="975" b="0">
+                <a:solidFill>
+                  <a:srgbClr val="94A3B8"/>
+                </a:solidFill>
+              </a:defRPr>
+            </a:lvl5pPr>
+            <a:lvl6pPr>
+              <a:defRPr sz="975" b="0">
+                <a:solidFill>
+                  <a:srgbClr val="94A3B8"/>
+                </a:solidFill>
+              </a:defRPr>
+            </a:lvl6pPr>
+            <a:lvl7pPr>
+              <a:defRPr sz="975" b="0">
+                <a:solidFill>
+                  <a:srgbClr val="94A3B8"/>
+                </a:solidFill>
+              </a:defRPr>
+            </a:lvl7pPr>
+            <a:lvl8pPr>
+              <a:defRPr sz="975" b="0">
+                <a:solidFill>
+                  <a:srgbClr val="94A3B8"/>
+                </a:solidFill>
+              </a:defRPr>
+            </a:lvl8pPr>
+            <a:lvl9pPr>
+              <a:defRPr sz="975" b="0">
+                <a:solidFill>
+                  <a:srgbClr val="94A3B8"/>
+                </a:solidFill>
+              </a:defRPr>
+            </a:lvl9pPr>
           </a:lstStyle>
           <a:p xmlns:a="http://schemas.openxmlformats.org/drawingml/2006/main">
             <a:pPr>
-              <a:defRPr sz="1275" b="0">
+              <a:defRPr sz="975" b="0">
                 <a:solidFill>
                   <a:srgbClr val="94A3B8"/>
                 </a:solidFill>
               </a:defRPr>
             </a:pPr>
             <a:r>
-              <a:rPr sz="1275" b="0">
+              <a:rPr sz="975" b="0">
                 <a:solidFill>
                   <a:srgbClr val="94A3B8"/>
                 </a:solidFill>
               </a:rPr>
-              <a:t>Covenant, cockpit, Chipnet + Mainnet settlement.</a:t>
+              <a:t>vault</a:t>
             </a:r>
           </a:p>
         </p:txBody>
@@ -7165,7 +11476,7 @@
           <p:cNvPr id="6" name="">
             <a:extLst xmlns:a="http://schemas.openxmlformats.org/drawingml/2006/main">
               <a:ext uri="{FF2B5EF4-FFF2-40B4-BE49-F238E27FC236}">
-                <a16:creationId xmlns:a16="http://schemas.microsoft.com/office/drawing/2014/main" id="{93F18D8E-3D89-456E-A8C1-D0F544ECFC6D}"/>
+                <a16:creationId xmlns:a16="http://schemas.microsoft.com/office/drawing/2014/main" id="{1970D2D9-5086-4D50-8C9A-2F9B8AF520BA}"/>
               </a:ext>
             </a:extLst>
           </p:cNvPr>
@@ -7176,12 +11487,12 @@
         </p:nvSpPr>
         <p:spPr>
           <a:xfrm xmlns:a="http://schemas.openxmlformats.org/drawingml/2006/main">
-            <a:off x="685800" y="3048000"/>
-            <a:ext cx="10477500" cy="952500"/>
+            <a:off x="3333750" y="1714500"/>
+            <a:ext cx="2381250" cy="1143000"/>
           </a:xfrm>
           <a:prstGeom xmlns:a="http://schemas.openxmlformats.org/drawingml/2006/main" prst="roundRect">
             <a:avLst>
-              <a:gd name="adj" fmla="val 12000"/>
+              <a:gd name="adj" fmla="val 10000"/>
             </a:avLst>
           </a:prstGeom>
           <a:solidFill xmlns:a="http://schemas.openxmlformats.org/drawingml/2006/main">
@@ -7200,7 +11511,7 @@
           <p:cNvPr id="7" name="">
             <a:extLst xmlns:a="http://schemas.openxmlformats.org/drawingml/2006/main">
               <a:ext uri="{FF2B5EF4-FFF2-40B4-BE49-F238E27FC236}">
-                <a16:creationId xmlns:a16="http://schemas.microsoft.com/office/drawing/2014/main" id="{EB71CD7E-BFEF-463F-8DC9-DD09D25B0DFD}"/>
+                <a16:creationId xmlns:a16="http://schemas.microsoft.com/office/drawing/2014/main" id="{864D5F2D-98B6-473E-B6D0-C726F2A7120D}"/>
               </a:ext>
             </a:extLst>
           </p:cNvPr>
@@ -7211,8 +11522,8 @@
         </p:nvSpPr>
         <p:spPr>
           <a:xfrm xmlns:a="http://schemas.openxmlformats.org/drawingml/2006/main">
-            <a:off x="952500" y="3238500"/>
-            <a:ext cx="3619500" cy="285750"/>
+            <a:off x="3524250" y="1943100"/>
+            <a:ext cx="2000250" cy="323850"/>
           </a:xfrm>
           <a:prstGeom xmlns:a="http://schemas.openxmlformats.org/drawingml/2006/main" prst="rect">
             <a:avLst/>
@@ -7233,6 +11544,69 @@
                 </a:solidFill>
               </a:defRPr>
             </a:defPPr>
+            <a:lvl1pPr>
+              <a:defRPr sz="1650" b="1">
+                <a:solidFill>
+                  <a:srgbClr val="0AC18E"/>
+                </a:solidFill>
+              </a:defRPr>
+            </a:lvl1pPr>
+            <a:lvl2pPr>
+              <a:defRPr sz="1650" b="1">
+                <a:solidFill>
+                  <a:srgbClr val="0AC18E"/>
+                </a:solidFill>
+              </a:defRPr>
+            </a:lvl2pPr>
+            <a:lvl3pPr>
+              <a:defRPr sz="1650" b="1">
+                <a:solidFill>
+                  <a:srgbClr val="0AC18E"/>
+                </a:solidFill>
+              </a:defRPr>
+            </a:lvl3pPr>
+            <a:lvl4pPr>
+              <a:defRPr sz="1650" b="1">
+                <a:solidFill>
+                  <a:srgbClr val="0AC18E"/>
+                </a:solidFill>
+              </a:defRPr>
+            </a:lvl4pPr>
+            <a:lvl5pPr>
+              <a:defRPr sz="1650" b="1">
+                <a:solidFill>
+                  <a:srgbClr val="0AC18E"/>
+                </a:solidFill>
+              </a:defRPr>
+            </a:lvl5pPr>
+            <a:lvl6pPr>
+              <a:defRPr sz="1650" b="1">
+                <a:solidFill>
+                  <a:srgbClr val="0AC18E"/>
+                </a:solidFill>
+              </a:defRPr>
+            </a:lvl6pPr>
+            <a:lvl7pPr>
+              <a:defRPr sz="1650" b="1">
+                <a:solidFill>
+                  <a:srgbClr val="0AC18E"/>
+                </a:solidFill>
+              </a:defRPr>
+            </a:lvl7pPr>
+            <a:lvl8pPr>
+              <a:defRPr sz="1650" b="1">
+                <a:solidFill>
+                  <a:srgbClr val="0AC18E"/>
+                </a:solidFill>
+              </a:defRPr>
+            </a:lvl8pPr>
+            <a:lvl9pPr>
+              <a:defRPr sz="1650" b="1">
+                <a:solidFill>
+                  <a:srgbClr val="0AC18E"/>
+                </a:solidFill>
+              </a:defRPr>
+            </a:lvl9pPr>
           </a:lstStyle>
           <a:p xmlns:a="http://schemas.openxmlformats.org/drawingml/2006/main">
             <a:pPr>
@@ -7248,7 +11622,7 @@
                   <a:srgbClr val="0AC18E"/>
                 </a:solidFill>
               </a:rPr>
-              <a:t>Phase 2 - SDK + MCP</a:t>
+              <a:t>0.10 PUSD</a:t>
             </a:r>
           </a:p>
         </p:txBody>
@@ -7258,7 +11632,7 @@
           <p:cNvPr id="8" name="">
             <a:extLst xmlns:a="http://schemas.openxmlformats.org/drawingml/2006/main">
               <a:ext uri="{FF2B5EF4-FFF2-40B4-BE49-F238E27FC236}">
-                <a16:creationId xmlns:a16="http://schemas.microsoft.com/office/drawing/2014/main" id="{ACFBDE91-CEFD-4CC9-BC80-C18B37CC9598}"/>
+                <a16:creationId xmlns:a16="http://schemas.microsoft.com/office/drawing/2014/main" id="{AAEB868F-5CAB-4316-8BC1-6585D3B24AD0}"/>
               </a:ext>
             </a:extLst>
           </p:cNvPr>
@@ -7269,8 +11643,8 @@
         </p:nvSpPr>
         <p:spPr>
           <a:xfrm xmlns:a="http://schemas.openxmlformats.org/drawingml/2006/main">
-            <a:off x="4781550" y="3333750"/>
-            <a:ext cx="6096000" cy="476250"/>
+            <a:off x="3524250" y="2381250"/>
+            <a:ext cx="2000250" cy="228600"/>
           </a:xfrm>
           <a:prstGeom xmlns:a="http://schemas.openxmlformats.org/drawingml/2006/main" prst="rect">
             <a:avLst/>
@@ -7285,28 +11659,91 @@
           <a:bodyPr xmlns:a="http://schemas.openxmlformats.org/drawingml/2006/main"/>
           <a:lstStyle xmlns:a="http://schemas.openxmlformats.org/drawingml/2006/main">
             <a:defPPr>
-              <a:defRPr sz="1275" b="0">
+              <a:defRPr sz="975" b="0">
                 <a:solidFill>
                   <a:srgbClr val="94A3B8"/>
                 </a:solidFill>
               </a:defRPr>
             </a:defPPr>
+            <a:lvl1pPr>
+              <a:defRPr sz="975" b="0">
+                <a:solidFill>
+                  <a:srgbClr val="94A3B8"/>
+                </a:solidFill>
+              </a:defRPr>
+            </a:lvl1pPr>
+            <a:lvl2pPr>
+              <a:defRPr sz="975" b="0">
+                <a:solidFill>
+                  <a:srgbClr val="94A3B8"/>
+                </a:solidFill>
+              </a:defRPr>
+            </a:lvl2pPr>
+            <a:lvl3pPr>
+              <a:defRPr sz="975" b="0">
+                <a:solidFill>
+                  <a:srgbClr val="94A3B8"/>
+                </a:solidFill>
+              </a:defRPr>
+            </a:lvl3pPr>
+            <a:lvl4pPr>
+              <a:defRPr sz="975" b="0">
+                <a:solidFill>
+                  <a:srgbClr val="94A3B8"/>
+                </a:solidFill>
+              </a:defRPr>
+            </a:lvl4pPr>
+            <a:lvl5pPr>
+              <a:defRPr sz="975" b="0">
+                <a:solidFill>
+                  <a:srgbClr val="94A3B8"/>
+                </a:solidFill>
+              </a:defRPr>
+            </a:lvl5pPr>
+            <a:lvl6pPr>
+              <a:defRPr sz="975" b="0">
+                <a:solidFill>
+                  <a:srgbClr val="94A3B8"/>
+                </a:solidFill>
+              </a:defRPr>
+            </a:lvl6pPr>
+            <a:lvl7pPr>
+              <a:defRPr sz="975" b="0">
+                <a:solidFill>
+                  <a:srgbClr val="94A3B8"/>
+                </a:solidFill>
+              </a:defRPr>
+            </a:lvl7pPr>
+            <a:lvl8pPr>
+              <a:defRPr sz="975" b="0">
+                <a:solidFill>
+                  <a:srgbClr val="94A3B8"/>
+                </a:solidFill>
+              </a:defRPr>
+            </a:lvl8pPr>
+            <a:lvl9pPr>
+              <a:defRPr sz="975" b="0">
+                <a:solidFill>
+                  <a:srgbClr val="94A3B8"/>
+                </a:solidFill>
+              </a:defRPr>
+            </a:lvl9pPr>
           </a:lstStyle>
           <a:p xmlns:a="http://schemas.openxmlformats.org/drawingml/2006/main">
             <a:pPr>
-              <a:defRPr sz="1275" b="0">
+              <a:defRPr sz="975" b="0">
                 <a:solidFill>
                   <a:srgbClr val="94A3B8"/>
                 </a:solidFill>
               </a:defRPr>
             </a:pPr>
             <a:r>
-              <a:rPr sz="1275" b="0">
+              <a:rPr sz="975" b="0">
                 <a:solidFill>
                   <a:srgbClr val="94A3B8"/>
                 </a:solidFill>
               </a:rPr>
-              <a:t>Agents stream a per-call PUSD budget.</a:t>
+              <a:t>per 2 blocks</a:t>
             </a:r>
           </a:p>
         </p:txBody>
@@ -7316,7 +11753,7 @@
           <p:cNvPr id="9" name="">
             <a:extLst xmlns:a="http://schemas.openxmlformats.org/drawingml/2006/main">
               <a:ext uri="{FF2B5EF4-FFF2-40B4-BE49-F238E27FC236}">
-                <a16:creationId xmlns:a16="http://schemas.microsoft.com/office/drawing/2014/main" id="{8558ACAB-9C95-464C-B70A-2BC0EA5CCA89}"/>
+                <a16:creationId xmlns:a16="http://schemas.microsoft.com/office/drawing/2014/main" id="{23D449FE-4E31-4661-92A3-C67976616E34}"/>
               </a:ext>
             </a:extLst>
           </p:cNvPr>
@@ -7327,12 +11764,12 @@
         </p:nvSpPr>
         <p:spPr>
           <a:xfrm xmlns:a="http://schemas.openxmlformats.org/drawingml/2006/main">
-            <a:off x="685800" y="4191000"/>
-            <a:ext cx="10477500" cy="952500"/>
+            <a:off x="5981700" y="1714500"/>
+            <a:ext cx="2381250" cy="1143000"/>
           </a:xfrm>
           <a:prstGeom xmlns:a="http://schemas.openxmlformats.org/drawingml/2006/main" prst="roundRect">
             <a:avLst>
-              <a:gd name="adj" fmla="val 12000"/>
+              <a:gd name="adj" fmla="val 10000"/>
             </a:avLst>
           </a:prstGeom>
           <a:solidFill xmlns:a="http://schemas.openxmlformats.org/drawingml/2006/main">
@@ -7351,7 +11788,7 @@
           <p:cNvPr id="10" name="">
             <a:extLst xmlns:a="http://schemas.openxmlformats.org/drawingml/2006/main">
               <a:ext uri="{FF2B5EF4-FFF2-40B4-BE49-F238E27FC236}">
-                <a16:creationId xmlns:a16="http://schemas.microsoft.com/office/drawing/2014/main" id="{DDC7B76F-3DE0-4590-A3B4-57DBDCDF35F0}"/>
+                <a16:creationId xmlns:a16="http://schemas.microsoft.com/office/drawing/2014/main" id="{DBE59F5F-79C2-4EC2-B47C-780E387AC90C}"/>
               </a:ext>
             </a:extLst>
           </p:cNvPr>
@@ -7362,8 +11799,8 @@
         </p:nvSpPr>
         <p:spPr>
           <a:xfrm xmlns:a="http://schemas.openxmlformats.org/drawingml/2006/main">
-            <a:off x="952500" y="4381500"/>
-            <a:ext cx="3619500" cy="285750"/>
+            <a:off x="6172200" y="1943100"/>
+            <a:ext cx="2000250" cy="323850"/>
           </a:xfrm>
           <a:prstGeom xmlns:a="http://schemas.openxmlformats.org/drawingml/2006/main" prst="rect">
             <a:avLst/>
@@ -7384,6 +11821,69 @@
                 </a:solidFill>
               </a:defRPr>
             </a:defPPr>
+            <a:lvl1pPr>
+              <a:defRPr sz="1650" b="1">
+                <a:solidFill>
+                  <a:srgbClr val="0AC18E"/>
+                </a:solidFill>
+              </a:defRPr>
+            </a:lvl1pPr>
+            <a:lvl2pPr>
+              <a:defRPr sz="1650" b="1">
+                <a:solidFill>
+                  <a:srgbClr val="0AC18E"/>
+                </a:solidFill>
+              </a:defRPr>
+            </a:lvl2pPr>
+            <a:lvl3pPr>
+              <a:defRPr sz="1650" b="1">
+                <a:solidFill>
+                  <a:srgbClr val="0AC18E"/>
+                </a:solidFill>
+              </a:defRPr>
+            </a:lvl3pPr>
+            <a:lvl4pPr>
+              <a:defRPr sz="1650" b="1">
+                <a:solidFill>
+                  <a:srgbClr val="0AC18E"/>
+                </a:solidFill>
+              </a:defRPr>
+            </a:lvl4pPr>
+            <a:lvl5pPr>
+              <a:defRPr sz="1650" b="1">
+                <a:solidFill>
+                  <a:srgbClr val="0AC18E"/>
+                </a:solidFill>
+              </a:defRPr>
+            </a:lvl5pPr>
+            <a:lvl6pPr>
+              <a:defRPr sz="1650" b="1">
+                <a:solidFill>
+                  <a:srgbClr val="0AC18E"/>
+                </a:solidFill>
+              </a:defRPr>
+            </a:lvl6pPr>
+            <a:lvl7pPr>
+              <a:defRPr sz="1650" b="1">
+                <a:solidFill>
+                  <a:srgbClr val="0AC18E"/>
+                </a:solidFill>
+              </a:defRPr>
+            </a:lvl7pPr>
+            <a:lvl8pPr>
+              <a:defRPr sz="1650" b="1">
+                <a:solidFill>
+                  <a:srgbClr val="0AC18E"/>
+                </a:solidFill>
+              </a:defRPr>
+            </a:lvl8pPr>
+            <a:lvl9pPr>
+              <a:defRPr sz="1650" b="1">
+                <a:solidFill>
+                  <a:srgbClr val="0AC18E"/>
+                </a:solidFill>
+              </a:defRPr>
+            </a:lvl9pPr>
           </a:lstStyle>
           <a:p xmlns:a="http://schemas.openxmlformats.org/drawingml/2006/main">
             <a:pPr>
@@ -7399,7 +11899,7 @@
                   <a:srgbClr val="0AC18E"/>
                 </a:solidFill>
               </a:rPr>
-              <a:t>Phase 3 - Marketplace</a:t>
+              <a:t>0.01 PUSD</a:t>
             </a:r>
           </a:p>
         </p:txBody>
@@ -7409,7 +11909,7 @@
           <p:cNvPr id="11" name="">
             <a:extLst xmlns:a="http://schemas.openxmlformats.org/drawingml/2006/main">
               <a:ext uri="{FF2B5EF4-FFF2-40B4-BE49-F238E27FC236}">
-                <a16:creationId xmlns:a16="http://schemas.microsoft.com/office/drawing/2014/main" id="{AC95BBDA-224F-4633-BE6B-9B55282D3170}"/>
+                <a16:creationId xmlns:a16="http://schemas.microsoft.com/office/drawing/2014/main" id="{E7D5925E-3086-41A4-92ED-906E3DA1542E}"/>
               </a:ext>
             </a:extLst>
           </p:cNvPr>
@@ -7420,8 +11920,8 @@
         </p:nvSpPr>
         <p:spPr>
           <a:xfrm xmlns:a="http://schemas.openxmlformats.org/drawingml/2006/main">
-            <a:off x="4781550" y="4476750"/>
-            <a:ext cx="6096000" cy="476250"/>
+            <a:off x="6172200" y="2381250"/>
+            <a:ext cx="2000250" cy="228600"/>
           </a:xfrm>
           <a:prstGeom xmlns:a="http://schemas.openxmlformats.org/drawingml/2006/main" prst="rect">
             <a:avLst/>
@@ -7436,28 +11936,922 @@
           <a:bodyPr xmlns:a="http://schemas.openxmlformats.org/drawingml/2006/main"/>
           <a:lstStyle xmlns:a="http://schemas.openxmlformats.org/drawingml/2006/main">
             <a:defPPr>
-              <a:defRPr sz="1275" b="0">
+              <a:defRPr sz="975" b="0">
                 <a:solidFill>
                   <a:srgbClr val="94A3B8"/>
                 </a:solidFill>
               </a:defRPr>
             </a:defPPr>
+            <a:lvl1pPr>
+              <a:defRPr sz="975" b="0">
+                <a:solidFill>
+                  <a:srgbClr val="94A3B8"/>
+                </a:solidFill>
+              </a:defRPr>
+            </a:lvl1pPr>
+            <a:lvl2pPr>
+              <a:defRPr sz="975" b="0">
+                <a:solidFill>
+                  <a:srgbClr val="94A3B8"/>
+                </a:solidFill>
+              </a:defRPr>
+            </a:lvl2pPr>
+            <a:lvl3pPr>
+              <a:defRPr sz="975" b="0">
+                <a:solidFill>
+                  <a:srgbClr val="94A3B8"/>
+                </a:solidFill>
+              </a:defRPr>
+            </a:lvl3pPr>
+            <a:lvl4pPr>
+              <a:defRPr sz="975" b="0">
+                <a:solidFill>
+                  <a:srgbClr val="94A3B8"/>
+                </a:solidFill>
+              </a:defRPr>
+            </a:lvl4pPr>
+            <a:lvl5pPr>
+              <a:defRPr sz="975" b="0">
+                <a:solidFill>
+                  <a:srgbClr val="94A3B8"/>
+                </a:solidFill>
+              </a:defRPr>
+            </a:lvl5pPr>
+            <a:lvl6pPr>
+              <a:defRPr sz="975" b="0">
+                <a:solidFill>
+                  <a:srgbClr val="94A3B8"/>
+                </a:solidFill>
+              </a:defRPr>
+            </a:lvl6pPr>
+            <a:lvl7pPr>
+              <a:defRPr sz="975" b="0">
+                <a:solidFill>
+                  <a:srgbClr val="94A3B8"/>
+                </a:solidFill>
+              </a:defRPr>
+            </a:lvl7pPr>
+            <a:lvl8pPr>
+              <a:defRPr sz="975" b="0">
+                <a:solidFill>
+                  <a:srgbClr val="94A3B8"/>
+                </a:solidFill>
+              </a:defRPr>
+            </a:lvl8pPr>
+            <a:lvl9pPr>
+              <a:defRPr sz="975" b="0">
+                <a:solidFill>
+                  <a:srgbClr val="94A3B8"/>
+                </a:solidFill>
+              </a:defRPr>
+            </a:lvl9pPr>
           </a:lstStyle>
           <a:p xmlns:a="http://schemas.openxmlformats.org/drawingml/2006/main">
             <a:pPr>
-              <a:defRPr sz="1275" b="0">
+              <a:defRPr sz="975" b="0">
                 <a:solidFill>
                   <a:srgbClr val="94A3B8"/>
                 </a:solidFill>
               </a:defRPr>
             </a:pPr>
             <a:r>
-              <a:rPr sz="1275" b="0">
+              <a:rPr sz="975" b="0">
                 <a:solidFill>
                   <a:srgbClr val="94A3B8"/>
                 </a:solidFill>
               </a:rPr>
-              <a:t>Directory of PUSD-denominated recurring services.</a:t>
+              <a:t>per service call</a:t>
+            </a:r>
+          </a:p>
+        </p:txBody>
+      </p:sp>
+      <p:sp>
+        <p:nvSpPr>
+          <p:cNvPr id="12" name="">
+            <a:extLst xmlns:a="http://schemas.openxmlformats.org/drawingml/2006/main">
+              <a:ext uri="{FF2B5EF4-FFF2-40B4-BE49-F238E27FC236}">
+                <a16:creationId xmlns:a16="http://schemas.microsoft.com/office/drawing/2014/main" id="{6E11F7E6-9663-496B-B367-EB26CEE00FAB}"/>
+              </a:ext>
+            </a:extLst>
+          </p:cNvPr>
+          <p:cNvSpPr>
+            <a:spLocks xmlns:a="http://schemas.openxmlformats.org/drawingml/2006/main" noGrp="1"/>
+          </p:cNvSpPr>
+          <p:nvPr/>
+        </p:nvSpPr>
+        <p:spPr>
+          <a:xfrm xmlns:a="http://schemas.openxmlformats.org/drawingml/2006/main">
+            <a:off x="8629650" y="1714500"/>
+            <a:ext cx="2381250" cy="1143000"/>
+          </a:xfrm>
+          <a:prstGeom xmlns:a="http://schemas.openxmlformats.org/drawingml/2006/main" prst="roundRect">
+            <a:avLst>
+              <a:gd name="adj" fmla="val 10000"/>
+            </a:avLst>
+          </a:prstGeom>
+          <a:solidFill xmlns:a="http://schemas.openxmlformats.org/drawingml/2006/main">
+            <a:srgbClr val="111827"/>
+          </a:solidFill>
+          <a:ln xmlns:a="http://schemas.openxmlformats.org/drawingml/2006/main" w="9525">
+            <a:solidFill>
+              <a:srgbClr val="1F2937"/>
+            </a:solidFill>
+            <a:prstDash val="solid"/>
+          </a:ln>
+        </p:spPr>
+      </p:sp>
+      <p:sp>
+        <p:nvSpPr>
+          <p:cNvPr id="13" name="">
+            <a:extLst xmlns:a="http://schemas.openxmlformats.org/drawingml/2006/main">
+              <a:ext uri="{FF2B5EF4-FFF2-40B4-BE49-F238E27FC236}">
+                <a16:creationId xmlns:a16="http://schemas.microsoft.com/office/drawing/2014/main" id="{5F0EFC52-E8D2-4938-B3DB-3F6B14D6DAE6}"/>
+              </a:ext>
+            </a:extLst>
+          </p:cNvPr>
+          <p:cNvSpPr>
+            <a:spLocks xmlns:a="http://schemas.openxmlformats.org/drawingml/2006/main" noGrp="1"/>
+          </p:cNvSpPr>
+          <p:nvPr/>
+        </p:nvSpPr>
+        <p:spPr>
+          <a:xfrm xmlns:a="http://schemas.openxmlformats.org/drawingml/2006/main">
+            <a:off x="8820150" y="1943100"/>
+            <a:ext cx="2000250" cy="323850"/>
+          </a:xfrm>
+          <a:prstGeom xmlns:a="http://schemas.openxmlformats.org/drawingml/2006/main" prst="rect">
+            <a:avLst/>
+          </a:prstGeom>
+          <a:noFill xmlns:a="http://schemas.openxmlformats.org/drawingml/2006/main"/>
+          <a:ln xmlns:a="http://schemas.openxmlformats.org/drawingml/2006/main" w="0">
+            <a:noFill/>
+            <a:prstDash val="solid"/>
+          </a:ln>
+        </p:spPr>
+        <p:txBody>
+          <a:bodyPr xmlns:a="http://schemas.openxmlformats.org/drawingml/2006/main"/>
+          <a:lstStyle xmlns:a="http://schemas.openxmlformats.org/drawingml/2006/main">
+            <a:defPPr>
+              <a:defRPr sz="1650" b="1">
+                <a:solidFill>
+                  <a:srgbClr val="0AC18E"/>
+                </a:solidFill>
+              </a:defRPr>
+            </a:defPPr>
+            <a:lvl1pPr>
+              <a:defRPr sz="1650" b="1">
+                <a:solidFill>
+                  <a:srgbClr val="0AC18E"/>
+                </a:solidFill>
+              </a:defRPr>
+            </a:lvl1pPr>
+            <a:lvl2pPr>
+              <a:defRPr sz="1650" b="1">
+                <a:solidFill>
+                  <a:srgbClr val="0AC18E"/>
+                </a:solidFill>
+              </a:defRPr>
+            </a:lvl2pPr>
+            <a:lvl3pPr>
+              <a:defRPr sz="1650" b="1">
+                <a:solidFill>
+                  <a:srgbClr val="0AC18E"/>
+                </a:solidFill>
+              </a:defRPr>
+            </a:lvl3pPr>
+            <a:lvl4pPr>
+              <a:defRPr sz="1650" b="1">
+                <a:solidFill>
+                  <a:srgbClr val="0AC18E"/>
+                </a:solidFill>
+              </a:defRPr>
+            </a:lvl4pPr>
+            <a:lvl5pPr>
+              <a:defRPr sz="1650" b="1">
+                <a:solidFill>
+                  <a:srgbClr val="0AC18E"/>
+                </a:solidFill>
+              </a:defRPr>
+            </a:lvl5pPr>
+            <a:lvl6pPr>
+              <a:defRPr sz="1650" b="1">
+                <a:solidFill>
+                  <a:srgbClr val="0AC18E"/>
+                </a:solidFill>
+              </a:defRPr>
+            </a:lvl6pPr>
+            <a:lvl7pPr>
+              <a:defRPr sz="1650" b="1">
+                <a:solidFill>
+                  <a:srgbClr val="0AC18E"/>
+                </a:solidFill>
+              </a:defRPr>
+            </a:lvl7pPr>
+            <a:lvl8pPr>
+              <a:defRPr sz="1650" b="1">
+                <a:solidFill>
+                  <a:srgbClr val="0AC18E"/>
+                </a:solidFill>
+              </a:defRPr>
+            </a:lvl8pPr>
+            <a:lvl9pPr>
+              <a:defRPr sz="1650" b="1">
+                <a:solidFill>
+                  <a:srgbClr val="0AC18E"/>
+                </a:solidFill>
+              </a:defRPr>
+            </a:lvl9pPr>
+          </a:lstStyle>
+          <a:p xmlns:a="http://schemas.openxmlformats.org/drawingml/2006/main">
+            <a:pPr>
+              <a:defRPr sz="1650" b="1">
+                <a:solidFill>
+                  <a:srgbClr val="0AC18E"/>
+                </a:solidFill>
+              </a:defRPr>
+            </a:pPr>
+            <a:r>
+              <a:rPr sz="1650" b="1">
+                <a:solidFill>
+                  <a:srgbClr val="0AC18E"/>
+                </a:solidFill>
+              </a:rPr>
+              <a:t>SV1:requestId</a:t>
+            </a:r>
+          </a:p>
+        </p:txBody>
+      </p:sp>
+      <p:sp>
+        <p:nvSpPr>
+          <p:cNvPr id="14" name="">
+            <a:extLst xmlns:a="http://schemas.openxmlformats.org/drawingml/2006/main">
+              <a:ext uri="{FF2B5EF4-FFF2-40B4-BE49-F238E27FC236}">
+                <a16:creationId xmlns:a16="http://schemas.microsoft.com/office/drawing/2014/main" id="{FBDD2089-488E-44F3-AAC1-17927F3DE481}"/>
+              </a:ext>
+            </a:extLst>
+          </p:cNvPr>
+          <p:cNvSpPr>
+            <a:spLocks xmlns:a="http://schemas.openxmlformats.org/drawingml/2006/main" noGrp="1"/>
+          </p:cNvSpPr>
+          <p:nvPr/>
+        </p:nvSpPr>
+        <p:spPr>
+          <a:xfrm xmlns:a="http://schemas.openxmlformats.org/drawingml/2006/main">
+            <a:off x="8820150" y="2381250"/>
+            <a:ext cx="2000250" cy="228600"/>
+          </a:xfrm>
+          <a:prstGeom xmlns:a="http://schemas.openxmlformats.org/drawingml/2006/main" prst="rect">
+            <a:avLst/>
+          </a:prstGeom>
+          <a:noFill xmlns:a="http://schemas.openxmlformats.org/drawingml/2006/main"/>
+          <a:ln xmlns:a="http://schemas.openxmlformats.org/drawingml/2006/main" w="0">
+            <a:noFill/>
+            <a:prstDash val="solid"/>
+          </a:ln>
+        </p:spPr>
+        <p:txBody>
+          <a:bodyPr xmlns:a="http://schemas.openxmlformats.org/drawingml/2006/main"/>
+          <a:lstStyle xmlns:a="http://schemas.openxmlformats.org/drawingml/2006/main">
+            <a:defPPr>
+              <a:defRPr sz="975" b="0">
+                <a:solidFill>
+                  <a:srgbClr val="94A3B8"/>
+                </a:solidFill>
+              </a:defRPr>
+            </a:defPPr>
+            <a:lvl1pPr>
+              <a:defRPr sz="975" b="0">
+                <a:solidFill>
+                  <a:srgbClr val="94A3B8"/>
+                </a:solidFill>
+              </a:defRPr>
+            </a:lvl1pPr>
+            <a:lvl2pPr>
+              <a:defRPr sz="975" b="0">
+                <a:solidFill>
+                  <a:srgbClr val="94A3B8"/>
+                </a:solidFill>
+              </a:defRPr>
+            </a:lvl2pPr>
+            <a:lvl3pPr>
+              <a:defRPr sz="975" b="0">
+                <a:solidFill>
+                  <a:srgbClr val="94A3B8"/>
+                </a:solidFill>
+              </a:defRPr>
+            </a:lvl3pPr>
+            <a:lvl4pPr>
+              <a:defRPr sz="975" b="0">
+                <a:solidFill>
+                  <a:srgbClr val="94A3B8"/>
+                </a:solidFill>
+              </a:defRPr>
+            </a:lvl4pPr>
+            <a:lvl5pPr>
+              <a:defRPr sz="975" b="0">
+                <a:solidFill>
+                  <a:srgbClr val="94A3B8"/>
+                </a:solidFill>
+              </a:defRPr>
+            </a:lvl5pPr>
+            <a:lvl6pPr>
+              <a:defRPr sz="975" b="0">
+                <a:solidFill>
+                  <a:srgbClr val="94A3B8"/>
+                </a:solidFill>
+              </a:defRPr>
+            </a:lvl6pPr>
+            <a:lvl7pPr>
+              <a:defRPr sz="975" b="0">
+                <a:solidFill>
+                  <a:srgbClr val="94A3B8"/>
+                </a:solidFill>
+              </a:defRPr>
+            </a:lvl7pPr>
+            <a:lvl8pPr>
+              <a:defRPr sz="975" b="0">
+                <a:solidFill>
+                  <a:srgbClr val="94A3B8"/>
+                </a:solidFill>
+              </a:defRPr>
+            </a:lvl8pPr>
+            <a:lvl9pPr>
+              <a:defRPr sz="975" b="0">
+                <a:solidFill>
+                  <a:srgbClr val="94A3B8"/>
+                </a:solidFill>
+              </a:defRPr>
+            </a:lvl9pPr>
+          </a:lstStyle>
+          <a:p xmlns:a="http://schemas.openxmlformats.org/drawingml/2006/main">
+            <a:pPr>
+              <a:defRPr sz="975" b="0">
+                <a:solidFill>
+                  <a:srgbClr val="94A3B8"/>
+                </a:solidFill>
+              </a:defRPr>
+            </a:pPr>
+            <a:r>
+              <a:rPr sz="975" b="0">
+                <a:solidFill>
+                  <a:srgbClr val="94A3B8"/>
+                </a:solidFill>
+              </a:rPr>
+              <a:t>OP_RETURN binding</a:t>
+            </a:r>
+          </a:p>
+        </p:txBody>
+      </p:sp>
+      <p:sp>
+        <p:nvSpPr>
+          <p:cNvPr id="15" name="">
+            <a:extLst xmlns:a="http://schemas.openxmlformats.org/drawingml/2006/main">
+              <a:ext uri="{FF2B5EF4-FFF2-40B4-BE49-F238E27FC236}">
+                <a16:creationId xmlns:a16="http://schemas.microsoft.com/office/drawing/2014/main" id="{F9FCF696-B589-4390-8CD0-C0FD9391F985}"/>
+              </a:ext>
+            </a:extLst>
+          </p:cNvPr>
+          <p:cNvSpPr>
+            <a:spLocks xmlns:a="http://schemas.openxmlformats.org/drawingml/2006/main" noGrp="1"/>
+          </p:cNvSpPr>
+          <p:nvPr/>
+        </p:nvSpPr>
+        <p:spPr>
+          <a:xfrm xmlns:a="http://schemas.openxmlformats.org/drawingml/2006/main">
+            <a:off x="685800" y="3238500"/>
+            <a:ext cx="5048250" cy="2190750"/>
+          </a:xfrm>
+          <a:prstGeom xmlns:a="http://schemas.openxmlformats.org/drawingml/2006/main" prst="roundRect">
+            <a:avLst>
+              <a:gd name="adj" fmla="val 5217"/>
+            </a:avLst>
+          </a:prstGeom>
+          <a:solidFill xmlns:a="http://schemas.openxmlformats.org/drawingml/2006/main">
+            <a:srgbClr val="111827"/>
+          </a:solidFill>
+          <a:ln xmlns:a="http://schemas.openxmlformats.org/drawingml/2006/main" w="9525">
+            <a:solidFill>
+              <a:srgbClr val="1F2937"/>
+            </a:solidFill>
+            <a:prstDash val="solid"/>
+          </a:ln>
+        </p:spPr>
+      </p:sp>
+      <p:sp>
+        <p:nvSpPr>
+          <p:cNvPr id="16" name="">
+            <a:extLst xmlns:a="http://schemas.openxmlformats.org/drawingml/2006/main">
+              <a:ext uri="{FF2B5EF4-FFF2-40B4-BE49-F238E27FC236}">
+                <a16:creationId xmlns:a16="http://schemas.microsoft.com/office/drawing/2014/main" id="{406FE69C-E3E0-4C3C-91DC-370E2AF26ED5}"/>
+              </a:ext>
+            </a:extLst>
+          </p:cNvPr>
+          <p:cNvSpPr>
+            <a:spLocks xmlns:a="http://schemas.openxmlformats.org/drawingml/2006/main" noGrp="1"/>
+          </p:cNvSpPr>
+          <p:nvPr/>
+        </p:nvSpPr>
+        <p:spPr>
+          <a:xfrm xmlns:a="http://schemas.openxmlformats.org/drawingml/2006/main">
+            <a:off x="914400" y="3467100"/>
+            <a:ext cx="4572000" cy="285750"/>
+          </a:xfrm>
+          <a:prstGeom xmlns:a="http://schemas.openxmlformats.org/drawingml/2006/main" prst="rect">
+            <a:avLst/>
+          </a:prstGeom>
+          <a:noFill xmlns:a="http://schemas.openxmlformats.org/drawingml/2006/main"/>
+          <a:ln xmlns:a="http://schemas.openxmlformats.org/drawingml/2006/main" w="0">
+            <a:noFill/>
+            <a:prstDash val="solid"/>
+          </a:ln>
+        </p:spPr>
+        <p:txBody>
+          <a:bodyPr xmlns:a="http://schemas.openxmlformats.org/drawingml/2006/main"/>
+          <a:lstStyle xmlns:a="http://schemas.openxmlformats.org/drawingml/2006/main">
+            <a:defPPr>
+              <a:defRPr sz="1500" b="1">
+                <a:solidFill>
+                  <a:srgbClr val="818CF8"/>
+                </a:solidFill>
+              </a:defRPr>
+            </a:defPPr>
+            <a:lvl1pPr>
+              <a:defRPr sz="1500" b="1">
+                <a:solidFill>
+                  <a:srgbClr val="818CF8"/>
+                </a:solidFill>
+              </a:defRPr>
+            </a:lvl1pPr>
+            <a:lvl2pPr>
+              <a:defRPr sz="1500" b="1">
+                <a:solidFill>
+                  <a:srgbClr val="818CF8"/>
+                </a:solidFill>
+              </a:defRPr>
+            </a:lvl2pPr>
+            <a:lvl3pPr>
+              <a:defRPr sz="1500" b="1">
+                <a:solidFill>
+                  <a:srgbClr val="818CF8"/>
+                </a:solidFill>
+              </a:defRPr>
+            </a:lvl3pPr>
+            <a:lvl4pPr>
+              <a:defRPr sz="1500" b="1">
+                <a:solidFill>
+                  <a:srgbClr val="818CF8"/>
+                </a:solidFill>
+              </a:defRPr>
+            </a:lvl4pPr>
+            <a:lvl5pPr>
+              <a:defRPr sz="1500" b="1">
+                <a:solidFill>
+                  <a:srgbClr val="818CF8"/>
+                </a:solidFill>
+              </a:defRPr>
+            </a:lvl5pPr>
+            <a:lvl6pPr>
+              <a:defRPr sz="1500" b="1">
+                <a:solidFill>
+                  <a:srgbClr val="818CF8"/>
+                </a:solidFill>
+              </a:defRPr>
+            </a:lvl6pPr>
+            <a:lvl7pPr>
+              <a:defRPr sz="1500" b="1">
+                <a:solidFill>
+                  <a:srgbClr val="818CF8"/>
+                </a:solidFill>
+              </a:defRPr>
+            </a:lvl7pPr>
+            <a:lvl8pPr>
+              <a:defRPr sz="1500" b="1">
+                <a:solidFill>
+                  <a:srgbClr val="818CF8"/>
+                </a:solidFill>
+              </a:defRPr>
+            </a:lvl8pPr>
+            <a:lvl9pPr>
+              <a:defRPr sz="1500" b="1">
+                <a:solidFill>
+                  <a:srgbClr val="818CF8"/>
+                </a:solidFill>
+              </a:defRPr>
+            </a:lvl9pPr>
+          </a:lstStyle>
+          <a:p xmlns:a="http://schemas.openxmlformats.org/drawingml/2006/main">
+            <a:pPr>
+              <a:defRPr sz="1500" b="1">
+                <a:solidFill>
+                  <a:srgbClr val="818CF8"/>
+                </a:solidFill>
+              </a:defRPr>
+            </a:pPr>
+            <a:r>
+              <a:rPr sz="1500" b="1">
+                <a:solidFill>
+                  <a:srgbClr val="818CF8"/>
+                </a:solidFill>
+              </a:rPr>
+              <a:t>How it works</a:t>
+            </a:r>
+          </a:p>
+        </p:txBody>
+      </p:sp>
+      <p:sp>
+        <p:nvSpPr>
+          <p:cNvPr id="17" name="">
+            <a:extLst xmlns:a="http://schemas.openxmlformats.org/drawingml/2006/main">
+              <a:ext uri="{FF2B5EF4-FFF2-40B4-BE49-F238E27FC236}">
+                <a16:creationId xmlns:a16="http://schemas.microsoft.com/office/drawing/2014/main" id="{9D159F03-B1CF-4477-A30D-94BD338AFD34}"/>
+              </a:ext>
+            </a:extLst>
+          </p:cNvPr>
+          <p:cNvSpPr>
+            <a:spLocks xmlns:a="http://schemas.openxmlformats.org/drawingml/2006/main" noGrp="1"/>
+          </p:cNvSpPr>
+          <p:nvPr/>
+        </p:nvSpPr>
+        <p:spPr>
+          <a:xfrm xmlns:a="http://schemas.openxmlformats.org/drawingml/2006/main">
+            <a:off x="914400" y="3867150"/>
+            <a:ext cx="4572000" cy="1333500"/>
+          </a:xfrm>
+          <a:prstGeom xmlns:a="http://schemas.openxmlformats.org/drawingml/2006/main" prst="rect">
+            <a:avLst/>
+          </a:prstGeom>
+          <a:noFill xmlns:a="http://schemas.openxmlformats.org/drawingml/2006/main"/>
+          <a:ln xmlns:a="http://schemas.openxmlformats.org/drawingml/2006/main" w="0">
+            <a:noFill/>
+            <a:prstDash val="solid"/>
+          </a:ln>
+        </p:spPr>
+        <p:txBody>
+          <a:bodyPr xmlns:a="http://schemas.openxmlformats.org/drawingml/2006/main"/>
+          <a:lstStyle xmlns:a="http://schemas.openxmlformats.org/drawingml/2006/main">
+            <a:defPPr>
+              <a:defRPr sz="1125" b="0">
+                <a:solidFill>
+                  <a:srgbClr val="94A3B8"/>
+                </a:solidFill>
+              </a:defRPr>
+            </a:defPPr>
+            <a:lvl1pPr>
+              <a:defRPr sz="1125" b="0">
+                <a:solidFill>
+                  <a:srgbClr val="94A3B8"/>
+                </a:solidFill>
+              </a:defRPr>
+            </a:lvl1pPr>
+            <a:lvl2pPr>
+              <a:defRPr sz="1125" b="0">
+                <a:solidFill>
+                  <a:srgbClr val="94A3B8"/>
+                </a:solidFill>
+              </a:defRPr>
+            </a:lvl2pPr>
+            <a:lvl3pPr>
+              <a:defRPr sz="1125" b="0">
+                <a:solidFill>
+                  <a:srgbClr val="94A3B8"/>
+                </a:solidFill>
+              </a:defRPr>
+            </a:lvl3pPr>
+            <a:lvl4pPr>
+              <a:defRPr sz="1125" b="0">
+                <a:solidFill>
+                  <a:srgbClr val="94A3B8"/>
+                </a:solidFill>
+              </a:defRPr>
+            </a:lvl4pPr>
+            <a:lvl5pPr>
+              <a:defRPr sz="1125" b="0">
+                <a:solidFill>
+                  <a:srgbClr val="94A3B8"/>
+                </a:solidFill>
+              </a:defRPr>
+            </a:lvl5pPr>
+            <a:lvl6pPr>
+              <a:defRPr sz="1125" b="0">
+                <a:solidFill>
+                  <a:srgbClr val="94A3B8"/>
+                </a:solidFill>
+              </a:defRPr>
+            </a:lvl6pPr>
+            <a:lvl7pPr>
+              <a:defRPr sz="1125" b="0">
+                <a:solidFill>
+                  <a:srgbClr val="94A3B8"/>
+                </a:solidFill>
+              </a:defRPr>
+            </a:lvl7pPr>
+            <a:lvl8pPr>
+              <a:defRPr sz="1125" b="0">
+                <a:solidFill>
+                  <a:srgbClr val="94A3B8"/>
+                </a:solidFill>
+              </a:defRPr>
+            </a:lvl8pPr>
+            <a:lvl9pPr>
+              <a:defRPr sz="1125" b="0">
+                <a:solidFill>
+                  <a:srgbClr val="94A3B8"/>
+                </a:solidFill>
+              </a:defRPr>
+            </a:lvl9pPr>
+          </a:lstStyle>
+          <a:p xmlns:a="http://schemas.openxmlformats.org/drawingml/2006/main">
+            <a:pPr>
+              <a:defRPr sz="1125" b="0">
+                <a:solidFill>
+                  <a:srgbClr val="94A3B8"/>
+                </a:solidFill>
+              </a:defRPr>
+            </a:pPr>
+            <a:r>
+              <a:rPr sz="1125" b="0">
+                <a:solidFill>
+                  <a:srgbClr val="94A3B8"/>
+                </a:solidFill>
+              </a:rPr>
+              <a:t>Agent claims a tranche. It pays the service 0.01 PUSD with a request id. The service verifies amount, destination, category and OP_RETURN. When the tranche is spent, the next request says: this period's budget is used up.</a:t>
+            </a:r>
+          </a:p>
+        </p:txBody>
+      </p:sp>
+      <p:sp>
+        <p:nvSpPr>
+          <p:cNvPr id="18" name="">
+            <a:extLst xmlns:a="http://schemas.openxmlformats.org/drawingml/2006/main">
+              <a:ext uri="{FF2B5EF4-FFF2-40B4-BE49-F238E27FC236}">
+                <a16:creationId xmlns:a16="http://schemas.microsoft.com/office/drawing/2014/main" id="{CEE30E2C-00A6-4534-824B-B4CAC2BD3EB3}"/>
+              </a:ext>
+            </a:extLst>
+          </p:cNvPr>
+          <p:cNvSpPr>
+            <a:spLocks xmlns:a="http://schemas.openxmlformats.org/drawingml/2006/main" noGrp="1"/>
+          </p:cNvSpPr>
+          <p:nvPr/>
+        </p:nvSpPr>
+        <p:spPr>
+          <a:xfrm xmlns:a="http://schemas.openxmlformats.org/drawingml/2006/main">
+            <a:off x="6667500" y="3238500"/>
+            <a:ext cx="4838700" cy="2190750"/>
+          </a:xfrm>
+          <a:prstGeom xmlns:a="http://schemas.openxmlformats.org/drawingml/2006/main" prst="roundRect">
+            <a:avLst>
+              <a:gd name="adj" fmla="val 5217"/>
+            </a:avLst>
+          </a:prstGeom>
+          <a:solidFill xmlns:a="http://schemas.openxmlformats.org/drawingml/2006/main">
+            <a:srgbClr val="111827"/>
+          </a:solidFill>
+          <a:ln xmlns:a="http://schemas.openxmlformats.org/drawingml/2006/main" w="9525">
+            <a:solidFill>
+              <a:srgbClr val="1F2937"/>
+            </a:solidFill>
+            <a:prstDash val="solid"/>
+          </a:ln>
+        </p:spPr>
+      </p:sp>
+      <p:sp>
+        <p:nvSpPr>
+          <p:cNvPr id="19" name="">
+            <a:extLst xmlns:a="http://schemas.openxmlformats.org/drawingml/2006/main">
+              <a:ext uri="{FF2B5EF4-FFF2-40B4-BE49-F238E27FC236}">
+                <a16:creationId xmlns:a16="http://schemas.microsoft.com/office/drawing/2014/main" id="{5B0ADDCA-5779-415D-9B86-96E8FF00EB96}"/>
+              </a:ext>
+            </a:extLst>
+          </p:cNvPr>
+          <p:cNvSpPr>
+            <a:spLocks xmlns:a="http://schemas.openxmlformats.org/drawingml/2006/main" noGrp="1"/>
+          </p:cNvSpPr>
+          <p:nvPr/>
+        </p:nvSpPr>
+        <p:spPr>
+          <a:xfrm xmlns:a="http://schemas.openxmlformats.org/drawingml/2006/main">
+            <a:off x="6896100" y="3467100"/>
+            <a:ext cx="4381500" cy="285750"/>
+          </a:xfrm>
+          <a:prstGeom xmlns:a="http://schemas.openxmlformats.org/drawingml/2006/main" prst="rect">
+            <a:avLst/>
+          </a:prstGeom>
+          <a:noFill xmlns:a="http://schemas.openxmlformats.org/drawingml/2006/main"/>
+          <a:ln xmlns:a="http://schemas.openxmlformats.org/drawingml/2006/main" w="0">
+            <a:noFill/>
+            <a:prstDash val="solid"/>
+          </a:ln>
+        </p:spPr>
+        <p:txBody>
+          <a:bodyPr xmlns:a="http://schemas.openxmlformats.org/drawingml/2006/main"/>
+          <a:lstStyle xmlns:a="http://schemas.openxmlformats.org/drawingml/2006/main">
+            <a:defPPr>
+              <a:defRPr sz="1500" b="1">
+                <a:solidFill>
+                  <a:srgbClr val="FBBF24"/>
+                </a:solidFill>
+              </a:defRPr>
+            </a:defPPr>
+            <a:lvl1pPr>
+              <a:defRPr sz="1500" b="1">
+                <a:solidFill>
+                  <a:srgbClr val="FBBF24"/>
+                </a:solidFill>
+              </a:defRPr>
+            </a:lvl1pPr>
+            <a:lvl2pPr>
+              <a:defRPr sz="1500" b="1">
+                <a:solidFill>
+                  <a:srgbClr val="FBBF24"/>
+                </a:solidFill>
+              </a:defRPr>
+            </a:lvl2pPr>
+            <a:lvl3pPr>
+              <a:defRPr sz="1500" b="1">
+                <a:solidFill>
+                  <a:srgbClr val="FBBF24"/>
+                </a:solidFill>
+              </a:defRPr>
+            </a:lvl3pPr>
+            <a:lvl4pPr>
+              <a:defRPr sz="1500" b="1">
+                <a:solidFill>
+                  <a:srgbClr val="FBBF24"/>
+                </a:solidFill>
+              </a:defRPr>
+            </a:lvl4pPr>
+            <a:lvl5pPr>
+              <a:defRPr sz="1500" b="1">
+                <a:solidFill>
+                  <a:srgbClr val="FBBF24"/>
+                </a:solidFill>
+              </a:defRPr>
+            </a:lvl5pPr>
+            <a:lvl6pPr>
+              <a:defRPr sz="1500" b="1">
+                <a:solidFill>
+                  <a:srgbClr val="FBBF24"/>
+                </a:solidFill>
+              </a:defRPr>
+            </a:lvl6pPr>
+            <a:lvl7pPr>
+              <a:defRPr sz="1500" b="1">
+                <a:solidFill>
+                  <a:srgbClr val="FBBF24"/>
+                </a:solidFill>
+              </a:defRPr>
+            </a:lvl7pPr>
+            <a:lvl8pPr>
+              <a:defRPr sz="1500" b="1">
+                <a:solidFill>
+                  <a:srgbClr val="FBBF24"/>
+                </a:solidFill>
+              </a:defRPr>
+            </a:lvl8pPr>
+            <a:lvl9pPr>
+              <a:defRPr sz="1500" b="1">
+                <a:solidFill>
+                  <a:srgbClr val="FBBF24"/>
+                </a:solidFill>
+              </a:defRPr>
+            </a:lvl9pPr>
+          </a:lstStyle>
+          <a:p xmlns:a="http://schemas.openxmlformats.org/drawingml/2006/main">
+            <a:pPr>
+              <a:defRPr sz="1500" b="1">
+                <a:solidFill>
+                  <a:srgbClr val="FBBF24"/>
+                </a:solidFill>
+              </a:defRPr>
+            </a:pPr>
+            <a:r>
+              <a:rPr sz="1500" b="1">
+                <a:solidFill>
+                  <a:srgbClr val="FBBF24"/>
+                </a:solidFill>
+              </a:rPr>
+              <a:t>Who pays</a:t>
+            </a:r>
+          </a:p>
+        </p:txBody>
+      </p:sp>
+      <p:sp>
+        <p:nvSpPr>
+          <p:cNvPr id="20" name="">
+            <a:extLst xmlns:a="http://schemas.openxmlformats.org/drawingml/2006/main">
+              <a:ext uri="{FF2B5EF4-FFF2-40B4-BE49-F238E27FC236}">
+                <a16:creationId xmlns:a16="http://schemas.microsoft.com/office/drawing/2014/main" id="{2EA5E3DB-5CC7-47F9-8621-47F4A961C079}"/>
+              </a:ext>
+            </a:extLst>
+          </p:cNvPr>
+          <p:cNvSpPr>
+            <a:spLocks xmlns:a="http://schemas.openxmlformats.org/drawingml/2006/main" noGrp="1"/>
+          </p:cNvSpPr>
+          <p:nvPr/>
+        </p:nvSpPr>
+        <p:spPr>
+          <a:xfrm xmlns:a="http://schemas.openxmlformats.org/drawingml/2006/main">
+            <a:off x="6896100" y="3867150"/>
+            <a:ext cx="4381500" cy="1333500"/>
+          </a:xfrm>
+          <a:prstGeom xmlns:a="http://schemas.openxmlformats.org/drawingml/2006/main" prst="rect">
+            <a:avLst/>
+          </a:prstGeom>
+          <a:noFill xmlns:a="http://schemas.openxmlformats.org/drawingml/2006/main"/>
+          <a:ln xmlns:a="http://schemas.openxmlformats.org/drawingml/2006/main" w="0">
+            <a:noFill/>
+            <a:prstDash val="solid"/>
+          </a:ln>
+        </p:spPr>
+        <p:txBody>
+          <a:bodyPr xmlns:a="http://schemas.openxmlformats.org/drawingml/2006/main"/>
+          <a:lstStyle xmlns:a="http://schemas.openxmlformats.org/drawingml/2006/main">
+            <a:defPPr>
+              <a:defRPr sz="1125" b="0">
+                <a:solidFill>
+                  <a:srgbClr val="94A3B8"/>
+                </a:solidFill>
+              </a:defRPr>
+            </a:defPPr>
+            <a:lvl1pPr>
+              <a:defRPr sz="1125" b="0">
+                <a:solidFill>
+                  <a:srgbClr val="94A3B8"/>
+                </a:solidFill>
+              </a:defRPr>
+            </a:lvl1pPr>
+            <a:lvl2pPr>
+              <a:defRPr sz="1125" b="0">
+                <a:solidFill>
+                  <a:srgbClr val="94A3B8"/>
+                </a:solidFill>
+              </a:defRPr>
+            </a:lvl2pPr>
+            <a:lvl3pPr>
+              <a:defRPr sz="1125" b="0">
+                <a:solidFill>
+                  <a:srgbClr val="94A3B8"/>
+                </a:solidFill>
+              </a:defRPr>
+            </a:lvl3pPr>
+            <a:lvl4pPr>
+              <a:defRPr sz="1125" b="0">
+                <a:solidFill>
+                  <a:srgbClr val="94A3B8"/>
+                </a:solidFill>
+              </a:defRPr>
+            </a:lvl4pPr>
+            <a:lvl5pPr>
+              <a:defRPr sz="1125" b="0">
+                <a:solidFill>
+                  <a:srgbClr val="94A3B8"/>
+                </a:solidFill>
+              </a:defRPr>
+            </a:lvl5pPr>
+            <a:lvl6pPr>
+              <a:defRPr sz="1125" b="0">
+                <a:solidFill>
+                  <a:srgbClr val="94A3B8"/>
+                </a:solidFill>
+              </a:defRPr>
+            </a:lvl6pPr>
+            <a:lvl7pPr>
+              <a:defRPr sz="1125" b="0">
+                <a:solidFill>
+                  <a:srgbClr val="94A3B8"/>
+                </a:solidFill>
+              </a:defRPr>
+            </a:lvl7pPr>
+            <a:lvl8pPr>
+              <a:defRPr sz="1125" b="0">
+                <a:solidFill>
+                  <a:srgbClr val="94A3B8"/>
+                </a:solidFill>
+              </a:defRPr>
+            </a:lvl8pPr>
+            <a:lvl9pPr>
+              <a:defRPr sz="1125" b="0">
+                <a:solidFill>
+                  <a:srgbClr val="94A3B8"/>
+                </a:solidFill>
+              </a:defRPr>
+            </a:lvl9pPr>
+          </a:lstStyle>
+          <a:p xmlns:a="http://schemas.openxmlformats.org/drawingml/2006/main">
+            <a:pPr>
+              <a:defRPr sz="1125" b="0">
+                <a:solidFill>
+                  <a:srgbClr val="94A3B8"/>
+                </a:solidFill>
+              </a:defRPr>
+            </a:pPr>
+            <a:r>
+              <a:rPr sz="1125" b="0">
+                <a:solidFill>
+                  <a:srgbClr val="94A3B8"/>
+                </a:solidFill>
+              </a:rPr>
+              <a:t>Teams buying agent budgets and service access. Service providers paying for a verified request gateway. Employers and studios running PUSD payroll streams. Revenue: hosted console, SDK and billing gateway - no protocol fee.</a:t>
             </a:r>
           </a:p>
         </p:txBody>
@@ -7465,7 +12859,7 @@
     </p:spTree>
     <p:extLst>
       <p:ext uri="{BB962C8B-B14F-4D97-AF65-F5344CB8AC3E}">
-        <p14:creationId xmlns:p14="http://schemas.microsoft.com/office/powerpoint/2010/main" val="1464482687"/>
+        <p14:creationId xmlns:p14="http://schemas.microsoft.com/office/powerpoint/2010/main" val="1520600393"/>
       </p:ext>
     </p:extLst>
   </p:cSld>
@@ -7496,7 +12890,7 @@
           <p:cNvPr id="8" name="">
             <a:extLst xmlns:a="http://schemas.openxmlformats.org/drawingml/2006/main">
               <a:ext uri="{FF2B5EF4-FFF2-40B4-BE49-F238E27FC236}">
-                <a16:creationId xmlns:a16="http://schemas.microsoft.com/office/drawing/2014/main" id="{67AF04DA-1910-4611-8883-DE469B189451}"/>
+                <a16:creationId xmlns:a16="http://schemas.microsoft.com/office/drawing/2014/main" id="{27C9414A-C873-4819-A71B-D4B069B90310}"/>
               </a:ext>
             </a:extLst>
           </p:cNvPr>
@@ -7529,6 +12923,69 @@
                 </a:solidFill>
               </a:defRPr>
             </a:defPPr>
+            <a:lvl1pPr>
+              <a:defRPr sz="975" b="1">
+                <a:solidFill>
+                  <a:srgbClr val="0AC18E"/>
+                </a:solidFill>
+              </a:defRPr>
+            </a:lvl1pPr>
+            <a:lvl2pPr>
+              <a:defRPr sz="975" b="1">
+                <a:solidFill>
+                  <a:srgbClr val="0AC18E"/>
+                </a:solidFill>
+              </a:defRPr>
+            </a:lvl2pPr>
+            <a:lvl3pPr>
+              <a:defRPr sz="975" b="1">
+                <a:solidFill>
+                  <a:srgbClr val="0AC18E"/>
+                </a:solidFill>
+              </a:defRPr>
+            </a:lvl3pPr>
+            <a:lvl4pPr>
+              <a:defRPr sz="975" b="1">
+                <a:solidFill>
+                  <a:srgbClr val="0AC18E"/>
+                </a:solidFill>
+              </a:defRPr>
+            </a:lvl4pPr>
+            <a:lvl5pPr>
+              <a:defRPr sz="975" b="1">
+                <a:solidFill>
+                  <a:srgbClr val="0AC18E"/>
+                </a:solidFill>
+              </a:defRPr>
+            </a:lvl5pPr>
+            <a:lvl6pPr>
+              <a:defRPr sz="975" b="1">
+                <a:solidFill>
+                  <a:srgbClr val="0AC18E"/>
+                </a:solidFill>
+              </a:defRPr>
+            </a:lvl6pPr>
+            <a:lvl7pPr>
+              <a:defRPr sz="975" b="1">
+                <a:solidFill>
+                  <a:srgbClr val="0AC18E"/>
+                </a:solidFill>
+              </a:defRPr>
+            </a:lvl7pPr>
+            <a:lvl8pPr>
+              <a:defRPr sz="975" b="1">
+                <a:solidFill>
+                  <a:srgbClr val="0AC18E"/>
+                </a:solidFill>
+              </a:defRPr>
+            </a:lvl8pPr>
+            <a:lvl9pPr>
+              <a:defRPr sz="975" b="1">
+                <a:solidFill>
+                  <a:srgbClr val="0AC18E"/>
+                </a:solidFill>
+              </a:defRPr>
+            </a:lvl9pPr>
           </a:lstStyle>
           <a:p xmlns:a="http://schemas.openxmlformats.org/drawingml/2006/main">
             <a:pPr>
@@ -7554,7 +13011,7 @@
           <p:cNvPr id="2" name="">
             <a:extLst xmlns:a="http://schemas.openxmlformats.org/drawingml/2006/main">
               <a:ext uri="{FF2B5EF4-FFF2-40B4-BE49-F238E27FC236}">
-                <a16:creationId xmlns:a16="http://schemas.microsoft.com/office/drawing/2014/main" id="{010CF6BD-8D74-49D5-B9C9-118CBC755980}"/>
+                <a16:creationId xmlns:a16="http://schemas.microsoft.com/office/drawing/2014/main" id="{6BD5BFDE-6114-42B5-A08E-BCD45AD094FA}"/>
               </a:ext>
             </a:extLst>
           </p:cNvPr>
@@ -7587,6 +13044,69 @@
                 </a:solidFill>
               </a:defRPr>
             </a:defPPr>
+            <a:lvl1pPr>
+              <a:defRPr sz="3900" b="1">
+                <a:solidFill>
+                  <a:srgbClr val="F1F5F9"/>
+                </a:solidFill>
+              </a:defRPr>
+            </a:lvl1pPr>
+            <a:lvl2pPr>
+              <a:defRPr sz="3900" b="1">
+                <a:solidFill>
+                  <a:srgbClr val="F1F5F9"/>
+                </a:solidFill>
+              </a:defRPr>
+            </a:lvl2pPr>
+            <a:lvl3pPr>
+              <a:defRPr sz="3900" b="1">
+                <a:solidFill>
+                  <a:srgbClr val="F1F5F9"/>
+                </a:solidFill>
+              </a:defRPr>
+            </a:lvl3pPr>
+            <a:lvl4pPr>
+              <a:defRPr sz="3900" b="1">
+                <a:solidFill>
+                  <a:srgbClr val="F1F5F9"/>
+                </a:solidFill>
+              </a:defRPr>
+            </a:lvl4pPr>
+            <a:lvl5pPr>
+              <a:defRPr sz="3900" b="1">
+                <a:solidFill>
+                  <a:srgbClr val="F1F5F9"/>
+                </a:solidFill>
+              </a:defRPr>
+            </a:lvl5pPr>
+            <a:lvl6pPr>
+              <a:defRPr sz="3900" b="1">
+                <a:solidFill>
+                  <a:srgbClr val="F1F5F9"/>
+                </a:solidFill>
+              </a:defRPr>
+            </a:lvl6pPr>
+            <a:lvl7pPr>
+              <a:defRPr sz="3900" b="1">
+                <a:solidFill>
+                  <a:srgbClr val="F1F5F9"/>
+                </a:solidFill>
+              </a:defRPr>
+            </a:lvl7pPr>
+            <a:lvl8pPr>
+              <a:defRPr sz="3900" b="1">
+                <a:solidFill>
+                  <a:srgbClr val="F1F5F9"/>
+                </a:solidFill>
+              </a:defRPr>
+            </a:lvl8pPr>
+            <a:lvl9pPr>
+              <a:defRPr sz="3900" b="1">
+                <a:solidFill>
+                  <a:srgbClr val="F1F5F9"/>
+                </a:solidFill>
+              </a:defRPr>
+            </a:lvl9pPr>
           </a:lstStyle>
           <a:p xmlns:a="http://schemas.openxmlformats.org/drawingml/2006/main">
             <a:pPr>
@@ -7602,7 +13122,7 @@
                   <a:srgbClr val="F1F5F9"/>
                 </a:solidFill>
               </a:rPr>
-              <a:t>Try the live demo</a:t>
+              <a:t>Try the agent demo</a:t>
             </a:r>
           </a:p>
         </p:txBody>
@@ -7612,7 +13132,7 @@
           <p:cNvPr id="3" name="">
             <a:extLst xmlns:a="http://schemas.openxmlformats.org/drawingml/2006/main">
               <a:ext uri="{FF2B5EF4-FFF2-40B4-BE49-F238E27FC236}">
-                <a16:creationId xmlns:a16="http://schemas.microsoft.com/office/drawing/2014/main" id="{24EA95FD-C51D-48AF-B42E-8FACF3253425}"/>
+                <a16:creationId xmlns:a16="http://schemas.microsoft.com/office/drawing/2014/main" id="{842A7BCE-016B-4205-AD88-DAE795D55D98}"/>
               </a:ext>
             </a:extLst>
           </p:cNvPr>
@@ -7645,6 +13165,69 @@
                 </a:solidFill>
               </a:defRPr>
             </a:defPPr>
+            <a:lvl1pPr>
+              <a:defRPr sz="1800" b="1">
+                <a:solidFill>
+                  <a:srgbClr val="0AC18E"/>
+                </a:solidFill>
+              </a:defRPr>
+            </a:lvl1pPr>
+            <a:lvl2pPr>
+              <a:defRPr sz="1800" b="1">
+                <a:solidFill>
+                  <a:srgbClr val="0AC18E"/>
+                </a:solidFill>
+              </a:defRPr>
+            </a:lvl2pPr>
+            <a:lvl3pPr>
+              <a:defRPr sz="1800" b="1">
+                <a:solidFill>
+                  <a:srgbClr val="0AC18E"/>
+                </a:solidFill>
+              </a:defRPr>
+            </a:lvl3pPr>
+            <a:lvl4pPr>
+              <a:defRPr sz="1800" b="1">
+                <a:solidFill>
+                  <a:srgbClr val="0AC18E"/>
+                </a:solidFill>
+              </a:defRPr>
+            </a:lvl4pPr>
+            <a:lvl5pPr>
+              <a:defRPr sz="1800" b="1">
+                <a:solidFill>
+                  <a:srgbClr val="0AC18E"/>
+                </a:solidFill>
+              </a:defRPr>
+            </a:lvl5pPr>
+            <a:lvl6pPr>
+              <a:defRPr sz="1800" b="1">
+                <a:solidFill>
+                  <a:srgbClr val="0AC18E"/>
+                </a:solidFill>
+              </a:defRPr>
+            </a:lvl6pPr>
+            <a:lvl7pPr>
+              <a:defRPr sz="1800" b="1">
+                <a:solidFill>
+                  <a:srgbClr val="0AC18E"/>
+                </a:solidFill>
+              </a:defRPr>
+            </a:lvl7pPr>
+            <a:lvl8pPr>
+              <a:defRPr sz="1800" b="1">
+                <a:solidFill>
+                  <a:srgbClr val="0AC18E"/>
+                </a:solidFill>
+              </a:defRPr>
+            </a:lvl8pPr>
+            <a:lvl9pPr>
+              <a:defRPr sz="1800" b="1">
+                <a:solidFill>
+                  <a:srgbClr val="0AC18E"/>
+                </a:solidFill>
+              </a:defRPr>
+            </a:lvl9pPr>
           </a:lstStyle>
           <a:p xmlns:a="http://schemas.openxmlformats.org/drawingml/2006/main">
             <a:pPr>
@@ -7660,7 +13243,7 @@
                   <a:srgbClr val="0AC18E"/>
                 </a:solidFill>
               </a:rPr>
-              <a:t>streamvault.cash</a:t>
+              <a:t>streamvault-cash.vercel.app</a:t>
             </a:r>
           </a:p>
         </p:txBody>
@@ -7670,7 +13253,7 @@
           <p:cNvPr id="4" name="">
             <a:extLst xmlns:a="http://schemas.openxmlformats.org/drawingml/2006/main">
               <a:ext uri="{FF2B5EF4-FFF2-40B4-BE49-F238E27FC236}">
-                <a16:creationId xmlns:a16="http://schemas.microsoft.com/office/drawing/2014/main" id="{3C0B4C8B-14DE-45E3-A9E9-7BDF691983AF}"/>
+                <a16:creationId xmlns:a16="http://schemas.microsoft.com/office/drawing/2014/main" id="{9D0165C8-E264-4582-B995-5ADA78634CAC}"/>
               </a:ext>
             </a:extLst>
           </p:cNvPr>
@@ -7705,7 +13288,7 @@
           <p:cNvPr id="5" name="">
             <a:extLst xmlns:a="http://schemas.openxmlformats.org/drawingml/2006/main">
               <a:ext uri="{FF2B5EF4-FFF2-40B4-BE49-F238E27FC236}">
-                <a16:creationId xmlns:a16="http://schemas.microsoft.com/office/drawing/2014/main" id="{79F87129-484F-4817-B099-B0B702EF98B4}"/>
+                <a16:creationId xmlns:a16="http://schemas.microsoft.com/office/drawing/2014/main" id="{A451A0B6-2949-4983-8679-0EE16980FC10}"/>
               </a:ext>
             </a:extLst>
           </p:cNvPr>
@@ -7738,6 +13321,69 @@
                 </a:solidFill>
               </a:defRPr>
             </a:defPPr>
+            <a:lvl1pPr>
+              <a:defRPr sz="1350" b="1">
+                <a:solidFill>
+                  <a:srgbClr val="F1F5F9"/>
+                </a:solidFill>
+              </a:defRPr>
+            </a:lvl1pPr>
+            <a:lvl2pPr>
+              <a:defRPr sz="1350" b="1">
+                <a:solidFill>
+                  <a:srgbClr val="F1F5F9"/>
+                </a:solidFill>
+              </a:defRPr>
+            </a:lvl2pPr>
+            <a:lvl3pPr>
+              <a:defRPr sz="1350" b="1">
+                <a:solidFill>
+                  <a:srgbClr val="F1F5F9"/>
+                </a:solidFill>
+              </a:defRPr>
+            </a:lvl3pPr>
+            <a:lvl4pPr>
+              <a:defRPr sz="1350" b="1">
+                <a:solidFill>
+                  <a:srgbClr val="F1F5F9"/>
+                </a:solidFill>
+              </a:defRPr>
+            </a:lvl4pPr>
+            <a:lvl5pPr>
+              <a:defRPr sz="1350" b="1">
+                <a:solidFill>
+                  <a:srgbClr val="F1F5F9"/>
+                </a:solidFill>
+              </a:defRPr>
+            </a:lvl5pPr>
+            <a:lvl6pPr>
+              <a:defRPr sz="1350" b="1">
+                <a:solidFill>
+                  <a:srgbClr val="F1F5F9"/>
+                </a:solidFill>
+              </a:defRPr>
+            </a:lvl6pPr>
+            <a:lvl7pPr>
+              <a:defRPr sz="1350" b="1">
+                <a:solidFill>
+                  <a:srgbClr val="F1F5F9"/>
+                </a:solidFill>
+              </a:defRPr>
+            </a:lvl7pPr>
+            <a:lvl8pPr>
+              <a:defRPr sz="1350" b="1">
+                <a:solidFill>
+                  <a:srgbClr val="F1F5F9"/>
+                </a:solidFill>
+              </a:defRPr>
+            </a:lvl8pPr>
+            <a:lvl9pPr>
+              <a:defRPr sz="1350" b="1">
+                <a:solidFill>
+                  <a:srgbClr val="F1F5F9"/>
+                </a:solidFill>
+              </a:defRPr>
+            </a:lvl9pPr>
           </a:lstStyle>
           <a:p xmlns:a="http://schemas.openxmlformats.org/drawingml/2006/main">
             <a:pPr>
@@ -7763,7 +13409,7 @@
           <p:cNvPr id="6" name="">
             <a:extLst xmlns:a="http://schemas.openxmlformats.org/drawingml/2006/main">
               <a:ext uri="{FF2B5EF4-FFF2-40B4-BE49-F238E27FC236}">
-                <a16:creationId xmlns:a16="http://schemas.microsoft.com/office/drawing/2014/main" id="{6DD5C550-4A4A-4D19-B017-0229DA8B6FC2}"/>
+                <a16:creationId xmlns:a16="http://schemas.microsoft.com/office/drawing/2014/main" id="{4347DD06-AE2C-43FF-8583-F97054DFCBC5}"/>
               </a:ext>
             </a:extLst>
           </p:cNvPr>
@@ -7796,6 +13442,69 @@
                 </a:solidFill>
               </a:defRPr>
             </a:defPPr>
+            <a:lvl1pPr>
+              <a:defRPr sz="1200" b="0">
+                <a:solidFill>
+                  <a:srgbClr val="94A3B8"/>
+                </a:solidFill>
+              </a:defRPr>
+            </a:lvl1pPr>
+            <a:lvl2pPr>
+              <a:defRPr sz="1200" b="0">
+                <a:solidFill>
+                  <a:srgbClr val="94A3B8"/>
+                </a:solidFill>
+              </a:defRPr>
+            </a:lvl2pPr>
+            <a:lvl3pPr>
+              <a:defRPr sz="1200" b="0">
+                <a:solidFill>
+                  <a:srgbClr val="94A3B8"/>
+                </a:solidFill>
+              </a:defRPr>
+            </a:lvl3pPr>
+            <a:lvl4pPr>
+              <a:defRPr sz="1200" b="0">
+                <a:solidFill>
+                  <a:srgbClr val="94A3B8"/>
+                </a:solidFill>
+              </a:defRPr>
+            </a:lvl4pPr>
+            <a:lvl5pPr>
+              <a:defRPr sz="1200" b="0">
+                <a:solidFill>
+                  <a:srgbClr val="94A3B8"/>
+                </a:solidFill>
+              </a:defRPr>
+            </a:lvl5pPr>
+            <a:lvl6pPr>
+              <a:defRPr sz="1200" b="0">
+                <a:solidFill>
+                  <a:srgbClr val="94A3B8"/>
+                </a:solidFill>
+              </a:defRPr>
+            </a:lvl6pPr>
+            <a:lvl7pPr>
+              <a:defRPr sz="1200" b="0">
+                <a:solidFill>
+                  <a:srgbClr val="94A3B8"/>
+                </a:solidFill>
+              </a:defRPr>
+            </a:lvl7pPr>
+            <a:lvl8pPr>
+              <a:defRPr sz="1200" b="0">
+                <a:solidFill>
+                  <a:srgbClr val="94A3B8"/>
+                </a:solidFill>
+              </a:defRPr>
+            </a:lvl8pPr>
+            <a:lvl9pPr>
+              <a:defRPr sz="1200" b="0">
+                <a:solidFill>
+                  <a:srgbClr val="94A3B8"/>
+                </a:solidFill>
+              </a:defRPr>
+            </a:lvl9pPr>
           </a:lstStyle>
           <a:p xmlns:a="http://schemas.openxmlformats.org/drawingml/2006/main">
             <a:pPr>
@@ -7811,7 +13520,7 @@
                   <a:srgbClr val="94A3B8"/>
                 </a:solidFill>
               </a:rPr>
-              <a:t>Launch the demo stream  →  fast-forward one period  →  claim a tranche  →  cancel and reclaim 100%.</a:t>
+              <a:t>Launch agent budget  →  run paid request  →  run until budget exhausted  →  cancel and reclaim.</a:t>
             </a:r>
           </a:p>
         </p:txBody>
@@ -7821,7 +13530,7 @@
           <p:cNvPr id="7" name="">
             <a:extLst xmlns:a="http://schemas.openxmlformats.org/drawingml/2006/main">
               <a:ext uri="{FF2B5EF4-FFF2-40B4-BE49-F238E27FC236}">
-                <a16:creationId xmlns:a16="http://schemas.microsoft.com/office/drawing/2014/main" id="{94381311-F4FC-44C1-8AA9-FD9C3BDA060C}"/>
+                <a16:creationId xmlns:a16="http://schemas.microsoft.com/office/drawing/2014/main" id="{81C15022-B66C-4113-A6EB-0CD24C7DC7CC}"/>
               </a:ext>
             </a:extLst>
           </p:cNvPr>
@@ -7854,6 +13563,69 @@
                 </a:solidFill>
               </a:defRPr>
             </a:defPPr>
+            <a:lvl1pPr>
+              <a:defRPr sz="1200" b="0">
+                <a:solidFill>
+                  <a:srgbClr val="94A3B8"/>
+                </a:solidFill>
+              </a:defRPr>
+            </a:lvl1pPr>
+            <a:lvl2pPr>
+              <a:defRPr sz="1200" b="0">
+                <a:solidFill>
+                  <a:srgbClr val="94A3B8"/>
+                </a:solidFill>
+              </a:defRPr>
+            </a:lvl2pPr>
+            <a:lvl3pPr>
+              <a:defRPr sz="1200" b="0">
+                <a:solidFill>
+                  <a:srgbClr val="94A3B8"/>
+                </a:solidFill>
+              </a:defRPr>
+            </a:lvl3pPr>
+            <a:lvl4pPr>
+              <a:defRPr sz="1200" b="0">
+                <a:solidFill>
+                  <a:srgbClr val="94A3B8"/>
+                </a:solidFill>
+              </a:defRPr>
+            </a:lvl4pPr>
+            <a:lvl5pPr>
+              <a:defRPr sz="1200" b="0">
+                <a:solidFill>
+                  <a:srgbClr val="94A3B8"/>
+                </a:solidFill>
+              </a:defRPr>
+            </a:lvl5pPr>
+            <a:lvl6pPr>
+              <a:defRPr sz="1200" b="0">
+                <a:solidFill>
+                  <a:srgbClr val="94A3B8"/>
+                </a:solidFill>
+              </a:defRPr>
+            </a:lvl6pPr>
+            <a:lvl7pPr>
+              <a:defRPr sz="1200" b="0">
+                <a:solidFill>
+                  <a:srgbClr val="94A3B8"/>
+                </a:solidFill>
+              </a:defRPr>
+            </a:lvl7pPr>
+            <a:lvl8pPr>
+              <a:defRPr sz="1200" b="0">
+                <a:solidFill>
+                  <a:srgbClr val="94A3B8"/>
+                </a:solidFill>
+              </a:defRPr>
+            </a:lvl8pPr>
+            <a:lvl9pPr>
+              <a:defRPr sz="1200" b="0">
+                <a:solidFill>
+                  <a:srgbClr val="94A3B8"/>
+                </a:solidFill>
+              </a:defRPr>
+            </a:lvl9pPr>
           </a:lstStyle>
           <a:p xmlns:a="http://schemas.openxmlformats.org/drawingml/2006/main">
             <a:pPr>
@@ -7869,7 +13641,7 @@
                   <a:srgbClr val="94A3B8"/>
                 </a:solidFill>
               </a:rPr>
-              <a:t>Bitcoin Cash is peer-to-peer cash for people - and now, for their money streams.</a:t>
+              <a:t>Give an AI an allowance, not your bank account.</a:t>
             </a:r>
           </a:p>
         </p:txBody>
@@ -7877,7 +13649,7 @@
     </p:spTree>
     <p:extLst>
       <p:ext uri="{BB962C8B-B14F-4D97-AF65-F5344CB8AC3E}">
-        <p14:creationId xmlns:p14="http://schemas.microsoft.com/office/powerpoint/2010/main" val="1079592033"/>
+        <p14:creationId xmlns:p14="http://schemas.microsoft.com/office/powerpoint/2010/main" val="1838207845"/>
       </p:ext>
     </p:extLst>
   </p:cSld>
